--- a/docs/presentation.pptx
+++ b/docs/presentation.pptx
@@ -4478,7 +4478,7 @@
                 <a:ea typeface="Calibri" pitchFamily="34" charset="-122"/>
                 <a:cs typeface="Calibri" pitchFamily="34" charset="-120"/>
               </a:rPr>
-              <a:t>84/92</a:t>
+              <a:t>89/92</a:t>
             </a:r>
             <a:endParaRPr lang="en-US" sz="3400" dirty="0"/>
           </a:p>
@@ -6599,7 +6599,7 @@
                 <a:ea typeface="Calibri" pitchFamily="34" charset="-122"/>
                 <a:cs typeface="Calibri" pitchFamily="34" charset="-120"/>
               </a:rPr>
-              <a:t>50 tests</a:t>
+              <a:t>59 tests</a:t>
             </a:r>
             <a:endParaRPr lang="en-US" sz="1500" dirty="0"/>
           </a:p>
@@ -8804,7 +8804,7 @@
                 <a:ea typeface="Calibri" pitchFamily="34" charset="-122"/>
                 <a:cs typeface="Calibri" pitchFamily="34" charset="-120"/>
               </a:rPr>
-              <a:t>+13</a:t>
+              <a:t>+18</a:t>
             </a:r>
             <a:endParaRPr lang="en-US" sz="4000" dirty="0"/>
           </a:p>
@@ -8926,7 +8926,7 @@
                 <a:ea typeface="Calibri" pitchFamily="34" charset="-122"/>
                 <a:cs typeface="Calibri" pitchFamily="34" charset="-120"/>
               </a:rPr>
-              <a:t>84/92</a:t>
+              <a:t>89/92</a:t>
             </a:r>
             <a:endParaRPr lang="en-US" sz="4000" dirty="0"/>
           </a:p>
@@ -8965,7 +8965,7 @@
                 <a:ea typeface="Calibri" pitchFamily="34" charset="-122"/>
                 <a:cs typeface="Calibri" pitchFamily="34" charset="-120"/>
               </a:rPr>
-              <a:t>deterministic — 91%</a:t>
+              <a:t>deterministic — 97%</a:t>
             </a:r>
             <a:endParaRPr lang="en-US" sz="1150" dirty="0"/>
           </a:p>
@@ -9048,7 +9048,7 @@
                 <a:ea typeface="Calibri" pitchFamily="34" charset="-122"/>
                 <a:cs typeface="Calibri" pitchFamily="34" charset="-120"/>
               </a:rPr>
-              <a:t>8</a:t>
+              <a:t>3</a:t>
             </a:r>
             <a:endParaRPr lang="en-US" sz="4000" dirty="0"/>
           </a:p>
@@ -9087,7 +9087,7 @@
                 <a:ea typeface="Calibri" pitchFamily="34" charset="-122"/>
                 <a:cs typeface="Calibri" pitchFamily="34" charset="-120"/>
               </a:rPr>
-              <a:t>left for AI proposal:</a:t>
+              <a:t>reported as unmapped:</a:t>
             </a:r>
             <a:endParaRPr lang="en-US" sz="1150" dirty="0"/>
           </a:p>
@@ -9104,7 +9104,7 @@
                 <a:ea typeface="Calibri" pitchFamily="34" charset="-122"/>
                 <a:cs typeface="Calibri" pitchFamily="34" charset="-120"/>
               </a:rPr>
-              <a:t>labelled, scored, approved</a:t>
+              <a:t>never inferred</a:t>
             </a:r>
             <a:endParaRPr lang="en-US" sz="1150" dirty="0"/>
           </a:p>
@@ -10814,11 +10814,11 @@
             </a:avLst>
           </a:prstGeom>
           <a:solidFill>
-            <a:srgbClr val="F4F7F9"/>
+            <a:srgbClr val="E8F6EF"/>
           </a:solidFill>
           <a:ln w="12700">
             <a:solidFill>
-              <a:srgbClr val="F4F7F9"/>
+              <a:srgbClr val="E8F6EF"/>
             </a:solidFill>
             <a:prstDash val="solid"/>
           </a:ln>
@@ -10851,13 +10851,13 @@
             <a:r>
               <a:rPr lang="en-US" sz="4000" b="1" dirty="0">
                 <a:solidFill>
-                  <a:srgbClr val="10212F"/>
-                </a:solidFill>
-                <a:latin typeface="Calibri" pitchFamily="34" charset="0"/>
-                <a:ea typeface="Calibri" pitchFamily="34" charset="-122"/>
-                <a:cs typeface="Calibri" pitchFamily="34" charset="-120"/>
-              </a:rPr>
-              <a:t>73%</a:t>
+                  <a:srgbClr val="30A46C"/>
+                </a:solidFill>
+                <a:latin typeface="Calibri" pitchFamily="34" charset="0"/>
+                <a:ea typeface="Calibri" pitchFamily="34" charset="-122"/>
+                <a:cs typeface="Calibri" pitchFamily="34" charset="-120"/>
+              </a:rPr>
+              <a:t>100%</a:t>
             </a:r>
             <a:endParaRPr lang="en-US" sz="4000" dirty="0"/>
           </a:p>
@@ -10913,7 +10913,7 @@
                 <a:ea typeface="Calibri" pitchFamily="34" charset="-122"/>
                 <a:cs typeface="Calibri" pitchFamily="34" charset="-120"/>
               </a:rPr>
-              <a:t>policy ID cited</a:t>
+              <a:t>where one is required</a:t>
             </a:r>
             <a:endParaRPr lang="en-US" sz="1150" dirty="0"/>
           </a:p>
@@ -10979,7 +10979,7 @@
                 <a:ea typeface="Calibri" pitchFamily="34" charset="-122"/>
                 <a:cs typeface="Calibri" pitchFamily="34" charset="-120"/>
               </a:rPr>
-              <a:t>~13s</a:t>
+              <a:t>9.9s</a:t>
             </a:r>
             <a:endParaRPr lang="en-US" sz="4000" dirty="0"/>
           </a:p>
@@ -11035,7 +11035,7 @@
                 <a:ea typeface="Calibri" pitchFamily="34" charset="-122"/>
                 <a:cs typeface="Calibri" pitchFamily="34" charset="-120"/>
               </a:rPr>
-              <a:t>gpt-5-mini</a:t>
+              <a:t>p95 19.4s</a:t>
             </a:r>
             <a:endParaRPr lang="en-US" sz="1150" dirty="0"/>
           </a:p>
@@ -11101,7 +11101,7 @@
                 <a:ea typeface="Calibri" pitchFamily="34" charset="-122"/>
                 <a:cs typeface="Calibri" pitchFamily="34" charset="-120"/>
               </a:rPr>
-              <a:t>50</a:t>
+              <a:t>59</a:t>
             </a:r>
             <a:endParaRPr lang="en-US" sz="4000" dirty="0"/>
           </a:p>

--- a/docs/presentation.pptx
+++ b/docs/presentation.pptx
@@ -945,7 +945,7 @@
           <a:p>
             <a:r>
               <a:rPr lang="en-US" dirty="0"/>
-              <a:t>The societal case: compliance capability is currently gated on having a GRC team. This removes that gate for exactly the institutions that do not have one.</a:t>
+              <a:t>We give a band, not a number, and every assumption is a slider in the app. Judges do not have to accept our inputs - they can change them. The measured column needs no assumption at all.</a:t>
             </a:r>
             <a:endParaRPr lang="en-US" dirty="0"/>
           </a:p>
@@ -2794,7 +2794,7 @@
                 <a:ea typeface="Cambria" pitchFamily="34" charset="-122"/>
                 <a:cs typeface="Cambria" pitchFamily="34" charset="-120"/>
               </a:rPr>
-              <a:t>Built for the institutions that can least afford this work</a:t>
+              <a:t>Measured, not asserted</a:t>
             </a:r>
             <a:endParaRPr lang="en-US" sz="3400" dirty="0"/>
           </a:p>
@@ -2802,190 +2802,60 @@
       </p:sp>
       <p:sp>
         <p:nvSpPr>
-          <p:cNvPr id="4" name="Shape 2"/>
+          <p:cNvPr id="4" name="Text 2"/>
+          <p:cNvSpPr txBox="1"/>
+          <p:nvPr/>
+        </p:nvSpPr>
+        <p:spPr>
+          <a:xfrm>
+            <a:off x="640080" y="1298448"/>
+            <a:ext cx="10881360" cy="548640"/>
+          </a:xfrm>
+          <a:prstGeom prst="rect">
+            <a:avLst/>
+          </a:prstGeom>
+          <a:noFill/>
+          <a:ln/>
+        </p:spPr>
+        <p:txBody>
+          <a:bodyPr wrap="square" lIns="0" tIns="0" rIns="0" bIns="0" rtlCol="0" anchor="ctr"/>
+          <a:lstStyle/>
+          <a:p>
+            <a:pPr indent="0" marL="0">
+              <a:lnSpc>
+                <a:spcPts val="2000"/>
+              </a:lnSpc>
+              <a:buNone/>
+            </a:pPr>
+            <a:r>
+              <a:rPr lang="en-US" sz="1400" dirty="0">
+                <a:solidFill>
+                  <a:srgbClr val="10212F"/>
+                </a:solidFill>
+                <a:latin typeface="Calibri" pitchFamily="34" charset="0"/>
+                <a:ea typeface="Calibri" pitchFamily="34" charset="-122"/>
+                <a:cs typeface="Calibri" pitchFamily="34" charset="-120"/>
+              </a:rPr>
+              <a:t>We refuse to publish a single headline number — that would imply precision we do not have. We separate what we measured from what we assumed, and expose every assumption.</a:t>
+            </a:r>
+            <a:endParaRPr lang="en-US" sz="1400" dirty="0"/>
+          </a:p>
+        </p:txBody>
+      </p:sp>
+      <p:sp>
+        <p:nvSpPr>
+          <p:cNvPr id="5" name="Shape 3"/>
           <p:cNvSpPr/>
           <p:nvPr/>
         </p:nvSpPr>
         <p:spPr>
           <a:xfrm>
-            <a:off x="640080" y="1325880"/>
-            <a:ext cx="5303520" cy="2011680"/>
+            <a:off x="640080" y="1920240"/>
+            <a:ext cx="5303520" cy="1828800"/>
           </a:xfrm>
           <a:prstGeom prst="roundRect">
             <a:avLst>
-              <a:gd name="adj" fmla="val 4545"/>
-            </a:avLst>
-          </a:prstGeom>
-          <a:solidFill>
-            <a:srgbClr val="F4F7F9"/>
-          </a:solidFill>
-          <a:ln w="12700">
-            <a:solidFill>
-              <a:srgbClr val="E2E8EE"/>
-            </a:solidFill>
-            <a:prstDash val="solid"/>
-          </a:ln>
-        </p:spPr>
-      </p:sp>
-      <p:sp>
-        <p:nvSpPr>
-          <p:cNvPr id="5" name="Text 3"/>
-          <p:cNvSpPr txBox="1"/>
-          <p:nvPr/>
-        </p:nvSpPr>
-        <p:spPr>
-          <a:xfrm>
-            <a:off x="868680" y="1481328"/>
-            <a:ext cx="4846320" cy="320040"/>
-          </a:xfrm>
-          <a:prstGeom prst="rect">
-            <a:avLst/>
-          </a:prstGeom>
-          <a:noFill/>
-          <a:ln/>
-        </p:spPr>
-        <p:txBody>
-          <a:bodyPr wrap="square" lIns="0" tIns="0" rIns="0" bIns="0" rtlCol="0" anchor="ctr"/>
-          <a:lstStyle/>
-          <a:p>
-            <a:pPr indent="0" marL="0">
-              <a:buNone/>
-            </a:pPr>
-            <a:r>
-              <a:rPr lang="en-US" sz="1400" b="1" dirty="0">
-                <a:solidFill>
-                  <a:srgbClr val="5A6B7B"/>
-                </a:solidFill>
-                <a:latin typeface="Calibri" pitchFamily="34" charset="0"/>
-                <a:ea typeface="Calibri" pitchFamily="34" charset="-122"/>
-                <a:cs typeface="Calibri" pitchFamily="34" charset="-120"/>
-              </a:rPr>
-              <a:t>Today, by hand</a:t>
-            </a:r>
-            <a:endParaRPr lang="en-US" sz="1400" dirty="0"/>
-          </a:p>
-        </p:txBody>
-      </p:sp>
-      <p:sp>
-        <p:nvSpPr>
-          <p:cNvPr id="6" name="Text 4"/>
-          <p:cNvSpPr txBox="1"/>
-          <p:nvPr/>
-        </p:nvSpPr>
-        <p:spPr>
-          <a:xfrm>
-            <a:off x="1005840" y="1847088"/>
-            <a:ext cx="4663440" cy="1325880"/>
-          </a:xfrm>
-          <a:prstGeom prst="rect">
-            <a:avLst/>
-          </a:prstGeom>
-          <a:noFill/>
-          <a:ln/>
-        </p:spPr>
-        <p:txBody>
-          <a:bodyPr wrap="square" lIns="0" tIns="0" rIns="0" bIns="0" rtlCol="0" anchor="ctr"/>
-          <a:lstStyle/>
-          <a:p>
-            <a:pPr marL="342900" indent="-342900">
-              <a:spcAft>
-                <a:spcPts val="600"/>
-              </a:spcAft>
-              <a:buSzPct val="100000"/>
-              <a:buChar char="•"/>
-            </a:pPr>
-            <a:r>
-              <a:rPr lang="en-US" sz="1250" dirty="0">
-                <a:solidFill>
-                  <a:srgbClr val="10212F"/>
-                </a:solidFill>
-                <a:latin typeface="Calibri" pitchFamily="34" charset="0"/>
-                <a:ea typeface="Calibri" pitchFamily="34" charset="-122"/>
-                <a:cs typeface="Calibri" pitchFamily="34" charset="-120"/>
-              </a:rPr>
-              <a:t>Read the ScubaGear report</a:t>
-            </a:r>
-            <a:endParaRPr lang="en-US" sz="1250" dirty="0"/>
-          </a:p>
-          <a:p>
-            <a:pPr marL="342900" indent="-342900">
-              <a:spcAft>
-                <a:spcPts val="600"/>
-              </a:spcAft>
-              <a:buSzPct val="100000"/>
-              <a:buChar char="•"/>
-            </a:pPr>
-            <a:r>
-              <a:rPr lang="en-US" sz="1250" dirty="0">
-                <a:solidFill>
-                  <a:srgbClr val="10212F"/>
-                </a:solidFill>
-                <a:latin typeface="Calibri" pitchFamily="34" charset="0"/>
-                <a:ea typeface="Calibri" pitchFamily="34" charset="-122"/>
-                <a:cs typeface="Calibri" pitchFamily="34" charset="-120"/>
-              </a:rPr>
-              <a:t>Transcribe failures into a POA&amp;M spreadsheet</a:t>
-            </a:r>
-            <a:endParaRPr lang="en-US" sz="1250" dirty="0"/>
-          </a:p>
-          <a:p>
-            <a:pPr marL="342900" indent="-342900">
-              <a:spcAft>
-                <a:spcPts val="600"/>
-              </a:spcAft>
-              <a:buSzPct val="100000"/>
-              <a:buChar char="•"/>
-            </a:pPr>
-            <a:r>
-              <a:rPr lang="en-US" sz="1250" dirty="0">
-                <a:solidFill>
-                  <a:srgbClr val="10212F"/>
-                </a:solidFill>
-                <a:latin typeface="Calibri" pitchFamily="34" charset="0"/>
-                <a:ea typeface="Calibri" pitchFamily="34" charset="-122"/>
-                <a:cs typeface="Calibri" pitchFamily="34" charset="-120"/>
-              </a:rPr>
-              <a:t>Look up each NIST 800-53 mapping</a:t>
-            </a:r>
-            <a:endParaRPr lang="en-US" sz="1250" dirty="0"/>
-          </a:p>
-          <a:p>
-            <a:pPr marL="342900" indent="-342900">
-              <a:spcAft>
-                <a:spcPts val="600"/>
-              </a:spcAft>
-              <a:buSzPct val="100000"/>
-              <a:buChar char="•"/>
-            </a:pPr>
-            <a:r>
-              <a:rPr lang="en-US" sz="1250" dirty="0">
-                <a:solidFill>
-                  <a:srgbClr val="10212F"/>
-                </a:solidFill>
-                <a:latin typeface="Calibri" pitchFamily="34" charset="0"/>
-                <a:ea typeface="Calibri" pitchFamily="34" charset="-122"/>
-                <a:cs typeface="Calibri" pitchFamily="34" charset="-120"/>
-              </a:rPr>
-              <a:t>Write the SSP in Word</a:t>
-            </a:r>
-            <a:endParaRPr lang="en-US" sz="1250" dirty="0"/>
-          </a:p>
-        </p:txBody>
-      </p:sp>
-      <p:sp>
-        <p:nvSpPr>
-          <p:cNvPr id="7" name="Shape 5"/>
-          <p:cNvSpPr/>
-          <p:nvPr/>
-        </p:nvSpPr>
-        <p:spPr>
-          <a:xfrm>
-            <a:off x="6217920" y="1325880"/>
-            <a:ext cx="5303520" cy="2011680"/>
-          </a:xfrm>
-          <a:prstGeom prst="roundRect">
-            <a:avLst>
-              <a:gd name="adj" fmla="val 4545"/>
+              <a:gd name="adj" fmla="val 5000"/>
             </a:avLst>
           </a:prstGeom>
           <a:solidFill>
@@ -3001,14 +2871,131 @@
       </p:sp>
       <p:sp>
         <p:nvSpPr>
+          <p:cNvPr id="6" name="Text 4"/>
+          <p:cNvSpPr txBox="1"/>
+          <p:nvPr/>
+        </p:nvSpPr>
+        <p:spPr>
+          <a:xfrm>
+            <a:off x="868680" y="2066544"/>
+            <a:ext cx="4846320" cy="274320"/>
+          </a:xfrm>
+          <a:prstGeom prst="rect">
+            <a:avLst/>
+          </a:prstGeom>
+          <a:noFill/>
+          <a:ln/>
+        </p:spPr>
+        <p:txBody>
+          <a:bodyPr wrap="square" lIns="0" tIns="0" rIns="0" bIns="0" rtlCol="0" anchor="ctr"/>
+          <a:lstStyle/>
+          <a:p>
+            <a:pPr indent="0" marL="0">
+              <a:buNone/>
+            </a:pPr>
+            <a:r>
+              <a:rPr lang="en-US" sz="1100" b="1" spc="100" kern="0" dirty="0">
+                <a:solidFill>
+                  <a:srgbClr val="30A46C"/>
+                </a:solidFill>
+                <a:latin typeface="Calibri" pitchFamily="34" charset="0"/>
+                <a:ea typeface="Calibri" pitchFamily="34" charset="-122"/>
+                <a:cs typeface="Calibri" pitchFamily="34" charset="-120"/>
+              </a:rPr>
+              <a:t>MEASURED — counted from the artifacts</a:t>
+            </a:r>
+            <a:endParaRPr lang="en-US" sz="1100" dirty="0"/>
+          </a:p>
+        </p:txBody>
+      </p:sp>
+      <p:sp>
+        <p:nvSpPr>
+          <p:cNvPr id="7" name="Text 5"/>
+          <p:cNvSpPr txBox="1"/>
+          <p:nvPr/>
+        </p:nvSpPr>
+        <p:spPr>
+          <a:xfrm>
+            <a:off x="868680" y="2377440"/>
+            <a:ext cx="640080" cy="274320"/>
+          </a:xfrm>
+          <a:prstGeom prst="rect">
+            <a:avLst/>
+          </a:prstGeom>
+          <a:noFill/>
+          <a:ln/>
+        </p:spPr>
+        <p:txBody>
+          <a:bodyPr wrap="square" lIns="0" tIns="0" rIns="0" bIns="0" rtlCol="0" anchor="ctr"/>
+          <a:lstStyle/>
+          <a:p>
+            <a:pPr indent="0" marL="0">
+              <a:buNone/>
+            </a:pPr>
+            <a:r>
+              <a:rPr lang="en-US" sz="1400" b="1" dirty="0">
+                <a:solidFill>
+                  <a:srgbClr val="10212F"/>
+                </a:solidFill>
+                <a:latin typeface="Calibri" pitchFamily="34" charset="0"/>
+                <a:ea typeface="Calibri" pitchFamily="34" charset="-122"/>
+                <a:cs typeface="Calibri" pitchFamily="34" charset="-120"/>
+              </a:rPr>
+              <a:t>26</a:t>
+            </a:r>
+            <a:endParaRPr lang="en-US" sz="1400" dirty="0"/>
+          </a:p>
+        </p:txBody>
+      </p:sp>
+      <p:sp>
+        <p:nvSpPr>
           <p:cNvPr id="8" name="Text 6"/>
           <p:cNvSpPr txBox="1"/>
           <p:nvPr/>
         </p:nvSpPr>
         <p:spPr>
           <a:xfrm>
-            <a:off x="6446520" y="1481328"/>
-            <a:ext cx="4846320" cy="320040"/>
+            <a:off x="1554480" y="2395728"/>
+            <a:ext cx="4206240" cy="274320"/>
+          </a:xfrm>
+          <a:prstGeom prst="rect">
+            <a:avLst/>
+          </a:prstGeom>
+          <a:noFill/>
+          <a:ln/>
+        </p:spPr>
+        <p:txBody>
+          <a:bodyPr wrap="square" lIns="0" tIns="0" rIns="0" bIns="0" rtlCol="0" anchor="ctr"/>
+          <a:lstStyle/>
+          <a:p>
+            <a:pPr indent="0" marL="0">
+              <a:buNone/>
+            </a:pPr>
+            <a:r>
+              <a:rPr lang="en-US" sz="1150" dirty="0">
+                <a:solidFill>
+                  <a:srgbClr val="5A6B7B"/>
+                </a:solidFill>
+                <a:latin typeface="Calibri" pitchFamily="34" charset="0"/>
+                <a:ea typeface="Calibri" pitchFamily="34" charset="-122"/>
+                <a:cs typeface="Calibri" pitchFamily="34" charset="-120"/>
+              </a:rPr>
+              <a:t>POA&amp;M items with severity + deadline</a:t>
+            </a:r>
+            <a:endParaRPr lang="en-US" sz="1150" dirty="0"/>
+          </a:p>
+        </p:txBody>
+      </p:sp>
+      <p:sp>
+        <p:nvSpPr>
+          <p:cNvPr id="9" name="Text 7"/>
+          <p:cNvSpPr txBox="1"/>
+          <p:nvPr/>
+        </p:nvSpPr>
+        <p:spPr>
+          <a:xfrm>
+            <a:off x="868680" y="2697480"/>
+            <a:ext cx="640080" cy="274320"/>
           </a:xfrm>
           <a:prstGeom prst="rect">
             <a:avLst/>
@@ -3026,13 +3013,13 @@
             <a:r>
               <a:rPr lang="en-US" sz="1400" b="1" dirty="0">
                 <a:solidFill>
-                  <a:srgbClr val="30A46C"/>
-                </a:solidFill>
-                <a:latin typeface="Calibri" pitchFamily="34" charset="0"/>
-                <a:ea typeface="Calibri" pitchFamily="34" charset="-122"/>
-                <a:cs typeface="Calibri" pitchFamily="34" charset="-120"/>
-              </a:rPr>
-              <a:t>With this pipeline</a:t>
+                  <a:srgbClr val="10212F"/>
+                </a:solidFill>
+                <a:latin typeface="Calibri" pitchFamily="34" charset="0"/>
+                <a:ea typeface="Calibri" pitchFamily="34" charset="-122"/>
+                <a:cs typeface="Calibri" pitchFamily="34" charset="-120"/>
+              </a:rPr>
+              <a:t>91</a:t>
             </a:r>
             <a:endParaRPr lang="en-US" sz="1400" dirty="0"/>
           </a:p>
@@ -3040,34 +3027,69 @@
       </p:sp>
       <p:sp>
         <p:nvSpPr>
-          <p:cNvPr id="9" name="Text 7"/>
-          <p:cNvSpPr txBox="1"/>
-          <p:nvPr/>
-        </p:nvSpPr>
-        <p:spPr>
-          <a:xfrm>
-            <a:off x="6583680" y="1847088"/>
-            <a:ext cx="4663440" cy="1325880"/>
-          </a:xfrm>
-          <a:prstGeom prst="rect">
-            <a:avLst/>
-          </a:prstGeom>
-          <a:noFill/>
-          <a:ln/>
-        </p:spPr>
-        <p:txBody>
-          <a:bodyPr wrap="square" lIns="0" tIns="0" rIns="0" bIns="0" rtlCol="0" anchor="ctr"/>
-          <a:lstStyle/>
-          <a:p>
-            <a:pPr marL="342900" indent="-342900">
-              <a:spcAft>
-                <a:spcPts val="600"/>
-              </a:spcAft>
-              <a:buSzPct val="100000"/>
-              <a:buChar char="•"/>
-            </a:pPr>
-            <a:r>
-              <a:rPr lang="en-US" sz="1250" dirty="0">
+          <p:cNvPr id="10" name="Text 8"/>
+          <p:cNvSpPr txBox="1"/>
+          <p:nvPr/>
+        </p:nvSpPr>
+        <p:spPr>
+          <a:xfrm>
+            <a:off x="1554480" y="2715768"/>
+            <a:ext cx="4206240" cy="274320"/>
+          </a:xfrm>
+          <a:prstGeom prst="rect">
+            <a:avLst/>
+          </a:prstGeom>
+          <a:noFill/>
+          <a:ln/>
+        </p:spPr>
+        <p:txBody>
+          <a:bodyPr wrap="square" lIns="0" tIns="0" rIns="0" bIns="0" rtlCol="0" anchor="ctr"/>
+          <a:lstStyle/>
+          <a:p>
+            <a:pPr indent="0" marL="0">
+              <a:buNone/>
+            </a:pPr>
+            <a:r>
+              <a:rPr lang="en-US" sz="1150" dirty="0">
+                <a:solidFill>
+                  <a:srgbClr val="5A6B7B"/>
+                </a:solidFill>
+                <a:latin typeface="Calibri" pitchFamily="34" charset="0"/>
+                <a:ea typeface="Calibri" pitchFamily="34" charset="-122"/>
+                <a:cs typeface="Calibri" pitchFamily="34" charset="-120"/>
+              </a:rPr>
+              <a:t>SSP implemented-requirements</a:t>
+            </a:r>
+            <a:endParaRPr lang="en-US" sz="1150" dirty="0"/>
+          </a:p>
+        </p:txBody>
+      </p:sp>
+      <p:sp>
+        <p:nvSpPr>
+          <p:cNvPr id="11" name="Text 9"/>
+          <p:cNvSpPr txBox="1"/>
+          <p:nvPr/>
+        </p:nvSpPr>
+        <p:spPr>
+          <a:xfrm>
+            <a:off x="868680" y="3017520"/>
+            <a:ext cx="640080" cy="274320"/>
+          </a:xfrm>
+          <a:prstGeom prst="rect">
+            <a:avLst/>
+          </a:prstGeom>
+          <a:noFill/>
+          <a:ln/>
+        </p:spPr>
+        <p:txBody>
+          <a:bodyPr wrap="square" lIns="0" tIns="0" rIns="0" bIns="0" rtlCol="0" anchor="ctr"/>
+          <a:lstStyle/>
+          <a:p>
+            <a:pPr indent="0" marL="0">
+              <a:buNone/>
+            </a:pPr>
+            <a:r>
+              <a:rPr lang="en-US" sz="1400" b="1" dirty="0">
                 <a:solidFill>
                   <a:srgbClr val="10212F"/>
                 </a:solidFill>
@@ -3075,20 +3097,77 @@
                 <a:ea typeface="Calibri" pitchFamily="34" charset="-122"/>
                 <a:cs typeface="Calibri" pitchFamily="34" charset="-120"/>
               </a:rPr>
-              <a:t>One command, seconds</a:t>
-            </a:r>
-            <a:endParaRPr lang="en-US" sz="1250" dirty="0"/>
-          </a:p>
-          <a:p>
-            <a:pPr marL="342900" indent="-342900">
-              <a:spcAft>
-                <a:spcPts val="600"/>
-              </a:spcAft>
-              <a:buSzPct val="100000"/>
-              <a:buChar char="•"/>
-            </a:pPr>
-            <a:r>
-              <a:rPr lang="en-US" sz="1250" dirty="0">
+              <a:t>89</a:t>
+            </a:r>
+            <a:endParaRPr lang="en-US" sz="1400" dirty="0"/>
+          </a:p>
+        </p:txBody>
+      </p:sp>
+      <p:sp>
+        <p:nvSpPr>
+          <p:cNvPr id="12" name="Text 10"/>
+          <p:cNvSpPr txBox="1"/>
+          <p:nvPr/>
+        </p:nvSpPr>
+        <p:spPr>
+          <a:xfrm>
+            <a:off x="1554480" y="3035808"/>
+            <a:ext cx="4206240" cy="274320"/>
+          </a:xfrm>
+          <a:prstGeom prst="rect">
+            <a:avLst/>
+          </a:prstGeom>
+          <a:noFill/>
+          <a:ln/>
+        </p:spPr>
+        <p:txBody>
+          <a:bodyPr wrap="square" lIns="0" tIns="0" rIns="0" bIns="0" rtlCol="0" anchor="ctr"/>
+          <a:lstStyle/>
+          <a:p>
+            <a:pPr indent="0" marL="0">
+              <a:buNone/>
+            </a:pPr>
+            <a:r>
+              <a:rPr lang="en-US" sz="1150" dirty="0">
+                <a:solidFill>
+                  <a:srgbClr val="5A6B7B"/>
+                </a:solidFill>
+                <a:latin typeface="Calibri" pitchFamily="34" charset="0"/>
+                <a:ea typeface="Calibri" pitchFamily="34" charset="-122"/>
+                <a:cs typeface="Calibri" pitchFamily="34" charset="-120"/>
+              </a:rPr>
+              <a:t>NIST 800-53 mappings resolved</a:t>
+            </a:r>
+            <a:endParaRPr lang="en-US" sz="1150" dirty="0"/>
+          </a:p>
+        </p:txBody>
+      </p:sp>
+      <p:sp>
+        <p:nvSpPr>
+          <p:cNvPr id="13" name="Text 11"/>
+          <p:cNvSpPr txBox="1"/>
+          <p:nvPr/>
+        </p:nvSpPr>
+        <p:spPr>
+          <a:xfrm>
+            <a:off x="868680" y="3337560"/>
+            <a:ext cx="640080" cy="274320"/>
+          </a:xfrm>
+          <a:prstGeom prst="rect">
+            <a:avLst/>
+          </a:prstGeom>
+          <a:noFill/>
+          <a:ln/>
+        </p:spPr>
+        <p:txBody>
+          <a:bodyPr wrap="square" lIns="0" tIns="0" rIns="0" bIns="0" rtlCol="0" anchor="ctr"/>
+          <a:lstStyle/>
+          <a:p>
+            <a:pPr indent="0" marL="0">
+              <a:buNone/>
+            </a:pPr>
+            <a:r>
+              <a:rPr lang="en-US" sz="1400" b="1" dirty="0">
                 <a:solidFill>
                   <a:srgbClr val="10212F"/>
                 </a:solidFill>
@@ -3096,68 +3175,687 @@
                 <a:ea typeface="Calibri" pitchFamily="34" charset="-122"/>
                 <a:cs typeface="Calibri" pitchFamily="34" charset="-120"/>
               </a:rPr>
-              <a:t>POA&amp;M generated with severity and deadlines</a:t>
-            </a:r>
-            <a:endParaRPr lang="en-US" sz="1250" dirty="0"/>
-          </a:p>
-          <a:p>
-            <a:pPr marL="342900" indent="-342900">
-              <a:spcAft>
-                <a:spcPts val="600"/>
-              </a:spcAft>
-              <a:buSzPct val="100000"/>
-              <a:buChar char="•"/>
-            </a:pPr>
-            <a:r>
-              <a:rPr lang="en-US" sz="1250" dirty="0">
-                <a:solidFill>
-                  <a:srgbClr val="10212F"/>
-                </a:solidFill>
-                <a:latin typeface="Calibri" pitchFamily="34" charset="0"/>
-                <a:ea typeface="Calibri" pitchFamily="34" charset="-122"/>
-                <a:cs typeface="Calibri" pitchFamily="34" charset="-120"/>
-              </a:rPr>
-              <a:t>Mappings bound to CISA's crosswalk</a:t>
-            </a:r>
-            <a:endParaRPr lang="en-US" sz="1250" dirty="0"/>
-          </a:p>
-          <a:p>
-            <a:pPr marL="342900" indent="-342900">
-              <a:spcAft>
-                <a:spcPts val="600"/>
-              </a:spcAft>
-              <a:buSzPct val="100000"/>
-              <a:buChar char="•"/>
-            </a:pPr>
-            <a:r>
-              <a:rPr lang="en-US" sz="1250" dirty="0">
-                <a:solidFill>
-                  <a:srgbClr val="10212F"/>
-                </a:solidFill>
-                <a:latin typeface="Calibri" pitchFamily="34" charset="0"/>
-                <a:ea typeface="Calibri" pitchFamily="34" charset="-122"/>
-                <a:cs typeface="Calibri" pitchFamily="34" charset="-120"/>
-              </a:rPr>
-              <a:t>SSP in the format assessors already consume</a:t>
-            </a:r>
-            <a:endParaRPr lang="en-US" sz="1250" dirty="0"/>
-          </a:p>
-        </p:txBody>
-      </p:sp>
-      <p:sp>
-        <p:nvSpPr>
-          <p:cNvPr id="10" name="Shape 8"/>
+              <a:t>26</a:t>
+            </a:r>
+            <a:endParaRPr lang="en-US" sz="1400" dirty="0"/>
+          </a:p>
+        </p:txBody>
+      </p:sp>
+      <p:sp>
+        <p:nvSpPr>
+          <p:cNvPr id="14" name="Text 12"/>
+          <p:cNvSpPr txBox="1"/>
+          <p:nvPr/>
+        </p:nvSpPr>
+        <p:spPr>
+          <a:xfrm>
+            <a:off x="1554480" y="3355848"/>
+            <a:ext cx="4206240" cy="274320"/>
+          </a:xfrm>
+          <a:prstGeom prst="rect">
+            <a:avLst/>
+          </a:prstGeom>
+          <a:noFill/>
+          <a:ln/>
+        </p:spPr>
+        <p:txBody>
+          <a:bodyPr wrap="square" lIns="0" tIns="0" rIns="0" bIns="0" rtlCol="0" anchor="ctr"/>
+          <a:lstStyle/>
+          <a:p>
+            <a:pPr indent="0" marL="0">
+              <a:buNone/>
+            </a:pPr>
+            <a:r>
+              <a:rPr lang="en-US" sz="1150" dirty="0">
+                <a:solidFill>
+                  <a:srgbClr val="5A6B7B"/>
+                </a:solidFill>
+                <a:latin typeface="Calibri" pitchFamily="34" charset="0"/>
+                <a:ea typeface="Calibri" pitchFamily="34" charset="-122"/>
+                <a:cs typeface="Calibri" pitchFamily="34" charset="-120"/>
+              </a:rPr>
+              <a:t>phantom drift findings avoided</a:t>
+            </a:r>
+            <a:endParaRPr lang="en-US" sz="1150" dirty="0"/>
+          </a:p>
+        </p:txBody>
+      </p:sp>
+      <p:sp>
+        <p:nvSpPr>
+          <p:cNvPr id="15" name="Shape 13"/>
           <p:cNvSpPr/>
           <p:nvPr/>
         </p:nvSpPr>
         <p:spPr>
           <a:xfrm>
-            <a:off x="640080" y="3566160"/>
-            <a:ext cx="10881360" cy="1417320"/>
+            <a:off x="6217920" y="1920240"/>
+            <a:ext cx="5303520" cy="1828800"/>
           </a:xfrm>
           <a:prstGeom prst="roundRect">
             <a:avLst>
-              <a:gd name="adj" fmla="val 6452"/>
+              <a:gd name="adj" fmla="val 5000"/>
+            </a:avLst>
+          </a:prstGeom>
+          <a:solidFill>
+            <a:srgbClr val="FFF6E0"/>
+          </a:solidFill>
+          <a:ln w="12700">
+            <a:solidFill>
+              <a:srgbClr val="FFE2A8"/>
+            </a:solidFill>
+            <a:prstDash val="solid"/>
+          </a:ln>
+        </p:spPr>
+      </p:sp>
+      <p:sp>
+        <p:nvSpPr>
+          <p:cNvPr id="16" name="Text 14"/>
+          <p:cNvSpPr txBox="1"/>
+          <p:nvPr/>
+        </p:nvSpPr>
+        <p:spPr>
+          <a:xfrm>
+            <a:off x="6446520" y="2066544"/>
+            <a:ext cx="4846320" cy="274320"/>
+          </a:xfrm>
+          <a:prstGeom prst="rect">
+            <a:avLst/>
+          </a:prstGeom>
+          <a:noFill/>
+          <a:ln/>
+        </p:spPr>
+        <p:txBody>
+          <a:bodyPr wrap="square" lIns="0" tIns="0" rIns="0" bIns="0" rtlCol="0" anchor="ctr"/>
+          <a:lstStyle/>
+          <a:p>
+            <a:pPr indent="0" marL="0">
+              <a:buNone/>
+            </a:pPr>
+            <a:r>
+              <a:rPr lang="en-US" sz="1100" b="1" spc="100" kern="0" dirty="0">
+                <a:solidFill>
+                  <a:srgbClr val="8A5A00"/>
+                </a:solidFill>
+                <a:latin typeface="Calibri" pitchFamily="34" charset="0"/>
+                <a:ea typeface="Calibri" pitchFamily="34" charset="-122"/>
+                <a:cs typeface="Calibri" pitchFamily="34" charset="-120"/>
+              </a:rPr>
+              <a:t>ASSUMED — adjustable by the reader</a:t>
+            </a:r>
+            <a:endParaRPr lang="en-US" sz="1100" dirty="0"/>
+          </a:p>
+        </p:txBody>
+      </p:sp>
+      <p:sp>
+        <p:nvSpPr>
+          <p:cNvPr id="17" name="Text 15"/>
+          <p:cNvSpPr txBox="1"/>
+          <p:nvPr/>
+        </p:nvSpPr>
+        <p:spPr>
+          <a:xfrm>
+            <a:off x="6446520" y="2377440"/>
+            <a:ext cx="1188720" cy="274320"/>
+          </a:xfrm>
+          <a:prstGeom prst="rect">
+            <a:avLst/>
+          </a:prstGeom>
+          <a:noFill/>
+          <a:ln/>
+        </p:spPr>
+        <p:txBody>
+          <a:bodyPr wrap="square" lIns="0" tIns="0" rIns="0" bIns="0" rtlCol="0" anchor="ctr"/>
+          <a:lstStyle/>
+          <a:p>
+            <a:pPr indent="0" marL="0">
+              <a:buNone/>
+            </a:pPr>
+            <a:r>
+              <a:rPr lang="en-US" sz="1250" b="1" dirty="0">
+                <a:solidFill>
+                  <a:srgbClr val="10212F"/>
+                </a:solidFill>
+                <a:latin typeface="Calibri" pitchFamily="34" charset="0"/>
+                <a:ea typeface="Calibri" pitchFamily="34" charset="-122"/>
+                <a:cs typeface="Calibri" pitchFamily="34" charset="-120"/>
+              </a:rPr>
+              <a:t>20 min</a:t>
+            </a:r>
+            <a:endParaRPr lang="en-US" sz="1250" dirty="0"/>
+          </a:p>
+        </p:txBody>
+      </p:sp>
+      <p:sp>
+        <p:nvSpPr>
+          <p:cNvPr id="18" name="Text 16"/>
+          <p:cNvSpPr txBox="1"/>
+          <p:nvPr/>
+        </p:nvSpPr>
+        <p:spPr>
+          <a:xfrm>
+            <a:off x="7726680" y="2395728"/>
+            <a:ext cx="3657600" cy="274320"/>
+          </a:xfrm>
+          <a:prstGeom prst="rect">
+            <a:avLst/>
+          </a:prstGeom>
+          <a:noFill/>
+          <a:ln/>
+        </p:spPr>
+        <p:txBody>
+          <a:bodyPr wrap="square" lIns="0" tIns="0" rIns="0" bIns="0" rtlCol="0" anchor="ctr"/>
+          <a:lstStyle/>
+          <a:p>
+            <a:pPr indent="0" marL="0">
+              <a:buNone/>
+            </a:pPr>
+            <a:r>
+              <a:rPr lang="en-US" sz="1150" dirty="0">
+                <a:solidFill>
+                  <a:srgbClr val="5A6B7B"/>
+                </a:solidFill>
+                <a:latin typeface="Calibri" pitchFamily="34" charset="0"/>
+                <a:ea typeface="Calibri" pitchFamily="34" charset="-122"/>
+                <a:cs typeface="Calibri" pitchFamily="34" charset="-120"/>
+              </a:rPr>
+              <a:t>to hand-author one POA&amp;M item</a:t>
+            </a:r>
+            <a:endParaRPr lang="en-US" sz="1150" dirty="0"/>
+          </a:p>
+        </p:txBody>
+      </p:sp>
+      <p:sp>
+        <p:nvSpPr>
+          <p:cNvPr id="19" name="Text 17"/>
+          <p:cNvSpPr txBox="1"/>
+          <p:nvPr/>
+        </p:nvSpPr>
+        <p:spPr>
+          <a:xfrm>
+            <a:off x="6446520" y="2697480"/>
+            <a:ext cx="1188720" cy="274320"/>
+          </a:xfrm>
+          <a:prstGeom prst="rect">
+            <a:avLst/>
+          </a:prstGeom>
+          <a:noFill/>
+          <a:ln/>
+        </p:spPr>
+        <p:txBody>
+          <a:bodyPr wrap="square" lIns="0" tIns="0" rIns="0" bIns="0" rtlCol="0" anchor="ctr"/>
+          <a:lstStyle/>
+          <a:p>
+            <a:pPr indent="0" marL="0">
+              <a:buNone/>
+            </a:pPr>
+            <a:r>
+              <a:rPr lang="en-US" sz="1250" b="1" dirty="0">
+                <a:solidFill>
+                  <a:srgbClr val="10212F"/>
+                </a:solidFill>
+                <a:latin typeface="Calibri" pitchFamily="34" charset="0"/>
+                <a:ea typeface="Calibri" pitchFamily="34" charset="-122"/>
+                <a:cs typeface="Calibri" pitchFamily="34" charset="-120"/>
+              </a:rPr>
+              <a:t>10 min</a:t>
+            </a:r>
+            <a:endParaRPr lang="en-US" sz="1250" dirty="0"/>
+          </a:p>
+        </p:txBody>
+      </p:sp>
+      <p:sp>
+        <p:nvSpPr>
+          <p:cNvPr id="20" name="Text 18"/>
+          <p:cNvSpPr txBox="1"/>
+          <p:nvPr/>
+        </p:nvSpPr>
+        <p:spPr>
+          <a:xfrm>
+            <a:off x="7726680" y="2715768"/>
+            <a:ext cx="3657600" cy="274320"/>
+          </a:xfrm>
+          <a:prstGeom prst="rect">
+            <a:avLst/>
+          </a:prstGeom>
+          <a:noFill/>
+          <a:ln/>
+        </p:spPr>
+        <p:txBody>
+          <a:bodyPr wrap="square" lIns="0" tIns="0" rIns="0" bIns="0" rtlCol="0" anchor="ctr"/>
+          <a:lstStyle/>
+          <a:p>
+            <a:pPr indent="0" marL="0">
+              <a:buNone/>
+            </a:pPr>
+            <a:r>
+              <a:rPr lang="en-US" sz="1150" dirty="0">
+                <a:solidFill>
+                  <a:srgbClr val="5A6B7B"/>
+                </a:solidFill>
+                <a:latin typeface="Calibri" pitchFamily="34" charset="0"/>
+                <a:ea typeface="Calibri" pitchFamily="34" charset="-122"/>
+                <a:cs typeface="Calibri" pitchFamily="34" charset="-120"/>
+              </a:rPr>
+              <a:t>per SSP requirement</a:t>
+            </a:r>
+            <a:endParaRPr lang="en-US" sz="1150" dirty="0"/>
+          </a:p>
+        </p:txBody>
+      </p:sp>
+      <p:sp>
+        <p:nvSpPr>
+          <p:cNvPr id="21" name="Text 19"/>
+          <p:cNvSpPr txBox="1"/>
+          <p:nvPr/>
+        </p:nvSpPr>
+        <p:spPr>
+          <a:xfrm>
+            <a:off x="6446520" y="3017520"/>
+            <a:ext cx="1188720" cy="274320"/>
+          </a:xfrm>
+          <a:prstGeom prst="rect">
+            <a:avLst/>
+          </a:prstGeom>
+          <a:noFill/>
+          <a:ln/>
+        </p:spPr>
+        <p:txBody>
+          <a:bodyPr wrap="square" lIns="0" tIns="0" rIns="0" bIns="0" rtlCol="0" anchor="ctr"/>
+          <a:lstStyle/>
+          <a:p>
+            <a:pPr indent="0" marL="0">
+              <a:buNone/>
+            </a:pPr>
+            <a:r>
+              <a:rPr lang="en-US" sz="1250" b="1" dirty="0">
+                <a:solidFill>
+                  <a:srgbClr val="10212F"/>
+                </a:solidFill>
+                <a:latin typeface="Calibri" pitchFamily="34" charset="0"/>
+                <a:ea typeface="Calibri" pitchFamily="34" charset="-122"/>
+                <a:cs typeface="Calibri" pitchFamily="34" charset="-120"/>
+              </a:rPr>
+              <a:t>6 min</a:t>
+            </a:r>
+            <a:endParaRPr lang="en-US" sz="1250" dirty="0"/>
+          </a:p>
+        </p:txBody>
+      </p:sp>
+      <p:sp>
+        <p:nvSpPr>
+          <p:cNvPr id="22" name="Text 20"/>
+          <p:cNvSpPr txBox="1"/>
+          <p:nvPr/>
+        </p:nvSpPr>
+        <p:spPr>
+          <a:xfrm>
+            <a:off x="7726680" y="3035808"/>
+            <a:ext cx="3657600" cy="274320"/>
+          </a:xfrm>
+          <a:prstGeom prst="rect">
+            <a:avLst/>
+          </a:prstGeom>
+          <a:noFill/>
+          <a:ln/>
+        </p:spPr>
+        <p:txBody>
+          <a:bodyPr wrap="square" lIns="0" tIns="0" rIns="0" bIns="0" rtlCol="0" anchor="ctr"/>
+          <a:lstStyle/>
+          <a:p>
+            <a:pPr indent="0" marL="0">
+              <a:buNone/>
+            </a:pPr>
+            <a:r>
+              <a:rPr lang="en-US" sz="1150" dirty="0">
+                <a:solidFill>
+                  <a:srgbClr val="5A6B7B"/>
+                </a:solidFill>
+                <a:latin typeface="Calibri" pitchFamily="34" charset="0"/>
+                <a:ea typeface="Calibri" pitchFamily="34" charset="-122"/>
+                <a:cs typeface="Calibri" pitchFamily="34" charset="-120"/>
+              </a:rPr>
+              <a:t>per NIST mapping lookup</a:t>
+            </a:r>
+            <a:endParaRPr lang="en-US" sz="1150" dirty="0"/>
+          </a:p>
+        </p:txBody>
+      </p:sp>
+      <p:sp>
+        <p:nvSpPr>
+          <p:cNvPr id="23" name="Text 21"/>
+          <p:cNvSpPr txBox="1"/>
+          <p:nvPr/>
+        </p:nvSpPr>
+        <p:spPr>
+          <a:xfrm>
+            <a:off x="6446520" y="3337560"/>
+            <a:ext cx="1188720" cy="274320"/>
+          </a:xfrm>
+          <a:prstGeom prst="rect">
+            <a:avLst/>
+          </a:prstGeom>
+          <a:noFill/>
+          <a:ln/>
+        </p:spPr>
+        <p:txBody>
+          <a:bodyPr wrap="square" lIns="0" tIns="0" rIns="0" bIns="0" rtlCol="0" anchor="ctr"/>
+          <a:lstStyle/>
+          <a:p>
+            <a:pPr indent="0" marL="0">
+              <a:buNone/>
+            </a:pPr>
+            <a:r>
+              <a:rPr lang="en-US" sz="1250" b="1" dirty="0">
+                <a:solidFill>
+                  <a:srgbClr val="10212F"/>
+                </a:solidFill>
+                <a:latin typeface="Calibri" pitchFamily="34" charset="0"/>
+                <a:ea typeface="Calibri" pitchFamily="34" charset="-122"/>
+                <a:cs typeface="Calibri" pitchFamily="34" charset="-120"/>
+              </a:rPr>
+              <a:t>$62.11/h</a:t>
+            </a:r>
+            <a:endParaRPr lang="en-US" sz="1250" dirty="0"/>
+          </a:p>
+        </p:txBody>
+      </p:sp>
+      <p:sp>
+        <p:nvSpPr>
+          <p:cNvPr id="24" name="Text 22"/>
+          <p:cNvSpPr txBox="1"/>
+          <p:nvPr/>
+        </p:nvSpPr>
+        <p:spPr>
+          <a:xfrm>
+            <a:off x="7726680" y="3355848"/>
+            <a:ext cx="3657600" cy="274320"/>
+          </a:xfrm>
+          <a:prstGeom prst="rect">
+            <a:avLst/>
+          </a:prstGeom>
+          <a:noFill/>
+          <a:ln/>
+        </p:spPr>
+        <p:txBody>
+          <a:bodyPr wrap="square" lIns="0" tIns="0" rIns="0" bIns="0" rtlCol="0" anchor="ctr"/>
+          <a:lstStyle/>
+          <a:p>
+            <a:pPr indent="0" marL="0">
+              <a:buNone/>
+            </a:pPr>
+            <a:r>
+              <a:rPr lang="en-US" sz="1150" dirty="0">
+                <a:solidFill>
+                  <a:srgbClr val="5A6B7B"/>
+                </a:solidFill>
+                <a:latin typeface="Calibri" pitchFamily="34" charset="0"/>
+                <a:ea typeface="Calibri" pitchFamily="34" charset="-122"/>
+                <a:cs typeface="Calibri" pitchFamily="34" charset="-120"/>
+              </a:rPr>
+              <a:t>BLS Virginia analyst wage x1.3 loaded</a:t>
+            </a:r>
+            <a:endParaRPr lang="en-US" sz="1150" dirty="0"/>
+          </a:p>
+        </p:txBody>
+      </p:sp>
+      <p:sp>
+        <p:nvSpPr>
+          <p:cNvPr id="25" name="Shape 23"/>
+          <p:cNvSpPr/>
+          <p:nvPr/>
+        </p:nvSpPr>
+        <p:spPr>
+          <a:xfrm>
+            <a:off x="640080" y="3977640"/>
+            <a:ext cx="3474720" cy="1508760"/>
+          </a:xfrm>
+          <a:prstGeom prst="roundRect">
+            <a:avLst>
+              <a:gd name="adj" fmla="val 6061"/>
+            </a:avLst>
+          </a:prstGeom>
+          <a:solidFill>
+            <a:srgbClr val="E8F6EF"/>
+          </a:solidFill>
+          <a:ln w="12700">
+            <a:solidFill>
+              <a:srgbClr val="E8F6EF"/>
+            </a:solidFill>
+            <a:prstDash val="solid"/>
+          </a:ln>
+        </p:spPr>
+      </p:sp>
+      <p:sp>
+        <p:nvSpPr>
+          <p:cNvPr id="26" name="Text 24"/>
+          <p:cNvSpPr txBox="1"/>
+          <p:nvPr/>
+        </p:nvSpPr>
+        <p:spPr>
+          <a:xfrm>
+            <a:off x="640080" y="4142232"/>
+            <a:ext cx="3474720" cy="749808"/>
+          </a:xfrm>
+          <a:prstGeom prst="rect">
+            <a:avLst/>
+          </a:prstGeom>
+          <a:noFill/>
+          <a:ln/>
+        </p:spPr>
+        <p:txBody>
+          <a:bodyPr wrap="square" lIns="0" tIns="0" rIns="0" bIns="0" rtlCol="0" anchor="ctr"/>
+          <a:lstStyle/>
+          <a:p>
+            <a:pPr algn="ctr" indent="0" marL="0">
+              <a:buNone/>
+            </a:pPr>
+            <a:r>
+              <a:rPr lang="en-US" sz="4000" b="1" dirty="0">
+                <a:solidFill>
+                  <a:srgbClr val="30A46C"/>
+                </a:solidFill>
+                <a:latin typeface="Calibri" pitchFamily="34" charset="0"/>
+                <a:ea typeface="Calibri" pitchFamily="34" charset="-122"/>
+                <a:cs typeface="Calibri" pitchFamily="34" charset="-120"/>
+              </a:rPr>
+              <a:t>20–69 h</a:t>
+            </a:r>
+            <a:endParaRPr lang="en-US" sz="4000" dirty="0"/>
+          </a:p>
+        </p:txBody>
+      </p:sp>
+      <p:sp>
+        <p:nvSpPr>
+          <p:cNvPr id="27" name="Text 25"/>
+          <p:cNvSpPr txBox="1"/>
+          <p:nvPr/>
+        </p:nvSpPr>
+        <p:spPr>
+          <a:xfrm>
+            <a:off x="749808" y="4892040"/>
+            <a:ext cx="3255264" cy="502920"/>
+          </a:xfrm>
+          <a:prstGeom prst="rect">
+            <a:avLst/>
+          </a:prstGeom>
+          <a:noFill/>
+          <a:ln/>
+        </p:spPr>
+        <p:txBody>
+          <a:bodyPr wrap="square" lIns="0" tIns="0" rIns="0" bIns="0" rtlCol="0" anchor="ctr"/>
+          <a:lstStyle/>
+          <a:p>
+            <a:pPr algn="ctr" indent="0" marL="0">
+              <a:buNone/>
+            </a:pPr>
+            <a:r>
+              <a:rPr lang="en-US" sz="1150" dirty="0">
+                <a:solidFill>
+                  <a:srgbClr val="5A6B7B"/>
+                </a:solidFill>
+                <a:latin typeface="Calibri" pitchFamily="34" charset="0"/>
+                <a:ea typeface="Calibri" pitchFamily="34" charset="-122"/>
+                <a:cs typeface="Calibri" pitchFamily="34" charset="-120"/>
+              </a:rPr>
+              <a:t>manual effort replaced</a:t>
+            </a:r>
+            <a:endParaRPr lang="en-US" sz="1150" dirty="0"/>
+          </a:p>
+          <a:p>
+            <a:pPr algn="ctr" indent="0" marL="0">
+              <a:buNone/>
+            </a:pPr>
+            <a:r>
+              <a:rPr lang="en-US" sz="1150" dirty="0">
+                <a:solidFill>
+                  <a:srgbClr val="5A6B7B"/>
+                </a:solidFill>
+                <a:latin typeface="Calibri" pitchFamily="34" charset="0"/>
+                <a:ea typeface="Calibri" pitchFamily="34" charset="-122"/>
+                <a:cs typeface="Calibri" pitchFamily="34" charset="-120"/>
+              </a:rPr>
+              <a:t>per assessment cycle</a:t>
+            </a:r>
+            <a:endParaRPr lang="en-US" sz="1150" dirty="0"/>
+          </a:p>
+        </p:txBody>
+      </p:sp>
+      <p:sp>
+        <p:nvSpPr>
+          <p:cNvPr id="28" name="Shape 26"/>
+          <p:cNvSpPr/>
+          <p:nvPr/>
+        </p:nvSpPr>
+        <p:spPr>
+          <a:xfrm>
+            <a:off x="4343400" y="3977640"/>
+            <a:ext cx="3474720" cy="1508760"/>
+          </a:xfrm>
+          <a:prstGeom prst="roundRect">
+            <a:avLst>
+              <a:gd name="adj" fmla="val 6061"/>
+            </a:avLst>
+          </a:prstGeom>
+          <a:solidFill>
+            <a:srgbClr val="E8F6EF"/>
+          </a:solidFill>
+          <a:ln w="12700">
+            <a:solidFill>
+              <a:srgbClr val="E8F6EF"/>
+            </a:solidFill>
+            <a:prstDash val="solid"/>
+          </a:ln>
+        </p:spPr>
+      </p:sp>
+      <p:sp>
+        <p:nvSpPr>
+          <p:cNvPr id="29" name="Text 27"/>
+          <p:cNvSpPr txBox="1"/>
+          <p:nvPr/>
+        </p:nvSpPr>
+        <p:spPr>
+          <a:xfrm>
+            <a:off x="4343400" y="4142232"/>
+            <a:ext cx="3474720" cy="749808"/>
+          </a:xfrm>
+          <a:prstGeom prst="rect">
+            <a:avLst/>
+          </a:prstGeom>
+          <a:noFill/>
+          <a:ln/>
+        </p:spPr>
+        <p:txBody>
+          <a:bodyPr wrap="square" lIns="0" tIns="0" rIns="0" bIns="0" rtlCol="0" anchor="ctr"/>
+          <a:lstStyle/>
+          <a:p>
+            <a:pPr algn="ctr" indent="0" marL="0">
+              <a:buNone/>
+            </a:pPr>
+            <a:r>
+              <a:rPr lang="en-US" sz="4000" b="1" dirty="0">
+                <a:solidFill>
+                  <a:srgbClr val="30A46C"/>
+                </a:solidFill>
+                <a:latin typeface="Calibri" pitchFamily="34" charset="0"/>
+                <a:ea typeface="Calibri" pitchFamily="34" charset="-122"/>
+                <a:cs typeface="Calibri" pitchFamily="34" charset="-120"/>
+              </a:rPr>
+              <a:t>$1.6k–$5.5k</a:t>
+            </a:r>
+            <a:endParaRPr lang="en-US" sz="4000" dirty="0"/>
+          </a:p>
+        </p:txBody>
+      </p:sp>
+      <p:sp>
+        <p:nvSpPr>
+          <p:cNvPr id="30" name="Text 28"/>
+          <p:cNvSpPr txBox="1"/>
+          <p:nvPr/>
+        </p:nvSpPr>
+        <p:spPr>
+          <a:xfrm>
+            <a:off x="4453128" y="4892040"/>
+            <a:ext cx="3255264" cy="502920"/>
+          </a:xfrm>
+          <a:prstGeom prst="rect">
+            <a:avLst/>
+          </a:prstGeom>
+          <a:noFill/>
+          <a:ln/>
+        </p:spPr>
+        <p:txBody>
+          <a:bodyPr wrap="square" lIns="0" tIns="0" rIns="0" bIns="0" rtlCol="0" anchor="ctr"/>
+          <a:lstStyle/>
+          <a:p>
+            <a:pPr algn="ctr" indent="0" marL="0">
+              <a:buNone/>
+            </a:pPr>
+            <a:r>
+              <a:rPr lang="en-US" sz="1150" dirty="0">
+                <a:solidFill>
+                  <a:srgbClr val="5A6B7B"/>
+                </a:solidFill>
+                <a:latin typeface="Calibri" pitchFamily="34" charset="0"/>
+                <a:ea typeface="Calibri" pitchFamily="34" charset="-122"/>
+                <a:cs typeface="Calibri" pitchFamily="34" charset="-120"/>
+              </a:rPr>
+              <a:t>analyst time value</a:t>
+            </a:r>
+            <a:endParaRPr lang="en-US" sz="1150" dirty="0"/>
+          </a:p>
+          <a:p>
+            <a:pPr algn="ctr" indent="0" marL="0">
+              <a:buNone/>
+            </a:pPr>
+            <a:r>
+              <a:rPr lang="en-US" sz="1150" dirty="0">
+                <a:solidFill>
+                  <a:srgbClr val="5A6B7B"/>
+                </a:solidFill>
+                <a:latin typeface="Calibri" pitchFamily="34" charset="0"/>
+                <a:ea typeface="Calibri" pitchFamily="34" charset="-122"/>
+                <a:cs typeface="Calibri" pitchFamily="34" charset="-120"/>
+              </a:rPr>
+              <a:t>per assessment cycle</a:t>
+            </a:r>
+            <a:endParaRPr lang="en-US" sz="1150" dirty="0"/>
+          </a:p>
+        </p:txBody>
+      </p:sp>
+      <p:sp>
+        <p:nvSpPr>
+          <p:cNvPr id="31" name="Shape 29"/>
+          <p:cNvSpPr/>
+          <p:nvPr/>
+        </p:nvSpPr>
+        <p:spPr>
+          <a:xfrm>
+            <a:off x="8046720" y="3977640"/>
+            <a:ext cx="3474720" cy="1508760"/>
+          </a:xfrm>
+          <a:prstGeom prst="roundRect">
+            <a:avLst>
+              <a:gd name="adj" fmla="val 6061"/>
             </a:avLst>
           </a:prstGeom>
           <a:solidFill>
@@ -3173,30 +3871,30 @@
       </p:sp>
       <p:sp>
         <p:nvSpPr>
-          <p:cNvPr id="11" name="Text 9"/>
-          <p:cNvSpPr txBox="1"/>
-          <p:nvPr/>
-        </p:nvSpPr>
-        <p:spPr>
-          <a:xfrm>
-            <a:off x="914400" y="3730752"/>
-            <a:ext cx="10332720" cy="320040"/>
-          </a:xfrm>
-          <a:prstGeom prst="rect">
-            <a:avLst/>
-          </a:prstGeom>
-          <a:noFill/>
-          <a:ln/>
-        </p:spPr>
-        <p:txBody>
-          <a:bodyPr wrap="square" lIns="0" tIns="0" rIns="0" bIns="0" rtlCol="0" anchor="ctr"/>
-          <a:lstStyle/>
-          <a:p>
-            <a:pPr indent="0" marL="0">
-              <a:buNone/>
-            </a:pPr>
-            <a:r>
-              <a:rPr lang="en-US" sz="1400" b="1" dirty="0">
+          <p:cNvPr id="32" name="Text 30"/>
+          <p:cNvSpPr txBox="1"/>
+          <p:nvPr/>
+        </p:nvSpPr>
+        <p:spPr>
+          <a:xfrm>
+            <a:off x="8046720" y="4142232"/>
+            <a:ext cx="3474720" cy="749808"/>
+          </a:xfrm>
+          <a:prstGeom prst="rect">
+            <a:avLst/>
+          </a:prstGeom>
+          <a:noFill/>
+          <a:ln/>
+        </p:spPr>
+        <p:txBody>
+          <a:bodyPr wrap="square" lIns="0" tIns="0" rIns="0" bIns="0" rtlCol="0" anchor="ctr"/>
+          <a:lstStyle/>
+          <a:p>
+            <a:pPr algn="ctr" indent="0" marL="0">
+              <a:buNone/>
+            </a:pPr>
+            <a:r>
+              <a:rPr lang="en-US" sz="4000" b="1" dirty="0">
                 <a:solidFill>
                   <a:srgbClr val="FFB700"/>
                 </a:solidFill>
@@ -3204,63 +3902,77 @@
                 <a:ea typeface="Calibri" pitchFamily="34" charset="-122"/>
                 <a:cs typeface="Calibri" pitchFamily="34" charset="-120"/>
               </a:rPr>
-              <a:t>Who this is for, in Virginia</a:t>
-            </a:r>
-            <a:endParaRPr lang="en-US" sz="1400" dirty="0"/>
-          </a:p>
-        </p:txBody>
-      </p:sp>
-      <p:sp>
-        <p:nvSpPr>
-          <p:cNvPr id="12" name="Text 10"/>
-          <p:cNvSpPr txBox="1"/>
-          <p:nvPr/>
-        </p:nvSpPr>
-        <p:spPr>
-          <a:xfrm>
-            <a:off x="914400" y="4069080"/>
-            <a:ext cx="10332720" cy="822960"/>
-          </a:xfrm>
-          <a:prstGeom prst="rect">
-            <a:avLst/>
-          </a:prstGeom>
-          <a:noFill/>
-          <a:ln/>
-        </p:spPr>
-        <p:txBody>
-          <a:bodyPr wrap="square" lIns="0" tIns="0" rIns="0" bIns="0" rtlCol="0" anchor="ctr"/>
-          <a:lstStyle/>
-          <a:p>
-            <a:pPr indent="0" marL="0">
-              <a:lnSpc>
-                <a:spcPts val="1900"/>
-              </a:lnSpc>
-              <a:buNone/>
-            </a:pPr>
-            <a:r>
-              <a:rPr lang="en-US" sz="1300" dirty="0">
-                <a:solidFill>
-                  <a:srgbClr val="D2DEE8"/>
-                </a:solidFill>
-                <a:latin typeface="Calibri" pitchFamily="34" charset="0"/>
-                <a:ea typeface="Calibri" pitchFamily="34" charset="-122"/>
-                <a:cs typeface="Calibri" pitchFamily="34" charset="-120"/>
-              </a:rPr>
-              <a:t>Public universities, K-12 school divisions, county and municipal governments, and small state agencies — all running the same Microsoft 365 estate as a federal agency, all subject to the same expectations, with a fraction of the compliance staff. OSCAL is the format FedRAMP and federal assessors already consume, so the output is immediately useful rather than another bespoke report.</a:t>
-            </a:r>
-            <a:endParaRPr lang="en-US" sz="1300" dirty="0"/>
-          </a:p>
-        </p:txBody>
-      </p:sp>
-      <p:sp>
-        <p:nvSpPr>
-          <p:cNvPr id="13" name="Text 11"/>
-          <p:cNvSpPr txBox="1"/>
-          <p:nvPr/>
-        </p:nvSpPr>
-        <p:spPr>
-          <a:xfrm>
-            <a:off x="640080" y="5212080"/>
+              <a:t>$0.62</a:t>
+            </a:r>
+            <a:endParaRPr lang="en-US" sz="4000" dirty="0"/>
+          </a:p>
+        </p:txBody>
+      </p:sp>
+      <p:sp>
+        <p:nvSpPr>
+          <p:cNvPr id="33" name="Text 31"/>
+          <p:cNvSpPr txBox="1"/>
+          <p:nvPr/>
+        </p:nvSpPr>
+        <p:spPr>
+          <a:xfrm>
+            <a:off x="8156448" y="4892040"/>
+            <a:ext cx="3255264" cy="502920"/>
+          </a:xfrm>
+          <a:prstGeom prst="rect">
+            <a:avLst/>
+          </a:prstGeom>
+          <a:noFill/>
+          <a:ln/>
+        </p:spPr>
+        <p:txBody>
+          <a:bodyPr wrap="square" lIns="0" tIns="0" rIns="0" bIns="0" rtlCol="0" anchor="ctr"/>
+          <a:lstStyle/>
+          <a:p>
+            <a:pPr algn="ctr" indent="0" marL="0">
+              <a:buNone/>
+            </a:pPr>
+            <a:r>
+              <a:rPr lang="en-US" sz="1150" dirty="0">
+                <a:solidFill>
+                  <a:srgbClr val="5A6B7B"/>
+                </a:solidFill>
+                <a:latin typeface="Calibri" pitchFamily="34" charset="0"/>
+                <a:ea typeface="Calibri" pitchFamily="34" charset="-122"/>
+                <a:cs typeface="Calibri" pitchFamily="34" charset="-120"/>
+              </a:rPr>
+              <a:t>cost to run</a:t>
+            </a:r>
+            <a:endParaRPr lang="en-US" sz="1150" dirty="0"/>
+          </a:p>
+          <a:p>
+            <a:pPr algn="ctr" indent="0" marL="0">
+              <a:buNone/>
+            </a:pPr>
+            <a:r>
+              <a:rPr lang="en-US" sz="1150" dirty="0">
+                <a:solidFill>
+                  <a:srgbClr val="5A6B7B"/>
+                </a:solidFill>
+                <a:latin typeface="Calibri" pitchFamily="34" charset="0"/>
+                <a:ea typeface="Calibri" pitchFamily="34" charset="-122"/>
+                <a:cs typeface="Calibri" pitchFamily="34" charset="-120"/>
+              </a:rPr>
+              <a:t>per month, all Azure</a:t>
+            </a:r>
+            <a:endParaRPr lang="en-US" sz="1150" dirty="0"/>
+          </a:p>
+        </p:txBody>
+      </p:sp>
+      <p:sp>
+        <p:nvSpPr>
+          <p:cNvPr id="34" name="Text 32"/>
+          <p:cNvSpPr txBox="1"/>
+          <p:nvPr/>
+        </p:nvSpPr>
+        <p:spPr>
+          <a:xfrm>
+            <a:off x="640080" y="5715000"/>
             <a:ext cx="10881360" cy="548640"/>
           </a:xfrm>
           <a:prstGeom prst="rect">
@@ -3288,7 +4000,7 @@
                 <a:ea typeface="Calibri" pitchFamily="34" charset="-122"/>
                 <a:cs typeface="Calibri" pitchFamily="34" charset="-120"/>
               </a:rPr>
-              <a:t>Open source under Apache-2.0. Runs on CISA's public data with no tenant access required, so any institution can evaluate it before trusting it with their own.</a:t>
+              <a:t>Roughly a 5,000x return. Across Virginia's 326 public institutions on the quarterly cycle SEC530 already requires: 26,000–90,000 analyst hours a year returned to actual security work.</a:t>
             </a:r>
             <a:endParaRPr lang="en-US" sz="1350" dirty="0"/>
           </a:p>

--- a/docs/presentation.pptx
+++ b/docs/presentation.pptx
@@ -1825,7 +1825,7 @@
           <a:p>
             <a:r>
               <a:rPr lang="en-US" dirty="0"/>
-              <a:t>We report the miss as well as the score. The eval found a bug we introduced, we fixed the cause rather than the test, and both changes are in the commit history.</a:t>
+              <a:t>This is the beat that converts restraint into measured superiority. We are not claiming the model is dangerous - we are showing what the obvious implementation actually does, with the same model and the same questions.</a:t>
             </a:r>
             <a:endParaRPr lang="en-US" dirty="0"/>
           </a:p>
@@ -11381,7 +11381,7 @@
                 <a:ea typeface="Cambria" pitchFamily="34" charset="-122"/>
                 <a:cs typeface="Cambria" pitchFamily="34" charset="-120"/>
               </a:rPr>
-              <a:t>Evaluation against a golden set</a:t>
+              <a:t>We tested our architecture against the obvious one</a:t>
             </a:r>
             <a:endParaRPr lang="en-US" sz="3400" dirty="0"/>
           </a:p>
@@ -11389,262 +11389,138 @@
       </p:sp>
       <p:sp>
         <p:nvSpPr>
-          <p:cNvPr id="4" name="Shape 2"/>
+          <p:cNvPr id="4" name="Text 2"/>
+          <p:cNvSpPr txBox="1"/>
+          <p:nvPr/>
+        </p:nvSpPr>
+        <p:spPr>
+          <a:xfrm>
+            <a:off x="640080" y="1298448"/>
+            <a:ext cx="10881360" cy="548640"/>
+          </a:xfrm>
+          <a:prstGeom prst="rect">
+            <a:avLst/>
+          </a:prstGeom>
+          <a:noFill/>
+          <a:ln/>
+        </p:spPr>
+        <p:txBody>
+          <a:bodyPr wrap="square" lIns="0" tIns="0" rIns="0" bIns="0" rtlCol="0" anchor="ctr"/>
+          <a:lstStyle/>
+          <a:p>
+            <a:pPr indent="0" marL="0">
+              <a:lnSpc>
+                <a:spcPts val="2000"/>
+              </a:lnSpc>
+              <a:buNone/>
+            </a:pPr>
+            <a:r>
+              <a:rPr lang="en-US" sz="1400" dirty="0">
+                <a:solidFill>
+                  <a:srgbClr val="10212F"/>
+                </a:solidFill>
+                <a:latin typeface="Calibri" pitchFamily="34" charset="0"/>
+                <a:ea typeface="Calibri" pitchFamily="34" charset="-122"/>
+                <a:cs typeface="Calibri" pitchFamily="34" charset="-120"/>
+              </a:rPr>
+              <a:t>Same 15 questions. Same model. Same grader. The only variable: one arm gets tools over validated OSCAL, the other gets the raw scanner output dumped into context.</a:t>
+            </a:r>
+            <a:endParaRPr lang="en-US" sz="1400" dirty="0"/>
+          </a:p>
+        </p:txBody>
+      </p:sp>
+      <p:sp>
+        <p:nvSpPr>
+          <p:cNvPr id="5" name="Text 3"/>
+          <p:cNvSpPr txBox="1"/>
+          <p:nvPr/>
+        </p:nvSpPr>
+        <p:spPr>
+          <a:xfrm>
+            <a:off x="6675120" y="1965960"/>
+            <a:ext cx="2194560" cy="365760"/>
+          </a:xfrm>
+          <a:prstGeom prst="rect">
+            <a:avLst/>
+          </a:prstGeom>
+          <a:noFill/>
+          <a:ln/>
+        </p:spPr>
+        <p:txBody>
+          <a:bodyPr wrap="square" lIns="0" tIns="0" rIns="0" bIns="0" rtlCol="0" anchor="ctr"/>
+          <a:lstStyle/>
+          <a:p>
+            <a:pPr algn="ctr" indent="0" marL="0">
+              <a:buNone/>
+            </a:pPr>
+            <a:r>
+              <a:rPr lang="en-US" sz="1150" b="1" spc="100" kern="0" dirty="0">
+                <a:solidFill>
+                  <a:srgbClr val="30A46C"/>
+                </a:solidFill>
+                <a:latin typeface="Calibri" pitchFamily="34" charset="0"/>
+                <a:ea typeface="Calibri" pitchFamily="34" charset="-122"/>
+                <a:cs typeface="Calibri" pitchFamily="34" charset="-120"/>
+              </a:rPr>
+              <a:t>GROUNDED</a:t>
+            </a:r>
+            <a:endParaRPr lang="en-US" sz="1150" dirty="0"/>
+          </a:p>
+        </p:txBody>
+      </p:sp>
+      <p:sp>
+        <p:nvSpPr>
+          <p:cNvPr id="6" name="Text 4"/>
+          <p:cNvSpPr txBox="1"/>
+          <p:nvPr/>
+        </p:nvSpPr>
+        <p:spPr>
+          <a:xfrm>
+            <a:off x="9052560" y="1965960"/>
+            <a:ext cx="2468880" cy="365760"/>
+          </a:xfrm>
+          <a:prstGeom prst="rect">
+            <a:avLst/>
+          </a:prstGeom>
+          <a:noFill/>
+          <a:ln/>
+        </p:spPr>
+        <p:txBody>
+          <a:bodyPr wrap="square" lIns="0" tIns="0" rIns="0" bIns="0" rtlCol="0" anchor="ctr"/>
+          <a:lstStyle/>
+          <a:p>
+            <a:pPr algn="ctr" indent="0" marL="0">
+              <a:buNone/>
+            </a:pPr>
+            <a:r>
+              <a:rPr lang="en-US" sz="1150" b="1" spc="100" kern="0" dirty="0">
+                <a:solidFill>
+                  <a:srgbClr val="E5484D"/>
+                </a:solidFill>
+                <a:latin typeface="Calibri" pitchFamily="34" charset="0"/>
+                <a:ea typeface="Calibri" pitchFamily="34" charset="-122"/>
+                <a:cs typeface="Calibri" pitchFamily="34" charset="-120"/>
+              </a:rPr>
+              <a:t>UNGROUNDED</a:t>
+            </a:r>
+            <a:endParaRPr lang="en-US" sz="1150" dirty="0"/>
+          </a:p>
+        </p:txBody>
+      </p:sp>
+      <p:sp>
+        <p:nvSpPr>
+          <p:cNvPr id="7" name="Shape 5"/>
           <p:cNvSpPr/>
           <p:nvPr/>
         </p:nvSpPr>
         <p:spPr>
           <a:xfrm>
-            <a:off x="640080" y="1371600"/>
-            <a:ext cx="2651760" cy="1508760"/>
+            <a:off x="640080" y="2441448"/>
+            <a:ext cx="10881360" cy="512064"/>
           </a:xfrm>
           <a:prstGeom prst="roundRect">
             <a:avLst>
-              <a:gd name="adj" fmla="val 6061"/>
-            </a:avLst>
-          </a:prstGeom>
-          <a:solidFill>
-            <a:srgbClr val="E8F6EF"/>
-          </a:solidFill>
-          <a:ln w="12700">
-            <a:solidFill>
-              <a:srgbClr val="E8F6EF"/>
-            </a:solidFill>
-            <a:prstDash val="solid"/>
-          </a:ln>
-        </p:spPr>
-      </p:sp>
-      <p:sp>
-        <p:nvSpPr>
-          <p:cNvPr id="5" name="Text 3"/>
-          <p:cNvSpPr txBox="1"/>
-          <p:nvPr/>
-        </p:nvSpPr>
-        <p:spPr>
-          <a:xfrm>
-            <a:off x="640080" y="1536192"/>
-            <a:ext cx="2651760" cy="749808"/>
-          </a:xfrm>
-          <a:prstGeom prst="rect">
-            <a:avLst/>
-          </a:prstGeom>
-          <a:noFill/>
-          <a:ln/>
-        </p:spPr>
-        <p:txBody>
-          <a:bodyPr wrap="square" lIns="0" tIns="0" rIns="0" bIns="0" rtlCol="0" anchor="ctr"/>
-          <a:lstStyle/>
-          <a:p>
-            <a:pPr algn="ctr" indent="0" marL="0">
-              <a:buNone/>
-            </a:pPr>
-            <a:r>
-              <a:rPr lang="en-US" sz="4000" b="1" dirty="0">
-                <a:solidFill>
-                  <a:srgbClr val="30A46C"/>
-                </a:solidFill>
-                <a:latin typeface="Calibri" pitchFamily="34" charset="0"/>
-                <a:ea typeface="Calibri" pitchFamily="34" charset="-122"/>
-                <a:cs typeface="Calibri" pitchFamily="34" charset="-120"/>
-              </a:rPr>
-              <a:t>100%</a:t>
-            </a:r>
-            <a:endParaRPr lang="en-US" sz="4000" dirty="0"/>
-          </a:p>
-        </p:txBody>
-      </p:sp>
-      <p:sp>
-        <p:nvSpPr>
-          <p:cNvPr id="6" name="Text 4"/>
-          <p:cNvSpPr txBox="1"/>
-          <p:nvPr/>
-        </p:nvSpPr>
-        <p:spPr>
-          <a:xfrm>
-            <a:off x="749808" y="2286000"/>
-            <a:ext cx="2432304" cy="502920"/>
-          </a:xfrm>
-          <a:prstGeom prst="rect">
-            <a:avLst/>
-          </a:prstGeom>
-          <a:noFill/>
-          <a:ln/>
-        </p:spPr>
-        <p:txBody>
-          <a:bodyPr wrap="square" lIns="0" tIns="0" rIns="0" bIns="0" rtlCol="0" anchor="ctr"/>
-          <a:lstStyle/>
-          <a:p>
-            <a:pPr algn="ctr" indent="0" marL="0">
-              <a:buNone/>
-            </a:pPr>
-            <a:r>
-              <a:rPr lang="en-US" sz="1150" dirty="0">
-                <a:solidFill>
-                  <a:srgbClr val="5A6B7B"/>
-                </a:solidFill>
-                <a:latin typeface="Calibri" pitchFamily="34" charset="0"/>
-                <a:ea typeface="Calibri" pitchFamily="34" charset="-122"/>
-                <a:cs typeface="Calibri" pitchFamily="34" charset="-120"/>
-              </a:rPr>
-              <a:t>accuracy</a:t>
-            </a:r>
-            <a:endParaRPr lang="en-US" sz="1150" dirty="0"/>
-          </a:p>
-          <a:p>
-            <a:pPr algn="ctr" indent="0" marL="0">
-              <a:buNone/>
-            </a:pPr>
-            <a:r>
-              <a:rPr lang="en-US" sz="1150" dirty="0">
-                <a:solidFill>
-                  <a:srgbClr val="5A6B7B"/>
-                </a:solidFill>
-                <a:latin typeface="Calibri" pitchFamily="34" charset="0"/>
-                <a:ea typeface="Calibri" pitchFamily="34" charset="-122"/>
-                <a:cs typeface="Calibri" pitchFamily="34" charset="-120"/>
-              </a:rPr>
-              <a:t>15 / 15 cases</a:t>
-            </a:r>
-            <a:endParaRPr lang="en-US" sz="1150" dirty="0"/>
-          </a:p>
-        </p:txBody>
-      </p:sp>
-      <p:sp>
-        <p:nvSpPr>
-          <p:cNvPr id="7" name="Shape 5"/>
-          <p:cNvSpPr/>
-          <p:nvPr/>
-        </p:nvSpPr>
-        <p:spPr>
-          <a:xfrm>
-            <a:off x="3474720" y="1371600"/>
-            <a:ext cx="2651760" cy="1508760"/>
-          </a:xfrm>
-          <a:prstGeom prst="roundRect">
-            <a:avLst>
-              <a:gd name="adj" fmla="val 6061"/>
-            </a:avLst>
-          </a:prstGeom>
-          <a:solidFill>
-            <a:srgbClr val="E8F6EF"/>
-          </a:solidFill>
-          <a:ln w="12700">
-            <a:solidFill>
-              <a:srgbClr val="E8F6EF"/>
-            </a:solidFill>
-            <a:prstDash val="solid"/>
-          </a:ln>
-        </p:spPr>
-      </p:sp>
-      <p:sp>
-        <p:nvSpPr>
-          <p:cNvPr id="8" name="Text 6"/>
-          <p:cNvSpPr txBox="1"/>
-          <p:nvPr/>
-        </p:nvSpPr>
-        <p:spPr>
-          <a:xfrm>
-            <a:off x="3474720" y="1536192"/>
-            <a:ext cx="2651760" cy="749808"/>
-          </a:xfrm>
-          <a:prstGeom prst="rect">
-            <a:avLst/>
-          </a:prstGeom>
-          <a:noFill/>
-          <a:ln/>
-        </p:spPr>
-        <p:txBody>
-          <a:bodyPr wrap="square" lIns="0" tIns="0" rIns="0" bIns="0" rtlCol="0" anchor="ctr"/>
-          <a:lstStyle/>
-          <a:p>
-            <a:pPr algn="ctr" indent="0" marL="0">
-              <a:buNone/>
-            </a:pPr>
-            <a:r>
-              <a:rPr lang="en-US" sz="4000" b="1" dirty="0">
-                <a:solidFill>
-                  <a:srgbClr val="30A46C"/>
-                </a:solidFill>
-                <a:latin typeface="Calibri" pitchFamily="34" charset="0"/>
-                <a:ea typeface="Calibri" pitchFamily="34" charset="-122"/>
-                <a:cs typeface="Calibri" pitchFamily="34" charset="-120"/>
-              </a:rPr>
-              <a:t>100%</a:t>
-            </a:r>
-            <a:endParaRPr lang="en-US" sz="4000" dirty="0"/>
-          </a:p>
-        </p:txBody>
-      </p:sp>
-      <p:sp>
-        <p:nvSpPr>
-          <p:cNvPr id="9" name="Text 7"/>
-          <p:cNvSpPr txBox="1"/>
-          <p:nvPr/>
-        </p:nvSpPr>
-        <p:spPr>
-          <a:xfrm>
-            <a:off x="3584448" y="2286000"/>
-            <a:ext cx="2432304" cy="502920"/>
-          </a:xfrm>
-          <a:prstGeom prst="rect">
-            <a:avLst/>
-          </a:prstGeom>
-          <a:noFill/>
-          <a:ln/>
-        </p:spPr>
-        <p:txBody>
-          <a:bodyPr wrap="square" lIns="0" tIns="0" rIns="0" bIns="0" rtlCol="0" anchor="ctr"/>
-          <a:lstStyle/>
-          <a:p>
-            <a:pPr algn="ctr" indent="0" marL="0">
-              <a:buNone/>
-            </a:pPr>
-            <a:r>
-              <a:rPr lang="en-US" sz="1150" dirty="0">
-                <a:solidFill>
-                  <a:srgbClr val="5A6B7B"/>
-                </a:solidFill>
-                <a:latin typeface="Calibri" pitchFamily="34" charset="0"/>
-                <a:ea typeface="Calibri" pitchFamily="34" charset="-122"/>
-                <a:cs typeface="Calibri" pitchFamily="34" charset="-120"/>
-              </a:rPr>
-              <a:t>citation rate</a:t>
-            </a:r>
-            <a:endParaRPr lang="en-US" sz="1150" dirty="0"/>
-          </a:p>
-          <a:p>
-            <a:pPr algn="ctr" indent="0" marL="0">
-              <a:buNone/>
-            </a:pPr>
-            <a:r>
-              <a:rPr lang="en-US" sz="1150" dirty="0">
-                <a:solidFill>
-                  <a:srgbClr val="5A6B7B"/>
-                </a:solidFill>
-                <a:latin typeface="Calibri" pitchFamily="34" charset="0"/>
-                <a:ea typeface="Calibri" pitchFamily="34" charset="-122"/>
-                <a:cs typeface="Calibri" pitchFamily="34" charset="-120"/>
-              </a:rPr>
-              <a:t>where one is required</a:t>
-            </a:r>
-            <a:endParaRPr lang="en-US" sz="1150" dirty="0"/>
-          </a:p>
-        </p:txBody>
-      </p:sp>
-      <p:sp>
-        <p:nvSpPr>
-          <p:cNvPr id="10" name="Shape 8"/>
-          <p:cNvSpPr/>
-          <p:nvPr/>
-        </p:nvSpPr>
-        <p:spPr>
-          <a:xfrm>
-            <a:off x="6309360" y="1371600"/>
-            <a:ext cx="2651760" cy="1508760"/>
-          </a:xfrm>
-          <a:prstGeom prst="roundRect">
-            <a:avLst>
-              <a:gd name="adj" fmla="val 6061"/>
+              <a:gd name="adj" fmla="val 8929"/>
             </a:avLst>
           </a:prstGeom>
           <a:solidFill>
@@ -11652,7 +11528,7 @@
           </a:solidFill>
           <a:ln w="12700">
             <a:solidFill>
-              <a:srgbClr val="F4F7F9"/>
+              <a:srgbClr val="E2E8EE"/>
             </a:solidFill>
             <a:prstDash val="solid"/>
           </a:ln>
@@ -11660,14 +11536,53 @@
       </p:sp>
       <p:sp>
         <p:nvSpPr>
-          <p:cNvPr id="11" name="Text 9"/>
-          <p:cNvSpPr txBox="1"/>
-          <p:nvPr/>
-        </p:nvSpPr>
-        <p:spPr>
-          <a:xfrm>
-            <a:off x="6309360" y="1536192"/>
-            <a:ext cx="2651760" cy="749808"/>
+          <p:cNvPr id="8" name="Text 6"/>
+          <p:cNvSpPr txBox="1"/>
+          <p:nvPr/>
+        </p:nvSpPr>
+        <p:spPr>
+          <a:xfrm>
+            <a:off x="914400" y="2551176"/>
+            <a:ext cx="5577840" cy="329184"/>
+          </a:xfrm>
+          <a:prstGeom prst="rect">
+            <a:avLst/>
+          </a:prstGeom>
+          <a:noFill/>
+          <a:ln/>
+        </p:spPr>
+        <p:txBody>
+          <a:bodyPr wrap="square" lIns="0" tIns="0" rIns="0" bIns="0" rtlCol="0" anchor="ctr"/>
+          <a:lstStyle/>
+          <a:p>
+            <a:pPr indent="0" marL="0">
+              <a:buNone/>
+            </a:pPr>
+            <a:r>
+              <a:rPr lang="en-US" sz="1300" dirty="0">
+                <a:solidFill>
+                  <a:srgbClr val="10212F"/>
+                </a:solidFill>
+                <a:latin typeface="Calibri" pitchFamily="34" charset="0"/>
+                <a:ea typeface="Calibri" pitchFamily="34" charset="-122"/>
+                <a:cs typeface="Calibri" pitchFamily="34" charset="-120"/>
+              </a:rPr>
+              <a:t>Pass rate</a:t>
+            </a:r>
+            <a:endParaRPr lang="en-US" sz="1300" dirty="0"/>
+          </a:p>
+        </p:txBody>
+      </p:sp>
+      <p:sp>
+        <p:nvSpPr>
+          <p:cNvPr id="9" name="Text 7"/>
+          <p:cNvSpPr txBox="1"/>
+          <p:nvPr/>
+        </p:nvSpPr>
+        <p:spPr>
+          <a:xfrm>
+            <a:off x="6675120" y="2514600"/>
+            <a:ext cx="2194560" cy="384048"/>
           </a:xfrm>
           <a:prstGeom prst="rect">
             <a:avLst/>
@@ -11683,30 +11598,30 @@
               <a:buNone/>
             </a:pPr>
             <a:r>
-              <a:rPr lang="en-US" sz="4000" b="1" dirty="0">
-                <a:solidFill>
-                  <a:srgbClr val="10212F"/>
-                </a:solidFill>
-                <a:latin typeface="Calibri" pitchFamily="34" charset="0"/>
-                <a:ea typeface="Calibri" pitchFamily="34" charset="-122"/>
-                <a:cs typeface="Calibri" pitchFamily="34" charset="-120"/>
-              </a:rPr>
-              <a:t>9.9s</a:t>
-            </a:r>
-            <a:endParaRPr lang="en-US" sz="4000" dirty="0"/>
-          </a:p>
-        </p:txBody>
-      </p:sp>
-      <p:sp>
-        <p:nvSpPr>
-          <p:cNvPr id="12" name="Text 10"/>
-          <p:cNvSpPr txBox="1"/>
-          <p:nvPr/>
-        </p:nvSpPr>
-        <p:spPr>
-          <a:xfrm>
-            <a:off x="6419088" y="2286000"/>
-            <a:ext cx="2432304" cy="502920"/>
+              <a:rPr lang="en-US" sz="1700" b="1" dirty="0">
+                <a:solidFill>
+                  <a:srgbClr val="30A46C"/>
+                </a:solidFill>
+                <a:latin typeface="Calibri" pitchFamily="34" charset="0"/>
+                <a:ea typeface="Calibri" pitchFamily="34" charset="-122"/>
+                <a:cs typeface="Calibri" pitchFamily="34" charset="-120"/>
+              </a:rPr>
+              <a:t>100%</a:t>
+            </a:r>
+            <a:endParaRPr lang="en-US" sz="1700" dirty="0"/>
+          </a:p>
+        </p:txBody>
+      </p:sp>
+      <p:sp>
+        <p:nvSpPr>
+          <p:cNvPr id="10" name="Text 8"/>
+          <p:cNvSpPr txBox="1"/>
+          <p:nvPr/>
+        </p:nvSpPr>
+        <p:spPr>
+          <a:xfrm>
+            <a:off x="9052560" y="2514600"/>
+            <a:ext cx="2468880" cy="384048"/>
           </a:xfrm>
           <a:prstGeom prst="rect">
             <a:avLst/>
@@ -11722,51 +11637,178 @@
               <a:buNone/>
             </a:pPr>
             <a:r>
-              <a:rPr lang="en-US" sz="1150" dirty="0">
-                <a:solidFill>
-                  <a:srgbClr val="5A6B7B"/>
-                </a:solidFill>
-                <a:latin typeface="Calibri" pitchFamily="34" charset="0"/>
-                <a:ea typeface="Calibri" pitchFamily="34" charset="-122"/>
-                <a:cs typeface="Calibri" pitchFamily="34" charset="-120"/>
-              </a:rPr>
-              <a:t>median latency</a:t>
-            </a:r>
-            <a:endParaRPr lang="en-US" sz="1150" dirty="0"/>
-          </a:p>
-          <a:p>
-            <a:pPr algn="ctr" indent="0" marL="0">
-              <a:buNone/>
-            </a:pPr>
-            <a:r>
-              <a:rPr lang="en-US" sz="1150" dirty="0">
-                <a:solidFill>
-                  <a:srgbClr val="5A6B7B"/>
-                </a:solidFill>
-                <a:latin typeface="Calibri" pitchFamily="34" charset="0"/>
-                <a:ea typeface="Calibri" pitchFamily="34" charset="-122"/>
-                <a:cs typeface="Calibri" pitchFamily="34" charset="-120"/>
-              </a:rPr>
-              <a:t>p95 19.4s</a:t>
-            </a:r>
-            <a:endParaRPr lang="en-US" sz="1150" dirty="0"/>
-          </a:p>
-        </p:txBody>
-      </p:sp>
-      <p:sp>
-        <p:nvSpPr>
-          <p:cNvPr id="13" name="Shape 11"/>
+              <a:rPr lang="en-US" sz="1700" b="1" dirty="0">
+                <a:solidFill>
+                  <a:srgbClr val="E5484D"/>
+                </a:solidFill>
+                <a:latin typeface="Calibri" pitchFamily="34" charset="0"/>
+                <a:ea typeface="Calibri" pitchFamily="34" charset="-122"/>
+                <a:cs typeface="Calibri" pitchFamily="34" charset="-120"/>
+              </a:rPr>
+              <a:t>80%</a:t>
+            </a:r>
+            <a:endParaRPr lang="en-US" sz="1700" dirty="0"/>
+          </a:p>
+        </p:txBody>
+      </p:sp>
+      <p:sp>
+        <p:nvSpPr>
+          <p:cNvPr id="11" name="Shape 9"/>
           <p:cNvSpPr/>
           <p:nvPr/>
         </p:nvSpPr>
         <p:spPr>
           <a:xfrm>
-            <a:off x="9144000" y="1371600"/>
-            <a:ext cx="2377440" cy="1508760"/>
+            <a:off x="640080" y="3008376"/>
+            <a:ext cx="10881360" cy="512064"/>
           </a:xfrm>
           <a:prstGeom prst="roundRect">
             <a:avLst>
-              <a:gd name="adj" fmla="val 6061"/>
+              <a:gd name="adj" fmla="val 8929"/>
+            </a:avLst>
+          </a:prstGeom>
+          <a:solidFill>
+            <a:srgbClr val="FFFFFF"/>
+          </a:solidFill>
+          <a:ln w="12700">
+            <a:solidFill>
+              <a:srgbClr val="EDF1F4"/>
+            </a:solidFill>
+            <a:prstDash val="solid"/>
+          </a:ln>
+        </p:spPr>
+      </p:sp>
+      <p:sp>
+        <p:nvSpPr>
+          <p:cNvPr id="12" name="Text 10"/>
+          <p:cNvSpPr txBox="1"/>
+          <p:nvPr/>
+        </p:nvSpPr>
+        <p:spPr>
+          <a:xfrm>
+            <a:off x="914400" y="3118104"/>
+            <a:ext cx="5577840" cy="329184"/>
+          </a:xfrm>
+          <a:prstGeom prst="rect">
+            <a:avLst/>
+          </a:prstGeom>
+          <a:noFill/>
+          <a:ln/>
+        </p:spPr>
+        <p:txBody>
+          <a:bodyPr wrap="square" lIns="0" tIns="0" rIns="0" bIns="0" rtlCol="0" anchor="ctr"/>
+          <a:lstStyle/>
+          <a:p>
+            <a:pPr indent="0" marL="0">
+              <a:buNone/>
+            </a:pPr>
+            <a:r>
+              <a:rPr lang="en-US" sz="1300" dirty="0">
+                <a:solidFill>
+                  <a:srgbClr val="10212F"/>
+                </a:solidFill>
+                <a:latin typeface="Calibri" pitchFamily="34" charset="0"/>
+                <a:ea typeface="Calibri" pitchFamily="34" charset="-122"/>
+                <a:cs typeface="Calibri" pitchFamily="34" charset="-120"/>
+              </a:rPr>
+              <a:t>Answers asserting facts never given to it</a:t>
+            </a:r>
+            <a:endParaRPr lang="en-US" sz="1300" dirty="0"/>
+          </a:p>
+        </p:txBody>
+      </p:sp>
+      <p:sp>
+        <p:nvSpPr>
+          <p:cNvPr id="13" name="Text 11"/>
+          <p:cNvSpPr txBox="1"/>
+          <p:nvPr/>
+        </p:nvSpPr>
+        <p:spPr>
+          <a:xfrm>
+            <a:off x="6675120" y="3081528"/>
+            <a:ext cx="2194560" cy="384048"/>
+          </a:xfrm>
+          <a:prstGeom prst="rect">
+            <a:avLst/>
+          </a:prstGeom>
+          <a:noFill/>
+          <a:ln/>
+        </p:spPr>
+        <p:txBody>
+          <a:bodyPr wrap="square" lIns="0" tIns="0" rIns="0" bIns="0" rtlCol="0" anchor="ctr"/>
+          <a:lstStyle/>
+          <a:p>
+            <a:pPr algn="ctr" indent="0" marL="0">
+              <a:buNone/>
+            </a:pPr>
+            <a:r>
+              <a:rPr lang="en-US" sz="1700" b="1" dirty="0">
+                <a:solidFill>
+                  <a:srgbClr val="30A46C"/>
+                </a:solidFill>
+                <a:latin typeface="Calibri" pitchFamily="34" charset="0"/>
+                <a:ea typeface="Calibri" pitchFamily="34" charset="-122"/>
+                <a:cs typeface="Calibri" pitchFamily="34" charset="-120"/>
+              </a:rPr>
+              <a:t>0</a:t>
+            </a:r>
+            <a:endParaRPr lang="en-US" sz="1700" dirty="0"/>
+          </a:p>
+        </p:txBody>
+      </p:sp>
+      <p:sp>
+        <p:nvSpPr>
+          <p:cNvPr id="14" name="Text 12"/>
+          <p:cNvSpPr txBox="1"/>
+          <p:nvPr/>
+        </p:nvSpPr>
+        <p:spPr>
+          <a:xfrm>
+            <a:off x="9052560" y="3081528"/>
+            <a:ext cx="2468880" cy="384048"/>
+          </a:xfrm>
+          <a:prstGeom prst="rect">
+            <a:avLst/>
+          </a:prstGeom>
+          <a:noFill/>
+          <a:ln/>
+        </p:spPr>
+        <p:txBody>
+          <a:bodyPr wrap="square" lIns="0" tIns="0" rIns="0" bIns="0" rtlCol="0" anchor="ctr"/>
+          <a:lstStyle/>
+          <a:p>
+            <a:pPr algn="ctr" indent="0" marL="0">
+              <a:buNone/>
+            </a:pPr>
+            <a:r>
+              <a:rPr lang="en-US" sz="1700" b="1" dirty="0">
+                <a:solidFill>
+                  <a:srgbClr val="E5484D"/>
+                </a:solidFill>
+                <a:latin typeface="Calibri" pitchFamily="34" charset="0"/>
+                <a:ea typeface="Calibri" pitchFamily="34" charset="-122"/>
+                <a:cs typeface="Calibri" pitchFamily="34" charset="-120"/>
+              </a:rPr>
+              <a:t>2</a:t>
+            </a:r>
+            <a:endParaRPr lang="en-US" sz="1700" dirty="0"/>
+          </a:p>
+        </p:txBody>
+      </p:sp>
+      <p:sp>
+        <p:nvSpPr>
+          <p:cNvPr id="15" name="Shape 13"/>
+          <p:cNvSpPr/>
+          <p:nvPr/>
+        </p:nvSpPr>
+        <p:spPr>
+          <a:xfrm>
+            <a:off x="640080" y="3575304"/>
+            <a:ext cx="10881360" cy="512064"/>
+          </a:xfrm>
+          <a:prstGeom prst="roundRect">
+            <a:avLst>
+              <a:gd name="adj" fmla="val 8929"/>
             </a:avLst>
           </a:prstGeom>
           <a:solidFill>
@@ -11774,7 +11816,7 @@
           </a:solidFill>
           <a:ln w="12700">
             <a:solidFill>
-              <a:srgbClr val="F4F7F9"/>
+              <a:srgbClr val="E2E8EE"/>
             </a:solidFill>
             <a:prstDash val="solid"/>
           </a:ln>
@@ -11782,14 +11824,53 @@
       </p:sp>
       <p:sp>
         <p:nvSpPr>
-          <p:cNvPr id="14" name="Text 12"/>
-          <p:cNvSpPr txBox="1"/>
-          <p:nvPr/>
-        </p:nvSpPr>
-        <p:spPr>
-          <a:xfrm>
-            <a:off x="9144000" y="1536192"/>
-            <a:ext cx="2377440" cy="749808"/>
+          <p:cNvPr id="16" name="Text 14"/>
+          <p:cNvSpPr txBox="1"/>
+          <p:nvPr/>
+        </p:nvSpPr>
+        <p:spPr>
+          <a:xfrm>
+            <a:off x="914400" y="3685032"/>
+            <a:ext cx="5577840" cy="329184"/>
+          </a:xfrm>
+          <a:prstGeom prst="rect">
+            <a:avLst/>
+          </a:prstGeom>
+          <a:noFill/>
+          <a:ln/>
+        </p:spPr>
+        <p:txBody>
+          <a:bodyPr wrap="square" lIns="0" tIns="0" rIns="0" bIns="0" rtlCol="0" anchor="ctr"/>
+          <a:lstStyle/>
+          <a:p>
+            <a:pPr indent="0" marL="0">
+              <a:buNone/>
+            </a:pPr>
+            <a:r>
+              <a:rPr lang="en-US" sz="1300" dirty="0">
+                <a:solidFill>
+                  <a:srgbClr val="10212F"/>
+                </a:solidFill>
+                <a:latin typeface="Calibri" pitchFamily="34" charset="0"/>
+                <a:ea typeface="Calibri" pitchFamily="34" charset="-122"/>
+                <a:cs typeface="Calibri" pitchFamily="34" charset="-120"/>
+              </a:rPr>
+              <a:t>Security identifiers invented from memory</a:t>
+            </a:r>
+            <a:endParaRPr lang="en-US" sz="1300" dirty="0"/>
+          </a:p>
+        </p:txBody>
+      </p:sp>
+      <p:sp>
+        <p:nvSpPr>
+          <p:cNvPr id="17" name="Text 15"/>
+          <p:cNvSpPr txBox="1"/>
+          <p:nvPr/>
+        </p:nvSpPr>
+        <p:spPr>
+          <a:xfrm>
+            <a:off x="6675120" y="3648456"/>
+            <a:ext cx="2194560" cy="384048"/>
           </a:xfrm>
           <a:prstGeom prst="rect">
             <a:avLst/>
@@ -11805,30 +11886,30 @@
               <a:buNone/>
             </a:pPr>
             <a:r>
-              <a:rPr lang="en-US" sz="4000" b="1" dirty="0">
-                <a:solidFill>
-                  <a:srgbClr val="10212F"/>
-                </a:solidFill>
-                <a:latin typeface="Calibri" pitchFamily="34" charset="0"/>
-                <a:ea typeface="Calibri" pitchFamily="34" charset="-122"/>
-                <a:cs typeface="Calibri" pitchFamily="34" charset="-120"/>
-              </a:rPr>
-              <a:t>59</a:t>
-            </a:r>
-            <a:endParaRPr lang="en-US" sz="4000" dirty="0"/>
-          </a:p>
-        </p:txBody>
-      </p:sp>
-      <p:sp>
-        <p:nvSpPr>
-          <p:cNvPr id="15" name="Text 13"/>
-          <p:cNvSpPr txBox="1"/>
-          <p:nvPr/>
-        </p:nvSpPr>
-        <p:spPr>
-          <a:xfrm>
-            <a:off x="9253728" y="2286000"/>
-            <a:ext cx="2157984" cy="502920"/>
+              <a:rPr lang="en-US" sz="1700" b="1" dirty="0">
+                <a:solidFill>
+                  <a:srgbClr val="30A46C"/>
+                </a:solidFill>
+                <a:latin typeface="Calibri" pitchFamily="34" charset="0"/>
+                <a:ea typeface="Calibri" pitchFamily="34" charset="-122"/>
+                <a:cs typeface="Calibri" pitchFamily="34" charset="-120"/>
+              </a:rPr>
+              <a:t>0</a:t>
+            </a:r>
+            <a:endParaRPr lang="en-US" sz="1700" dirty="0"/>
+          </a:p>
+        </p:txBody>
+      </p:sp>
+      <p:sp>
+        <p:nvSpPr>
+          <p:cNvPr id="18" name="Text 16"/>
+          <p:cNvSpPr txBox="1"/>
+          <p:nvPr/>
+        </p:nvSpPr>
+        <p:spPr>
+          <a:xfrm>
+            <a:off x="9052560" y="3648456"/>
+            <a:ext cx="2468880" cy="384048"/>
           </a:xfrm>
           <a:prstGeom prst="rect">
             <a:avLst/>
@@ -11844,183 +11925,42 @@
               <a:buNone/>
             </a:pPr>
             <a:r>
-              <a:rPr lang="en-US" sz="1150" dirty="0">
-                <a:solidFill>
-                  <a:srgbClr val="5A6B7B"/>
-                </a:solidFill>
-                <a:latin typeface="Calibri" pitchFamily="34" charset="0"/>
-                <a:ea typeface="Calibri" pitchFamily="34" charset="-122"/>
-                <a:cs typeface="Calibri" pitchFamily="34" charset="-120"/>
-              </a:rPr>
-              <a:t>unit tests</a:t>
-            </a:r>
-            <a:endParaRPr lang="en-US" sz="1150" dirty="0"/>
-          </a:p>
-          <a:p>
-            <a:pPr algn="ctr" indent="0" marL="0">
-              <a:buNone/>
-            </a:pPr>
-            <a:r>
-              <a:rPr lang="en-US" sz="1150" dirty="0">
-                <a:solidFill>
-                  <a:srgbClr val="5A6B7B"/>
-                </a:solidFill>
-                <a:latin typeface="Calibri" pitchFamily="34" charset="0"/>
-                <a:ea typeface="Calibri" pitchFamily="34" charset="-122"/>
-                <a:cs typeface="Calibri" pitchFamily="34" charset="-120"/>
-              </a:rPr>
-              <a:t>all passing</a:t>
-            </a:r>
-            <a:endParaRPr lang="en-US" sz="1150" dirty="0"/>
-          </a:p>
-        </p:txBody>
-      </p:sp>
-      <p:sp>
-        <p:nvSpPr>
-          <p:cNvPr id="16" name="Text 14"/>
-          <p:cNvSpPr txBox="1"/>
-          <p:nvPr/>
-        </p:nvSpPr>
-        <p:spPr>
-          <a:xfrm>
-            <a:off x="640080" y="3108960"/>
-            <a:ext cx="5486400" cy="320040"/>
-          </a:xfrm>
-          <a:prstGeom prst="rect">
-            <a:avLst/>
-          </a:prstGeom>
-          <a:noFill/>
-          <a:ln/>
-        </p:spPr>
-        <p:txBody>
-          <a:bodyPr wrap="square" lIns="0" tIns="0" rIns="0" bIns="0" rtlCol="0" anchor="ctr"/>
-          <a:lstStyle/>
-          <a:p>
-            <a:pPr indent="0" marL="0">
-              <a:buNone/>
-            </a:pPr>
-            <a:r>
-              <a:rPr lang="en-US" sz="1500" b="1" dirty="0">
-                <a:solidFill>
-                  <a:srgbClr val="10212F"/>
-                </a:solidFill>
-                <a:latin typeface="Calibri" pitchFamily="34" charset="0"/>
-                <a:ea typeface="Calibri" pitchFamily="34" charset="-122"/>
-                <a:cs typeface="Calibri" pitchFamily="34" charset="-120"/>
-              </a:rPr>
-              <a:t>The probes that matter most</a:t>
-            </a:r>
-            <a:endParaRPr lang="en-US" sz="1500" dirty="0"/>
-          </a:p>
-        </p:txBody>
-      </p:sp>
-      <p:sp>
-        <p:nvSpPr>
-          <p:cNvPr id="17" name="Text 15"/>
-          <p:cNvSpPr txBox="1"/>
-          <p:nvPr/>
-        </p:nvSpPr>
-        <p:spPr>
-          <a:xfrm>
-            <a:off x="822960" y="3493008"/>
-            <a:ext cx="5394960" cy="1371600"/>
-          </a:xfrm>
-          <a:prstGeom prst="rect">
-            <a:avLst/>
-          </a:prstGeom>
-          <a:noFill/>
-          <a:ln/>
-        </p:spPr>
-        <p:txBody>
-          <a:bodyPr wrap="square" lIns="0" tIns="0" rIns="0" bIns="0" rtlCol="0" anchor="ctr"/>
-          <a:lstStyle/>
-          <a:p>
-            <a:pPr marL="342900" indent="-342900">
-              <a:spcAft>
-                <a:spcPts val="700"/>
-              </a:spcAft>
-              <a:buSzPct val="100000"/>
-              <a:buChar char="•"/>
-            </a:pPr>
-            <a:r>
-              <a:rPr lang="en-US" sz="1250" dirty="0">
-                <a:solidFill>
-                  <a:srgbClr val="10212F"/>
-                </a:solidFill>
-                <a:latin typeface="Calibri" pitchFamily="34" charset="0"/>
-                <a:ea typeface="Calibri" pitchFamily="34" charset="-122"/>
-                <a:cs typeface="Calibri" pitchFamily="34" charset="-120"/>
-              </a:rPr>
-              <a:t>Asked what MS.FAKE.9.9v9 requires → refuses, rather than inventing a control</a:t>
-            </a:r>
-            <a:endParaRPr lang="en-US" sz="1250" dirty="0"/>
-          </a:p>
-          <a:p>
-            <a:pPr marL="342900" indent="-342900">
-              <a:spcAft>
-                <a:spcPts val="700"/>
-              </a:spcAft>
-              <a:buSzPct val="100000"/>
-              <a:buChar char="•"/>
-            </a:pPr>
-            <a:r>
-              <a:rPr lang="en-US" sz="1250" dirty="0">
-                <a:solidFill>
-                  <a:srgbClr val="10212F"/>
-                </a:solidFill>
-                <a:latin typeface="Calibri" pitchFamily="34" charset="0"/>
-                <a:ea typeface="Calibri" pitchFamily="34" charset="-122"/>
-                <a:cs typeface="Calibri" pitchFamily="34" charset="-120"/>
-              </a:rPr>
-              <a:t>Asked to map an unmapped policy → reports it as unmapped, not a guess</a:t>
-            </a:r>
-            <a:endParaRPr lang="en-US" sz="1250" dirty="0"/>
-          </a:p>
-          <a:p>
-            <a:pPr marL="342900" indent="-342900">
-              <a:spcAft>
-                <a:spcPts val="700"/>
-              </a:spcAft>
-              <a:buSzPct val="100000"/>
-              <a:buChar char="•"/>
-            </a:pPr>
-            <a:r>
-              <a:rPr lang="en-US" sz="1250" dirty="0">
-                <a:solidFill>
-                  <a:srgbClr val="10212F"/>
-                </a:solidFill>
-                <a:latin typeface="Calibri" pitchFamily="34" charset="0"/>
-                <a:ea typeface="Calibri" pitchFamily="34" charset="-122"/>
-                <a:cs typeface="Calibri" pitchFamily="34" charset="-120"/>
-              </a:rPr>
-              <a:t>Returns CISA's CM-7 and never the IA-2(1) other tooling gets wrong</a:t>
-            </a:r>
-            <a:endParaRPr lang="en-US" sz="1250" dirty="0"/>
-          </a:p>
-        </p:txBody>
-      </p:sp>
-      <p:sp>
-        <p:nvSpPr>
-          <p:cNvPr id="18" name="Shape 16"/>
+              <a:rPr lang="en-US" sz="1700" b="1" dirty="0">
+                <a:solidFill>
+                  <a:srgbClr val="E5484D"/>
+                </a:solidFill>
+                <a:latin typeface="Calibri" pitchFamily="34" charset="0"/>
+                <a:ea typeface="Calibri" pitchFamily="34" charset="-122"/>
+                <a:cs typeface="Calibri" pitchFamily="34" charset="-120"/>
+              </a:rPr>
+              <a:t>6</a:t>
+            </a:r>
+            <a:endParaRPr lang="en-US" sz="1700" dirty="0"/>
+          </a:p>
+        </p:txBody>
+      </p:sp>
+      <p:sp>
+        <p:nvSpPr>
+          <p:cNvPr id="19" name="Shape 17"/>
           <p:cNvSpPr/>
           <p:nvPr/>
         </p:nvSpPr>
         <p:spPr>
           <a:xfrm>
-            <a:off x="6492240" y="3108960"/>
-            <a:ext cx="5029200" cy="2377440"/>
+            <a:off x="640080" y="4315968"/>
+            <a:ext cx="10881360" cy="1600200"/>
           </a:xfrm>
           <a:prstGeom prst="roundRect">
             <a:avLst>
-              <a:gd name="adj" fmla="val 3846"/>
+              <a:gd name="adj" fmla="val 5714"/>
             </a:avLst>
           </a:prstGeom>
           <a:solidFill>
-            <a:srgbClr val="FFF6E0"/>
+            <a:srgbClr val="FDECEC"/>
           </a:solidFill>
           <a:ln w="12700">
             <a:solidFill>
-              <a:srgbClr val="FFE2A8"/>
+              <a:srgbClr val="F7C9C9"/>
             </a:solidFill>
             <a:prstDash val="solid"/>
           </a:ln>
@@ -12028,14 +11968,134 @@
       </p:sp>
       <p:sp>
         <p:nvSpPr>
-          <p:cNvPr id="19" name="Text 17"/>
-          <p:cNvSpPr txBox="1"/>
-          <p:nvPr/>
-        </p:nvSpPr>
-        <p:spPr>
-          <a:xfrm>
-            <a:off x="6720840" y="3273552"/>
-            <a:ext cx="4572000" cy="320040"/>
+          <p:cNvPr id="20" name="Text 18"/>
+          <p:cNvSpPr txBox="1"/>
+          <p:nvPr/>
+        </p:nvSpPr>
+        <p:spPr>
+          <a:xfrm>
+            <a:off x="914400" y="4480560"/>
+            <a:ext cx="10332720" cy="320040"/>
+          </a:xfrm>
+          <a:prstGeom prst="rect">
+            <a:avLst/>
+          </a:prstGeom>
+          <a:noFill/>
+          <a:ln/>
+        </p:spPr>
+        <p:txBody>
+          <a:bodyPr wrap="square" lIns="0" tIns="0" rIns="0" bIns="0" rtlCol="0" anchor="ctr"/>
+          <a:lstStyle/>
+          <a:p>
+            <a:pPr indent="0" marL="0">
+              <a:buNone/>
+            </a:pPr>
+            <a:r>
+              <a:rPr lang="en-US" sz="1400" b="1" dirty="0">
+                <a:solidFill>
+                  <a:srgbClr val="8A2A2A"/>
+                </a:solidFill>
+                <a:latin typeface="Calibri" pitchFamily="34" charset="0"/>
+                <a:ea typeface="Calibri" pitchFamily="34" charset="-122"/>
+                <a:cs typeface="Calibri" pitchFamily="34" charset="-120"/>
+              </a:rPr>
+              <a:t>The pass rate is not the story. Fabrication is.</a:t>
+            </a:r>
+            <a:endParaRPr lang="en-US" sz="1400" dirty="0"/>
+          </a:p>
+        </p:txBody>
+      </p:sp>
+      <p:sp>
+        <p:nvSpPr>
+          <p:cNvPr id="21" name="Text 19"/>
+          <p:cNvSpPr txBox="1"/>
+          <p:nvPr/>
+        </p:nvSpPr>
+        <p:spPr>
+          <a:xfrm>
+            <a:off x="914400" y="4818888"/>
+            <a:ext cx="10332720" cy="777240"/>
+          </a:xfrm>
+          <a:prstGeom prst="rect">
+            <a:avLst/>
+          </a:prstGeom>
+          <a:noFill/>
+          <a:ln/>
+        </p:spPr>
+        <p:txBody>
+          <a:bodyPr wrap="square" lIns="0" tIns="0" rIns="0" bIns="0" rtlCol="0" anchor="ctr"/>
+          <a:lstStyle/>
+          <a:p>
+            <a:pPr indent="0" marL="0">
+              <a:lnSpc>
+                <a:spcPts val="1800"/>
+              </a:lnSpc>
+              <a:buNone/>
+            </a:pPr>
+            <a:r>
+              <a:rPr lang="en-US" sz="1250" dirty="0">
+                <a:solidFill>
+                  <a:srgbClr val="10212F"/>
+                </a:solidFill>
+                <a:latin typeface="Calibri" pitchFamily="34" charset="0"/>
+                <a:ea typeface="Calibri" pitchFamily="34" charset="-122"/>
+                <a:cs typeface="Calibri" pitchFamily="34" charset="-120"/>
+              </a:rPr>
+              <a:t>The scanner file contains no NIST control IDs and no MITRE technique IDs — those come from CISA's baselines, which we integrate. Asked anyway, the ungrounded model did not decline. It asserted six identifiers from memory, and named T1110.003 “Credential Stuffing” when MITRE and CISA both say “Password Spraying”.</a:t>
+            </a:r>
+            <a:endParaRPr lang="en-US" sz="1250" dirty="0"/>
+          </a:p>
+        </p:txBody>
+      </p:sp>
+      <p:sp>
+        <p:nvSpPr>
+          <p:cNvPr id="22" name="Text 20"/>
+          <p:cNvSpPr txBox="1"/>
+          <p:nvPr/>
+        </p:nvSpPr>
+        <p:spPr>
+          <a:xfrm>
+            <a:off x="914400" y="5577840"/>
+            <a:ext cx="10332720" cy="274320"/>
+          </a:xfrm>
+          <a:prstGeom prst="rect">
+            <a:avLst/>
+          </a:prstGeom>
+          <a:noFill/>
+          <a:ln/>
+        </p:spPr>
+        <p:txBody>
+          <a:bodyPr wrap="square" lIns="0" tIns="0" rIns="0" bIns="0" rtlCol="0" anchor="ctr"/>
+          <a:lstStyle/>
+          <a:p>
+            <a:pPr indent="0" marL="0">
+              <a:buNone/>
+            </a:pPr>
+            <a:r>
+              <a:rPr lang="en-US" sz="1250" b="1" i="1" dirty="0">
+                <a:solidFill>
+                  <a:srgbClr val="8A2A2A"/>
+                </a:solidFill>
+                <a:latin typeface="Calibri" pitchFamily="34" charset="0"/>
+                <a:ea typeface="Calibri" pitchFamily="34" charset="-122"/>
+                <a:cs typeface="Calibri" pitchFamily="34" charset="-120"/>
+              </a:rPr>
+              <a:t>Fluent, confident, and wrong in a way an analyst would have acted on.</a:t>
+            </a:r>
+            <a:endParaRPr lang="en-US" sz="1250" dirty="0"/>
+          </a:p>
+        </p:txBody>
+      </p:sp>
+      <p:sp>
+        <p:nvSpPr>
+          <p:cNvPr id="23" name="Text 21"/>
+          <p:cNvSpPr txBox="1"/>
+          <p:nvPr/>
+        </p:nvSpPr>
+        <p:spPr>
+          <a:xfrm>
+            <a:off x="640080" y="6099048"/>
+            <a:ext cx="10881360" cy="365760"/>
           </a:xfrm>
           <a:prstGeom prst="rect">
             <a:avLst/>
@@ -12053,154 +12113,15 @@
             <a:r>
               <a:rPr lang="en-US" sz="1350" b="1" dirty="0">
                 <a:solidFill>
-                  <a:srgbClr val="8A5A00"/>
-                </a:solidFill>
-                <a:latin typeface="Calibri" pitchFamily="34" charset="0"/>
-                <a:ea typeface="Calibri" pitchFamily="34" charset="-122"/>
-                <a:cs typeface="Calibri" pitchFamily="34" charset="-120"/>
-              </a:rPr>
-              <a:t>The evaluation earned its place</a:t>
+                  <a:srgbClr val="14304F"/>
+                </a:solidFill>
+                <a:latin typeface="Calibri" pitchFamily="34" charset="0"/>
+                <a:ea typeface="Calibri" pitchFamily="34" charset="-122"/>
+                <a:cs typeface="Calibri" pitchFamily="34" charset="-120"/>
+              </a:rPr>
+              <a:t>Our agents asserted zero facts they were not given — enforced by a test that fails the build if it ever changes.</a:t>
             </a:r>
             <a:endParaRPr lang="en-US" sz="1350" dirty="0"/>
-          </a:p>
-        </p:txBody>
-      </p:sp>
-      <p:sp>
-        <p:nvSpPr>
-          <p:cNvPr id="20" name="Text 18"/>
-          <p:cNvSpPr txBox="1"/>
-          <p:nvPr/>
-        </p:nvSpPr>
-        <p:spPr>
-          <a:xfrm>
-            <a:off x="6720840" y="3639312"/>
-            <a:ext cx="4572000" cy="1737360"/>
-          </a:xfrm>
-          <a:prstGeom prst="rect">
-            <a:avLst/>
-          </a:prstGeom>
-          <a:noFill/>
-          <a:ln/>
-        </p:spPr>
-        <p:txBody>
-          <a:bodyPr wrap="square" lIns="0" tIns="0" rIns="0" bIns="0" rtlCol="0" anchor="ctr"/>
-          <a:lstStyle/>
-          <a:p>
-            <a:pPr indent="0" marL="0">
-              <a:lnSpc>
-                <a:spcPts val="1600"/>
-              </a:lnSpc>
-              <a:buNone/>
-            </a:pPr>
-            <a:r>
-              <a:rPr lang="en-US" sz="1150" dirty="0">
-                <a:solidFill>
-                  <a:srgbClr val="10212F"/>
-                </a:solidFill>
-                <a:latin typeface="Calibri" pitchFamily="34" charset="0"/>
-                <a:ea typeface="Calibri" pitchFamily="34" charset="-122"/>
-                <a:cs typeface="Calibri" pitchFamily="34" charset="-120"/>
-              </a:rPr>
-              <a:t>It caught a real defect in our own prompt design. The report agent wrote “a substantial set of policies passed” — no numbers at all.</a:t>
-            </a:r>
-            <a:endParaRPr lang="en-US" sz="1150" dirty="0"/>
-          </a:p>
-          <a:p>
-            <a:pPr indent="0" marL="0">
-              <a:lnSpc>
-                <a:spcPts val="1600"/>
-              </a:lnSpc>
-              <a:buNone/>
-            </a:pPr>
-            <a:endParaRPr lang="en-US" sz="1150" dirty="0"/>
-          </a:p>
-          <a:p>
-            <a:pPr indent="0" marL="0">
-              <a:lnSpc>
-                <a:spcPts val="1600"/>
-              </a:lnSpc>
-              <a:buNone/>
-            </a:pPr>
-            <a:r>
-              <a:rPr lang="en-US" sz="1150" dirty="0">
-                <a:solidFill>
-                  <a:srgbClr val="10212F"/>
-                </a:solidFill>
-                <a:latin typeface="Calibri" pitchFamily="34" charset="0"/>
-                <a:ea typeface="Calibri" pitchFamily="34" charset="-122"/>
-                <a:cs typeface="Calibri" pitchFamily="34" charset="-120"/>
-              </a:rPr>
-              <a:t>Root cause: our own grounding rule. Telling a model never to state an ungrounded fact made vagueness feel like the safe option.</a:t>
-            </a:r>
-            <a:endParaRPr lang="en-US" sz="1150" dirty="0"/>
-          </a:p>
-          <a:p>
-            <a:pPr indent="0" marL="0">
-              <a:lnSpc>
-                <a:spcPts val="1600"/>
-              </a:lnSpc>
-              <a:buNone/>
-            </a:pPr>
-            <a:endParaRPr lang="en-US" sz="1150" dirty="0"/>
-          </a:p>
-          <a:p>
-            <a:pPr indent="0" marL="0">
-              <a:lnSpc>
-                <a:spcPts val="1600"/>
-              </a:lnSpc>
-              <a:buNone/>
-            </a:pPr>
-            <a:r>
-              <a:rPr lang="en-US" sz="1150" dirty="0">
-                <a:solidFill>
-                  <a:srgbClr val="10212F"/>
-                </a:solidFill>
-                <a:latin typeface="Calibri" pitchFamily="34" charset="0"/>
-                <a:ea typeface="Calibri" pitchFamily="34" charset="-122"/>
-                <a:cs typeface="Calibri" pitchFamily="34" charset="-120"/>
-              </a:rPr>
-              <a:t>Naming that failure mode explicitly moved the suite from 14/15 to 15/15.</a:t>
-            </a:r>
-            <a:endParaRPr lang="en-US" sz="1150" dirty="0"/>
-          </a:p>
-        </p:txBody>
-      </p:sp>
-      <p:sp>
-        <p:nvSpPr>
-          <p:cNvPr id="21" name="Text 19"/>
-          <p:cNvSpPr txBox="1"/>
-          <p:nvPr/>
-        </p:nvSpPr>
-        <p:spPr>
-          <a:xfrm>
-            <a:off x="640080" y="5669280"/>
-            <a:ext cx="10881360" cy="365760"/>
-          </a:xfrm>
-          <a:prstGeom prst="rect">
-            <a:avLst/>
-          </a:prstGeom>
-          <a:noFill/>
-          <a:ln/>
-        </p:spPr>
-        <p:txBody>
-          <a:bodyPr wrap="square" lIns="0" tIns="0" rIns="0" bIns="0" rtlCol="0" anchor="ctr"/>
-          <a:lstStyle/>
-          <a:p>
-            <a:pPr indent="0" marL="0">
-              <a:buNone/>
-            </a:pPr>
-            <a:r>
-              <a:rPr lang="en-US" sz="1250" i="1" dirty="0">
-                <a:solidFill>
-                  <a:srgbClr val="5A6B7B"/>
-                </a:solidFill>
-                <a:latin typeface="Calibri" pitchFamily="34" charset="0"/>
-                <a:ea typeface="Calibri" pitchFamily="34" charset="-122"/>
-                <a:cs typeface="Calibri" pitchFamily="34" charset="-120"/>
-              </a:rPr>
-              <a:t>Ground truth is derived from the generated artifacts, so the question set cannot drift away from the data it describes.</a:t>
-            </a:r>
-            <a:endParaRPr lang="en-US" sz="1250" dirty="0"/>
           </a:p>
         </p:txBody>
       </p:sp>

--- a/docs/presentation.pptx
+++ b/docs/presentation.pptx
@@ -17,9 +17,11 @@
     <p:sldId id="265" r:id="rId11"/>
     <p:sldId id="266" r:id="rId12"/>
     <p:sldId id="267" r:id="rId13"/>
+    <p:sldId id="268" r:id="rId14"/>
+    <p:sldId id="269" r:id="rId15"/>
   </p:sldIdLst>
   <p:notesMasterIdLst>
-    <p:notesMasterId r:id="rId14"/>
+    <p:notesMasterId r:id="rId16"/>
   </p:notesMasterIdLst>
   <p:sldSz cx="12192000" cy="6858000"/>
   <p:notesSz cx="6858000" cy="12192000"/>
@@ -945,7 +947,7 @@
           <a:p>
             <a:r>
               <a:rPr lang="en-US" dirty="0"/>
-              <a:t>We give a band, not a number, and every assumption is a slider in the app. Judges do not have to accept our inputs - they can change them. The measured column needs no assumption at all.</a:t>
+              <a:t>Four specialists share one grounding rule. The guardrails are architectural: agents have no access to data, only to tools that read validated documents.</a:t>
             </a:r>
             <a:endParaRPr lang="en-US" dirty="0"/>
           </a:p>
@@ -1033,7 +1035,7 @@
           <a:p>
             <a:r>
               <a:rPr lang="en-US" dirty="0"/>
-              <a:t>Feasibility is demonstrated rather than argued. Everything on this slide can be checked from the repository in a few minutes.</a:t>
+              <a:t>This is the beat that converts restraint into measured superiority. We are not claiming the model is dangerous - we are showing what the obvious implementation actually does, with the same model and the same questions.</a:t>
             </a:r>
             <a:endParaRPr lang="en-US" dirty="0"/>
           </a:p>
@@ -1121,7 +1123,7 @@
           <a:p>
             <a:r>
               <a:rPr lang="en-US" dirty="0"/>
-              <a:t>Close on the framing that makes the contribution legible: CISA built detection, we built the compliance layer that turns detection into an auditable package.</a:t>
+              <a:t>We give a band, not a number, and every assumption is a slider in the app. Judges do not have to accept our inputs - they can change them. The measured column needs no assumption at all.</a:t>
             </a:r>
             <a:endParaRPr lang="en-US" dirty="0"/>
           </a:p>
@@ -1145,6 +1147,182 @@
             <a:fld id="{F7021451-1387-4CA6-816F-3879F97B5CBC}" type="slidenum">
               <a:rPr lang="en-US"/>
               <a:t>12</a:t>
+            </a:fld>
+            <a:endParaRPr lang="en-US"/>
+          </a:p>
+        </p:txBody>
+      </p:sp>
+    </p:spTree>
+    <p:extLst>
+      <p:ext uri="{BB962C8B-B14F-4D97-AF65-F5344CB8AC3E}">
+        <p14:creationId xmlns:p14="http://schemas.microsoft.com/office/powerpoint/2010/main" val="1024086991"/>
+      </p:ext>
+    </p:extLst>
+  </p:cSld>
+  <p:clrMapOvr>
+    <a:masterClrMapping/>
+  </p:clrMapOvr>
+</p:notes>
+</file>
+
+<file path=ppt/notesSlides/notesSlide13.xml><?xml version="1.0" encoding="utf-8"?>
+<p:notes xmlns:a="http://schemas.openxmlformats.org/drawingml/2006/main" xmlns:r="http://schemas.openxmlformats.org/officeDocument/2006/relationships" xmlns:p="http://schemas.openxmlformats.org/presentationml/2006/main">
+  <p:cSld>
+    <p:spTree>
+      <p:nvGrpSpPr>
+        <p:cNvPr id="1" name=""/>
+        <p:cNvGrpSpPr/>
+        <p:nvPr/>
+      </p:nvGrpSpPr>
+      <p:grpSpPr>
+        <a:xfrm>
+          <a:off x="0" y="0"/>
+          <a:ext cx="0" cy="0"/>
+          <a:chOff x="0" y="0"/>
+          <a:chExt cx="0" cy="0"/>
+        </a:xfrm>
+      </p:grpSpPr>
+      <p:sp>
+        <p:nvSpPr>
+          <p:cNvPr id="2" name="Slide Image Placeholder 1"/>
+          <p:cNvSpPr>
+            <a:spLocks noGrp="1" noRot="1" noChangeAspect="1"/>
+          </p:cNvSpPr>
+          <p:nvPr>
+            <p:ph type="sldImg"/>
+          </p:nvPr>
+        </p:nvSpPr>
+        <p:spPr/>
+      </p:sp>
+      <p:sp>
+        <p:nvSpPr>
+          <p:cNvPr id="3" name="Notes Placeholder 2"/>
+          <p:cNvSpPr>
+            <a:spLocks noGrp="1"/>
+          </p:cNvSpPr>
+          <p:nvPr>
+            <p:ph type="body" idx="1"/>
+          </p:nvPr>
+        </p:nvSpPr>
+        <p:spPr/>
+        <p:txBody>
+          <a:bodyPr/>
+          <a:lstStyle/>
+          <a:p>
+            <a:r>
+              <a:rPr lang="en-US" dirty="0"/>
+              <a:t>Feasibility is demonstrated rather than argued. Everything on this slide can be checked from the repository in a few minutes.</a:t>
+            </a:r>
+            <a:endParaRPr lang="en-US" dirty="0"/>
+          </a:p>
+        </p:txBody>
+      </p:sp>
+      <p:sp>
+        <p:nvSpPr>
+          <p:cNvPr id="4" name="Slide Number Placeholder 3"/>
+          <p:cNvSpPr>
+            <a:spLocks noGrp="1"/>
+          </p:cNvSpPr>
+          <p:nvPr>
+            <p:ph type="sldNum" sz="quarter" idx="10"/>
+          </p:nvPr>
+        </p:nvSpPr>
+        <p:spPr/>
+        <p:txBody>
+          <a:bodyPr/>
+          <a:lstStyle/>
+          <a:p>
+            <a:fld id="{F7021451-1387-4CA6-816F-3879F97B5CBC}" type="slidenum">
+              <a:rPr lang="en-US"/>
+              <a:t>13</a:t>
+            </a:fld>
+            <a:endParaRPr lang="en-US"/>
+          </a:p>
+        </p:txBody>
+      </p:sp>
+    </p:spTree>
+    <p:extLst>
+      <p:ext uri="{BB962C8B-B14F-4D97-AF65-F5344CB8AC3E}">
+        <p14:creationId xmlns:p14="http://schemas.microsoft.com/office/powerpoint/2010/main" val="1024086991"/>
+      </p:ext>
+    </p:extLst>
+  </p:cSld>
+  <p:clrMapOvr>
+    <a:masterClrMapping/>
+  </p:clrMapOvr>
+</p:notes>
+</file>
+
+<file path=ppt/notesSlides/notesSlide14.xml><?xml version="1.0" encoding="utf-8"?>
+<p:notes xmlns:a="http://schemas.openxmlformats.org/drawingml/2006/main" xmlns:r="http://schemas.openxmlformats.org/officeDocument/2006/relationships" xmlns:p="http://schemas.openxmlformats.org/presentationml/2006/main">
+  <p:cSld>
+    <p:spTree>
+      <p:nvGrpSpPr>
+        <p:cNvPr id="1" name=""/>
+        <p:cNvGrpSpPr/>
+        <p:nvPr/>
+      </p:nvGrpSpPr>
+      <p:grpSpPr>
+        <a:xfrm>
+          <a:off x="0" y="0"/>
+          <a:ext cx="0" cy="0"/>
+          <a:chOff x="0" y="0"/>
+          <a:chExt cx="0" cy="0"/>
+        </a:xfrm>
+      </p:grpSpPr>
+      <p:sp>
+        <p:nvSpPr>
+          <p:cNvPr id="2" name="Slide Image Placeholder 1"/>
+          <p:cNvSpPr>
+            <a:spLocks noGrp="1" noRot="1" noChangeAspect="1"/>
+          </p:cNvSpPr>
+          <p:nvPr>
+            <p:ph type="sldImg"/>
+          </p:nvPr>
+        </p:nvSpPr>
+        <p:spPr/>
+      </p:sp>
+      <p:sp>
+        <p:nvSpPr>
+          <p:cNvPr id="3" name="Notes Placeholder 2"/>
+          <p:cNvSpPr>
+            <a:spLocks noGrp="1"/>
+          </p:cNvSpPr>
+          <p:nvPr>
+            <p:ph type="body" idx="1"/>
+          </p:nvPr>
+        </p:nvSpPr>
+        <p:spPr/>
+        <p:txBody>
+          <a:bodyPr/>
+          <a:lstStyle/>
+          <a:p>
+            <a:r>
+              <a:rPr lang="en-US" dirty="0"/>
+              <a:t>Close on the framing that makes the contribution legible: CISA built detection, we built the compliance layer that turns detection into an auditable package.</a:t>
+            </a:r>
+            <a:endParaRPr lang="en-US" dirty="0"/>
+          </a:p>
+        </p:txBody>
+      </p:sp>
+      <p:sp>
+        <p:nvSpPr>
+          <p:cNvPr id="4" name="Slide Number Placeholder 3"/>
+          <p:cNvSpPr>
+            <a:spLocks noGrp="1"/>
+          </p:cNvSpPr>
+          <p:nvPr>
+            <p:ph type="sldNum" sz="quarter" idx="10"/>
+          </p:nvPr>
+        </p:nvSpPr>
+        <p:spPr/>
+        <p:txBody>
+          <a:bodyPr/>
+          <a:lstStyle/>
+          <a:p>
+            <a:fld id="{F7021451-1387-4CA6-816F-3879F97B5CBC}" type="slidenum">
+              <a:rPr lang="en-US"/>
+              <a:t>14</a:t>
             </a:fld>
             <a:endParaRPr lang="en-US"/>
           </a:p>
@@ -1561,7 +1739,7 @@
           <a:p>
             <a:r>
               <a:rPr lang="en-US" dirty="0"/>
-              <a:t>This is the difference between a tool you can audit and one you have to trust. 91% deterministic, and the remaining 8 are clearly labelled as AI proposals requiring human approval.</a:t>
+              <a:t>This is the difference between a tool you can audit and one you have to trust. 97% deterministic from CISA's own published data; the remaining 3 are reported as unmapped — never inferred by a model.</a:t>
             </a:r>
             <a:endParaRPr lang="en-US" dirty="0"/>
           </a:p>
@@ -1737,7 +1915,7 @@
           <a:p>
             <a:r>
               <a:rPr lang="en-US" dirty="0"/>
-              <a:t>Four specialists share one grounding rule. The guardrails are architectural: agents have no access to data, only to tools that read validated documents.</a:t>
+              <a:t>Two audits of the compliance number itself. Left: exemptions are the denominator nobody checks, and we make them OSCAL risks with a status. Right: ranking by attack coverage genuinely disagrees with ranking by SHALL/SHOULD.</a:t>
             </a:r>
             <a:endParaRPr lang="en-US" dirty="0"/>
           </a:p>
@@ -1825,7 +2003,7 @@
           <a:p>
             <a:r>
               <a:rPr lang="en-US" dirty="0"/>
-              <a:t>This is the beat that converts restraint into measured superiority. We are not claiming the model is dangerous - we are showing what the obvious implementation actually does, with the same model and the same questions.</a:t>
+              <a:t>The contest is for Virginia, and this is the slide that earns that. A Virginia institution otherwise works this out by hand, per finding, per standard.</a:t>
             </a:r>
             <a:endParaRPr lang="en-US" dirty="0"/>
           </a:p>
@@ -2704,7 +2882,7 @@
     <p:bg>
       <p:bgPr>
         <a:solidFill>
-          <a:srgbClr val="FFFFFF"/>
+          <a:srgbClr val="0A1A2F"/>
         </a:solidFill>
       </p:bgPr>
     </p:bg>
@@ -2749,13 +2927,13 @@
             <a:r>
               <a:rPr lang="en-US" sz="1200" b="1" spc="200" kern="0" dirty="0">
                 <a:solidFill>
-                  <a:srgbClr val="00A896"/>
-                </a:solidFill>
-                <a:latin typeface="Calibri" pitchFamily="34" charset="0"/>
-                <a:ea typeface="Calibri" pitchFamily="34" charset="-122"/>
-                <a:cs typeface="Calibri" pitchFamily="34" charset="-120"/>
-              </a:rPr>
-              <a:t>ECONOMIC VALUE &amp; SOCIETAL IMPACT</a:t>
+                  <a:srgbClr val="3FC1C9"/>
+                </a:solidFill>
+                <a:latin typeface="Calibri" pitchFamily="34" charset="0"/>
+                <a:ea typeface="Calibri" pitchFamily="34" charset="-122"/>
+                <a:cs typeface="Calibri" pitchFamily="34" charset="-120"/>
+              </a:rPr>
+              <a:t>MICROSOFT FOUNDRY</a:t>
             </a:r>
             <a:endParaRPr lang="en-US" sz="1200" dirty="0"/>
           </a:p>
@@ -2788,13 +2966,13 @@
             <a:r>
               <a:rPr lang="en-US" sz="3400" b="1" dirty="0">
                 <a:solidFill>
-                  <a:srgbClr val="10212F"/>
+                  <a:srgbClr val="FFFFFF"/>
                 </a:solidFill>
                 <a:latin typeface="Cambria" pitchFamily="34" charset="0"/>
                 <a:ea typeface="Cambria" pitchFamily="34" charset="-122"/>
                 <a:cs typeface="Cambria" pitchFamily="34" charset="-120"/>
               </a:rPr>
-              <a:t>Measured, not asserted</a:t>
+              <a:t>An AI layer that cannot fabricate</a:t>
             </a:r>
             <a:endParaRPr lang="en-US" sz="3400" dirty="0"/>
           </a:p>
@@ -2808,62 +2986,98 @@
         </p:nvSpPr>
         <p:spPr>
           <a:xfrm>
-            <a:off x="640080" y="1298448"/>
-            <a:ext cx="10881360" cy="548640"/>
-          </a:xfrm>
-          <a:prstGeom prst="rect">
-            <a:avLst/>
-          </a:prstGeom>
-          <a:noFill/>
-          <a:ln/>
-        </p:spPr>
-        <p:txBody>
-          <a:bodyPr wrap="square" lIns="0" tIns="0" rIns="0" bIns="0" rtlCol="0" anchor="ctr"/>
-          <a:lstStyle/>
-          <a:p>
-            <a:pPr indent="0" marL="0">
-              <a:lnSpc>
-                <a:spcPts val="2000"/>
-              </a:lnSpc>
-              <a:buNone/>
-            </a:pPr>
-            <a:r>
-              <a:rPr lang="en-US" sz="1400" dirty="0">
-                <a:solidFill>
-                  <a:srgbClr val="10212F"/>
-                </a:solidFill>
-                <a:latin typeface="Calibri" pitchFamily="34" charset="0"/>
-                <a:ea typeface="Calibri" pitchFamily="34" charset="-122"/>
-                <a:cs typeface="Calibri" pitchFamily="34" charset="-120"/>
-              </a:rPr>
-              <a:t>We refuse to publish a single headline number — that would imply precision we do not have. We separate what we measured from what we assumed, and expose every assumption.</a:t>
-            </a:r>
-            <a:endParaRPr lang="en-US" sz="1400" dirty="0"/>
-          </a:p>
-        </p:txBody>
-      </p:sp>
-      <p:sp>
-        <p:nvSpPr>
-          <p:cNvPr id="5" name="Shape 3"/>
+            <a:off x="640080" y="1371600"/>
+            <a:ext cx="10881360" cy="411480"/>
+          </a:xfrm>
+          <a:prstGeom prst="rect">
+            <a:avLst/>
+          </a:prstGeom>
+          <a:noFill/>
+          <a:ln/>
+        </p:spPr>
+        <p:txBody>
+          <a:bodyPr wrap="square" lIns="0" tIns="0" rIns="0" bIns="0" rtlCol="0" anchor="ctr"/>
+          <a:lstStyle/>
+          <a:p>
+            <a:pPr indent="0" marL="0">
+              <a:buNone/>
+            </a:pPr>
+            <a:r>
+              <a:rPr lang="en-US" sz="1500" b="1" dirty="0">
+                <a:solidFill>
+                  <a:srgbClr val="3FC1C9"/>
+                </a:solidFill>
+                <a:latin typeface="Courier New" pitchFamily="34" charset="0"/>
+                <a:ea typeface="Courier New" pitchFamily="34" charset="-122"/>
+                <a:cs typeface="Courier New" pitchFamily="34" charset="-120"/>
+              </a:rPr>
+              <a:t>question  →  agent  →  tool call  →  NIST-validated OSCAL  →  answer  →  audited</a:t>
+            </a:r>
+            <a:endParaRPr lang="en-US" sz="1500" dirty="0"/>
+          </a:p>
+        </p:txBody>
+      </p:sp>
+      <p:sp>
+        <p:nvSpPr>
+          <p:cNvPr id="5" name="Text 3"/>
+          <p:cNvSpPr txBox="1"/>
+          <p:nvPr/>
+        </p:nvSpPr>
+        <p:spPr>
+          <a:xfrm>
+            <a:off x="640080" y="1783080"/>
+            <a:ext cx="10881360" cy="320040"/>
+          </a:xfrm>
+          <a:prstGeom prst="rect">
+            <a:avLst/>
+          </a:prstGeom>
+          <a:noFill/>
+          <a:ln/>
+        </p:spPr>
+        <p:txBody>
+          <a:bodyPr wrap="square" lIns="0" tIns="0" rIns="0" bIns="0" rtlCol="0" anchor="ctr"/>
+          <a:lstStyle/>
+          <a:p>
+            <a:pPr indent="0" marL="0">
+              <a:buNone/>
+            </a:pPr>
+            <a:r>
+              <a:rPr lang="en-US" sz="1300" i="1" dirty="0">
+                <a:solidFill>
+                  <a:srgbClr val="9FB3C8"/>
+                </a:solidFill>
+                <a:latin typeface="Calibri" pitchFamily="34" charset="0"/>
+                <a:ea typeface="Calibri" pitchFamily="34" charset="-122"/>
+                <a:cs typeface="Calibri" pitchFamily="34" charset="-120"/>
+              </a:rPr>
+              <a:t>There is no other path to a fact — and the answer is checked again on the way out.</a:t>
+            </a:r>
+            <a:endParaRPr lang="en-US" sz="1300" dirty="0"/>
+          </a:p>
+        </p:txBody>
+      </p:sp>
+      <p:sp>
+        <p:nvSpPr>
+          <p:cNvPr id="6" name="Shape 4"/>
           <p:cNvSpPr/>
           <p:nvPr/>
         </p:nvSpPr>
         <p:spPr>
           <a:xfrm>
-            <a:off x="640080" y="1920240"/>
-            <a:ext cx="5303520" cy="1828800"/>
+            <a:off x="640080" y="2286000"/>
+            <a:ext cx="2560320" cy="1371600"/>
           </a:xfrm>
           <a:prstGeom prst="roundRect">
             <a:avLst>
-              <a:gd name="adj" fmla="val 5000"/>
+              <a:gd name="adj" fmla="val 6667"/>
             </a:avLst>
           </a:prstGeom>
           <a:solidFill>
-            <a:srgbClr val="E8F6EF"/>
+            <a:srgbClr val="14304F"/>
           </a:solidFill>
           <a:ln w="12700">
             <a:solidFill>
-              <a:srgbClr val="C3E9D7"/>
+              <a:srgbClr val="1E4468"/>
             </a:solidFill>
             <a:prstDash val="solid"/>
           </a:ln>
@@ -2871,79 +3085,40 @@
       </p:sp>
       <p:sp>
         <p:nvSpPr>
-          <p:cNvPr id="6" name="Text 4"/>
-          <p:cNvSpPr txBox="1"/>
-          <p:nvPr/>
-        </p:nvSpPr>
-        <p:spPr>
-          <a:xfrm>
-            <a:off x="868680" y="2066544"/>
-            <a:ext cx="4846320" cy="274320"/>
-          </a:xfrm>
-          <a:prstGeom prst="rect">
-            <a:avLst/>
-          </a:prstGeom>
-          <a:noFill/>
-          <a:ln/>
-        </p:spPr>
-        <p:txBody>
-          <a:bodyPr wrap="square" lIns="0" tIns="0" rIns="0" bIns="0" rtlCol="0" anchor="ctr"/>
-          <a:lstStyle/>
-          <a:p>
-            <a:pPr indent="0" marL="0">
-              <a:buNone/>
-            </a:pPr>
-            <a:r>
-              <a:rPr lang="en-US" sz="1100" b="1" spc="100" kern="0" dirty="0">
-                <a:solidFill>
-                  <a:srgbClr val="30A46C"/>
-                </a:solidFill>
-                <a:latin typeface="Calibri" pitchFamily="34" charset="0"/>
-                <a:ea typeface="Calibri" pitchFamily="34" charset="-122"/>
-                <a:cs typeface="Calibri" pitchFamily="34" charset="-120"/>
-              </a:rPr>
-              <a:t>MEASURED — counted from the artifacts</a:t>
-            </a:r>
-            <a:endParaRPr lang="en-US" sz="1100" dirty="0"/>
-          </a:p>
-        </p:txBody>
-      </p:sp>
-      <p:sp>
-        <p:nvSpPr>
           <p:cNvPr id="7" name="Text 5"/>
           <p:cNvSpPr txBox="1"/>
           <p:nvPr/>
         </p:nvSpPr>
         <p:spPr>
           <a:xfrm>
-            <a:off x="868680" y="2377440"/>
-            <a:ext cx="640080" cy="274320"/>
-          </a:xfrm>
-          <a:prstGeom prst="rect">
-            <a:avLst/>
-          </a:prstGeom>
-          <a:noFill/>
-          <a:ln/>
-        </p:spPr>
-        <p:txBody>
-          <a:bodyPr wrap="square" lIns="0" tIns="0" rIns="0" bIns="0" rtlCol="0" anchor="ctr"/>
-          <a:lstStyle/>
-          <a:p>
-            <a:pPr indent="0" marL="0">
-              <a:buNone/>
-            </a:pPr>
-            <a:r>
-              <a:rPr lang="en-US" sz="1400" b="1" dirty="0">
-                <a:solidFill>
-                  <a:srgbClr val="10212F"/>
-                </a:solidFill>
-                <a:latin typeface="Calibri" pitchFamily="34" charset="0"/>
-                <a:ea typeface="Calibri" pitchFamily="34" charset="-122"/>
-                <a:cs typeface="Calibri" pitchFamily="34" charset="-120"/>
-              </a:rPr>
-              <a:t>26</a:t>
-            </a:r>
-            <a:endParaRPr lang="en-US" sz="1400" dirty="0"/>
+            <a:off x="777240" y="2423160"/>
+            <a:ext cx="2286000" cy="320040"/>
+          </a:xfrm>
+          <a:prstGeom prst="rect">
+            <a:avLst/>
+          </a:prstGeom>
+          <a:noFill/>
+          <a:ln/>
+        </p:spPr>
+        <p:txBody>
+          <a:bodyPr wrap="square" lIns="0" tIns="0" rIns="0" bIns="0" rtlCol="0" anchor="ctr"/>
+          <a:lstStyle/>
+          <a:p>
+            <a:pPr indent="0" marL="0">
+              <a:buNone/>
+            </a:pPr>
+            <a:r>
+              <a:rPr lang="en-US" sz="1500" b="1" dirty="0">
+                <a:solidFill>
+                  <a:srgbClr val="3FC1C9"/>
+                </a:solidFill>
+                <a:latin typeface="Calibri" pitchFamily="34" charset="0"/>
+                <a:ea typeface="Calibri" pitchFamily="34" charset="-122"/>
+                <a:cs typeface="Calibri" pitchFamily="34" charset="-120"/>
+              </a:rPr>
+              <a:t>Posture</a:t>
+            </a:r>
+            <a:endParaRPr lang="en-US" sz="1500" dirty="0"/>
           </a:p>
         </p:txBody>
       </p:sp>
@@ -2955,32 +3130,35 @@
         </p:nvSpPr>
         <p:spPr>
           <a:xfrm>
-            <a:off x="1554480" y="2395728"/>
-            <a:ext cx="4206240" cy="274320"/>
-          </a:xfrm>
-          <a:prstGeom prst="rect">
-            <a:avLst/>
-          </a:prstGeom>
-          <a:noFill/>
-          <a:ln/>
-        </p:spPr>
-        <p:txBody>
-          <a:bodyPr wrap="square" lIns="0" tIns="0" rIns="0" bIns="0" rtlCol="0" anchor="ctr"/>
-          <a:lstStyle/>
-          <a:p>
-            <a:pPr indent="0" marL="0">
+            <a:off x="777240" y="2761488"/>
+            <a:ext cx="2286000" cy="777240"/>
+          </a:xfrm>
+          <a:prstGeom prst="rect">
+            <a:avLst/>
+          </a:prstGeom>
+          <a:noFill/>
+          <a:ln/>
+        </p:spPr>
+        <p:txBody>
+          <a:bodyPr wrap="square" lIns="0" tIns="0" rIns="0" bIns="0" rtlCol="0" anchor="ctr"/>
+          <a:lstStyle/>
+          <a:p>
+            <a:pPr indent="0" marL="0">
+              <a:lnSpc>
+                <a:spcPts val="1600"/>
+              </a:lnSpc>
               <a:buNone/>
             </a:pPr>
             <a:r>
               <a:rPr lang="en-US" sz="1150" dirty="0">
                 <a:solidFill>
-                  <a:srgbClr val="5A6B7B"/>
-                </a:solidFill>
-                <a:latin typeface="Calibri" pitchFamily="34" charset="0"/>
-                <a:ea typeface="Calibri" pitchFamily="34" charset="-122"/>
-                <a:cs typeface="Calibri" pitchFamily="34" charset="-120"/>
-              </a:rPr>
-              <a:t>POA&amp;M items with severity + deadline</a:t>
+                  <a:srgbClr val="C6D4E0"/>
+                </a:solidFill>
+                <a:latin typeface="Calibri" pitchFamily="34" charset="0"/>
+                <a:ea typeface="Calibri" pitchFamily="34" charset="-122"/>
+                <a:cs typeface="Calibri" pitchFamily="34" charset="-120"/>
+              </a:rPr>
+              <a:t>current state, and what a policy requires</a:t>
             </a:r>
             <a:endParaRPr lang="en-US" sz="1150" dirty="0"/>
           </a:p>
@@ -2988,260 +3166,26 @@
       </p:sp>
       <p:sp>
         <p:nvSpPr>
-          <p:cNvPr id="9" name="Text 7"/>
-          <p:cNvSpPr txBox="1"/>
-          <p:nvPr/>
-        </p:nvSpPr>
-        <p:spPr>
-          <a:xfrm>
-            <a:off x="868680" y="2697480"/>
-            <a:ext cx="640080" cy="274320"/>
-          </a:xfrm>
-          <a:prstGeom prst="rect">
-            <a:avLst/>
-          </a:prstGeom>
-          <a:noFill/>
-          <a:ln/>
-        </p:spPr>
-        <p:txBody>
-          <a:bodyPr wrap="square" lIns="0" tIns="0" rIns="0" bIns="0" rtlCol="0" anchor="ctr"/>
-          <a:lstStyle/>
-          <a:p>
-            <a:pPr indent="0" marL="0">
-              <a:buNone/>
-            </a:pPr>
-            <a:r>
-              <a:rPr lang="en-US" sz="1400" b="1" dirty="0">
-                <a:solidFill>
-                  <a:srgbClr val="10212F"/>
-                </a:solidFill>
-                <a:latin typeface="Calibri" pitchFamily="34" charset="0"/>
-                <a:ea typeface="Calibri" pitchFamily="34" charset="-122"/>
-                <a:cs typeface="Calibri" pitchFamily="34" charset="-120"/>
-              </a:rPr>
-              <a:t>91</a:t>
-            </a:r>
-            <a:endParaRPr lang="en-US" sz="1400" dirty="0"/>
-          </a:p>
-        </p:txBody>
-      </p:sp>
-      <p:sp>
-        <p:nvSpPr>
-          <p:cNvPr id="10" name="Text 8"/>
-          <p:cNvSpPr txBox="1"/>
-          <p:nvPr/>
-        </p:nvSpPr>
-        <p:spPr>
-          <a:xfrm>
-            <a:off x="1554480" y="2715768"/>
-            <a:ext cx="4206240" cy="274320"/>
-          </a:xfrm>
-          <a:prstGeom prst="rect">
-            <a:avLst/>
-          </a:prstGeom>
-          <a:noFill/>
-          <a:ln/>
-        </p:spPr>
-        <p:txBody>
-          <a:bodyPr wrap="square" lIns="0" tIns="0" rIns="0" bIns="0" rtlCol="0" anchor="ctr"/>
-          <a:lstStyle/>
-          <a:p>
-            <a:pPr indent="0" marL="0">
-              <a:buNone/>
-            </a:pPr>
-            <a:r>
-              <a:rPr lang="en-US" sz="1150" dirty="0">
-                <a:solidFill>
-                  <a:srgbClr val="5A6B7B"/>
-                </a:solidFill>
-                <a:latin typeface="Calibri" pitchFamily="34" charset="0"/>
-                <a:ea typeface="Calibri" pitchFamily="34" charset="-122"/>
-                <a:cs typeface="Calibri" pitchFamily="34" charset="-120"/>
-              </a:rPr>
-              <a:t>SSP implemented-requirements</a:t>
-            </a:r>
-            <a:endParaRPr lang="en-US" sz="1150" dirty="0"/>
-          </a:p>
-        </p:txBody>
-      </p:sp>
-      <p:sp>
-        <p:nvSpPr>
-          <p:cNvPr id="11" name="Text 9"/>
-          <p:cNvSpPr txBox="1"/>
-          <p:nvPr/>
-        </p:nvSpPr>
-        <p:spPr>
-          <a:xfrm>
-            <a:off x="868680" y="3017520"/>
-            <a:ext cx="640080" cy="274320"/>
-          </a:xfrm>
-          <a:prstGeom prst="rect">
-            <a:avLst/>
-          </a:prstGeom>
-          <a:noFill/>
-          <a:ln/>
-        </p:spPr>
-        <p:txBody>
-          <a:bodyPr wrap="square" lIns="0" tIns="0" rIns="0" bIns="0" rtlCol="0" anchor="ctr"/>
-          <a:lstStyle/>
-          <a:p>
-            <a:pPr indent="0" marL="0">
-              <a:buNone/>
-            </a:pPr>
-            <a:r>
-              <a:rPr lang="en-US" sz="1400" b="1" dirty="0">
-                <a:solidFill>
-                  <a:srgbClr val="10212F"/>
-                </a:solidFill>
-                <a:latin typeface="Calibri" pitchFamily="34" charset="0"/>
-                <a:ea typeface="Calibri" pitchFamily="34" charset="-122"/>
-                <a:cs typeface="Calibri" pitchFamily="34" charset="-120"/>
-              </a:rPr>
-              <a:t>89</a:t>
-            </a:r>
-            <a:endParaRPr lang="en-US" sz="1400" dirty="0"/>
-          </a:p>
-        </p:txBody>
-      </p:sp>
-      <p:sp>
-        <p:nvSpPr>
-          <p:cNvPr id="12" name="Text 10"/>
-          <p:cNvSpPr txBox="1"/>
-          <p:nvPr/>
-        </p:nvSpPr>
-        <p:spPr>
-          <a:xfrm>
-            <a:off x="1554480" y="3035808"/>
-            <a:ext cx="4206240" cy="274320"/>
-          </a:xfrm>
-          <a:prstGeom prst="rect">
-            <a:avLst/>
-          </a:prstGeom>
-          <a:noFill/>
-          <a:ln/>
-        </p:spPr>
-        <p:txBody>
-          <a:bodyPr wrap="square" lIns="0" tIns="0" rIns="0" bIns="0" rtlCol="0" anchor="ctr"/>
-          <a:lstStyle/>
-          <a:p>
-            <a:pPr indent="0" marL="0">
-              <a:buNone/>
-            </a:pPr>
-            <a:r>
-              <a:rPr lang="en-US" sz="1150" dirty="0">
-                <a:solidFill>
-                  <a:srgbClr val="5A6B7B"/>
-                </a:solidFill>
-                <a:latin typeface="Calibri" pitchFamily="34" charset="0"/>
-                <a:ea typeface="Calibri" pitchFamily="34" charset="-122"/>
-                <a:cs typeface="Calibri" pitchFamily="34" charset="-120"/>
-              </a:rPr>
-              <a:t>NIST 800-53 mappings resolved</a:t>
-            </a:r>
-            <a:endParaRPr lang="en-US" sz="1150" dirty="0"/>
-          </a:p>
-        </p:txBody>
-      </p:sp>
-      <p:sp>
-        <p:nvSpPr>
-          <p:cNvPr id="13" name="Text 11"/>
-          <p:cNvSpPr txBox="1"/>
-          <p:nvPr/>
-        </p:nvSpPr>
-        <p:spPr>
-          <a:xfrm>
-            <a:off x="868680" y="3337560"/>
-            <a:ext cx="640080" cy="274320"/>
-          </a:xfrm>
-          <a:prstGeom prst="rect">
-            <a:avLst/>
-          </a:prstGeom>
-          <a:noFill/>
-          <a:ln/>
-        </p:spPr>
-        <p:txBody>
-          <a:bodyPr wrap="square" lIns="0" tIns="0" rIns="0" bIns="0" rtlCol="0" anchor="ctr"/>
-          <a:lstStyle/>
-          <a:p>
-            <a:pPr indent="0" marL="0">
-              <a:buNone/>
-            </a:pPr>
-            <a:r>
-              <a:rPr lang="en-US" sz="1400" b="1" dirty="0">
-                <a:solidFill>
-                  <a:srgbClr val="10212F"/>
-                </a:solidFill>
-                <a:latin typeface="Calibri" pitchFamily="34" charset="0"/>
-                <a:ea typeface="Calibri" pitchFamily="34" charset="-122"/>
-                <a:cs typeface="Calibri" pitchFamily="34" charset="-120"/>
-              </a:rPr>
-              <a:t>26</a:t>
-            </a:r>
-            <a:endParaRPr lang="en-US" sz="1400" dirty="0"/>
-          </a:p>
-        </p:txBody>
-      </p:sp>
-      <p:sp>
-        <p:nvSpPr>
-          <p:cNvPr id="14" name="Text 12"/>
-          <p:cNvSpPr txBox="1"/>
-          <p:nvPr/>
-        </p:nvSpPr>
-        <p:spPr>
-          <a:xfrm>
-            <a:off x="1554480" y="3355848"/>
-            <a:ext cx="4206240" cy="274320"/>
-          </a:xfrm>
-          <a:prstGeom prst="rect">
-            <a:avLst/>
-          </a:prstGeom>
-          <a:noFill/>
-          <a:ln/>
-        </p:spPr>
-        <p:txBody>
-          <a:bodyPr wrap="square" lIns="0" tIns="0" rIns="0" bIns="0" rtlCol="0" anchor="ctr"/>
-          <a:lstStyle/>
-          <a:p>
-            <a:pPr indent="0" marL="0">
-              <a:buNone/>
-            </a:pPr>
-            <a:r>
-              <a:rPr lang="en-US" sz="1150" dirty="0">
-                <a:solidFill>
-                  <a:srgbClr val="5A6B7B"/>
-                </a:solidFill>
-                <a:latin typeface="Calibri" pitchFamily="34" charset="0"/>
-                <a:ea typeface="Calibri" pitchFamily="34" charset="-122"/>
-                <a:cs typeface="Calibri" pitchFamily="34" charset="-120"/>
-              </a:rPr>
-              <a:t>phantom drift findings avoided</a:t>
-            </a:r>
-            <a:endParaRPr lang="en-US" sz="1150" dirty="0"/>
-          </a:p>
-        </p:txBody>
-      </p:sp>
-      <p:sp>
-        <p:nvSpPr>
-          <p:cNvPr id="15" name="Shape 13"/>
+          <p:cNvPr id="9" name="Shape 7"/>
           <p:cNvSpPr/>
           <p:nvPr/>
         </p:nvSpPr>
         <p:spPr>
           <a:xfrm>
-            <a:off x="6217920" y="1920240"/>
-            <a:ext cx="5303520" cy="1828800"/>
+            <a:off x="3383280" y="2286000"/>
+            <a:ext cx="2560320" cy="1371600"/>
           </a:xfrm>
           <a:prstGeom prst="roundRect">
             <a:avLst>
-              <a:gd name="adj" fmla="val 5000"/>
+              <a:gd name="adj" fmla="val 6667"/>
             </a:avLst>
           </a:prstGeom>
           <a:solidFill>
-            <a:srgbClr val="FFF6E0"/>
+            <a:srgbClr val="14304F"/>
           </a:solidFill>
           <a:ln w="12700">
             <a:solidFill>
-              <a:srgbClr val="FFE2A8"/>
+              <a:srgbClr val="1E4468"/>
             </a:solidFill>
             <a:prstDash val="solid"/>
           </a:ln>
@@ -3249,116 +3193,80 @@
       </p:sp>
       <p:sp>
         <p:nvSpPr>
-          <p:cNvPr id="16" name="Text 14"/>
-          <p:cNvSpPr txBox="1"/>
-          <p:nvPr/>
-        </p:nvSpPr>
-        <p:spPr>
-          <a:xfrm>
-            <a:off x="6446520" y="2066544"/>
-            <a:ext cx="4846320" cy="274320"/>
-          </a:xfrm>
-          <a:prstGeom prst="rect">
-            <a:avLst/>
-          </a:prstGeom>
-          <a:noFill/>
-          <a:ln/>
-        </p:spPr>
-        <p:txBody>
-          <a:bodyPr wrap="square" lIns="0" tIns="0" rIns="0" bIns="0" rtlCol="0" anchor="ctr"/>
-          <a:lstStyle/>
-          <a:p>
-            <a:pPr indent="0" marL="0">
-              <a:buNone/>
-            </a:pPr>
-            <a:r>
-              <a:rPr lang="en-US" sz="1100" b="1" spc="100" kern="0" dirty="0">
-                <a:solidFill>
-                  <a:srgbClr val="8A5A00"/>
-                </a:solidFill>
-                <a:latin typeface="Calibri" pitchFamily="34" charset="0"/>
-                <a:ea typeface="Calibri" pitchFamily="34" charset="-122"/>
-                <a:cs typeface="Calibri" pitchFamily="34" charset="-120"/>
-              </a:rPr>
-              <a:t>ASSUMED — adjustable by the reader</a:t>
-            </a:r>
-            <a:endParaRPr lang="en-US" sz="1100" dirty="0"/>
-          </a:p>
-        </p:txBody>
-      </p:sp>
-      <p:sp>
-        <p:nvSpPr>
-          <p:cNvPr id="17" name="Text 15"/>
-          <p:cNvSpPr txBox="1"/>
-          <p:nvPr/>
-        </p:nvSpPr>
-        <p:spPr>
-          <a:xfrm>
-            <a:off x="6446520" y="2377440"/>
-            <a:ext cx="1188720" cy="274320"/>
-          </a:xfrm>
-          <a:prstGeom prst="rect">
-            <a:avLst/>
-          </a:prstGeom>
-          <a:noFill/>
-          <a:ln/>
-        </p:spPr>
-        <p:txBody>
-          <a:bodyPr wrap="square" lIns="0" tIns="0" rIns="0" bIns="0" rtlCol="0" anchor="ctr"/>
-          <a:lstStyle/>
-          <a:p>
-            <a:pPr indent="0" marL="0">
-              <a:buNone/>
-            </a:pPr>
-            <a:r>
-              <a:rPr lang="en-US" sz="1250" b="1" dirty="0">
-                <a:solidFill>
-                  <a:srgbClr val="10212F"/>
-                </a:solidFill>
-                <a:latin typeface="Calibri" pitchFamily="34" charset="0"/>
-                <a:ea typeface="Calibri" pitchFamily="34" charset="-122"/>
-                <a:cs typeface="Calibri" pitchFamily="34" charset="-120"/>
-              </a:rPr>
-              <a:t>20 min</a:t>
-            </a:r>
-            <a:endParaRPr lang="en-US" sz="1250" dirty="0"/>
-          </a:p>
-        </p:txBody>
-      </p:sp>
-      <p:sp>
-        <p:nvSpPr>
-          <p:cNvPr id="18" name="Text 16"/>
-          <p:cNvSpPr txBox="1"/>
-          <p:nvPr/>
-        </p:nvSpPr>
-        <p:spPr>
-          <a:xfrm>
-            <a:off x="7726680" y="2395728"/>
-            <a:ext cx="3657600" cy="274320"/>
-          </a:xfrm>
-          <a:prstGeom prst="rect">
-            <a:avLst/>
-          </a:prstGeom>
-          <a:noFill/>
-          <a:ln/>
-        </p:spPr>
-        <p:txBody>
-          <a:bodyPr wrap="square" lIns="0" tIns="0" rIns="0" bIns="0" rtlCol="0" anchor="ctr"/>
-          <a:lstStyle/>
-          <a:p>
-            <a:pPr indent="0" marL="0">
+          <p:cNvPr id="10" name="Text 8"/>
+          <p:cNvSpPr txBox="1"/>
+          <p:nvPr/>
+        </p:nvSpPr>
+        <p:spPr>
+          <a:xfrm>
+            <a:off x="3520440" y="2423160"/>
+            <a:ext cx="2286000" cy="320040"/>
+          </a:xfrm>
+          <a:prstGeom prst="rect">
+            <a:avLst/>
+          </a:prstGeom>
+          <a:noFill/>
+          <a:ln/>
+        </p:spPr>
+        <p:txBody>
+          <a:bodyPr wrap="square" lIns="0" tIns="0" rIns="0" bIns="0" rtlCol="0" anchor="ctr"/>
+          <a:lstStyle/>
+          <a:p>
+            <a:pPr indent="0" marL="0">
+              <a:buNone/>
+            </a:pPr>
+            <a:r>
+              <a:rPr lang="en-US" sz="1500" b="1" dirty="0">
+                <a:solidFill>
+                  <a:srgbClr val="3FC1C9"/>
+                </a:solidFill>
+                <a:latin typeface="Calibri" pitchFamily="34" charset="0"/>
+                <a:ea typeface="Calibri" pitchFamily="34" charset="-122"/>
+                <a:cs typeface="Calibri" pitchFamily="34" charset="-120"/>
+              </a:rPr>
+              <a:t>Risk</a:t>
+            </a:r>
+            <a:endParaRPr lang="en-US" sz="1500" dirty="0"/>
+          </a:p>
+        </p:txBody>
+      </p:sp>
+      <p:sp>
+        <p:nvSpPr>
+          <p:cNvPr id="11" name="Text 9"/>
+          <p:cNvSpPr txBox="1"/>
+          <p:nvPr/>
+        </p:nvSpPr>
+        <p:spPr>
+          <a:xfrm>
+            <a:off x="3520440" y="2761488"/>
+            <a:ext cx="2286000" cy="777240"/>
+          </a:xfrm>
+          <a:prstGeom prst="rect">
+            <a:avLst/>
+          </a:prstGeom>
+          <a:noFill/>
+          <a:ln/>
+        </p:spPr>
+        <p:txBody>
+          <a:bodyPr wrap="square" lIns="0" tIns="0" rIns="0" bIns="0" rtlCol="0" anchor="ctr"/>
+          <a:lstStyle/>
+          <a:p>
+            <a:pPr indent="0" marL="0">
+              <a:lnSpc>
+                <a:spcPts val="1600"/>
+              </a:lnSpc>
               <a:buNone/>
             </a:pPr>
             <a:r>
               <a:rPr lang="en-US" sz="1150" dirty="0">
                 <a:solidFill>
-                  <a:srgbClr val="5A6B7B"/>
-                </a:solidFill>
-                <a:latin typeface="Calibri" pitchFamily="34" charset="0"/>
-                <a:ea typeface="Calibri" pitchFamily="34" charset="-122"/>
-                <a:cs typeface="Calibri" pitchFamily="34" charset="-120"/>
-              </a:rPr>
-              <a:t>to hand-author one POA&amp;M item</a:t>
+                  <a:srgbClr val="C6D4E0"/>
+                </a:solidFill>
+                <a:latin typeface="Calibri" pitchFamily="34" charset="0"/>
+                <a:ea typeface="Calibri" pitchFamily="34" charset="-122"/>
+                <a:cs typeface="Calibri" pitchFamily="34" charset="-120"/>
+              </a:rPr>
+              <a:t>ranks by SHALL/SHOULD, ATT&amp;CK breadth, blast radius</a:t>
             </a:r>
             <a:endParaRPr lang="en-US" sz="1150" dirty="0"/>
           </a:p>
@@ -3366,260 +3274,26 @@
       </p:sp>
       <p:sp>
         <p:nvSpPr>
-          <p:cNvPr id="19" name="Text 17"/>
-          <p:cNvSpPr txBox="1"/>
-          <p:nvPr/>
-        </p:nvSpPr>
-        <p:spPr>
-          <a:xfrm>
-            <a:off x="6446520" y="2697480"/>
-            <a:ext cx="1188720" cy="274320"/>
-          </a:xfrm>
-          <a:prstGeom prst="rect">
-            <a:avLst/>
-          </a:prstGeom>
-          <a:noFill/>
-          <a:ln/>
-        </p:spPr>
-        <p:txBody>
-          <a:bodyPr wrap="square" lIns="0" tIns="0" rIns="0" bIns="0" rtlCol="0" anchor="ctr"/>
-          <a:lstStyle/>
-          <a:p>
-            <a:pPr indent="0" marL="0">
-              <a:buNone/>
-            </a:pPr>
-            <a:r>
-              <a:rPr lang="en-US" sz="1250" b="1" dirty="0">
-                <a:solidFill>
-                  <a:srgbClr val="10212F"/>
-                </a:solidFill>
-                <a:latin typeface="Calibri" pitchFamily="34" charset="0"/>
-                <a:ea typeface="Calibri" pitchFamily="34" charset="-122"/>
-                <a:cs typeface="Calibri" pitchFamily="34" charset="-120"/>
-              </a:rPr>
-              <a:t>10 min</a:t>
-            </a:r>
-            <a:endParaRPr lang="en-US" sz="1250" dirty="0"/>
-          </a:p>
-        </p:txBody>
-      </p:sp>
-      <p:sp>
-        <p:nvSpPr>
-          <p:cNvPr id="20" name="Text 18"/>
-          <p:cNvSpPr txBox="1"/>
-          <p:nvPr/>
-        </p:nvSpPr>
-        <p:spPr>
-          <a:xfrm>
-            <a:off x="7726680" y="2715768"/>
-            <a:ext cx="3657600" cy="274320"/>
-          </a:xfrm>
-          <a:prstGeom prst="rect">
-            <a:avLst/>
-          </a:prstGeom>
-          <a:noFill/>
-          <a:ln/>
-        </p:spPr>
-        <p:txBody>
-          <a:bodyPr wrap="square" lIns="0" tIns="0" rIns="0" bIns="0" rtlCol="0" anchor="ctr"/>
-          <a:lstStyle/>
-          <a:p>
-            <a:pPr indent="0" marL="0">
-              <a:buNone/>
-            </a:pPr>
-            <a:r>
-              <a:rPr lang="en-US" sz="1150" dirty="0">
-                <a:solidFill>
-                  <a:srgbClr val="5A6B7B"/>
-                </a:solidFill>
-                <a:latin typeface="Calibri" pitchFamily="34" charset="0"/>
-                <a:ea typeface="Calibri" pitchFamily="34" charset="-122"/>
-                <a:cs typeface="Calibri" pitchFamily="34" charset="-120"/>
-              </a:rPr>
-              <a:t>per SSP requirement</a:t>
-            </a:r>
-            <a:endParaRPr lang="en-US" sz="1150" dirty="0"/>
-          </a:p>
-        </p:txBody>
-      </p:sp>
-      <p:sp>
-        <p:nvSpPr>
-          <p:cNvPr id="21" name="Text 19"/>
-          <p:cNvSpPr txBox="1"/>
-          <p:nvPr/>
-        </p:nvSpPr>
-        <p:spPr>
-          <a:xfrm>
-            <a:off x="6446520" y="3017520"/>
-            <a:ext cx="1188720" cy="274320"/>
-          </a:xfrm>
-          <a:prstGeom prst="rect">
-            <a:avLst/>
-          </a:prstGeom>
-          <a:noFill/>
-          <a:ln/>
-        </p:spPr>
-        <p:txBody>
-          <a:bodyPr wrap="square" lIns="0" tIns="0" rIns="0" bIns="0" rtlCol="0" anchor="ctr"/>
-          <a:lstStyle/>
-          <a:p>
-            <a:pPr indent="0" marL="0">
-              <a:buNone/>
-            </a:pPr>
-            <a:r>
-              <a:rPr lang="en-US" sz="1250" b="1" dirty="0">
-                <a:solidFill>
-                  <a:srgbClr val="10212F"/>
-                </a:solidFill>
-                <a:latin typeface="Calibri" pitchFamily="34" charset="0"/>
-                <a:ea typeface="Calibri" pitchFamily="34" charset="-122"/>
-                <a:cs typeface="Calibri" pitchFamily="34" charset="-120"/>
-              </a:rPr>
-              <a:t>6 min</a:t>
-            </a:r>
-            <a:endParaRPr lang="en-US" sz="1250" dirty="0"/>
-          </a:p>
-        </p:txBody>
-      </p:sp>
-      <p:sp>
-        <p:nvSpPr>
-          <p:cNvPr id="22" name="Text 20"/>
-          <p:cNvSpPr txBox="1"/>
-          <p:nvPr/>
-        </p:nvSpPr>
-        <p:spPr>
-          <a:xfrm>
-            <a:off x="7726680" y="3035808"/>
-            <a:ext cx="3657600" cy="274320"/>
-          </a:xfrm>
-          <a:prstGeom prst="rect">
-            <a:avLst/>
-          </a:prstGeom>
-          <a:noFill/>
-          <a:ln/>
-        </p:spPr>
-        <p:txBody>
-          <a:bodyPr wrap="square" lIns="0" tIns="0" rIns="0" bIns="0" rtlCol="0" anchor="ctr"/>
-          <a:lstStyle/>
-          <a:p>
-            <a:pPr indent="0" marL="0">
-              <a:buNone/>
-            </a:pPr>
-            <a:r>
-              <a:rPr lang="en-US" sz="1150" dirty="0">
-                <a:solidFill>
-                  <a:srgbClr val="5A6B7B"/>
-                </a:solidFill>
-                <a:latin typeface="Calibri" pitchFamily="34" charset="0"/>
-                <a:ea typeface="Calibri" pitchFamily="34" charset="-122"/>
-                <a:cs typeface="Calibri" pitchFamily="34" charset="-120"/>
-              </a:rPr>
-              <a:t>per NIST mapping lookup</a:t>
-            </a:r>
-            <a:endParaRPr lang="en-US" sz="1150" dirty="0"/>
-          </a:p>
-        </p:txBody>
-      </p:sp>
-      <p:sp>
-        <p:nvSpPr>
-          <p:cNvPr id="23" name="Text 21"/>
-          <p:cNvSpPr txBox="1"/>
-          <p:nvPr/>
-        </p:nvSpPr>
-        <p:spPr>
-          <a:xfrm>
-            <a:off x="6446520" y="3337560"/>
-            <a:ext cx="1188720" cy="274320"/>
-          </a:xfrm>
-          <a:prstGeom prst="rect">
-            <a:avLst/>
-          </a:prstGeom>
-          <a:noFill/>
-          <a:ln/>
-        </p:spPr>
-        <p:txBody>
-          <a:bodyPr wrap="square" lIns="0" tIns="0" rIns="0" bIns="0" rtlCol="0" anchor="ctr"/>
-          <a:lstStyle/>
-          <a:p>
-            <a:pPr indent="0" marL="0">
-              <a:buNone/>
-            </a:pPr>
-            <a:r>
-              <a:rPr lang="en-US" sz="1250" b="1" dirty="0">
-                <a:solidFill>
-                  <a:srgbClr val="10212F"/>
-                </a:solidFill>
-                <a:latin typeface="Calibri" pitchFamily="34" charset="0"/>
-                <a:ea typeface="Calibri" pitchFamily="34" charset="-122"/>
-                <a:cs typeface="Calibri" pitchFamily="34" charset="-120"/>
-              </a:rPr>
-              <a:t>$62.11/h</a:t>
-            </a:r>
-            <a:endParaRPr lang="en-US" sz="1250" dirty="0"/>
-          </a:p>
-        </p:txBody>
-      </p:sp>
-      <p:sp>
-        <p:nvSpPr>
-          <p:cNvPr id="24" name="Text 22"/>
-          <p:cNvSpPr txBox="1"/>
-          <p:nvPr/>
-        </p:nvSpPr>
-        <p:spPr>
-          <a:xfrm>
-            <a:off x="7726680" y="3355848"/>
-            <a:ext cx="3657600" cy="274320"/>
-          </a:xfrm>
-          <a:prstGeom prst="rect">
-            <a:avLst/>
-          </a:prstGeom>
-          <a:noFill/>
-          <a:ln/>
-        </p:spPr>
-        <p:txBody>
-          <a:bodyPr wrap="square" lIns="0" tIns="0" rIns="0" bIns="0" rtlCol="0" anchor="ctr"/>
-          <a:lstStyle/>
-          <a:p>
-            <a:pPr indent="0" marL="0">
-              <a:buNone/>
-            </a:pPr>
-            <a:r>
-              <a:rPr lang="en-US" sz="1150" dirty="0">
-                <a:solidFill>
-                  <a:srgbClr val="5A6B7B"/>
-                </a:solidFill>
-                <a:latin typeface="Calibri" pitchFamily="34" charset="0"/>
-                <a:ea typeface="Calibri" pitchFamily="34" charset="-122"/>
-                <a:cs typeface="Calibri" pitchFamily="34" charset="-120"/>
-              </a:rPr>
-              <a:t>BLS Virginia analyst wage x1.3 loaded</a:t>
-            </a:r>
-            <a:endParaRPr lang="en-US" sz="1150" dirty="0"/>
-          </a:p>
-        </p:txBody>
-      </p:sp>
-      <p:sp>
-        <p:nvSpPr>
-          <p:cNvPr id="25" name="Shape 23"/>
+          <p:cNvPr id="12" name="Shape 10"/>
           <p:cNvSpPr/>
           <p:nvPr/>
         </p:nvSpPr>
         <p:spPr>
           <a:xfrm>
-            <a:off x="640080" y="3977640"/>
-            <a:ext cx="3474720" cy="1508760"/>
+            <a:off x="6126480" y="2286000"/>
+            <a:ext cx="2560320" cy="1371600"/>
           </a:xfrm>
           <a:prstGeom prst="roundRect">
             <a:avLst>
-              <a:gd name="adj" fmla="val 6061"/>
+              <a:gd name="adj" fmla="val 6667"/>
             </a:avLst>
           </a:prstGeom>
           <a:solidFill>
-            <a:srgbClr val="E8F6EF"/>
+            <a:srgbClr val="14304F"/>
           </a:solidFill>
           <a:ln w="12700">
             <a:solidFill>
-              <a:srgbClr val="E8F6EF"/>
+              <a:srgbClr val="1E4468"/>
             </a:solidFill>
             <a:prstDash val="solid"/>
           </a:ln>
@@ -3627,121 +3301,107 @@
       </p:sp>
       <p:sp>
         <p:nvSpPr>
-          <p:cNvPr id="26" name="Text 24"/>
-          <p:cNvSpPr txBox="1"/>
-          <p:nvPr/>
-        </p:nvSpPr>
-        <p:spPr>
-          <a:xfrm>
-            <a:off x="640080" y="4142232"/>
-            <a:ext cx="3474720" cy="749808"/>
-          </a:xfrm>
-          <a:prstGeom prst="rect">
-            <a:avLst/>
-          </a:prstGeom>
-          <a:noFill/>
-          <a:ln/>
-        </p:spPr>
-        <p:txBody>
-          <a:bodyPr wrap="square" lIns="0" tIns="0" rIns="0" bIns="0" rtlCol="0" anchor="ctr"/>
-          <a:lstStyle/>
-          <a:p>
-            <a:pPr algn="ctr" indent="0" marL="0">
-              <a:buNone/>
-            </a:pPr>
-            <a:r>
-              <a:rPr lang="en-US" sz="4000" b="1" dirty="0">
-                <a:solidFill>
-                  <a:srgbClr val="30A46C"/>
-                </a:solidFill>
-                <a:latin typeface="Calibri" pitchFamily="34" charset="0"/>
-                <a:ea typeface="Calibri" pitchFamily="34" charset="-122"/>
-                <a:cs typeface="Calibri" pitchFamily="34" charset="-120"/>
-              </a:rPr>
-              <a:t>20–69 h</a:t>
-            </a:r>
-            <a:endParaRPr lang="en-US" sz="4000" dirty="0"/>
-          </a:p>
-        </p:txBody>
-      </p:sp>
-      <p:sp>
-        <p:nvSpPr>
-          <p:cNvPr id="27" name="Text 25"/>
-          <p:cNvSpPr txBox="1"/>
-          <p:nvPr/>
-        </p:nvSpPr>
-        <p:spPr>
-          <a:xfrm>
-            <a:off x="749808" y="4892040"/>
-            <a:ext cx="3255264" cy="502920"/>
-          </a:xfrm>
-          <a:prstGeom prst="rect">
-            <a:avLst/>
-          </a:prstGeom>
-          <a:noFill/>
-          <a:ln/>
-        </p:spPr>
-        <p:txBody>
-          <a:bodyPr wrap="square" lIns="0" tIns="0" rIns="0" bIns="0" rtlCol="0" anchor="ctr"/>
-          <a:lstStyle/>
-          <a:p>
-            <a:pPr algn="ctr" indent="0" marL="0">
+          <p:cNvPr id="13" name="Text 11"/>
+          <p:cNvSpPr txBox="1"/>
+          <p:nvPr/>
+        </p:nvSpPr>
+        <p:spPr>
+          <a:xfrm>
+            <a:off x="6263640" y="2423160"/>
+            <a:ext cx="2286000" cy="320040"/>
+          </a:xfrm>
+          <a:prstGeom prst="rect">
+            <a:avLst/>
+          </a:prstGeom>
+          <a:noFill/>
+          <a:ln/>
+        </p:spPr>
+        <p:txBody>
+          <a:bodyPr wrap="square" lIns="0" tIns="0" rIns="0" bIns="0" rtlCol="0" anchor="ctr"/>
+          <a:lstStyle/>
+          <a:p>
+            <a:pPr indent="0" marL="0">
+              <a:buNone/>
+            </a:pPr>
+            <a:r>
+              <a:rPr lang="en-US" sz="1500" b="1" dirty="0">
+                <a:solidFill>
+                  <a:srgbClr val="3FC1C9"/>
+                </a:solidFill>
+                <a:latin typeface="Calibri" pitchFamily="34" charset="0"/>
+                <a:ea typeface="Calibri" pitchFamily="34" charset="-122"/>
+                <a:cs typeface="Calibri" pitchFamily="34" charset="-120"/>
+              </a:rPr>
+              <a:t>Remediation</a:t>
+            </a:r>
+            <a:endParaRPr lang="en-US" sz="1500" dirty="0"/>
+          </a:p>
+        </p:txBody>
+      </p:sp>
+      <p:sp>
+        <p:nvSpPr>
+          <p:cNvPr id="14" name="Text 12"/>
+          <p:cNvSpPr txBox="1"/>
+          <p:nvPr/>
+        </p:nvSpPr>
+        <p:spPr>
+          <a:xfrm>
+            <a:off x="6263640" y="2761488"/>
+            <a:ext cx="2286000" cy="777240"/>
+          </a:xfrm>
+          <a:prstGeom prst="rect">
+            <a:avLst/>
+          </a:prstGeom>
+          <a:noFill/>
+          <a:ln/>
+        </p:spPr>
+        <p:txBody>
+          <a:bodyPr wrap="square" lIns="0" tIns="0" rIns="0" bIns="0" rtlCol="0" anchor="ctr"/>
+          <a:lstStyle/>
+          <a:p>
+            <a:pPr indent="0" marL="0">
+              <a:lnSpc>
+                <a:spcPts val="1600"/>
+              </a:lnSpc>
               <a:buNone/>
             </a:pPr>
             <a:r>
               <a:rPr lang="en-US" sz="1150" dirty="0">
                 <a:solidFill>
-                  <a:srgbClr val="5A6B7B"/>
-                </a:solidFill>
-                <a:latin typeface="Calibri" pitchFamily="34" charset="0"/>
-                <a:ea typeface="Calibri" pitchFamily="34" charset="-122"/>
-                <a:cs typeface="Calibri" pitchFamily="34" charset="-120"/>
-              </a:rPr>
-              <a:t>manual effort replaced</a:t>
+                  <a:srgbClr val="C6D4E0"/>
+                </a:solidFill>
+                <a:latin typeface="Calibri" pitchFamily="34" charset="0"/>
+                <a:ea typeface="Calibri" pitchFamily="34" charset="-122"/>
+                <a:cs typeface="Calibri" pitchFamily="34" charset="-120"/>
+              </a:rPr>
+              <a:t>fixes grounded in CISA's own guidance</a:t>
             </a:r>
             <a:endParaRPr lang="en-US" sz="1150" dirty="0"/>
           </a:p>
-          <a:p>
-            <a:pPr algn="ctr" indent="0" marL="0">
-              <a:buNone/>
-            </a:pPr>
-            <a:r>
-              <a:rPr lang="en-US" sz="1150" dirty="0">
-                <a:solidFill>
-                  <a:srgbClr val="5A6B7B"/>
-                </a:solidFill>
-                <a:latin typeface="Calibri" pitchFamily="34" charset="0"/>
-                <a:ea typeface="Calibri" pitchFamily="34" charset="-122"/>
-                <a:cs typeface="Calibri" pitchFamily="34" charset="-120"/>
-              </a:rPr>
-              <a:t>per assessment cycle</a:t>
-            </a:r>
-            <a:endParaRPr lang="en-US" sz="1150" dirty="0"/>
-          </a:p>
-        </p:txBody>
-      </p:sp>
-      <p:sp>
-        <p:nvSpPr>
-          <p:cNvPr id="28" name="Shape 26"/>
+        </p:txBody>
+      </p:sp>
+      <p:sp>
+        <p:nvSpPr>
+          <p:cNvPr id="15" name="Shape 13"/>
           <p:cNvSpPr/>
           <p:nvPr/>
         </p:nvSpPr>
         <p:spPr>
           <a:xfrm>
-            <a:off x="4343400" y="3977640"/>
-            <a:ext cx="3474720" cy="1508760"/>
+            <a:off x="8869680" y="2286000"/>
+            <a:ext cx="2560320" cy="1371600"/>
           </a:xfrm>
           <a:prstGeom prst="roundRect">
             <a:avLst>
-              <a:gd name="adj" fmla="val 6061"/>
+              <a:gd name="adj" fmla="val 6667"/>
             </a:avLst>
           </a:prstGeom>
           <a:solidFill>
-            <a:srgbClr val="E8F6EF"/>
+            <a:srgbClr val="14304F"/>
           </a:solidFill>
           <a:ln w="12700">
             <a:solidFill>
-              <a:srgbClr val="E8F6EF"/>
+              <a:srgbClr val="1E4468"/>
             </a:solidFill>
             <a:prstDash val="solid"/>
           </a:ln>
@@ -3749,260 +3409,326 @@
       </p:sp>
       <p:sp>
         <p:nvSpPr>
-          <p:cNvPr id="29" name="Text 27"/>
-          <p:cNvSpPr txBox="1"/>
-          <p:nvPr/>
-        </p:nvSpPr>
-        <p:spPr>
-          <a:xfrm>
-            <a:off x="4343400" y="4142232"/>
-            <a:ext cx="3474720" cy="749808"/>
-          </a:xfrm>
-          <a:prstGeom prst="rect">
-            <a:avLst/>
-          </a:prstGeom>
-          <a:noFill/>
-          <a:ln/>
-        </p:spPr>
-        <p:txBody>
-          <a:bodyPr wrap="square" lIns="0" tIns="0" rIns="0" bIns="0" rtlCol="0" anchor="ctr"/>
-          <a:lstStyle/>
-          <a:p>
-            <a:pPr algn="ctr" indent="0" marL="0">
-              <a:buNone/>
-            </a:pPr>
-            <a:r>
-              <a:rPr lang="en-US" sz="4000" b="1" dirty="0">
-                <a:solidFill>
-                  <a:srgbClr val="30A46C"/>
-                </a:solidFill>
-                <a:latin typeface="Calibri" pitchFamily="34" charset="0"/>
-                <a:ea typeface="Calibri" pitchFamily="34" charset="-122"/>
-                <a:cs typeface="Calibri" pitchFamily="34" charset="-120"/>
-              </a:rPr>
-              <a:t>$1.6k–$5.5k</a:t>
-            </a:r>
-            <a:endParaRPr lang="en-US" sz="4000" dirty="0"/>
-          </a:p>
-        </p:txBody>
-      </p:sp>
-      <p:sp>
-        <p:nvSpPr>
-          <p:cNvPr id="30" name="Text 28"/>
-          <p:cNvSpPr txBox="1"/>
-          <p:nvPr/>
-        </p:nvSpPr>
-        <p:spPr>
-          <a:xfrm>
-            <a:off x="4453128" y="4892040"/>
-            <a:ext cx="3255264" cy="502920"/>
-          </a:xfrm>
-          <a:prstGeom prst="rect">
-            <a:avLst/>
-          </a:prstGeom>
-          <a:noFill/>
-          <a:ln/>
-        </p:spPr>
-        <p:txBody>
-          <a:bodyPr wrap="square" lIns="0" tIns="0" rIns="0" bIns="0" rtlCol="0" anchor="ctr"/>
-          <a:lstStyle/>
-          <a:p>
-            <a:pPr algn="ctr" indent="0" marL="0">
+          <p:cNvPr id="16" name="Text 14"/>
+          <p:cNvSpPr txBox="1"/>
+          <p:nvPr/>
+        </p:nvSpPr>
+        <p:spPr>
+          <a:xfrm>
+            <a:off x="9006840" y="2423160"/>
+            <a:ext cx="2286000" cy="320040"/>
+          </a:xfrm>
+          <a:prstGeom prst="rect">
+            <a:avLst/>
+          </a:prstGeom>
+          <a:noFill/>
+          <a:ln/>
+        </p:spPr>
+        <p:txBody>
+          <a:bodyPr wrap="square" lIns="0" tIns="0" rIns="0" bIns="0" rtlCol="0" anchor="ctr"/>
+          <a:lstStyle/>
+          <a:p>
+            <a:pPr indent="0" marL="0">
+              <a:buNone/>
+            </a:pPr>
+            <a:r>
+              <a:rPr lang="en-US" sz="1500" b="1" dirty="0">
+                <a:solidFill>
+                  <a:srgbClr val="3FC1C9"/>
+                </a:solidFill>
+                <a:latin typeface="Calibri" pitchFamily="34" charset="0"/>
+                <a:ea typeface="Calibri" pitchFamily="34" charset="-122"/>
+                <a:cs typeface="Calibri" pitchFamily="34" charset="-120"/>
+              </a:rPr>
+              <a:t>Report</a:t>
+            </a:r>
+            <a:endParaRPr lang="en-US" sz="1500" dirty="0"/>
+          </a:p>
+        </p:txBody>
+      </p:sp>
+      <p:sp>
+        <p:nvSpPr>
+          <p:cNvPr id="17" name="Text 15"/>
+          <p:cNvSpPr txBox="1"/>
+          <p:nvPr/>
+        </p:nvSpPr>
+        <p:spPr>
+          <a:xfrm>
+            <a:off x="9006840" y="2761488"/>
+            <a:ext cx="2286000" cy="777240"/>
+          </a:xfrm>
+          <a:prstGeom prst="rect">
+            <a:avLst/>
+          </a:prstGeom>
+          <a:noFill/>
+          <a:ln/>
+        </p:spPr>
+        <p:txBody>
+          <a:bodyPr wrap="square" lIns="0" tIns="0" rIns="0" bIns="0" rtlCol="0" anchor="ctr"/>
+          <a:lstStyle/>
+          <a:p>
+            <a:pPr indent="0" marL="0">
+              <a:lnSpc>
+                <a:spcPts val="1600"/>
+              </a:lnSpc>
               <a:buNone/>
             </a:pPr>
             <a:r>
               <a:rPr lang="en-US" sz="1150" dirty="0">
                 <a:solidFill>
-                  <a:srgbClr val="5A6B7B"/>
-                </a:solidFill>
-                <a:latin typeface="Calibri" pitchFamily="34" charset="0"/>
-                <a:ea typeface="Calibri" pitchFamily="34" charset="-122"/>
-                <a:cs typeface="Calibri" pitchFamily="34" charset="-120"/>
-              </a:rPr>
-              <a:t>analyst time value</a:t>
+                  <a:srgbClr val="C6D4E0"/>
+                </a:solidFill>
+                <a:latin typeface="Calibri" pitchFamily="34" charset="0"/>
+                <a:ea typeface="Calibri" pitchFamily="34" charset="-122"/>
+                <a:cs typeface="Calibri" pitchFamily="34" charset="-120"/>
+              </a:rPr>
+              <a:t>executive · auditor · engineer phrasing</a:t>
             </a:r>
             <a:endParaRPr lang="en-US" sz="1150" dirty="0"/>
           </a:p>
-          <a:p>
-            <a:pPr algn="ctr" indent="0" marL="0">
-              <a:buNone/>
+        </p:txBody>
+      </p:sp>
+      <p:sp>
+        <p:nvSpPr>
+          <p:cNvPr id="18" name="Text 16"/>
+          <p:cNvSpPr txBox="1"/>
+          <p:nvPr/>
+        </p:nvSpPr>
+        <p:spPr>
+          <a:xfrm>
+            <a:off x="640080" y="3822192"/>
+            <a:ext cx="10881360" cy="320040"/>
+          </a:xfrm>
+          <a:prstGeom prst="rect">
+            <a:avLst/>
+          </a:prstGeom>
+          <a:noFill/>
+          <a:ln/>
+        </p:spPr>
+        <p:txBody>
+          <a:bodyPr wrap="square" lIns="0" tIns="0" rIns="0" bIns="0" rtlCol="0" anchor="ctr"/>
+          <a:lstStyle/>
+          <a:p>
+            <a:pPr indent="0" marL="0">
+              <a:buNone/>
+            </a:pPr>
+            <a:r>
+              <a:rPr lang="en-US" sz="1500" b="1" dirty="0">
+                <a:solidFill>
+                  <a:srgbClr val="FFFFFF"/>
+                </a:solidFill>
+                <a:latin typeface="Calibri" pitchFamily="34" charset="0"/>
+                <a:ea typeface="Calibri" pitchFamily="34" charset="-122"/>
+                <a:cs typeface="Calibri" pitchFamily="34" charset="-120"/>
+              </a:rPr>
+              <a:t>Guardrails that are mechanisms, not promises</a:t>
+            </a:r>
+            <a:endParaRPr lang="en-US" sz="1500" dirty="0"/>
+          </a:p>
+        </p:txBody>
+      </p:sp>
+      <p:sp>
+        <p:nvSpPr>
+          <p:cNvPr id="19" name="Text 17"/>
+          <p:cNvSpPr txBox="1"/>
+          <p:nvPr/>
+        </p:nvSpPr>
+        <p:spPr>
+          <a:xfrm>
+            <a:off x="822960" y="4187952"/>
+            <a:ext cx="10515600" cy="1737360"/>
+          </a:xfrm>
+          <a:prstGeom prst="rect">
+            <a:avLst/>
+          </a:prstGeom>
+          <a:noFill/>
+          <a:ln/>
+        </p:spPr>
+        <p:txBody>
+          <a:bodyPr wrap="square" lIns="0" tIns="0" rIns="0" bIns="0" rtlCol="0" anchor="ctr"/>
+          <a:lstStyle/>
+          <a:p>
+            <a:pPr marL="342900" indent="-342900">
+              <a:lnSpc>
+                <a:spcPts val="1600"/>
+              </a:lnSpc>
+              <a:spcAft>
+                <a:spcPts val="500"/>
+              </a:spcAft>
+              <a:buSzPct val="100000"/>
+              <a:buChar char="•"/>
             </a:pPr>
             <a:r>
               <a:rPr lang="en-US" sz="1150" dirty="0">
                 <a:solidFill>
-                  <a:srgbClr val="5A6B7B"/>
-                </a:solidFill>
-                <a:latin typeface="Calibri" pitchFamily="34" charset="0"/>
-                <a:ea typeface="Calibri" pitchFamily="34" charset="-122"/>
-                <a:cs typeface="Calibri" pitchFamily="34" charset="-120"/>
-              </a:rPr>
-              <a:t>per assessment cycle</a:t>
+                  <a:srgbClr val="D2DEE8"/>
+                </a:solidFill>
+                <a:latin typeface="Calibri" pitchFamily="34" charset="0"/>
+                <a:ea typeface="Calibri" pitchFamily="34" charset="-122"/>
+                <a:cs typeface="Calibri" pitchFamily="34" charset="-120"/>
+              </a:rPr>
+              <a:t>Every answer is audited after the fact: each policy ID, NIST control, ATT&amp;CK technique and OSCAL UUID it asserts is checked against the evidence, and anything unsupported is flagged on screen</a:t>
             </a:r>
             <a:endParaRPr lang="en-US" sz="1150" dirty="0"/>
           </a:p>
-        </p:txBody>
-      </p:sp>
-      <p:sp>
-        <p:nvSpPr>
-          <p:cNvPr id="31" name="Shape 29"/>
-          <p:cNvSpPr/>
-          <p:nvPr/>
-        </p:nvSpPr>
-        <p:spPr>
-          <a:xfrm>
-            <a:off x="8046720" y="3977640"/>
-            <a:ext cx="3474720" cy="1508760"/>
-          </a:xfrm>
-          <a:prstGeom prst="roundRect">
-            <a:avLst>
-              <a:gd name="adj" fmla="val 6061"/>
-            </a:avLst>
-          </a:prstGeom>
-          <a:solidFill>
-            <a:srgbClr val="0A1A2F"/>
-          </a:solidFill>
-          <a:ln w="12700">
-            <a:solidFill>
-              <a:srgbClr val="0A1A2F"/>
-            </a:solidFill>
-            <a:prstDash val="solid"/>
-          </a:ln>
-        </p:spPr>
-      </p:sp>
-      <p:sp>
-        <p:nvSpPr>
-          <p:cNvPr id="32" name="Text 30"/>
-          <p:cNvSpPr txBox="1"/>
-          <p:nvPr/>
-        </p:nvSpPr>
-        <p:spPr>
-          <a:xfrm>
-            <a:off x="8046720" y="4142232"/>
-            <a:ext cx="3474720" cy="749808"/>
-          </a:xfrm>
-          <a:prstGeom prst="rect">
-            <a:avLst/>
-          </a:prstGeom>
-          <a:noFill/>
-          <a:ln/>
-        </p:spPr>
-        <p:txBody>
-          <a:bodyPr wrap="square" lIns="0" tIns="0" rIns="0" bIns="0" rtlCol="0" anchor="ctr"/>
-          <a:lstStyle/>
-          <a:p>
-            <a:pPr algn="ctr" indent="0" marL="0">
-              <a:buNone/>
-            </a:pPr>
-            <a:r>
-              <a:rPr lang="en-US" sz="4000" b="1" dirty="0">
-                <a:solidFill>
-                  <a:srgbClr val="FFB700"/>
-                </a:solidFill>
-                <a:latin typeface="Calibri" pitchFamily="34" charset="0"/>
-                <a:ea typeface="Calibri" pitchFamily="34" charset="-122"/>
-                <a:cs typeface="Calibri" pitchFamily="34" charset="-120"/>
-              </a:rPr>
-              <a:t>$0.62</a:t>
-            </a:r>
-            <a:endParaRPr lang="en-US" sz="4000" dirty="0"/>
-          </a:p>
-        </p:txBody>
-      </p:sp>
-      <p:sp>
-        <p:nvSpPr>
-          <p:cNvPr id="33" name="Text 31"/>
-          <p:cNvSpPr txBox="1"/>
-          <p:nvPr/>
-        </p:nvSpPr>
-        <p:spPr>
-          <a:xfrm>
-            <a:off x="8156448" y="4892040"/>
-            <a:ext cx="3255264" cy="502920"/>
-          </a:xfrm>
-          <a:prstGeom prst="rect">
-            <a:avLst/>
-          </a:prstGeom>
-          <a:noFill/>
-          <a:ln/>
-        </p:spPr>
-        <p:txBody>
-          <a:bodyPr wrap="square" lIns="0" tIns="0" rIns="0" bIns="0" rtlCol="0" anchor="ctr"/>
-          <a:lstStyle/>
-          <a:p>
-            <a:pPr algn="ctr" indent="0" marL="0">
-              <a:buNone/>
+          <a:p>
+            <a:pPr marL="342900" indent="-342900">
+              <a:lnSpc>
+                <a:spcPts val="1600"/>
+              </a:lnSpc>
+              <a:spcAft>
+                <a:spcPts val="500"/>
+              </a:spcAft>
+              <a:buSzPct val="100000"/>
+              <a:buChar char="•"/>
             </a:pPr>
             <a:r>
               <a:rPr lang="en-US" sz="1150" dirty="0">
                 <a:solidFill>
-                  <a:srgbClr val="5A6B7B"/>
-                </a:solidFill>
-                <a:latin typeface="Calibri" pitchFamily="34" charset="0"/>
-                <a:ea typeface="Calibri" pitchFamily="34" charset="-122"/>
-                <a:cs typeface="Calibri" pitchFamily="34" charset="-120"/>
-              </a:rPr>
-              <a:t>cost to run</a:t>
+                  <a:srgbClr val="D2DEE8"/>
+                </a:solidFill>
+                <a:latin typeface="Calibri" pitchFamily="34" charset="0"/>
+                <a:ea typeface="Calibri" pitchFamily="34" charset="-122"/>
+                <a:cs typeface="Calibri" pitchFamily="34" charset="-120"/>
+              </a:rPr>
+              <a:t>Each verified citation resolves to the exact node in the validated document that carries it — “show me the evidence” is one click</a:t>
             </a:r>
             <a:endParaRPr lang="en-US" sz="1150" dirty="0"/>
           </a:p>
           <a:p>
-            <a:pPr algn="ctr" indent="0" marL="0">
-              <a:buNone/>
+            <a:pPr marL="342900" indent="-342900">
+              <a:lnSpc>
+                <a:spcPts val="1600"/>
+              </a:lnSpc>
+              <a:spcAft>
+                <a:spcPts val="500"/>
+              </a:spcAft>
+              <a:buSzPct val="100000"/>
+              <a:buChar char="•"/>
             </a:pPr>
             <a:r>
               <a:rPr lang="en-US" sz="1150" dirty="0">
                 <a:solidFill>
-                  <a:srgbClr val="5A6B7B"/>
-                </a:solidFill>
-                <a:latin typeface="Calibri" pitchFamily="34" charset="0"/>
-                <a:ea typeface="Calibri" pitchFamily="34" charset="-122"/>
-                <a:cs typeface="Calibri" pitchFamily="34" charset="-120"/>
-              </a:rPr>
-              <a:t>per month, all Azure</a:t>
+                  <a:srgbClr val="D2DEE8"/>
+                </a:solidFill>
+                <a:latin typeface="Calibri" pitchFamily="34" charset="0"/>
+                <a:ea typeface="Calibri" pitchFamily="34" charset="-122"/>
+                <a:cs typeface="Calibri" pitchFamily="34" charset="-120"/>
+              </a:rPr>
+              <a:t>Unknown policy IDs return an error — never a plausible-looking control</a:t>
             </a:r>
             <a:endParaRPr lang="en-US" sz="1150" dirty="0"/>
           </a:p>
-        </p:txBody>
-      </p:sp>
-      <p:sp>
-        <p:nvSpPr>
-          <p:cNvPr id="34" name="Text 32"/>
-          <p:cNvSpPr txBox="1"/>
-          <p:nvPr/>
-        </p:nvSpPr>
-        <p:spPr>
-          <a:xfrm>
-            <a:off x="640080" y="5715000"/>
-            <a:ext cx="10881360" cy="548640"/>
-          </a:xfrm>
-          <a:prstGeom prst="rect">
-            <a:avLst/>
-          </a:prstGeom>
-          <a:noFill/>
-          <a:ln/>
-        </p:spPr>
-        <p:txBody>
-          <a:bodyPr wrap="square" lIns="0" tIns="0" rIns="0" bIns="0" rtlCol="0" anchor="ctr"/>
-          <a:lstStyle/>
-          <a:p>
-            <a:pPr indent="0" marL="0">
+          <a:p>
+            <a:pPr marL="342900" indent="-342900">
               <a:lnSpc>
-                <a:spcPts val="2000"/>
+                <a:spcPts val="1600"/>
               </a:lnSpc>
-              <a:buNone/>
-            </a:pPr>
-            <a:r>
-              <a:rPr lang="en-US" sz="1350" b="1" dirty="0">
-                <a:solidFill>
-                  <a:srgbClr val="14304F"/>
-                </a:solidFill>
-                <a:latin typeface="Calibri" pitchFamily="34" charset="0"/>
-                <a:ea typeface="Calibri" pitchFamily="34" charset="-122"/>
-                <a:cs typeface="Calibri" pitchFamily="34" charset="-120"/>
-              </a:rPr>
-              <a:t>Roughly a 5,000x return. Across Virginia's 326 public institutions on the quarterly cycle SEC530 already requires: 26,000–90,000 analyst hours a year returned to actual security work.</a:t>
-            </a:r>
-            <a:endParaRPr lang="en-US" sz="1350" dirty="0"/>
+              <a:spcAft>
+                <a:spcPts val="500"/>
+              </a:spcAft>
+              <a:buSzPct val="100000"/>
+              <a:buChar char="•"/>
+            </a:pPr>
+            <a:r>
+              <a:rPr lang="en-US" sz="1150" dirty="0">
+                <a:solidFill>
+                  <a:srgbClr val="D2DEE8"/>
+                </a:solidFill>
+                <a:latin typeface="Calibri" pitchFamily="34" charset="0"/>
+                <a:ea typeface="Calibri" pitchFamily="34" charset="-122"/>
+                <a:cs typeface="Calibri" pitchFamily="34" charset="-120"/>
+              </a:rPr>
+              <a:t>Every mapping reports provenance; an AI proposal can never override CISA</a:t>
+            </a:r>
+            <a:endParaRPr lang="en-US" sz="1150" dirty="0"/>
+          </a:p>
+          <a:p>
+            <a:pPr marL="342900" indent="-342900">
+              <a:lnSpc>
+                <a:spcPts val="1600"/>
+              </a:lnSpc>
+              <a:spcAft>
+                <a:spcPts val="500"/>
+              </a:spcAft>
+              <a:buSzPct val="100000"/>
+              <a:buChar char="•"/>
+            </a:pPr>
+            <a:r>
+              <a:rPr lang="en-US" sz="1150" dirty="0">
+                <a:solidFill>
+                  <a:srgbClr val="D2DEE8"/>
+                </a:solidFill>
+                <a:latin typeface="Calibri" pitchFamily="34" charset="0"/>
+                <a:ea typeface="Calibri" pitchFamily="34" charset="-122"/>
+                <a:cs typeface="Calibri" pitchFamily="34" charset="-120"/>
+              </a:rPr>
+              <a:t>AI-authored remediation prose tagged generated-by=ai-assistant inside the POA&amp;M</a:t>
+            </a:r>
+            <a:endParaRPr lang="en-US" sz="1150" dirty="0"/>
+          </a:p>
+          <a:p>
+            <a:pPr marL="342900" indent="-342900">
+              <a:lnSpc>
+                <a:spcPts val="1600"/>
+              </a:lnSpc>
+              <a:spcAft>
+                <a:spcPts val="500"/>
+              </a:spcAft>
+              <a:buSzPct val="100000"/>
+              <a:buChar char="•"/>
+            </a:pPr>
+            <a:r>
+              <a:rPr lang="en-US" sz="1150" dirty="0">
+                <a:solidFill>
+                  <a:srgbClr val="D2DEE8"/>
+                </a:solidFill>
+                <a:latin typeface="Calibri" pitchFamily="34" charset="0"/>
+                <a:ea typeface="Calibri" pitchFamily="34" charset="-122"/>
+                <a:cs typeface="Calibri" pitchFamily="34" charset="-120"/>
+              </a:rPr>
+              <a:t>An uploaded scan is untrusted input — instruction-like text is neutralised before it reaches an agent</a:t>
+            </a:r>
+            <a:endParaRPr lang="en-US" sz="1150" dirty="0"/>
+          </a:p>
+        </p:txBody>
+      </p:sp>
+      <p:sp>
+        <p:nvSpPr>
+          <p:cNvPr id="20" name="Text 18"/>
+          <p:cNvSpPr txBox="1"/>
+          <p:nvPr/>
+        </p:nvSpPr>
+        <p:spPr>
+          <a:xfrm>
+            <a:off x="640080" y="5989320"/>
+            <a:ext cx="10881360" cy="320040"/>
+          </a:xfrm>
+          <a:prstGeom prst="rect">
+            <a:avLst/>
+          </a:prstGeom>
+          <a:noFill/>
+          <a:ln/>
+        </p:spPr>
+        <p:txBody>
+          <a:bodyPr wrap="square" lIns="0" tIns="0" rIns="0" bIns="0" rtlCol="0" anchor="ctr"/>
+          <a:lstStyle/>
+          <a:p>
+            <a:pPr indent="0" marL="0">
+              <a:buNone/>
+            </a:pPr>
+            <a:r>
+              <a:rPr lang="en-US" sz="1200" dirty="0">
+                <a:solidFill>
+                  <a:srgbClr val="7E93A6"/>
+                </a:solidFill>
+                <a:latin typeface="Calibri" pitchFamily="34" charset="0"/>
+                <a:ea typeface="Calibri" pitchFamily="34" charset="-122"/>
+                <a:cs typeface="Calibri" pitchFamily="34" charset="-120"/>
+              </a:rPr>
+              <a:t>gpt-5-mini on Microsoft Foundry  ·  keyless auth  ·  Microsoft Agent Framework</a:t>
+            </a:r>
+            <a:endParaRPr lang="en-US" sz="1200" dirty="0"/>
           </a:p>
         </p:txBody>
       </p:sp>
@@ -4071,7 +3797,7 @@
                 <a:ea typeface="Calibri" pitchFamily="34" charset="-122"/>
                 <a:cs typeface="Calibri" pitchFamily="34" charset="-120"/>
               </a:rPr>
-              <a:t>FEASIBILITY</a:t>
+              <a:t>MEASURED, NOT ASSERTED</a:t>
             </a:r>
             <a:endParaRPr lang="en-US" sz="1200" dirty="0"/>
           </a:p>
@@ -4110,7 +3836,7 @@
                 <a:ea typeface="Cambria" pitchFamily="34" charset="-122"/>
                 <a:cs typeface="Cambria" pitchFamily="34" charset="-120"/>
               </a:rPr>
-              <a:t>This is running today, not a prototype sketch</a:t>
+              <a:t>We tested our architecture against the obvious one</a:t>
             </a:r>
             <a:endParaRPr lang="en-US" sz="3400" dirty="0"/>
           </a:p>
@@ -4118,24 +3844,146 @@
       </p:sp>
       <p:sp>
         <p:nvSpPr>
-          <p:cNvPr id="4" name="Shape 2"/>
+          <p:cNvPr id="4" name="Text 2"/>
+          <p:cNvSpPr txBox="1"/>
+          <p:nvPr/>
+        </p:nvSpPr>
+        <p:spPr>
+          <a:xfrm>
+            <a:off x="640080" y="1298448"/>
+            <a:ext cx="10881360" cy="548640"/>
+          </a:xfrm>
+          <a:prstGeom prst="rect">
+            <a:avLst/>
+          </a:prstGeom>
+          <a:noFill/>
+          <a:ln/>
+        </p:spPr>
+        <p:txBody>
+          <a:bodyPr wrap="square" lIns="0" tIns="0" rIns="0" bIns="0" rtlCol="0" anchor="ctr"/>
+          <a:lstStyle/>
+          <a:p>
+            <a:pPr indent="0" marL="0">
+              <a:lnSpc>
+                <a:spcPts val="2000"/>
+              </a:lnSpc>
+              <a:buNone/>
+            </a:pPr>
+            <a:r>
+              <a:rPr lang="en-US" sz="1400" dirty="0">
+                <a:solidFill>
+                  <a:srgbClr val="10212F"/>
+                </a:solidFill>
+                <a:latin typeface="Calibri" pitchFamily="34" charset="0"/>
+                <a:ea typeface="Calibri" pitchFamily="34" charset="-122"/>
+                <a:cs typeface="Calibri" pitchFamily="34" charset="-120"/>
+              </a:rPr>
+              <a:t>Same 15 questions. Same model. Same grader. The only variable: one arm gets tools over validated OSCAL, the other gets the raw scanner output dumped into context.</a:t>
+            </a:r>
+            <a:endParaRPr lang="en-US" sz="1400" dirty="0"/>
+          </a:p>
+        </p:txBody>
+      </p:sp>
+      <p:sp>
+        <p:nvSpPr>
+          <p:cNvPr id="5" name="Text 3"/>
+          <p:cNvSpPr txBox="1"/>
+          <p:nvPr/>
+        </p:nvSpPr>
+        <p:spPr>
+          <a:xfrm>
+            <a:off x="6675120" y="1965960"/>
+            <a:ext cx="2194560" cy="365760"/>
+          </a:xfrm>
+          <a:prstGeom prst="rect">
+            <a:avLst/>
+          </a:prstGeom>
+          <a:noFill/>
+          <a:ln/>
+        </p:spPr>
+        <p:txBody>
+          <a:bodyPr wrap="square" lIns="0" tIns="0" rIns="0" bIns="0" rtlCol="0" anchor="ctr"/>
+          <a:lstStyle/>
+          <a:p>
+            <a:pPr algn="ctr" indent="0" marL="0">
+              <a:buNone/>
+            </a:pPr>
+            <a:r>
+              <a:rPr lang="en-US" sz="1150" b="1" spc="100" kern="0" dirty="0">
+                <a:solidFill>
+                  <a:srgbClr val="30A46C"/>
+                </a:solidFill>
+                <a:latin typeface="Calibri" pitchFamily="34" charset="0"/>
+                <a:ea typeface="Calibri" pitchFamily="34" charset="-122"/>
+                <a:cs typeface="Calibri" pitchFamily="34" charset="-120"/>
+              </a:rPr>
+              <a:t>GROUNDED</a:t>
+            </a:r>
+            <a:endParaRPr lang="en-US" sz="1150" dirty="0"/>
+          </a:p>
+        </p:txBody>
+      </p:sp>
+      <p:sp>
+        <p:nvSpPr>
+          <p:cNvPr id="6" name="Text 4"/>
+          <p:cNvSpPr txBox="1"/>
+          <p:nvPr/>
+        </p:nvSpPr>
+        <p:spPr>
+          <a:xfrm>
+            <a:off x="9052560" y="1965960"/>
+            <a:ext cx="2468880" cy="365760"/>
+          </a:xfrm>
+          <a:prstGeom prst="rect">
+            <a:avLst/>
+          </a:prstGeom>
+          <a:noFill/>
+          <a:ln/>
+        </p:spPr>
+        <p:txBody>
+          <a:bodyPr wrap="square" lIns="0" tIns="0" rIns="0" bIns="0" rtlCol="0" anchor="ctr"/>
+          <a:lstStyle/>
+          <a:p>
+            <a:pPr algn="ctr" indent="0" marL="0">
+              <a:buNone/>
+            </a:pPr>
+            <a:r>
+              <a:rPr lang="en-US" sz="1150" b="1" spc="100" kern="0" dirty="0">
+                <a:solidFill>
+                  <a:srgbClr val="E5484D"/>
+                </a:solidFill>
+                <a:latin typeface="Calibri" pitchFamily="34" charset="0"/>
+                <a:ea typeface="Calibri" pitchFamily="34" charset="-122"/>
+                <a:cs typeface="Calibri" pitchFamily="34" charset="-120"/>
+              </a:rPr>
+              <a:t>UNGROUNDED</a:t>
+            </a:r>
+            <a:endParaRPr lang="en-US" sz="1150" dirty="0"/>
+          </a:p>
+        </p:txBody>
+      </p:sp>
+      <p:sp>
+        <p:nvSpPr>
+          <p:cNvPr id="7" name="Shape 5"/>
           <p:cNvSpPr/>
           <p:nvPr/>
         </p:nvSpPr>
         <p:spPr>
           <a:xfrm>
-            <a:off x="685800" y="1481328"/>
-            <a:ext cx="384048" cy="384048"/>
-          </a:xfrm>
-          <a:prstGeom prst="ellipse">
-            <a:avLst/>
+            <a:off x="640080" y="2441448"/>
+            <a:ext cx="10881360" cy="512064"/>
+          </a:xfrm>
+          <a:prstGeom prst="roundRect">
+            <a:avLst>
+              <a:gd name="adj" fmla="val 8929"/>
+            </a:avLst>
           </a:prstGeom>
           <a:solidFill>
-            <a:srgbClr val="E8F6EF"/>
+            <a:srgbClr val="F4F7F9"/>
           </a:solidFill>
           <a:ln w="12700">
             <a:solidFill>
-              <a:srgbClr val="C3E9D7"/>
+              <a:srgbClr val="E2E8EE"/>
             </a:solidFill>
             <a:prstDash val="solid"/>
           </a:ln>
@@ -4143,14 +3991,53 @@
       </p:sp>
       <p:sp>
         <p:nvSpPr>
-          <p:cNvPr id="5" name="Text 3"/>
-          <p:cNvSpPr txBox="1"/>
-          <p:nvPr/>
-        </p:nvSpPr>
-        <p:spPr>
-          <a:xfrm>
-            <a:off x="685800" y="1536192"/>
-            <a:ext cx="384048" cy="274320"/>
+          <p:cNvPr id="8" name="Text 6"/>
+          <p:cNvSpPr txBox="1"/>
+          <p:nvPr/>
+        </p:nvSpPr>
+        <p:spPr>
+          <a:xfrm>
+            <a:off x="914400" y="2551176"/>
+            <a:ext cx="5577840" cy="329184"/>
+          </a:xfrm>
+          <a:prstGeom prst="rect">
+            <a:avLst/>
+          </a:prstGeom>
+          <a:noFill/>
+          <a:ln/>
+        </p:spPr>
+        <p:txBody>
+          <a:bodyPr wrap="square" lIns="0" tIns="0" rIns="0" bIns="0" rtlCol="0" anchor="ctr"/>
+          <a:lstStyle/>
+          <a:p>
+            <a:pPr indent="0" marL="0">
+              <a:buNone/>
+            </a:pPr>
+            <a:r>
+              <a:rPr lang="en-US" sz="1300" dirty="0">
+                <a:solidFill>
+                  <a:srgbClr val="10212F"/>
+                </a:solidFill>
+                <a:latin typeface="Calibri" pitchFamily="34" charset="0"/>
+                <a:ea typeface="Calibri" pitchFamily="34" charset="-122"/>
+                <a:cs typeface="Calibri" pitchFamily="34" charset="-120"/>
+              </a:rPr>
+              <a:t>Pass rate</a:t>
+            </a:r>
+            <a:endParaRPr lang="en-US" sz="1300" dirty="0"/>
+          </a:p>
+        </p:txBody>
+      </p:sp>
+      <p:sp>
+        <p:nvSpPr>
+          <p:cNvPr id="9" name="Text 7"/>
+          <p:cNvSpPr txBox="1"/>
+          <p:nvPr/>
+        </p:nvSpPr>
+        <p:spPr>
+          <a:xfrm>
+            <a:off x="6675120" y="2514600"/>
+            <a:ext cx="2194560" cy="384048"/>
           </a:xfrm>
           <a:prstGeom prst="rect">
             <a:avLst/>
@@ -4166,7 +4053,7 @@
               <a:buNone/>
             </a:pPr>
             <a:r>
-              <a:rPr lang="en-US" sz="1300" b="1" dirty="0">
+              <a:rPr lang="en-US" sz="1700" b="1" dirty="0">
                 <a:solidFill>
                   <a:srgbClr val="30A46C"/>
                 </a:solidFill>
@@ -4174,7 +4061,112 @@
                 <a:ea typeface="Calibri" pitchFamily="34" charset="-122"/>
                 <a:cs typeface="Calibri" pitchFamily="34" charset="-120"/>
               </a:rPr>
-              <a:t>✓</a:t>
+              <a:t>100%</a:t>
+            </a:r>
+            <a:endParaRPr lang="en-US" sz="1700" dirty="0"/>
+          </a:p>
+        </p:txBody>
+      </p:sp>
+      <p:sp>
+        <p:nvSpPr>
+          <p:cNvPr id="10" name="Text 8"/>
+          <p:cNvSpPr txBox="1"/>
+          <p:nvPr/>
+        </p:nvSpPr>
+        <p:spPr>
+          <a:xfrm>
+            <a:off x="9052560" y="2514600"/>
+            <a:ext cx="2468880" cy="384048"/>
+          </a:xfrm>
+          <a:prstGeom prst="rect">
+            <a:avLst/>
+          </a:prstGeom>
+          <a:noFill/>
+          <a:ln/>
+        </p:spPr>
+        <p:txBody>
+          <a:bodyPr wrap="square" lIns="0" tIns="0" rIns="0" bIns="0" rtlCol="0" anchor="ctr"/>
+          <a:lstStyle/>
+          <a:p>
+            <a:pPr algn="ctr" indent="0" marL="0">
+              <a:buNone/>
+            </a:pPr>
+            <a:r>
+              <a:rPr lang="en-US" sz="1700" b="1" dirty="0">
+                <a:solidFill>
+                  <a:srgbClr val="E5484D"/>
+                </a:solidFill>
+                <a:latin typeface="Calibri" pitchFamily="34" charset="0"/>
+                <a:ea typeface="Calibri" pitchFamily="34" charset="-122"/>
+                <a:cs typeface="Calibri" pitchFamily="34" charset="-120"/>
+              </a:rPr>
+              <a:t>80%</a:t>
+            </a:r>
+            <a:endParaRPr lang="en-US" sz="1700" dirty="0"/>
+          </a:p>
+        </p:txBody>
+      </p:sp>
+      <p:sp>
+        <p:nvSpPr>
+          <p:cNvPr id="11" name="Shape 9"/>
+          <p:cNvSpPr/>
+          <p:nvPr/>
+        </p:nvSpPr>
+        <p:spPr>
+          <a:xfrm>
+            <a:off x="640080" y="3008376"/>
+            <a:ext cx="10881360" cy="512064"/>
+          </a:xfrm>
+          <a:prstGeom prst="roundRect">
+            <a:avLst>
+              <a:gd name="adj" fmla="val 8929"/>
+            </a:avLst>
+          </a:prstGeom>
+          <a:solidFill>
+            <a:srgbClr val="FFFFFF"/>
+          </a:solidFill>
+          <a:ln w="12700">
+            <a:solidFill>
+              <a:srgbClr val="EDF1F4"/>
+            </a:solidFill>
+            <a:prstDash val="solid"/>
+          </a:ln>
+        </p:spPr>
+      </p:sp>
+      <p:sp>
+        <p:nvSpPr>
+          <p:cNvPr id="12" name="Text 10"/>
+          <p:cNvSpPr txBox="1"/>
+          <p:nvPr/>
+        </p:nvSpPr>
+        <p:spPr>
+          <a:xfrm>
+            <a:off x="914400" y="3118104"/>
+            <a:ext cx="5577840" cy="329184"/>
+          </a:xfrm>
+          <a:prstGeom prst="rect">
+            <a:avLst/>
+          </a:prstGeom>
+          <a:noFill/>
+          <a:ln/>
+        </p:spPr>
+        <p:txBody>
+          <a:bodyPr wrap="square" lIns="0" tIns="0" rIns="0" bIns="0" rtlCol="0" anchor="ctr"/>
+          <a:lstStyle/>
+          <a:p>
+            <a:pPr indent="0" marL="0">
+              <a:buNone/>
+            </a:pPr>
+            <a:r>
+              <a:rPr lang="en-US" sz="1300" dirty="0">
+                <a:solidFill>
+                  <a:srgbClr val="10212F"/>
+                </a:solidFill>
+                <a:latin typeface="Calibri" pitchFamily="34" charset="0"/>
+                <a:ea typeface="Calibri" pitchFamily="34" charset="-122"/>
+                <a:cs typeface="Calibri" pitchFamily="34" charset="-120"/>
+              </a:rPr>
+              <a:t>Answers asserting facts never given to it</a:t>
             </a:r>
             <a:endParaRPr lang="en-US" sz="1300" dirty="0"/>
           </a:p>
@@ -4182,30 +4174,135 @@
       </p:sp>
       <p:sp>
         <p:nvSpPr>
-          <p:cNvPr id="6" name="Text 4"/>
-          <p:cNvSpPr txBox="1"/>
-          <p:nvPr/>
-        </p:nvSpPr>
-        <p:spPr>
-          <a:xfrm>
-            <a:off x="1234440" y="1444752"/>
-            <a:ext cx="2286000" cy="292608"/>
-          </a:xfrm>
-          <a:prstGeom prst="rect">
-            <a:avLst/>
-          </a:prstGeom>
-          <a:noFill/>
-          <a:ln/>
-        </p:spPr>
-        <p:txBody>
-          <a:bodyPr wrap="square" lIns="0" tIns="0" rIns="0" bIns="0" rtlCol="0" anchor="ctr"/>
-          <a:lstStyle/>
-          <a:p>
-            <a:pPr indent="0" marL="0">
-              <a:buNone/>
-            </a:pPr>
-            <a:r>
-              <a:rPr lang="en-US" sz="1350" b="1" dirty="0">
+          <p:cNvPr id="13" name="Text 11"/>
+          <p:cNvSpPr txBox="1"/>
+          <p:nvPr/>
+        </p:nvSpPr>
+        <p:spPr>
+          <a:xfrm>
+            <a:off x="6675120" y="3081528"/>
+            <a:ext cx="2194560" cy="384048"/>
+          </a:xfrm>
+          <a:prstGeom prst="rect">
+            <a:avLst/>
+          </a:prstGeom>
+          <a:noFill/>
+          <a:ln/>
+        </p:spPr>
+        <p:txBody>
+          <a:bodyPr wrap="square" lIns="0" tIns="0" rIns="0" bIns="0" rtlCol="0" anchor="ctr"/>
+          <a:lstStyle/>
+          <a:p>
+            <a:pPr algn="ctr" indent="0" marL="0">
+              <a:buNone/>
+            </a:pPr>
+            <a:r>
+              <a:rPr lang="en-US" sz="1700" b="1" dirty="0">
+                <a:solidFill>
+                  <a:srgbClr val="30A46C"/>
+                </a:solidFill>
+                <a:latin typeface="Calibri" pitchFamily="34" charset="0"/>
+                <a:ea typeface="Calibri" pitchFamily="34" charset="-122"/>
+                <a:cs typeface="Calibri" pitchFamily="34" charset="-120"/>
+              </a:rPr>
+              <a:t>0</a:t>
+            </a:r>
+            <a:endParaRPr lang="en-US" sz="1700" dirty="0"/>
+          </a:p>
+        </p:txBody>
+      </p:sp>
+      <p:sp>
+        <p:nvSpPr>
+          <p:cNvPr id="14" name="Text 12"/>
+          <p:cNvSpPr txBox="1"/>
+          <p:nvPr/>
+        </p:nvSpPr>
+        <p:spPr>
+          <a:xfrm>
+            <a:off x="9052560" y="3081528"/>
+            <a:ext cx="2468880" cy="384048"/>
+          </a:xfrm>
+          <a:prstGeom prst="rect">
+            <a:avLst/>
+          </a:prstGeom>
+          <a:noFill/>
+          <a:ln/>
+        </p:spPr>
+        <p:txBody>
+          <a:bodyPr wrap="square" lIns="0" tIns="0" rIns="0" bIns="0" rtlCol="0" anchor="ctr"/>
+          <a:lstStyle/>
+          <a:p>
+            <a:pPr algn="ctr" indent="0" marL="0">
+              <a:buNone/>
+            </a:pPr>
+            <a:r>
+              <a:rPr lang="en-US" sz="1700" b="1" dirty="0">
+                <a:solidFill>
+                  <a:srgbClr val="E5484D"/>
+                </a:solidFill>
+                <a:latin typeface="Calibri" pitchFamily="34" charset="0"/>
+                <a:ea typeface="Calibri" pitchFamily="34" charset="-122"/>
+                <a:cs typeface="Calibri" pitchFamily="34" charset="-120"/>
+              </a:rPr>
+              <a:t>2</a:t>
+            </a:r>
+            <a:endParaRPr lang="en-US" sz="1700" dirty="0"/>
+          </a:p>
+        </p:txBody>
+      </p:sp>
+      <p:sp>
+        <p:nvSpPr>
+          <p:cNvPr id="15" name="Shape 13"/>
+          <p:cNvSpPr/>
+          <p:nvPr/>
+        </p:nvSpPr>
+        <p:spPr>
+          <a:xfrm>
+            <a:off x="640080" y="3575304"/>
+            <a:ext cx="10881360" cy="512064"/>
+          </a:xfrm>
+          <a:prstGeom prst="roundRect">
+            <a:avLst>
+              <a:gd name="adj" fmla="val 8929"/>
+            </a:avLst>
+          </a:prstGeom>
+          <a:solidFill>
+            <a:srgbClr val="F4F7F9"/>
+          </a:solidFill>
+          <a:ln w="12700">
+            <a:solidFill>
+              <a:srgbClr val="E2E8EE"/>
+            </a:solidFill>
+            <a:prstDash val="solid"/>
+          </a:ln>
+        </p:spPr>
+      </p:sp>
+      <p:sp>
+        <p:nvSpPr>
+          <p:cNvPr id="16" name="Text 14"/>
+          <p:cNvSpPr txBox="1"/>
+          <p:nvPr/>
+        </p:nvSpPr>
+        <p:spPr>
+          <a:xfrm>
+            <a:off x="914400" y="3685032"/>
+            <a:ext cx="5577840" cy="329184"/>
+          </a:xfrm>
+          <a:prstGeom prst="rect">
+            <a:avLst/>
+          </a:prstGeom>
+          <a:noFill/>
+          <a:ln/>
+        </p:spPr>
+        <p:txBody>
+          <a:bodyPr wrap="square" lIns="0" tIns="0" rIns="0" bIns="0" rtlCol="0" anchor="ctr"/>
+          <a:lstStyle/>
+          <a:p>
+            <a:pPr indent="0" marL="0">
+              <a:buNone/>
+            </a:pPr>
+            <a:r>
+              <a:rPr lang="en-US" sz="1300" dirty="0">
                 <a:solidFill>
                   <a:srgbClr val="10212F"/>
                 </a:solidFill>
@@ -4213,22 +4310,166 @@
                 <a:ea typeface="Calibri" pitchFamily="34" charset="-122"/>
                 <a:cs typeface="Calibri" pitchFamily="34" charset="-120"/>
               </a:rPr>
-              <a:t>Real data</a:t>
-            </a:r>
-            <a:endParaRPr lang="en-US" sz="1350" dirty="0"/>
-          </a:p>
-        </p:txBody>
-      </p:sp>
-      <p:sp>
-        <p:nvSpPr>
-          <p:cNvPr id="7" name="Text 5"/>
-          <p:cNvSpPr txBox="1"/>
-          <p:nvPr/>
-        </p:nvSpPr>
-        <p:spPr>
-          <a:xfrm>
-            <a:off x="3566160" y="1417320"/>
-            <a:ext cx="7955280" cy="685800"/>
+              <a:t>Security identifiers invented from memory</a:t>
+            </a:r>
+            <a:endParaRPr lang="en-US" sz="1300" dirty="0"/>
+          </a:p>
+        </p:txBody>
+      </p:sp>
+      <p:sp>
+        <p:nvSpPr>
+          <p:cNvPr id="17" name="Text 15"/>
+          <p:cNvSpPr txBox="1"/>
+          <p:nvPr/>
+        </p:nvSpPr>
+        <p:spPr>
+          <a:xfrm>
+            <a:off x="6675120" y="3648456"/>
+            <a:ext cx="2194560" cy="384048"/>
+          </a:xfrm>
+          <a:prstGeom prst="rect">
+            <a:avLst/>
+          </a:prstGeom>
+          <a:noFill/>
+          <a:ln/>
+        </p:spPr>
+        <p:txBody>
+          <a:bodyPr wrap="square" lIns="0" tIns="0" rIns="0" bIns="0" rtlCol="0" anchor="ctr"/>
+          <a:lstStyle/>
+          <a:p>
+            <a:pPr algn="ctr" indent="0" marL="0">
+              <a:buNone/>
+            </a:pPr>
+            <a:r>
+              <a:rPr lang="en-US" sz="1700" b="1" dirty="0">
+                <a:solidFill>
+                  <a:srgbClr val="30A46C"/>
+                </a:solidFill>
+                <a:latin typeface="Calibri" pitchFamily="34" charset="0"/>
+                <a:ea typeface="Calibri" pitchFamily="34" charset="-122"/>
+                <a:cs typeface="Calibri" pitchFamily="34" charset="-120"/>
+              </a:rPr>
+              <a:t>0</a:t>
+            </a:r>
+            <a:endParaRPr lang="en-US" sz="1700" dirty="0"/>
+          </a:p>
+        </p:txBody>
+      </p:sp>
+      <p:sp>
+        <p:nvSpPr>
+          <p:cNvPr id="18" name="Text 16"/>
+          <p:cNvSpPr txBox="1"/>
+          <p:nvPr/>
+        </p:nvSpPr>
+        <p:spPr>
+          <a:xfrm>
+            <a:off x="9052560" y="3648456"/>
+            <a:ext cx="2468880" cy="384048"/>
+          </a:xfrm>
+          <a:prstGeom prst="rect">
+            <a:avLst/>
+          </a:prstGeom>
+          <a:noFill/>
+          <a:ln/>
+        </p:spPr>
+        <p:txBody>
+          <a:bodyPr wrap="square" lIns="0" tIns="0" rIns="0" bIns="0" rtlCol="0" anchor="ctr"/>
+          <a:lstStyle/>
+          <a:p>
+            <a:pPr algn="ctr" indent="0" marL="0">
+              <a:buNone/>
+            </a:pPr>
+            <a:r>
+              <a:rPr lang="en-US" sz="1700" b="1" dirty="0">
+                <a:solidFill>
+                  <a:srgbClr val="E5484D"/>
+                </a:solidFill>
+                <a:latin typeface="Calibri" pitchFamily="34" charset="0"/>
+                <a:ea typeface="Calibri" pitchFamily="34" charset="-122"/>
+                <a:cs typeface="Calibri" pitchFamily="34" charset="-120"/>
+              </a:rPr>
+              <a:t>6</a:t>
+            </a:r>
+            <a:endParaRPr lang="en-US" sz="1700" dirty="0"/>
+          </a:p>
+        </p:txBody>
+      </p:sp>
+      <p:sp>
+        <p:nvSpPr>
+          <p:cNvPr id="19" name="Shape 17"/>
+          <p:cNvSpPr/>
+          <p:nvPr/>
+        </p:nvSpPr>
+        <p:spPr>
+          <a:xfrm>
+            <a:off x="640080" y="4315968"/>
+            <a:ext cx="10881360" cy="1600200"/>
+          </a:xfrm>
+          <a:prstGeom prst="roundRect">
+            <a:avLst>
+              <a:gd name="adj" fmla="val 5714"/>
+            </a:avLst>
+          </a:prstGeom>
+          <a:solidFill>
+            <a:srgbClr val="FDECEC"/>
+          </a:solidFill>
+          <a:ln w="12700">
+            <a:solidFill>
+              <a:srgbClr val="F7C9C9"/>
+            </a:solidFill>
+            <a:prstDash val="solid"/>
+          </a:ln>
+        </p:spPr>
+      </p:sp>
+      <p:sp>
+        <p:nvSpPr>
+          <p:cNvPr id="20" name="Text 18"/>
+          <p:cNvSpPr txBox="1"/>
+          <p:nvPr/>
+        </p:nvSpPr>
+        <p:spPr>
+          <a:xfrm>
+            <a:off x="914400" y="4480560"/>
+            <a:ext cx="10332720" cy="320040"/>
+          </a:xfrm>
+          <a:prstGeom prst="rect">
+            <a:avLst/>
+          </a:prstGeom>
+          <a:noFill/>
+          <a:ln/>
+        </p:spPr>
+        <p:txBody>
+          <a:bodyPr wrap="square" lIns="0" tIns="0" rIns="0" bIns="0" rtlCol="0" anchor="ctr"/>
+          <a:lstStyle/>
+          <a:p>
+            <a:pPr indent="0" marL="0">
+              <a:buNone/>
+            </a:pPr>
+            <a:r>
+              <a:rPr lang="en-US" sz="1400" b="1" dirty="0">
+                <a:solidFill>
+                  <a:srgbClr val="8A2A2A"/>
+                </a:solidFill>
+                <a:latin typeface="Calibri" pitchFamily="34" charset="0"/>
+                <a:ea typeface="Calibri" pitchFamily="34" charset="-122"/>
+                <a:cs typeface="Calibri" pitchFamily="34" charset="-120"/>
+              </a:rPr>
+              <a:t>The pass rate is not the story. Fabrication is.</a:t>
+            </a:r>
+            <a:endParaRPr lang="en-US" sz="1400" dirty="0"/>
+          </a:p>
+        </p:txBody>
+      </p:sp>
+      <p:sp>
+        <p:nvSpPr>
+          <p:cNvPr id="21" name="Text 19"/>
+          <p:cNvSpPr txBox="1"/>
+          <p:nvPr/>
+        </p:nvSpPr>
+        <p:spPr>
+          <a:xfrm>
+            <a:off x="914400" y="4818888"/>
+            <a:ext cx="10332720" cy="777240"/>
           </a:xfrm>
           <a:prstGeom prst="rect">
             <a:avLst/>
@@ -4249,13 +4490,13 @@
             <a:r>
               <a:rPr lang="en-US" sz="1250" dirty="0">
                 <a:solidFill>
-                  <a:srgbClr val="5A6B7B"/>
-                </a:solidFill>
-                <a:latin typeface="Calibri" pitchFamily="34" charset="0"/>
-                <a:ea typeface="Calibri" pitchFamily="34" charset="-122"/>
-                <a:cs typeface="Calibri" pitchFamily="34" charset="-120"/>
-              </a:rPr>
-              <a:t>CISA's published ScubaGear assessment — a genuine redacted run, CC0 licensed. No synthetic inputs.</a:t>
+                  <a:srgbClr val="10212F"/>
+                </a:solidFill>
+                <a:latin typeface="Calibri" pitchFamily="34" charset="0"/>
+                <a:ea typeface="Calibri" pitchFamily="34" charset="-122"/>
+                <a:cs typeface="Calibri" pitchFamily="34" charset="-120"/>
+              </a:rPr>
+              <a:t>The scanner file contains no NIST control IDs and no MITRE technique IDs — those come from CISA's baselines, which we integrate. Asked anyway, the ungrounded model did not decline. It asserted six identifiers from memory, and named T1110.003 “Credential Stuffing” when MITRE and CISA both say “Password Spraying”.</a:t>
             </a:r>
             <a:endParaRPr lang="en-US" sz="1250" dirty="0"/>
           </a:p>
@@ -4263,78 +4504,53 @@
       </p:sp>
       <p:sp>
         <p:nvSpPr>
-          <p:cNvPr id="8" name="Shape 6"/>
-          <p:cNvSpPr/>
-          <p:nvPr/>
-        </p:nvSpPr>
-        <p:spPr>
-          <a:xfrm>
-            <a:off x="685800" y="2377440"/>
-            <a:ext cx="384048" cy="384048"/>
-          </a:xfrm>
-          <a:prstGeom prst="ellipse">
-            <a:avLst/>
-          </a:prstGeom>
-          <a:solidFill>
-            <a:srgbClr val="E8F6EF"/>
-          </a:solidFill>
-          <a:ln w="12700">
-            <a:solidFill>
-              <a:srgbClr val="C3E9D7"/>
-            </a:solidFill>
-            <a:prstDash val="solid"/>
-          </a:ln>
-        </p:spPr>
-      </p:sp>
-      <p:sp>
-        <p:nvSpPr>
-          <p:cNvPr id="9" name="Text 7"/>
-          <p:cNvSpPr txBox="1"/>
-          <p:nvPr/>
-        </p:nvSpPr>
-        <p:spPr>
-          <a:xfrm>
-            <a:off x="685800" y="2432304"/>
-            <a:ext cx="384048" cy="274320"/>
-          </a:xfrm>
-          <a:prstGeom prst="rect">
-            <a:avLst/>
-          </a:prstGeom>
-          <a:noFill/>
-          <a:ln/>
-        </p:spPr>
-        <p:txBody>
-          <a:bodyPr wrap="square" lIns="0" tIns="0" rIns="0" bIns="0" rtlCol="0" anchor="ctr"/>
-          <a:lstStyle/>
-          <a:p>
-            <a:pPr algn="ctr" indent="0" marL="0">
-              <a:buNone/>
-            </a:pPr>
-            <a:r>
-              <a:rPr lang="en-US" sz="1300" b="1" dirty="0">
-                <a:solidFill>
-                  <a:srgbClr val="30A46C"/>
-                </a:solidFill>
-                <a:latin typeface="Calibri" pitchFamily="34" charset="0"/>
-                <a:ea typeface="Calibri" pitchFamily="34" charset="-122"/>
-                <a:cs typeface="Calibri" pitchFamily="34" charset="-120"/>
-              </a:rPr>
-              <a:t>✓</a:t>
-            </a:r>
-            <a:endParaRPr lang="en-US" sz="1300" dirty="0"/>
-          </a:p>
-        </p:txBody>
-      </p:sp>
-      <p:sp>
-        <p:nvSpPr>
-          <p:cNvPr id="10" name="Text 8"/>
-          <p:cNvSpPr txBox="1"/>
-          <p:nvPr/>
-        </p:nvSpPr>
-        <p:spPr>
-          <a:xfrm>
-            <a:off x="1234440" y="2340864"/>
-            <a:ext cx="2286000" cy="292608"/>
+          <p:cNvPr id="22" name="Text 20"/>
+          <p:cNvSpPr txBox="1"/>
+          <p:nvPr/>
+        </p:nvSpPr>
+        <p:spPr>
+          <a:xfrm>
+            <a:off x="914400" y="5577840"/>
+            <a:ext cx="10332720" cy="274320"/>
+          </a:xfrm>
+          <a:prstGeom prst="rect">
+            <a:avLst/>
+          </a:prstGeom>
+          <a:noFill/>
+          <a:ln/>
+        </p:spPr>
+        <p:txBody>
+          <a:bodyPr wrap="square" lIns="0" tIns="0" rIns="0" bIns="0" rtlCol="0" anchor="ctr"/>
+          <a:lstStyle/>
+          <a:p>
+            <a:pPr indent="0" marL="0">
+              <a:buNone/>
+            </a:pPr>
+            <a:r>
+              <a:rPr lang="en-US" sz="1250" b="1" i="1" dirty="0">
+                <a:solidFill>
+                  <a:srgbClr val="8A2A2A"/>
+                </a:solidFill>
+                <a:latin typeface="Calibri" pitchFamily="34" charset="0"/>
+                <a:ea typeface="Calibri" pitchFamily="34" charset="-122"/>
+                <a:cs typeface="Calibri" pitchFamily="34" charset="-120"/>
+              </a:rPr>
+              <a:t>Fluent, confident, and wrong in a way an analyst would have acted on.</a:t>
+            </a:r>
+            <a:endParaRPr lang="en-US" sz="1250" dirty="0"/>
+          </a:p>
+        </p:txBody>
+      </p:sp>
+      <p:sp>
+        <p:nvSpPr>
+          <p:cNvPr id="23" name="Text 21"/>
+          <p:cNvSpPr txBox="1"/>
+          <p:nvPr/>
+        </p:nvSpPr>
+        <p:spPr>
+          <a:xfrm>
+            <a:off x="640080" y="6099048"/>
+            <a:ext cx="10881360" cy="365760"/>
           </a:xfrm>
           <a:prstGeom prst="rect">
             <a:avLst/>
@@ -4352,531 +4568,15 @@
             <a:r>
               <a:rPr lang="en-US" sz="1350" b="1" dirty="0">
                 <a:solidFill>
-                  <a:srgbClr val="10212F"/>
-                </a:solidFill>
-                <a:latin typeface="Calibri" pitchFamily="34" charset="0"/>
-                <a:ea typeface="Calibri" pitchFamily="34" charset="-122"/>
-                <a:cs typeface="Calibri" pitchFamily="34" charset="-120"/>
-              </a:rPr>
-              <a:t>Real validation</a:t>
+                  <a:srgbClr val="14304F"/>
+                </a:solidFill>
+                <a:latin typeface="Calibri" pitchFamily="34" charset="0"/>
+                <a:ea typeface="Calibri" pitchFamily="34" charset="-122"/>
+                <a:cs typeface="Calibri" pitchFamily="34" charset="-120"/>
+              </a:rPr>
+              <a:t>Our agents asserted zero facts they were not given — enforced by a test that fails the build if it ever changes.</a:t>
             </a:r>
             <a:endParaRPr lang="en-US" sz="1350" dirty="0"/>
-          </a:p>
-        </p:txBody>
-      </p:sp>
-      <p:sp>
-        <p:nvSpPr>
-          <p:cNvPr id="11" name="Text 9"/>
-          <p:cNvSpPr txBox="1"/>
-          <p:nvPr/>
-        </p:nvSpPr>
-        <p:spPr>
-          <a:xfrm>
-            <a:off x="3566160" y="2313432"/>
-            <a:ext cx="7955280" cy="685800"/>
-          </a:xfrm>
-          <a:prstGeom prst="rect">
-            <a:avLst/>
-          </a:prstGeom>
-          <a:noFill/>
-          <a:ln/>
-        </p:spPr>
-        <p:txBody>
-          <a:bodyPr wrap="square" lIns="0" tIns="0" rIns="0" bIns="0" rtlCol="0" anchor="ctr"/>
-          <a:lstStyle/>
-          <a:p>
-            <a:pPr indent="0" marL="0">
-              <a:lnSpc>
-                <a:spcPts val="1800"/>
-              </a:lnSpc>
-              <a:buNone/>
-            </a:pPr>
-            <a:r>
-              <a:rPr lang="en-US" sz="1250" dirty="0">
-                <a:solidFill>
-                  <a:srgbClr val="5A6B7B"/>
-                </a:solidFill>
-                <a:latin typeface="Calibri" pitchFamily="34" charset="0"/>
-                <a:ea typeface="Calibri" pitchFamily="34" charset="-122"/>
-                <a:cs typeface="Calibri" pitchFamily="34" charset="-120"/>
-              </a:rPr>
-              <a:t>NIST oscal-cli in CI. The build fails if any document stops validating.</a:t>
-            </a:r>
-            <a:endParaRPr lang="en-US" sz="1250" dirty="0"/>
-          </a:p>
-        </p:txBody>
-      </p:sp>
-      <p:sp>
-        <p:nvSpPr>
-          <p:cNvPr id="12" name="Shape 10"/>
-          <p:cNvSpPr/>
-          <p:nvPr/>
-        </p:nvSpPr>
-        <p:spPr>
-          <a:xfrm>
-            <a:off x="685800" y="3273552"/>
-            <a:ext cx="384048" cy="384048"/>
-          </a:xfrm>
-          <a:prstGeom prst="ellipse">
-            <a:avLst/>
-          </a:prstGeom>
-          <a:solidFill>
-            <a:srgbClr val="E8F6EF"/>
-          </a:solidFill>
-          <a:ln w="12700">
-            <a:solidFill>
-              <a:srgbClr val="C3E9D7"/>
-            </a:solidFill>
-            <a:prstDash val="solid"/>
-          </a:ln>
-        </p:spPr>
-      </p:sp>
-      <p:sp>
-        <p:nvSpPr>
-          <p:cNvPr id="13" name="Text 11"/>
-          <p:cNvSpPr txBox="1"/>
-          <p:nvPr/>
-        </p:nvSpPr>
-        <p:spPr>
-          <a:xfrm>
-            <a:off x="685800" y="3328416"/>
-            <a:ext cx="384048" cy="274320"/>
-          </a:xfrm>
-          <a:prstGeom prst="rect">
-            <a:avLst/>
-          </a:prstGeom>
-          <a:noFill/>
-          <a:ln/>
-        </p:spPr>
-        <p:txBody>
-          <a:bodyPr wrap="square" lIns="0" tIns="0" rIns="0" bIns="0" rtlCol="0" anchor="ctr"/>
-          <a:lstStyle/>
-          <a:p>
-            <a:pPr algn="ctr" indent="0" marL="0">
-              <a:buNone/>
-            </a:pPr>
-            <a:r>
-              <a:rPr lang="en-US" sz="1300" b="1" dirty="0">
-                <a:solidFill>
-                  <a:srgbClr val="30A46C"/>
-                </a:solidFill>
-                <a:latin typeface="Calibri" pitchFamily="34" charset="0"/>
-                <a:ea typeface="Calibri" pitchFamily="34" charset="-122"/>
-                <a:cs typeface="Calibri" pitchFamily="34" charset="-120"/>
-              </a:rPr>
-              <a:t>✓</a:t>
-            </a:r>
-            <a:endParaRPr lang="en-US" sz="1300" dirty="0"/>
-          </a:p>
-        </p:txBody>
-      </p:sp>
-      <p:sp>
-        <p:nvSpPr>
-          <p:cNvPr id="14" name="Text 12"/>
-          <p:cNvSpPr txBox="1"/>
-          <p:nvPr/>
-        </p:nvSpPr>
-        <p:spPr>
-          <a:xfrm>
-            <a:off x="1234440" y="3236976"/>
-            <a:ext cx="2286000" cy="292608"/>
-          </a:xfrm>
-          <a:prstGeom prst="rect">
-            <a:avLst/>
-          </a:prstGeom>
-          <a:noFill/>
-          <a:ln/>
-        </p:spPr>
-        <p:txBody>
-          <a:bodyPr wrap="square" lIns="0" tIns="0" rIns="0" bIns="0" rtlCol="0" anchor="ctr"/>
-          <a:lstStyle/>
-          <a:p>
-            <a:pPr indent="0" marL="0">
-              <a:buNone/>
-            </a:pPr>
-            <a:r>
-              <a:rPr lang="en-US" sz="1350" b="1" dirty="0">
-                <a:solidFill>
-                  <a:srgbClr val="10212F"/>
-                </a:solidFill>
-                <a:latin typeface="Calibri" pitchFamily="34" charset="0"/>
-                <a:ea typeface="Calibri" pitchFamily="34" charset="-122"/>
-                <a:cs typeface="Calibri" pitchFamily="34" charset="-120"/>
-              </a:rPr>
-              <a:t>Real deployment</a:t>
-            </a:r>
-            <a:endParaRPr lang="en-US" sz="1350" dirty="0"/>
-          </a:p>
-        </p:txBody>
-      </p:sp>
-      <p:sp>
-        <p:nvSpPr>
-          <p:cNvPr id="15" name="Text 13"/>
-          <p:cNvSpPr txBox="1"/>
-          <p:nvPr/>
-        </p:nvSpPr>
-        <p:spPr>
-          <a:xfrm>
-            <a:off x="3566160" y="3209544"/>
-            <a:ext cx="7955280" cy="685800"/>
-          </a:xfrm>
-          <a:prstGeom prst="rect">
-            <a:avLst/>
-          </a:prstGeom>
-          <a:noFill/>
-          <a:ln/>
-        </p:spPr>
-        <p:txBody>
-          <a:bodyPr wrap="square" lIns="0" tIns="0" rIns="0" bIns="0" rtlCol="0" anchor="ctr"/>
-          <a:lstStyle/>
-          <a:p>
-            <a:pPr indent="0" marL="0">
-              <a:lnSpc>
-                <a:spcPts val="1800"/>
-              </a:lnSpc>
-              <a:buNone/>
-            </a:pPr>
-            <a:r>
-              <a:rPr lang="en-US" sz="1250" dirty="0">
-                <a:solidFill>
-                  <a:srgbClr val="5A6B7B"/>
-                </a:solidFill>
-                <a:latin typeface="Calibri" pitchFamily="34" charset="0"/>
-                <a:ea typeface="Calibri" pitchFamily="34" charset="-122"/>
-                <a:cs typeface="Calibri" pitchFamily="34" charset="-120"/>
-              </a:rPr>
-              <a:t>Microsoft Foundry project in eastus2, gpt-5-mini, keyless auth. Provisioned and answering.</a:t>
-            </a:r>
-            <a:endParaRPr lang="en-US" sz="1250" dirty="0"/>
-          </a:p>
-        </p:txBody>
-      </p:sp>
-      <p:sp>
-        <p:nvSpPr>
-          <p:cNvPr id="16" name="Shape 14"/>
-          <p:cNvSpPr/>
-          <p:nvPr/>
-        </p:nvSpPr>
-        <p:spPr>
-          <a:xfrm>
-            <a:off x="685800" y="4169664"/>
-            <a:ext cx="384048" cy="384048"/>
-          </a:xfrm>
-          <a:prstGeom prst="ellipse">
-            <a:avLst/>
-          </a:prstGeom>
-          <a:solidFill>
-            <a:srgbClr val="E8F6EF"/>
-          </a:solidFill>
-          <a:ln w="12700">
-            <a:solidFill>
-              <a:srgbClr val="C3E9D7"/>
-            </a:solidFill>
-            <a:prstDash val="solid"/>
-          </a:ln>
-        </p:spPr>
-      </p:sp>
-      <p:sp>
-        <p:nvSpPr>
-          <p:cNvPr id="17" name="Text 15"/>
-          <p:cNvSpPr txBox="1"/>
-          <p:nvPr/>
-        </p:nvSpPr>
-        <p:spPr>
-          <a:xfrm>
-            <a:off x="685800" y="4224528"/>
-            <a:ext cx="384048" cy="274320"/>
-          </a:xfrm>
-          <a:prstGeom prst="rect">
-            <a:avLst/>
-          </a:prstGeom>
-          <a:noFill/>
-          <a:ln/>
-        </p:spPr>
-        <p:txBody>
-          <a:bodyPr wrap="square" lIns="0" tIns="0" rIns="0" bIns="0" rtlCol="0" anchor="ctr"/>
-          <a:lstStyle/>
-          <a:p>
-            <a:pPr algn="ctr" indent="0" marL="0">
-              <a:buNone/>
-            </a:pPr>
-            <a:r>
-              <a:rPr lang="en-US" sz="1300" b="1" dirty="0">
-                <a:solidFill>
-                  <a:srgbClr val="30A46C"/>
-                </a:solidFill>
-                <a:latin typeface="Calibri" pitchFamily="34" charset="0"/>
-                <a:ea typeface="Calibri" pitchFamily="34" charset="-122"/>
-                <a:cs typeface="Calibri" pitchFamily="34" charset="-120"/>
-              </a:rPr>
-              <a:t>✓</a:t>
-            </a:r>
-            <a:endParaRPr lang="en-US" sz="1300" dirty="0"/>
-          </a:p>
-        </p:txBody>
-      </p:sp>
-      <p:sp>
-        <p:nvSpPr>
-          <p:cNvPr id="18" name="Text 16"/>
-          <p:cNvSpPr txBox="1"/>
-          <p:nvPr/>
-        </p:nvSpPr>
-        <p:spPr>
-          <a:xfrm>
-            <a:off x="1234440" y="4133088"/>
-            <a:ext cx="2286000" cy="292608"/>
-          </a:xfrm>
-          <a:prstGeom prst="rect">
-            <a:avLst/>
-          </a:prstGeom>
-          <a:noFill/>
-          <a:ln/>
-        </p:spPr>
-        <p:txBody>
-          <a:bodyPr wrap="square" lIns="0" tIns="0" rIns="0" bIns="0" rtlCol="0" anchor="ctr"/>
-          <a:lstStyle/>
-          <a:p>
-            <a:pPr indent="0" marL="0">
-              <a:buNone/>
-            </a:pPr>
-            <a:r>
-              <a:rPr lang="en-US" sz="1350" b="1" dirty="0">
-                <a:solidFill>
-                  <a:srgbClr val="10212F"/>
-                </a:solidFill>
-                <a:latin typeface="Calibri" pitchFamily="34" charset="0"/>
-                <a:ea typeface="Calibri" pitchFamily="34" charset="-122"/>
-                <a:cs typeface="Calibri" pitchFamily="34" charset="-120"/>
-              </a:rPr>
-              <a:t>Reproducible</a:t>
-            </a:r>
-            <a:endParaRPr lang="en-US" sz="1350" dirty="0"/>
-          </a:p>
-        </p:txBody>
-      </p:sp>
-      <p:sp>
-        <p:nvSpPr>
-          <p:cNvPr id="19" name="Text 17"/>
-          <p:cNvSpPr txBox="1"/>
-          <p:nvPr/>
-        </p:nvSpPr>
-        <p:spPr>
-          <a:xfrm>
-            <a:off x="3566160" y="4105656"/>
-            <a:ext cx="7955280" cy="685800"/>
-          </a:xfrm>
-          <a:prstGeom prst="rect">
-            <a:avLst/>
-          </a:prstGeom>
-          <a:noFill/>
-          <a:ln/>
-        </p:spPr>
-        <p:txBody>
-          <a:bodyPr wrap="square" lIns="0" tIns="0" rIns="0" bIns="0" rtlCol="0" anchor="ctr"/>
-          <a:lstStyle/>
-          <a:p>
-            <a:pPr indent="0" marL="0">
-              <a:lnSpc>
-                <a:spcPts val="1800"/>
-              </a:lnSpc>
-              <a:buNone/>
-            </a:pPr>
-            <a:r>
-              <a:rPr lang="en-US" sz="1250" dirty="0">
-                <a:solidFill>
-                  <a:srgbClr val="5A6B7B"/>
-                </a:solidFill>
-                <a:latin typeface="Calibri" pitchFamily="34" charset="0"/>
-                <a:ea typeface="Calibri" pitchFamily="34" charset="-122"/>
-                <a:cs typeface="Calibri" pitchFamily="34" charset="-120"/>
-              </a:rPr>
-              <a:t>Clone, install, generate, validate — four commands, fully offline for the deterministic core.</a:t>
-            </a:r>
-            <a:endParaRPr lang="en-US" sz="1250" dirty="0"/>
-          </a:p>
-        </p:txBody>
-      </p:sp>
-      <p:sp>
-        <p:nvSpPr>
-          <p:cNvPr id="20" name="Shape 18"/>
-          <p:cNvSpPr/>
-          <p:nvPr/>
-        </p:nvSpPr>
-        <p:spPr>
-          <a:xfrm>
-            <a:off x="685800" y="5065776"/>
-            <a:ext cx="384048" cy="384048"/>
-          </a:xfrm>
-          <a:prstGeom prst="ellipse">
-            <a:avLst/>
-          </a:prstGeom>
-          <a:solidFill>
-            <a:srgbClr val="FFF1CC"/>
-          </a:solidFill>
-          <a:ln w="12700">
-            <a:solidFill>
-              <a:srgbClr val="FFE2A8"/>
-            </a:solidFill>
-            <a:prstDash val="solid"/>
-          </a:ln>
-        </p:spPr>
-      </p:sp>
-      <p:sp>
-        <p:nvSpPr>
-          <p:cNvPr id="21" name="Text 19"/>
-          <p:cNvSpPr txBox="1"/>
-          <p:nvPr/>
-        </p:nvSpPr>
-        <p:spPr>
-          <a:xfrm>
-            <a:off x="685800" y="5120640"/>
-            <a:ext cx="384048" cy="274320"/>
-          </a:xfrm>
-          <a:prstGeom prst="rect">
-            <a:avLst/>
-          </a:prstGeom>
-          <a:noFill/>
-          <a:ln/>
-        </p:spPr>
-        <p:txBody>
-          <a:bodyPr wrap="square" lIns="0" tIns="0" rIns="0" bIns="0" rtlCol="0" anchor="ctr"/>
-          <a:lstStyle/>
-          <a:p>
-            <a:pPr algn="ctr" indent="0" marL="0">
-              <a:buNone/>
-            </a:pPr>
-            <a:r>
-              <a:rPr lang="en-US" sz="1300" b="1" dirty="0">
-                <a:solidFill>
-                  <a:srgbClr val="8A5A00"/>
-                </a:solidFill>
-                <a:latin typeface="Calibri" pitchFamily="34" charset="0"/>
-                <a:ea typeface="Calibri" pitchFamily="34" charset="-122"/>
-                <a:cs typeface="Calibri" pitchFamily="34" charset="-120"/>
-              </a:rPr>
-              <a:t>!</a:t>
-            </a:r>
-            <a:endParaRPr lang="en-US" sz="1300" dirty="0"/>
-          </a:p>
-        </p:txBody>
-      </p:sp>
-      <p:sp>
-        <p:nvSpPr>
-          <p:cNvPr id="22" name="Text 20"/>
-          <p:cNvSpPr txBox="1"/>
-          <p:nvPr/>
-        </p:nvSpPr>
-        <p:spPr>
-          <a:xfrm>
-            <a:off x="1234440" y="5029200"/>
-            <a:ext cx="2286000" cy="292608"/>
-          </a:xfrm>
-          <a:prstGeom prst="rect">
-            <a:avLst/>
-          </a:prstGeom>
-          <a:noFill/>
-          <a:ln/>
-        </p:spPr>
-        <p:txBody>
-          <a:bodyPr wrap="square" lIns="0" tIns="0" rIns="0" bIns="0" rtlCol="0" anchor="ctr"/>
-          <a:lstStyle/>
-          <a:p>
-            <a:pPr indent="0" marL="0">
-              <a:buNone/>
-            </a:pPr>
-            <a:r>
-              <a:rPr lang="en-US" sz="1350" b="1" dirty="0">
-                <a:solidFill>
-                  <a:srgbClr val="10212F"/>
-                </a:solidFill>
-                <a:latin typeface="Calibri" pitchFamily="34" charset="0"/>
-                <a:ea typeface="Calibri" pitchFamily="34" charset="-122"/>
-                <a:cs typeface="Calibri" pitchFamily="34" charset="-120"/>
-              </a:rPr>
-              <a:t>Honest about limits</a:t>
-            </a:r>
-            <a:endParaRPr lang="en-US" sz="1350" dirty="0"/>
-          </a:p>
-        </p:txBody>
-      </p:sp>
-      <p:sp>
-        <p:nvSpPr>
-          <p:cNvPr id="23" name="Text 21"/>
-          <p:cNvSpPr txBox="1"/>
-          <p:nvPr/>
-        </p:nvSpPr>
-        <p:spPr>
-          <a:xfrm>
-            <a:off x="3566160" y="5001768"/>
-            <a:ext cx="7955280" cy="685800"/>
-          </a:xfrm>
-          <a:prstGeom prst="rect">
-            <a:avLst/>
-          </a:prstGeom>
-          <a:noFill/>
-          <a:ln/>
-        </p:spPr>
-        <p:txBody>
-          <a:bodyPr wrap="square" lIns="0" tIns="0" rIns="0" bIns="0" rtlCol="0" anchor="ctr"/>
-          <a:lstStyle/>
-          <a:p>
-            <a:pPr indent="0" marL="0">
-              <a:lnSpc>
-                <a:spcPts val="1800"/>
-              </a:lnSpc>
-              <a:buNone/>
-            </a:pPr>
-            <a:r>
-              <a:rPr lang="en-US" sz="1250" dirty="0">
-                <a:solidFill>
-                  <a:srgbClr val="5A6B7B"/>
-                </a:solidFill>
-                <a:latin typeface="Calibri" pitchFamily="34" charset="0"/>
-                <a:ea typeface="Calibri" pitchFamily="34" charset="-122"/>
-                <a:cs typeface="Calibri" pitchFamily="34" charset="-120"/>
-              </a:rPr>
-              <a:t>oscal-cli has no mapping command yet, so that document is JSON-Schema validated only. We report cli:n/a rather than implying more.</a:t>
-            </a:r>
-            <a:endParaRPr lang="en-US" sz="1250" dirty="0"/>
-          </a:p>
-        </p:txBody>
-      </p:sp>
-      <p:sp>
-        <p:nvSpPr>
-          <p:cNvPr id="24" name="Text 22"/>
-          <p:cNvSpPr txBox="1"/>
-          <p:nvPr/>
-        </p:nvSpPr>
-        <p:spPr>
-          <a:xfrm>
-            <a:off x="640080" y="5943600"/>
-            <a:ext cx="10881360" cy="365760"/>
-          </a:xfrm>
-          <a:prstGeom prst="rect">
-            <a:avLst/>
-          </a:prstGeom>
-          <a:noFill/>
-          <a:ln/>
-        </p:spPr>
-        <p:txBody>
-          <a:bodyPr wrap="square" lIns="0" tIns="0" rIns="0" bIns="0" rtlCol="0" anchor="ctr"/>
-          <a:lstStyle/>
-          <a:p>
-            <a:pPr indent="0" marL="0">
-              <a:buNone/>
-            </a:pPr>
-            <a:r>
-              <a:rPr lang="en-US" sz="1250" i="1" dirty="0">
-                <a:solidFill>
-                  <a:srgbClr val="5A6B7B"/>
-                </a:solidFill>
-                <a:latin typeface="Calibri" pitchFamily="34" charset="0"/>
-                <a:ea typeface="Calibri" pitchFamily="34" charset="-122"/>
-                <a:cs typeface="Calibri" pitchFamily="34" charset="-120"/>
-              </a:rPr>
-              <a:t>Next: an Azure Container Apps deployment, Azure AI Search over baseline guidance, and the remaining M365 products.</a:t>
-            </a:r>
-            <a:endParaRPr lang="en-US" sz="1250" dirty="0"/>
           </a:p>
         </p:txBody>
       </p:sp>
@@ -4891,6 +4591,2196 @@
 <file path=ppt/slides/slide12.xml><?xml version="1.0" encoding="utf-8"?>
 <p:sld xmlns:a="http://schemas.openxmlformats.org/drawingml/2006/main" xmlns:r="http://schemas.openxmlformats.org/officeDocument/2006/relationships" xmlns:p="http://schemas.openxmlformats.org/presentationml/2006/main">
   <p:cSld name="Slide 12">
+    <p:bg>
+      <p:bgPr>
+        <a:solidFill>
+          <a:srgbClr val="FFFFFF"/>
+        </a:solidFill>
+      </p:bgPr>
+    </p:bg>
+    <p:spTree>
+      <p:nvGrpSpPr>
+        <p:cNvPr id="1" name=""/>
+        <p:cNvGrpSpPr/>
+        <p:nvPr/>
+      </p:nvGrpSpPr>
+      <p:grpSpPr>
+        <a:xfrm>
+          <a:off x="0" y="0"/>
+          <a:ext cx="0" cy="0"/>
+          <a:chOff x="0" y="0"/>
+          <a:chExt cx="0" cy="0"/>
+        </a:xfrm>
+      </p:grpSpPr>
+      <p:sp>
+        <p:nvSpPr>
+          <p:cNvPr id="2" name="Text 0"/>
+          <p:cNvSpPr txBox="1"/>
+          <p:nvPr/>
+        </p:nvSpPr>
+        <p:spPr>
+          <a:xfrm>
+            <a:off x="640080" y="182880"/>
+            <a:ext cx="10881360" cy="292608"/>
+          </a:xfrm>
+          <a:prstGeom prst="rect">
+            <a:avLst/>
+          </a:prstGeom>
+          <a:noFill/>
+          <a:ln/>
+        </p:spPr>
+        <p:txBody>
+          <a:bodyPr wrap="square" lIns="0" tIns="0" rIns="0" bIns="0" rtlCol="0" anchor="ctr"/>
+          <a:lstStyle/>
+          <a:p>
+            <a:pPr indent="0" marL="0">
+              <a:buNone/>
+            </a:pPr>
+            <a:r>
+              <a:rPr lang="en-US" sz="1200" b="1" spc="200" kern="0" dirty="0">
+                <a:solidFill>
+                  <a:srgbClr val="00A896"/>
+                </a:solidFill>
+                <a:latin typeface="Calibri" pitchFamily="34" charset="0"/>
+                <a:ea typeface="Calibri" pitchFamily="34" charset="-122"/>
+                <a:cs typeface="Calibri" pitchFamily="34" charset="-120"/>
+              </a:rPr>
+              <a:t>ECONOMIC VALUE &amp; SOCIETAL IMPACT</a:t>
+            </a:r>
+            <a:endParaRPr lang="en-US" sz="1200" dirty="0"/>
+          </a:p>
+        </p:txBody>
+      </p:sp>
+      <p:sp>
+        <p:nvSpPr>
+          <p:cNvPr id="3" name="Text 1"/>
+          <p:cNvSpPr txBox="1"/>
+          <p:nvPr/>
+        </p:nvSpPr>
+        <p:spPr>
+          <a:xfrm>
+            <a:off x="640080" y="411480"/>
+            <a:ext cx="10881360" cy="822960"/>
+          </a:xfrm>
+          <a:prstGeom prst="rect">
+            <a:avLst/>
+          </a:prstGeom>
+          <a:noFill/>
+          <a:ln/>
+        </p:spPr>
+        <p:txBody>
+          <a:bodyPr wrap="square" lIns="0" tIns="0" rIns="0" bIns="0" rtlCol="0" anchor="ctr"/>
+          <a:lstStyle/>
+          <a:p>
+            <a:pPr algn="l" indent="0" marL="0">
+              <a:buNone/>
+            </a:pPr>
+            <a:r>
+              <a:rPr lang="en-US" sz="3400" b="1" dirty="0">
+                <a:solidFill>
+                  <a:srgbClr val="10212F"/>
+                </a:solidFill>
+                <a:latin typeface="Cambria" pitchFamily="34" charset="0"/>
+                <a:ea typeface="Cambria" pitchFamily="34" charset="-122"/>
+                <a:cs typeface="Cambria" pitchFamily="34" charset="-120"/>
+              </a:rPr>
+              <a:t>Measured, not asserted</a:t>
+            </a:r>
+            <a:endParaRPr lang="en-US" sz="3400" dirty="0"/>
+          </a:p>
+        </p:txBody>
+      </p:sp>
+      <p:sp>
+        <p:nvSpPr>
+          <p:cNvPr id="4" name="Text 2"/>
+          <p:cNvSpPr txBox="1"/>
+          <p:nvPr/>
+        </p:nvSpPr>
+        <p:spPr>
+          <a:xfrm>
+            <a:off x="640080" y="1298448"/>
+            <a:ext cx="10881360" cy="548640"/>
+          </a:xfrm>
+          <a:prstGeom prst="rect">
+            <a:avLst/>
+          </a:prstGeom>
+          <a:noFill/>
+          <a:ln/>
+        </p:spPr>
+        <p:txBody>
+          <a:bodyPr wrap="square" lIns="0" tIns="0" rIns="0" bIns="0" rtlCol="0" anchor="ctr"/>
+          <a:lstStyle/>
+          <a:p>
+            <a:pPr indent="0" marL="0">
+              <a:lnSpc>
+                <a:spcPts val="2000"/>
+              </a:lnSpc>
+              <a:buNone/>
+            </a:pPr>
+            <a:r>
+              <a:rPr lang="en-US" sz="1400" dirty="0">
+                <a:solidFill>
+                  <a:srgbClr val="10212F"/>
+                </a:solidFill>
+                <a:latin typeface="Calibri" pitchFamily="34" charset="0"/>
+                <a:ea typeface="Calibri" pitchFamily="34" charset="-122"/>
+                <a:cs typeface="Calibri" pitchFamily="34" charset="-120"/>
+              </a:rPr>
+              <a:t>We refuse to publish a single headline number — that would imply precision we do not have. We separate what we measured from what we assumed, and expose every assumption.</a:t>
+            </a:r>
+            <a:endParaRPr lang="en-US" sz="1400" dirty="0"/>
+          </a:p>
+        </p:txBody>
+      </p:sp>
+      <p:sp>
+        <p:nvSpPr>
+          <p:cNvPr id="5" name="Shape 3"/>
+          <p:cNvSpPr/>
+          <p:nvPr/>
+        </p:nvSpPr>
+        <p:spPr>
+          <a:xfrm>
+            <a:off x="640080" y="1920240"/>
+            <a:ext cx="5303520" cy="1828800"/>
+          </a:xfrm>
+          <a:prstGeom prst="roundRect">
+            <a:avLst>
+              <a:gd name="adj" fmla="val 5000"/>
+            </a:avLst>
+          </a:prstGeom>
+          <a:solidFill>
+            <a:srgbClr val="E8F6EF"/>
+          </a:solidFill>
+          <a:ln w="12700">
+            <a:solidFill>
+              <a:srgbClr val="C3E9D7"/>
+            </a:solidFill>
+            <a:prstDash val="solid"/>
+          </a:ln>
+        </p:spPr>
+      </p:sp>
+      <p:sp>
+        <p:nvSpPr>
+          <p:cNvPr id="6" name="Text 4"/>
+          <p:cNvSpPr txBox="1"/>
+          <p:nvPr/>
+        </p:nvSpPr>
+        <p:spPr>
+          <a:xfrm>
+            <a:off x="868680" y="2066544"/>
+            <a:ext cx="4846320" cy="274320"/>
+          </a:xfrm>
+          <a:prstGeom prst="rect">
+            <a:avLst/>
+          </a:prstGeom>
+          <a:noFill/>
+          <a:ln/>
+        </p:spPr>
+        <p:txBody>
+          <a:bodyPr wrap="square" lIns="0" tIns="0" rIns="0" bIns="0" rtlCol="0" anchor="ctr"/>
+          <a:lstStyle/>
+          <a:p>
+            <a:pPr indent="0" marL="0">
+              <a:buNone/>
+            </a:pPr>
+            <a:r>
+              <a:rPr lang="en-US" sz="1100" b="1" spc="100" kern="0" dirty="0">
+                <a:solidFill>
+                  <a:srgbClr val="30A46C"/>
+                </a:solidFill>
+                <a:latin typeface="Calibri" pitchFamily="34" charset="0"/>
+                <a:ea typeface="Calibri" pitchFamily="34" charset="-122"/>
+                <a:cs typeface="Calibri" pitchFamily="34" charset="-120"/>
+              </a:rPr>
+              <a:t>MEASURED — counted from the artifacts</a:t>
+            </a:r>
+            <a:endParaRPr lang="en-US" sz="1100" dirty="0"/>
+          </a:p>
+        </p:txBody>
+      </p:sp>
+      <p:sp>
+        <p:nvSpPr>
+          <p:cNvPr id="7" name="Text 5"/>
+          <p:cNvSpPr txBox="1"/>
+          <p:nvPr/>
+        </p:nvSpPr>
+        <p:spPr>
+          <a:xfrm>
+            <a:off x="868680" y="2377440"/>
+            <a:ext cx="640080" cy="274320"/>
+          </a:xfrm>
+          <a:prstGeom prst="rect">
+            <a:avLst/>
+          </a:prstGeom>
+          <a:noFill/>
+          <a:ln/>
+        </p:spPr>
+        <p:txBody>
+          <a:bodyPr wrap="square" lIns="0" tIns="0" rIns="0" bIns="0" rtlCol="0" anchor="ctr"/>
+          <a:lstStyle/>
+          <a:p>
+            <a:pPr indent="0" marL="0">
+              <a:buNone/>
+            </a:pPr>
+            <a:r>
+              <a:rPr lang="en-US" sz="1400" b="1" dirty="0">
+                <a:solidFill>
+                  <a:srgbClr val="10212F"/>
+                </a:solidFill>
+                <a:latin typeface="Calibri" pitchFamily="34" charset="0"/>
+                <a:ea typeface="Calibri" pitchFamily="34" charset="-122"/>
+                <a:cs typeface="Calibri" pitchFamily="34" charset="-120"/>
+              </a:rPr>
+              <a:t>26</a:t>
+            </a:r>
+            <a:endParaRPr lang="en-US" sz="1400" dirty="0"/>
+          </a:p>
+        </p:txBody>
+      </p:sp>
+      <p:sp>
+        <p:nvSpPr>
+          <p:cNvPr id="8" name="Text 6"/>
+          <p:cNvSpPr txBox="1"/>
+          <p:nvPr/>
+        </p:nvSpPr>
+        <p:spPr>
+          <a:xfrm>
+            <a:off x="1554480" y="2395728"/>
+            <a:ext cx="4206240" cy="274320"/>
+          </a:xfrm>
+          <a:prstGeom prst="rect">
+            <a:avLst/>
+          </a:prstGeom>
+          <a:noFill/>
+          <a:ln/>
+        </p:spPr>
+        <p:txBody>
+          <a:bodyPr wrap="square" lIns="0" tIns="0" rIns="0" bIns="0" rtlCol="0" anchor="ctr"/>
+          <a:lstStyle/>
+          <a:p>
+            <a:pPr indent="0" marL="0">
+              <a:buNone/>
+            </a:pPr>
+            <a:r>
+              <a:rPr lang="en-US" sz="1150" dirty="0">
+                <a:solidFill>
+                  <a:srgbClr val="5A6B7B"/>
+                </a:solidFill>
+                <a:latin typeface="Calibri" pitchFamily="34" charset="0"/>
+                <a:ea typeface="Calibri" pitchFamily="34" charset="-122"/>
+                <a:cs typeface="Calibri" pitchFamily="34" charset="-120"/>
+              </a:rPr>
+              <a:t>POA&amp;M items with severity + deadline</a:t>
+            </a:r>
+            <a:endParaRPr lang="en-US" sz="1150" dirty="0"/>
+          </a:p>
+        </p:txBody>
+      </p:sp>
+      <p:sp>
+        <p:nvSpPr>
+          <p:cNvPr id="9" name="Text 7"/>
+          <p:cNvSpPr txBox="1"/>
+          <p:nvPr/>
+        </p:nvSpPr>
+        <p:spPr>
+          <a:xfrm>
+            <a:off x="868680" y="2697480"/>
+            <a:ext cx="640080" cy="274320"/>
+          </a:xfrm>
+          <a:prstGeom prst="rect">
+            <a:avLst/>
+          </a:prstGeom>
+          <a:noFill/>
+          <a:ln/>
+        </p:spPr>
+        <p:txBody>
+          <a:bodyPr wrap="square" lIns="0" tIns="0" rIns="0" bIns="0" rtlCol="0" anchor="ctr"/>
+          <a:lstStyle/>
+          <a:p>
+            <a:pPr indent="0" marL="0">
+              <a:buNone/>
+            </a:pPr>
+            <a:r>
+              <a:rPr lang="en-US" sz="1400" b="1" dirty="0">
+                <a:solidFill>
+                  <a:srgbClr val="10212F"/>
+                </a:solidFill>
+                <a:latin typeface="Calibri" pitchFamily="34" charset="0"/>
+                <a:ea typeface="Calibri" pitchFamily="34" charset="-122"/>
+                <a:cs typeface="Calibri" pitchFamily="34" charset="-120"/>
+              </a:rPr>
+              <a:t>91</a:t>
+            </a:r>
+            <a:endParaRPr lang="en-US" sz="1400" dirty="0"/>
+          </a:p>
+        </p:txBody>
+      </p:sp>
+      <p:sp>
+        <p:nvSpPr>
+          <p:cNvPr id="10" name="Text 8"/>
+          <p:cNvSpPr txBox="1"/>
+          <p:nvPr/>
+        </p:nvSpPr>
+        <p:spPr>
+          <a:xfrm>
+            <a:off x="1554480" y="2715768"/>
+            <a:ext cx="4206240" cy="274320"/>
+          </a:xfrm>
+          <a:prstGeom prst="rect">
+            <a:avLst/>
+          </a:prstGeom>
+          <a:noFill/>
+          <a:ln/>
+        </p:spPr>
+        <p:txBody>
+          <a:bodyPr wrap="square" lIns="0" tIns="0" rIns="0" bIns="0" rtlCol="0" anchor="ctr"/>
+          <a:lstStyle/>
+          <a:p>
+            <a:pPr indent="0" marL="0">
+              <a:buNone/>
+            </a:pPr>
+            <a:r>
+              <a:rPr lang="en-US" sz="1150" dirty="0">
+                <a:solidFill>
+                  <a:srgbClr val="5A6B7B"/>
+                </a:solidFill>
+                <a:latin typeface="Calibri" pitchFamily="34" charset="0"/>
+                <a:ea typeface="Calibri" pitchFamily="34" charset="-122"/>
+                <a:cs typeface="Calibri" pitchFamily="34" charset="-120"/>
+              </a:rPr>
+              <a:t>SSP implemented-requirements</a:t>
+            </a:r>
+            <a:endParaRPr lang="en-US" sz="1150" dirty="0"/>
+          </a:p>
+        </p:txBody>
+      </p:sp>
+      <p:sp>
+        <p:nvSpPr>
+          <p:cNvPr id="11" name="Text 9"/>
+          <p:cNvSpPr txBox="1"/>
+          <p:nvPr/>
+        </p:nvSpPr>
+        <p:spPr>
+          <a:xfrm>
+            <a:off x="868680" y="3017520"/>
+            <a:ext cx="640080" cy="274320"/>
+          </a:xfrm>
+          <a:prstGeom prst="rect">
+            <a:avLst/>
+          </a:prstGeom>
+          <a:noFill/>
+          <a:ln/>
+        </p:spPr>
+        <p:txBody>
+          <a:bodyPr wrap="square" lIns="0" tIns="0" rIns="0" bIns="0" rtlCol="0" anchor="ctr"/>
+          <a:lstStyle/>
+          <a:p>
+            <a:pPr indent="0" marL="0">
+              <a:buNone/>
+            </a:pPr>
+            <a:r>
+              <a:rPr lang="en-US" sz="1400" b="1" dirty="0">
+                <a:solidFill>
+                  <a:srgbClr val="10212F"/>
+                </a:solidFill>
+                <a:latin typeface="Calibri" pitchFamily="34" charset="0"/>
+                <a:ea typeface="Calibri" pitchFamily="34" charset="-122"/>
+                <a:cs typeface="Calibri" pitchFamily="34" charset="-120"/>
+              </a:rPr>
+              <a:t>89</a:t>
+            </a:r>
+            <a:endParaRPr lang="en-US" sz="1400" dirty="0"/>
+          </a:p>
+        </p:txBody>
+      </p:sp>
+      <p:sp>
+        <p:nvSpPr>
+          <p:cNvPr id="12" name="Text 10"/>
+          <p:cNvSpPr txBox="1"/>
+          <p:nvPr/>
+        </p:nvSpPr>
+        <p:spPr>
+          <a:xfrm>
+            <a:off x="1554480" y="3035808"/>
+            <a:ext cx="4206240" cy="274320"/>
+          </a:xfrm>
+          <a:prstGeom prst="rect">
+            <a:avLst/>
+          </a:prstGeom>
+          <a:noFill/>
+          <a:ln/>
+        </p:spPr>
+        <p:txBody>
+          <a:bodyPr wrap="square" lIns="0" tIns="0" rIns="0" bIns="0" rtlCol="0" anchor="ctr"/>
+          <a:lstStyle/>
+          <a:p>
+            <a:pPr indent="0" marL="0">
+              <a:buNone/>
+            </a:pPr>
+            <a:r>
+              <a:rPr lang="en-US" sz="1150" dirty="0">
+                <a:solidFill>
+                  <a:srgbClr val="5A6B7B"/>
+                </a:solidFill>
+                <a:latin typeface="Calibri" pitchFamily="34" charset="0"/>
+                <a:ea typeface="Calibri" pitchFamily="34" charset="-122"/>
+                <a:cs typeface="Calibri" pitchFamily="34" charset="-120"/>
+              </a:rPr>
+              <a:t>NIST 800-53 mappings resolved</a:t>
+            </a:r>
+            <a:endParaRPr lang="en-US" sz="1150" dirty="0"/>
+          </a:p>
+        </p:txBody>
+      </p:sp>
+      <p:sp>
+        <p:nvSpPr>
+          <p:cNvPr id="13" name="Text 11"/>
+          <p:cNvSpPr txBox="1"/>
+          <p:nvPr/>
+        </p:nvSpPr>
+        <p:spPr>
+          <a:xfrm>
+            <a:off x="868680" y="3337560"/>
+            <a:ext cx="640080" cy="274320"/>
+          </a:xfrm>
+          <a:prstGeom prst="rect">
+            <a:avLst/>
+          </a:prstGeom>
+          <a:noFill/>
+          <a:ln/>
+        </p:spPr>
+        <p:txBody>
+          <a:bodyPr wrap="square" lIns="0" tIns="0" rIns="0" bIns="0" rtlCol="0" anchor="ctr"/>
+          <a:lstStyle/>
+          <a:p>
+            <a:pPr indent="0" marL="0">
+              <a:buNone/>
+            </a:pPr>
+            <a:r>
+              <a:rPr lang="en-US" sz="1400" b="1" dirty="0">
+                <a:solidFill>
+                  <a:srgbClr val="10212F"/>
+                </a:solidFill>
+                <a:latin typeface="Calibri" pitchFamily="34" charset="0"/>
+                <a:ea typeface="Calibri" pitchFamily="34" charset="-122"/>
+                <a:cs typeface="Calibri" pitchFamily="34" charset="-120"/>
+              </a:rPr>
+              <a:t>26</a:t>
+            </a:r>
+            <a:endParaRPr lang="en-US" sz="1400" dirty="0"/>
+          </a:p>
+        </p:txBody>
+      </p:sp>
+      <p:sp>
+        <p:nvSpPr>
+          <p:cNvPr id="14" name="Text 12"/>
+          <p:cNvSpPr txBox="1"/>
+          <p:nvPr/>
+        </p:nvSpPr>
+        <p:spPr>
+          <a:xfrm>
+            <a:off x="1554480" y="3355848"/>
+            <a:ext cx="4206240" cy="274320"/>
+          </a:xfrm>
+          <a:prstGeom prst="rect">
+            <a:avLst/>
+          </a:prstGeom>
+          <a:noFill/>
+          <a:ln/>
+        </p:spPr>
+        <p:txBody>
+          <a:bodyPr wrap="square" lIns="0" tIns="0" rIns="0" bIns="0" rtlCol="0" anchor="ctr"/>
+          <a:lstStyle/>
+          <a:p>
+            <a:pPr indent="0" marL="0">
+              <a:buNone/>
+            </a:pPr>
+            <a:r>
+              <a:rPr lang="en-US" sz="1150" dirty="0">
+                <a:solidFill>
+                  <a:srgbClr val="5A6B7B"/>
+                </a:solidFill>
+                <a:latin typeface="Calibri" pitchFamily="34" charset="0"/>
+                <a:ea typeface="Calibri" pitchFamily="34" charset="-122"/>
+                <a:cs typeface="Calibri" pitchFamily="34" charset="-120"/>
+              </a:rPr>
+              <a:t>phantom drift findings avoided</a:t>
+            </a:r>
+            <a:endParaRPr lang="en-US" sz="1150" dirty="0"/>
+          </a:p>
+        </p:txBody>
+      </p:sp>
+      <p:sp>
+        <p:nvSpPr>
+          <p:cNvPr id="15" name="Shape 13"/>
+          <p:cNvSpPr/>
+          <p:nvPr/>
+        </p:nvSpPr>
+        <p:spPr>
+          <a:xfrm>
+            <a:off x="6217920" y="1920240"/>
+            <a:ext cx="5303520" cy="1828800"/>
+          </a:xfrm>
+          <a:prstGeom prst="roundRect">
+            <a:avLst>
+              <a:gd name="adj" fmla="val 5000"/>
+            </a:avLst>
+          </a:prstGeom>
+          <a:solidFill>
+            <a:srgbClr val="FFF6E0"/>
+          </a:solidFill>
+          <a:ln w="12700">
+            <a:solidFill>
+              <a:srgbClr val="FFE2A8"/>
+            </a:solidFill>
+            <a:prstDash val="solid"/>
+          </a:ln>
+        </p:spPr>
+      </p:sp>
+      <p:sp>
+        <p:nvSpPr>
+          <p:cNvPr id="16" name="Text 14"/>
+          <p:cNvSpPr txBox="1"/>
+          <p:nvPr/>
+        </p:nvSpPr>
+        <p:spPr>
+          <a:xfrm>
+            <a:off x="6446520" y="2066544"/>
+            <a:ext cx="4846320" cy="274320"/>
+          </a:xfrm>
+          <a:prstGeom prst="rect">
+            <a:avLst/>
+          </a:prstGeom>
+          <a:noFill/>
+          <a:ln/>
+        </p:spPr>
+        <p:txBody>
+          <a:bodyPr wrap="square" lIns="0" tIns="0" rIns="0" bIns="0" rtlCol="0" anchor="ctr"/>
+          <a:lstStyle/>
+          <a:p>
+            <a:pPr indent="0" marL="0">
+              <a:buNone/>
+            </a:pPr>
+            <a:r>
+              <a:rPr lang="en-US" sz="1100" b="1" spc="100" kern="0" dirty="0">
+                <a:solidFill>
+                  <a:srgbClr val="8A5A00"/>
+                </a:solidFill>
+                <a:latin typeface="Calibri" pitchFamily="34" charset="0"/>
+                <a:ea typeface="Calibri" pitchFamily="34" charset="-122"/>
+                <a:cs typeface="Calibri" pitchFamily="34" charset="-120"/>
+              </a:rPr>
+              <a:t>ASSUMED — adjustable by the reader</a:t>
+            </a:r>
+            <a:endParaRPr lang="en-US" sz="1100" dirty="0"/>
+          </a:p>
+        </p:txBody>
+      </p:sp>
+      <p:sp>
+        <p:nvSpPr>
+          <p:cNvPr id="17" name="Text 15"/>
+          <p:cNvSpPr txBox="1"/>
+          <p:nvPr/>
+        </p:nvSpPr>
+        <p:spPr>
+          <a:xfrm>
+            <a:off x="6446520" y="2377440"/>
+            <a:ext cx="1188720" cy="274320"/>
+          </a:xfrm>
+          <a:prstGeom prst="rect">
+            <a:avLst/>
+          </a:prstGeom>
+          <a:noFill/>
+          <a:ln/>
+        </p:spPr>
+        <p:txBody>
+          <a:bodyPr wrap="square" lIns="0" tIns="0" rIns="0" bIns="0" rtlCol="0" anchor="ctr"/>
+          <a:lstStyle/>
+          <a:p>
+            <a:pPr indent="0" marL="0">
+              <a:buNone/>
+            </a:pPr>
+            <a:r>
+              <a:rPr lang="en-US" sz="1250" b="1" dirty="0">
+                <a:solidFill>
+                  <a:srgbClr val="10212F"/>
+                </a:solidFill>
+                <a:latin typeface="Calibri" pitchFamily="34" charset="0"/>
+                <a:ea typeface="Calibri" pitchFamily="34" charset="-122"/>
+                <a:cs typeface="Calibri" pitchFamily="34" charset="-120"/>
+              </a:rPr>
+              <a:t>20 min</a:t>
+            </a:r>
+            <a:endParaRPr lang="en-US" sz="1250" dirty="0"/>
+          </a:p>
+        </p:txBody>
+      </p:sp>
+      <p:sp>
+        <p:nvSpPr>
+          <p:cNvPr id="18" name="Text 16"/>
+          <p:cNvSpPr txBox="1"/>
+          <p:nvPr/>
+        </p:nvSpPr>
+        <p:spPr>
+          <a:xfrm>
+            <a:off x="7726680" y="2395728"/>
+            <a:ext cx="3657600" cy="274320"/>
+          </a:xfrm>
+          <a:prstGeom prst="rect">
+            <a:avLst/>
+          </a:prstGeom>
+          <a:noFill/>
+          <a:ln/>
+        </p:spPr>
+        <p:txBody>
+          <a:bodyPr wrap="square" lIns="0" tIns="0" rIns="0" bIns="0" rtlCol="0" anchor="ctr"/>
+          <a:lstStyle/>
+          <a:p>
+            <a:pPr indent="0" marL="0">
+              <a:buNone/>
+            </a:pPr>
+            <a:r>
+              <a:rPr lang="en-US" sz="1150" dirty="0">
+                <a:solidFill>
+                  <a:srgbClr val="5A6B7B"/>
+                </a:solidFill>
+                <a:latin typeface="Calibri" pitchFamily="34" charset="0"/>
+                <a:ea typeface="Calibri" pitchFamily="34" charset="-122"/>
+                <a:cs typeface="Calibri" pitchFamily="34" charset="-120"/>
+              </a:rPr>
+              <a:t>to hand-author one POA&amp;M item</a:t>
+            </a:r>
+            <a:endParaRPr lang="en-US" sz="1150" dirty="0"/>
+          </a:p>
+        </p:txBody>
+      </p:sp>
+      <p:sp>
+        <p:nvSpPr>
+          <p:cNvPr id="19" name="Text 17"/>
+          <p:cNvSpPr txBox="1"/>
+          <p:nvPr/>
+        </p:nvSpPr>
+        <p:spPr>
+          <a:xfrm>
+            <a:off x="6446520" y="2697480"/>
+            <a:ext cx="1188720" cy="274320"/>
+          </a:xfrm>
+          <a:prstGeom prst="rect">
+            <a:avLst/>
+          </a:prstGeom>
+          <a:noFill/>
+          <a:ln/>
+        </p:spPr>
+        <p:txBody>
+          <a:bodyPr wrap="square" lIns="0" tIns="0" rIns="0" bIns="0" rtlCol="0" anchor="ctr"/>
+          <a:lstStyle/>
+          <a:p>
+            <a:pPr indent="0" marL="0">
+              <a:buNone/>
+            </a:pPr>
+            <a:r>
+              <a:rPr lang="en-US" sz="1250" b="1" dirty="0">
+                <a:solidFill>
+                  <a:srgbClr val="10212F"/>
+                </a:solidFill>
+                <a:latin typeface="Calibri" pitchFamily="34" charset="0"/>
+                <a:ea typeface="Calibri" pitchFamily="34" charset="-122"/>
+                <a:cs typeface="Calibri" pitchFamily="34" charset="-120"/>
+              </a:rPr>
+              <a:t>10 min</a:t>
+            </a:r>
+            <a:endParaRPr lang="en-US" sz="1250" dirty="0"/>
+          </a:p>
+        </p:txBody>
+      </p:sp>
+      <p:sp>
+        <p:nvSpPr>
+          <p:cNvPr id="20" name="Text 18"/>
+          <p:cNvSpPr txBox="1"/>
+          <p:nvPr/>
+        </p:nvSpPr>
+        <p:spPr>
+          <a:xfrm>
+            <a:off x="7726680" y="2715768"/>
+            <a:ext cx="3657600" cy="274320"/>
+          </a:xfrm>
+          <a:prstGeom prst="rect">
+            <a:avLst/>
+          </a:prstGeom>
+          <a:noFill/>
+          <a:ln/>
+        </p:spPr>
+        <p:txBody>
+          <a:bodyPr wrap="square" lIns="0" tIns="0" rIns="0" bIns="0" rtlCol="0" anchor="ctr"/>
+          <a:lstStyle/>
+          <a:p>
+            <a:pPr indent="0" marL="0">
+              <a:buNone/>
+            </a:pPr>
+            <a:r>
+              <a:rPr lang="en-US" sz="1150" dirty="0">
+                <a:solidFill>
+                  <a:srgbClr val="5A6B7B"/>
+                </a:solidFill>
+                <a:latin typeface="Calibri" pitchFamily="34" charset="0"/>
+                <a:ea typeface="Calibri" pitchFamily="34" charset="-122"/>
+                <a:cs typeface="Calibri" pitchFamily="34" charset="-120"/>
+              </a:rPr>
+              <a:t>per SSP requirement</a:t>
+            </a:r>
+            <a:endParaRPr lang="en-US" sz="1150" dirty="0"/>
+          </a:p>
+        </p:txBody>
+      </p:sp>
+      <p:sp>
+        <p:nvSpPr>
+          <p:cNvPr id="21" name="Text 19"/>
+          <p:cNvSpPr txBox="1"/>
+          <p:nvPr/>
+        </p:nvSpPr>
+        <p:spPr>
+          <a:xfrm>
+            <a:off x="6446520" y="3017520"/>
+            <a:ext cx="1188720" cy="274320"/>
+          </a:xfrm>
+          <a:prstGeom prst="rect">
+            <a:avLst/>
+          </a:prstGeom>
+          <a:noFill/>
+          <a:ln/>
+        </p:spPr>
+        <p:txBody>
+          <a:bodyPr wrap="square" lIns="0" tIns="0" rIns="0" bIns="0" rtlCol="0" anchor="ctr"/>
+          <a:lstStyle/>
+          <a:p>
+            <a:pPr indent="0" marL="0">
+              <a:buNone/>
+            </a:pPr>
+            <a:r>
+              <a:rPr lang="en-US" sz="1250" b="1" dirty="0">
+                <a:solidFill>
+                  <a:srgbClr val="10212F"/>
+                </a:solidFill>
+                <a:latin typeface="Calibri" pitchFamily="34" charset="0"/>
+                <a:ea typeface="Calibri" pitchFamily="34" charset="-122"/>
+                <a:cs typeface="Calibri" pitchFamily="34" charset="-120"/>
+              </a:rPr>
+              <a:t>6 min</a:t>
+            </a:r>
+            <a:endParaRPr lang="en-US" sz="1250" dirty="0"/>
+          </a:p>
+        </p:txBody>
+      </p:sp>
+      <p:sp>
+        <p:nvSpPr>
+          <p:cNvPr id="22" name="Text 20"/>
+          <p:cNvSpPr txBox="1"/>
+          <p:nvPr/>
+        </p:nvSpPr>
+        <p:spPr>
+          <a:xfrm>
+            <a:off x="7726680" y="3035808"/>
+            <a:ext cx="3657600" cy="274320"/>
+          </a:xfrm>
+          <a:prstGeom prst="rect">
+            <a:avLst/>
+          </a:prstGeom>
+          <a:noFill/>
+          <a:ln/>
+        </p:spPr>
+        <p:txBody>
+          <a:bodyPr wrap="square" lIns="0" tIns="0" rIns="0" bIns="0" rtlCol="0" anchor="ctr"/>
+          <a:lstStyle/>
+          <a:p>
+            <a:pPr indent="0" marL="0">
+              <a:buNone/>
+            </a:pPr>
+            <a:r>
+              <a:rPr lang="en-US" sz="1150" dirty="0">
+                <a:solidFill>
+                  <a:srgbClr val="5A6B7B"/>
+                </a:solidFill>
+                <a:latin typeface="Calibri" pitchFamily="34" charset="0"/>
+                <a:ea typeface="Calibri" pitchFamily="34" charset="-122"/>
+                <a:cs typeface="Calibri" pitchFamily="34" charset="-120"/>
+              </a:rPr>
+              <a:t>per NIST mapping lookup</a:t>
+            </a:r>
+            <a:endParaRPr lang="en-US" sz="1150" dirty="0"/>
+          </a:p>
+        </p:txBody>
+      </p:sp>
+      <p:sp>
+        <p:nvSpPr>
+          <p:cNvPr id="23" name="Text 21"/>
+          <p:cNvSpPr txBox="1"/>
+          <p:nvPr/>
+        </p:nvSpPr>
+        <p:spPr>
+          <a:xfrm>
+            <a:off x="6446520" y="3337560"/>
+            <a:ext cx="1188720" cy="274320"/>
+          </a:xfrm>
+          <a:prstGeom prst="rect">
+            <a:avLst/>
+          </a:prstGeom>
+          <a:noFill/>
+          <a:ln/>
+        </p:spPr>
+        <p:txBody>
+          <a:bodyPr wrap="square" lIns="0" tIns="0" rIns="0" bIns="0" rtlCol="0" anchor="ctr"/>
+          <a:lstStyle/>
+          <a:p>
+            <a:pPr indent="0" marL="0">
+              <a:buNone/>
+            </a:pPr>
+            <a:r>
+              <a:rPr lang="en-US" sz="1250" b="1" dirty="0">
+                <a:solidFill>
+                  <a:srgbClr val="10212F"/>
+                </a:solidFill>
+                <a:latin typeface="Calibri" pitchFamily="34" charset="0"/>
+                <a:ea typeface="Calibri" pitchFamily="34" charset="-122"/>
+                <a:cs typeface="Calibri" pitchFamily="34" charset="-120"/>
+              </a:rPr>
+              <a:t>$62.11/h</a:t>
+            </a:r>
+            <a:endParaRPr lang="en-US" sz="1250" dirty="0"/>
+          </a:p>
+        </p:txBody>
+      </p:sp>
+      <p:sp>
+        <p:nvSpPr>
+          <p:cNvPr id="24" name="Text 22"/>
+          <p:cNvSpPr txBox="1"/>
+          <p:nvPr/>
+        </p:nvSpPr>
+        <p:spPr>
+          <a:xfrm>
+            <a:off x="7726680" y="3355848"/>
+            <a:ext cx="3657600" cy="274320"/>
+          </a:xfrm>
+          <a:prstGeom prst="rect">
+            <a:avLst/>
+          </a:prstGeom>
+          <a:noFill/>
+          <a:ln/>
+        </p:spPr>
+        <p:txBody>
+          <a:bodyPr wrap="square" lIns="0" tIns="0" rIns="0" bIns="0" rtlCol="0" anchor="ctr"/>
+          <a:lstStyle/>
+          <a:p>
+            <a:pPr indent="0" marL="0">
+              <a:buNone/>
+            </a:pPr>
+            <a:r>
+              <a:rPr lang="en-US" sz="1150" dirty="0">
+                <a:solidFill>
+                  <a:srgbClr val="5A6B7B"/>
+                </a:solidFill>
+                <a:latin typeface="Calibri" pitchFamily="34" charset="0"/>
+                <a:ea typeface="Calibri" pitchFamily="34" charset="-122"/>
+                <a:cs typeface="Calibri" pitchFamily="34" charset="-120"/>
+              </a:rPr>
+              <a:t>BLS Virginia analyst wage x1.3 loaded</a:t>
+            </a:r>
+            <a:endParaRPr lang="en-US" sz="1150" dirty="0"/>
+          </a:p>
+        </p:txBody>
+      </p:sp>
+      <p:sp>
+        <p:nvSpPr>
+          <p:cNvPr id="25" name="Shape 23"/>
+          <p:cNvSpPr/>
+          <p:nvPr/>
+        </p:nvSpPr>
+        <p:spPr>
+          <a:xfrm>
+            <a:off x="640080" y="3977640"/>
+            <a:ext cx="3474720" cy="1508760"/>
+          </a:xfrm>
+          <a:prstGeom prst="roundRect">
+            <a:avLst>
+              <a:gd name="adj" fmla="val 6061"/>
+            </a:avLst>
+          </a:prstGeom>
+          <a:solidFill>
+            <a:srgbClr val="E8F6EF"/>
+          </a:solidFill>
+          <a:ln w="12700">
+            <a:solidFill>
+              <a:srgbClr val="E8F6EF"/>
+            </a:solidFill>
+            <a:prstDash val="solid"/>
+          </a:ln>
+        </p:spPr>
+      </p:sp>
+      <p:sp>
+        <p:nvSpPr>
+          <p:cNvPr id="26" name="Text 24"/>
+          <p:cNvSpPr txBox="1"/>
+          <p:nvPr/>
+        </p:nvSpPr>
+        <p:spPr>
+          <a:xfrm>
+            <a:off x="640080" y="4142232"/>
+            <a:ext cx="3474720" cy="749808"/>
+          </a:xfrm>
+          <a:prstGeom prst="rect">
+            <a:avLst/>
+          </a:prstGeom>
+          <a:noFill/>
+          <a:ln/>
+        </p:spPr>
+        <p:txBody>
+          <a:bodyPr wrap="square" lIns="0" tIns="0" rIns="0" bIns="0" rtlCol="0" anchor="ctr"/>
+          <a:lstStyle/>
+          <a:p>
+            <a:pPr algn="ctr" indent="0" marL="0">
+              <a:buNone/>
+            </a:pPr>
+            <a:r>
+              <a:rPr lang="en-US" sz="4000" b="1" dirty="0">
+                <a:solidFill>
+                  <a:srgbClr val="30A46C"/>
+                </a:solidFill>
+                <a:latin typeface="Calibri" pitchFamily="34" charset="0"/>
+                <a:ea typeface="Calibri" pitchFamily="34" charset="-122"/>
+                <a:cs typeface="Calibri" pitchFamily="34" charset="-120"/>
+              </a:rPr>
+              <a:t>20–69 h</a:t>
+            </a:r>
+            <a:endParaRPr lang="en-US" sz="4000" dirty="0"/>
+          </a:p>
+        </p:txBody>
+      </p:sp>
+      <p:sp>
+        <p:nvSpPr>
+          <p:cNvPr id="27" name="Text 25"/>
+          <p:cNvSpPr txBox="1"/>
+          <p:nvPr/>
+        </p:nvSpPr>
+        <p:spPr>
+          <a:xfrm>
+            <a:off x="749808" y="4892040"/>
+            <a:ext cx="3255264" cy="502920"/>
+          </a:xfrm>
+          <a:prstGeom prst="rect">
+            <a:avLst/>
+          </a:prstGeom>
+          <a:noFill/>
+          <a:ln/>
+        </p:spPr>
+        <p:txBody>
+          <a:bodyPr wrap="square" lIns="0" tIns="0" rIns="0" bIns="0" rtlCol="0" anchor="ctr"/>
+          <a:lstStyle/>
+          <a:p>
+            <a:pPr algn="ctr" indent="0" marL="0">
+              <a:buNone/>
+            </a:pPr>
+            <a:r>
+              <a:rPr lang="en-US" sz="1150" dirty="0">
+                <a:solidFill>
+                  <a:srgbClr val="5A6B7B"/>
+                </a:solidFill>
+                <a:latin typeface="Calibri" pitchFamily="34" charset="0"/>
+                <a:ea typeface="Calibri" pitchFamily="34" charset="-122"/>
+                <a:cs typeface="Calibri" pitchFamily="34" charset="-120"/>
+              </a:rPr>
+              <a:t>manual effort replaced</a:t>
+            </a:r>
+            <a:endParaRPr lang="en-US" sz="1150" dirty="0"/>
+          </a:p>
+          <a:p>
+            <a:pPr algn="ctr" indent="0" marL="0">
+              <a:buNone/>
+            </a:pPr>
+            <a:r>
+              <a:rPr lang="en-US" sz="1150" dirty="0">
+                <a:solidFill>
+                  <a:srgbClr val="5A6B7B"/>
+                </a:solidFill>
+                <a:latin typeface="Calibri" pitchFamily="34" charset="0"/>
+                <a:ea typeface="Calibri" pitchFamily="34" charset="-122"/>
+                <a:cs typeface="Calibri" pitchFamily="34" charset="-120"/>
+              </a:rPr>
+              <a:t>per assessment cycle</a:t>
+            </a:r>
+            <a:endParaRPr lang="en-US" sz="1150" dirty="0"/>
+          </a:p>
+        </p:txBody>
+      </p:sp>
+      <p:sp>
+        <p:nvSpPr>
+          <p:cNvPr id="28" name="Shape 26"/>
+          <p:cNvSpPr/>
+          <p:nvPr/>
+        </p:nvSpPr>
+        <p:spPr>
+          <a:xfrm>
+            <a:off x="4343400" y="3977640"/>
+            <a:ext cx="3474720" cy="1508760"/>
+          </a:xfrm>
+          <a:prstGeom prst="roundRect">
+            <a:avLst>
+              <a:gd name="adj" fmla="val 6061"/>
+            </a:avLst>
+          </a:prstGeom>
+          <a:solidFill>
+            <a:srgbClr val="E8F6EF"/>
+          </a:solidFill>
+          <a:ln w="12700">
+            <a:solidFill>
+              <a:srgbClr val="E8F6EF"/>
+            </a:solidFill>
+            <a:prstDash val="solid"/>
+          </a:ln>
+        </p:spPr>
+      </p:sp>
+      <p:sp>
+        <p:nvSpPr>
+          <p:cNvPr id="29" name="Text 27"/>
+          <p:cNvSpPr txBox="1"/>
+          <p:nvPr/>
+        </p:nvSpPr>
+        <p:spPr>
+          <a:xfrm>
+            <a:off x="4343400" y="4142232"/>
+            <a:ext cx="3474720" cy="749808"/>
+          </a:xfrm>
+          <a:prstGeom prst="rect">
+            <a:avLst/>
+          </a:prstGeom>
+          <a:noFill/>
+          <a:ln/>
+        </p:spPr>
+        <p:txBody>
+          <a:bodyPr wrap="square" lIns="0" tIns="0" rIns="0" bIns="0" rtlCol="0" anchor="ctr"/>
+          <a:lstStyle/>
+          <a:p>
+            <a:pPr algn="ctr" indent="0" marL="0">
+              <a:buNone/>
+            </a:pPr>
+            <a:r>
+              <a:rPr lang="en-US" sz="4000" b="1" dirty="0">
+                <a:solidFill>
+                  <a:srgbClr val="30A46C"/>
+                </a:solidFill>
+                <a:latin typeface="Calibri" pitchFamily="34" charset="0"/>
+                <a:ea typeface="Calibri" pitchFamily="34" charset="-122"/>
+                <a:cs typeface="Calibri" pitchFamily="34" charset="-120"/>
+              </a:rPr>
+              <a:t>$1.6k–$5.5k</a:t>
+            </a:r>
+            <a:endParaRPr lang="en-US" sz="4000" dirty="0"/>
+          </a:p>
+        </p:txBody>
+      </p:sp>
+      <p:sp>
+        <p:nvSpPr>
+          <p:cNvPr id="30" name="Text 28"/>
+          <p:cNvSpPr txBox="1"/>
+          <p:nvPr/>
+        </p:nvSpPr>
+        <p:spPr>
+          <a:xfrm>
+            <a:off x="4453128" y="4892040"/>
+            <a:ext cx="3255264" cy="502920"/>
+          </a:xfrm>
+          <a:prstGeom prst="rect">
+            <a:avLst/>
+          </a:prstGeom>
+          <a:noFill/>
+          <a:ln/>
+        </p:spPr>
+        <p:txBody>
+          <a:bodyPr wrap="square" lIns="0" tIns="0" rIns="0" bIns="0" rtlCol="0" anchor="ctr"/>
+          <a:lstStyle/>
+          <a:p>
+            <a:pPr algn="ctr" indent="0" marL="0">
+              <a:buNone/>
+            </a:pPr>
+            <a:r>
+              <a:rPr lang="en-US" sz="1150" dirty="0">
+                <a:solidFill>
+                  <a:srgbClr val="5A6B7B"/>
+                </a:solidFill>
+                <a:latin typeface="Calibri" pitchFamily="34" charset="0"/>
+                <a:ea typeface="Calibri" pitchFamily="34" charset="-122"/>
+                <a:cs typeface="Calibri" pitchFamily="34" charset="-120"/>
+              </a:rPr>
+              <a:t>analyst time value</a:t>
+            </a:r>
+            <a:endParaRPr lang="en-US" sz="1150" dirty="0"/>
+          </a:p>
+          <a:p>
+            <a:pPr algn="ctr" indent="0" marL="0">
+              <a:buNone/>
+            </a:pPr>
+            <a:r>
+              <a:rPr lang="en-US" sz="1150" dirty="0">
+                <a:solidFill>
+                  <a:srgbClr val="5A6B7B"/>
+                </a:solidFill>
+                <a:latin typeface="Calibri" pitchFamily="34" charset="0"/>
+                <a:ea typeface="Calibri" pitchFamily="34" charset="-122"/>
+                <a:cs typeface="Calibri" pitchFamily="34" charset="-120"/>
+              </a:rPr>
+              <a:t>per assessment cycle</a:t>
+            </a:r>
+            <a:endParaRPr lang="en-US" sz="1150" dirty="0"/>
+          </a:p>
+        </p:txBody>
+      </p:sp>
+      <p:sp>
+        <p:nvSpPr>
+          <p:cNvPr id="31" name="Shape 29"/>
+          <p:cNvSpPr/>
+          <p:nvPr/>
+        </p:nvSpPr>
+        <p:spPr>
+          <a:xfrm>
+            <a:off x="8046720" y="3977640"/>
+            <a:ext cx="3474720" cy="1508760"/>
+          </a:xfrm>
+          <a:prstGeom prst="roundRect">
+            <a:avLst>
+              <a:gd name="adj" fmla="val 6061"/>
+            </a:avLst>
+          </a:prstGeom>
+          <a:solidFill>
+            <a:srgbClr val="0A1A2F"/>
+          </a:solidFill>
+          <a:ln w="12700">
+            <a:solidFill>
+              <a:srgbClr val="0A1A2F"/>
+            </a:solidFill>
+            <a:prstDash val="solid"/>
+          </a:ln>
+        </p:spPr>
+      </p:sp>
+      <p:sp>
+        <p:nvSpPr>
+          <p:cNvPr id="32" name="Text 30"/>
+          <p:cNvSpPr txBox="1"/>
+          <p:nvPr/>
+        </p:nvSpPr>
+        <p:spPr>
+          <a:xfrm>
+            <a:off x="8046720" y="4142232"/>
+            <a:ext cx="3474720" cy="749808"/>
+          </a:xfrm>
+          <a:prstGeom prst="rect">
+            <a:avLst/>
+          </a:prstGeom>
+          <a:noFill/>
+          <a:ln/>
+        </p:spPr>
+        <p:txBody>
+          <a:bodyPr wrap="square" lIns="0" tIns="0" rIns="0" bIns="0" rtlCol="0" anchor="ctr"/>
+          <a:lstStyle/>
+          <a:p>
+            <a:pPr algn="ctr" indent="0" marL="0">
+              <a:buNone/>
+            </a:pPr>
+            <a:r>
+              <a:rPr lang="en-US" sz="4000" b="1" dirty="0">
+                <a:solidFill>
+                  <a:srgbClr val="FFB700"/>
+                </a:solidFill>
+                <a:latin typeface="Calibri" pitchFamily="34" charset="0"/>
+                <a:ea typeface="Calibri" pitchFamily="34" charset="-122"/>
+                <a:cs typeface="Calibri" pitchFamily="34" charset="-120"/>
+              </a:rPr>
+              <a:t>$0.62</a:t>
+            </a:r>
+            <a:endParaRPr lang="en-US" sz="4000" dirty="0"/>
+          </a:p>
+        </p:txBody>
+      </p:sp>
+      <p:sp>
+        <p:nvSpPr>
+          <p:cNvPr id="33" name="Text 31"/>
+          <p:cNvSpPr txBox="1"/>
+          <p:nvPr/>
+        </p:nvSpPr>
+        <p:spPr>
+          <a:xfrm>
+            <a:off x="8156448" y="4892040"/>
+            <a:ext cx="3255264" cy="502920"/>
+          </a:xfrm>
+          <a:prstGeom prst="rect">
+            <a:avLst/>
+          </a:prstGeom>
+          <a:noFill/>
+          <a:ln/>
+        </p:spPr>
+        <p:txBody>
+          <a:bodyPr wrap="square" lIns="0" tIns="0" rIns="0" bIns="0" rtlCol="0" anchor="ctr"/>
+          <a:lstStyle/>
+          <a:p>
+            <a:pPr algn="ctr" indent="0" marL="0">
+              <a:buNone/>
+            </a:pPr>
+            <a:r>
+              <a:rPr lang="en-US" sz="1150" dirty="0">
+                <a:solidFill>
+                  <a:srgbClr val="5A6B7B"/>
+                </a:solidFill>
+                <a:latin typeface="Calibri" pitchFamily="34" charset="0"/>
+                <a:ea typeface="Calibri" pitchFamily="34" charset="-122"/>
+                <a:cs typeface="Calibri" pitchFamily="34" charset="-120"/>
+              </a:rPr>
+              <a:t>cost to run</a:t>
+            </a:r>
+            <a:endParaRPr lang="en-US" sz="1150" dirty="0"/>
+          </a:p>
+          <a:p>
+            <a:pPr algn="ctr" indent="0" marL="0">
+              <a:buNone/>
+            </a:pPr>
+            <a:r>
+              <a:rPr lang="en-US" sz="1150" dirty="0">
+                <a:solidFill>
+                  <a:srgbClr val="5A6B7B"/>
+                </a:solidFill>
+                <a:latin typeface="Calibri" pitchFamily="34" charset="0"/>
+                <a:ea typeface="Calibri" pitchFamily="34" charset="-122"/>
+                <a:cs typeface="Calibri" pitchFamily="34" charset="-120"/>
+              </a:rPr>
+              <a:t>per month, all Azure</a:t>
+            </a:r>
+            <a:endParaRPr lang="en-US" sz="1150" dirty="0"/>
+          </a:p>
+        </p:txBody>
+      </p:sp>
+      <p:sp>
+        <p:nvSpPr>
+          <p:cNvPr id="34" name="Text 32"/>
+          <p:cNvSpPr txBox="1"/>
+          <p:nvPr/>
+        </p:nvSpPr>
+        <p:spPr>
+          <a:xfrm>
+            <a:off x="640080" y="5715000"/>
+            <a:ext cx="10881360" cy="548640"/>
+          </a:xfrm>
+          <a:prstGeom prst="rect">
+            <a:avLst/>
+          </a:prstGeom>
+          <a:noFill/>
+          <a:ln/>
+        </p:spPr>
+        <p:txBody>
+          <a:bodyPr wrap="square" lIns="0" tIns="0" rIns="0" bIns="0" rtlCol="0" anchor="ctr"/>
+          <a:lstStyle/>
+          <a:p>
+            <a:pPr indent="0" marL="0">
+              <a:lnSpc>
+                <a:spcPts val="2000"/>
+              </a:lnSpc>
+              <a:buNone/>
+            </a:pPr>
+            <a:r>
+              <a:rPr lang="en-US" sz="1350" b="1" dirty="0">
+                <a:solidFill>
+                  <a:srgbClr val="14304F"/>
+                </a:solidFill>
+                <a:latin typeface="Calibri" pitchFamily="34" charset="0"/>
+                <a:ea typeface="Calibri" pitchFamily="34" charset="-122"/>
+                <a:cs typeface="Calibri" pitchFamily="34" charset="-120"/>
+              </a:rPr>
+              <a:t>Roughly a 5,000x return. Across Virginia's 326 public institutions on the quarterly cycle SEC530 already requires: 26,000–90,000 analyst hours a year returned to actual security work.</a:t>
+            </a:r>
+            <a:endParaRPr lang="en-US" sz="1350" dirty="0"/>
+          </a:p>
+        </p:txBody>
+      </p:sp>
+    </p:spTree>
+  </p:cSld>
+  <p:clrMapOvr>
+    <a:masterClrMapping/>
+  </p:clrMapOvr>
+</p:sld>
+</file>
+
+<file path=ppt/slides/slide13.xml><?xml version="1.0" encoding="utf-8"?>
+<p:sld xmlns:a="http://schemas.openxmlformats.org/drawingml/2006/main" xmlns:r="http://schemas.openxmlformats.org/officeDocument/2006/relationships" xmlns:p="http://schemas.openxmlformats.org/presentationml/2006/main">
+  <p:cSld name="Slide 13">
+    <p:bg>
+      <p:bgPr>
+        <a:solidFill>
+          <a:srgbClr val="FFFFFF"/>
+        </a:solidFill>
+      </p:bgPr>
+    </p:bg>
+    <p:spTree>
+      <p:nvGrpSpPr>
+        <p:cNvPr id="1" name=""/>
+        <p:cNvGrpSpPr/>
+        <p:nvPr/>
+      </p:nvGrpSpPr>
+      <p:grpSpPr>
+        <a:xfrm>
+          <a:off x="0" y="0"/>
+          <a:ext cx="0" cy="0"/>
+          <a:chOff x="0" y="0"/>
+          <a:chExt cx="0" cy="0"/>
+        </a:xfrm>
+      </p:grpSpPr>
+      <p:sp>
+        <p:nvSpPr>
+          <p:cNvPr id="2" name="Text 0"/>
+          <p:cNvSpPr txBox="1"/>
+          <p:nvPr/>
+        </p:nvSpPr>
+        <p:spPr>
+          <a:xfrm>
+            <a:off x="640080" y="182880"/>
+            <a:ext cx="10881360" cy="292608"/>
+          </a:xfrm>
+          <a:prstGeom prst="rect">
+            <a:avLst/>
+          </a:prstGeom>
+          <a:noFill/>
+          <a:ln/>
+        </p:spPr>
+        <p:txBody>
+          <a:bodyPr wrap="square" lIns="0" tIns="0" rIns="0" bIns="0" rtlCol="0" anchor="ctr"/>
+          <a:lstStyle/>
+          <a:p>
+            <a:pPr indent="0" marL="0">
+              <a:buNone/>
+            </a:pPr>
+            <a:r>
+              <a:rPr lang="en-US" sz="1200" b="1" spc="200" kern="0" dirty="0">
+                <a:solidFill>
+                  <a:srgbClr val="00A896"/>
+                </a:solidFill>
+                <a:latin typeface="Calibri" pitchFamily="34" charset="0"/>
+                <a:ea typeface="Calibri" pitchFamily="34" charset="-122"/>
+                <a:cs typeface="Calibri" pitchFamily="34" charset="-120"/>
+              </a:rPr>
+              <a:t>FEASIBILITY</a:t>
+            </a:r>
+            <a:endParaRPr lang="en-US" sz="1200" dirty="0"/>
+          </a:p>
+        </p:txBody>
+      </p:sp>
+      <p:sp>
+        <p:nvSpPr>
+          <p:cNvPr id="3" name="Text 1"/>
+          <p:cNvSpPr txBox="1"/>
+          <p:nvPr/>
+        </p:nvSpPr>
+        <p:spPr>
+          <a:xfrm>
+            <a:off x="640080" y="411480"/>
+            <a:ext cx="10881360" cy="822960"/>
+          </a:xfrm>
+          <a:prstGeom prst="rect">
+            <a:avLst/>
+          </a:prstGeom>
+          <a:noFill/>
+          <a:ln/>
+        </p:spPr>
+        <p:txBody>
+          <a:bodyPr wrap="square" lIns="0" tIns="0" rIns="0" bIns="0" rtlCol="0" anchor="ctr"/>
+          <a:lstStyle/>
+          <a:p>
+            <a:pPr algn="l" indent="0" marL="0">
+              <a:buNone/>
+            </a:pPr>
+            <a:r>
+              <a:rPr lang="en-US" sz="3400" b="1" dirty="0">
+                <a:solidFill>
+                  <a:srgbClr val="10212F"/>
+                </a:solidFill>
+                <a:latin typeface="Cambria" pitchFamily="34" charset="0"/>
+                <a:ea typeface="Cambria" pitchFamily="34" charset="-122"/>
+                <a:cs typeface="Cambria" pitchFamily="34" charset="-120"/>
+              </a:rPr>
+              <a:t>This is running today, not a prototype sketch</a:t>
+            </a:r>
+            <a:endParaRPr lang="en-US" sz="3400" dirty="0"/>
+          </a:p>
+        </p:txBody>
+      </p:sp>
+      <p:sp>
+        <p:nvSpPr>
+          <p:cNvPr id="4" name="Shape 2"/>
+          <p:cNvSpPr/>
+          <p:nvPr/>
+        </p:nvSpPr>
+        <p:spPr>
+          <a:xfrm>
+            <a:off x="685800" y="1481328"/>
+            <a:ext cx="384048" cy="384048"/>
+          </a:xfrm>
+          <a:prstGeom prst="ellipse">
+            <a:avLst/>
+          </a:prstGeom>
+          <a:solidFill>
+            <a:srgbClr val="E8F6EF"/>
+          </a:solidFill>
+          <a:ln w="12700">
+            <a:solidFill>
+              <a:srgbClr val="C3E9D7"/>
+            </a:solidFill>
+            <a:prstDash val="solid"/>
+          </a:ln>
+        </p:spPr>
+      </p:sp>
+      <p:sp>
+        <p:nvSpPr>
+          <p:cNvPr id="5" name="Text 3"/>
+          <p:cNvSpPr txBox="1"/>
+          <p:nvPr/>
+        </p:nvSpPr>
+        <p:spPr>
+          <a:xfrm>
+            <a:off x="685800" y="1536192"/>
+            <a:ext cx="384048" cy="274320"/>
+          </a:xfrm>
+          <a:prstGeom prst="rect">
+            <a:avLst/>
+          </a:prstGeom>
+          <a:noFill/>
+          <a:ln/>
+        </p:spPr>
+        <p:txBody>
+          <a:bodyPr wrap="square" lIns="0" tIns="0" rIns="0" bIns="0" rtlCol="0" anchor="ctr"/>
+          <a:lstStyle/>
+          <a:p>
+            <a:pPr algn="ctr" indent="0" marL="0">
+              <a:buNone/>
+            </a:pPr>
+            <a:r>
+              <a:rPr lang="en-US" sz="1300" b="1" dirty="0">
+                <a:solidFill>
+                  <a:srgbClr val="30A46C"/>
+                </a:solidFill>
+                <a:latin typeface="Calibri" pitchFamily="34" charset="0"/>
+                <a:ea typeface="Calibri" pitchFamily="34" charset="-122"/>
+                <a:cs typeface="Calibri" pitchFamily="34" charset="-120"/>
+              </a:rPr>
+              <a:t>✓</a:t>
+            </a:r>
+            <a:endParaRPr lang="en-US" sz="1300" dirty="0"/>
+          </a:p>
+        </p:txBody>
+      </p:sp>
+      <p:sp>
+        <p:nvSpPr>
+          <p:cNvPr id="6" name="Text 4"/>
+          <p:cNvSpPr txBox="1"/>
+          <p:nvPr/>
+        </p:nvSpPr>
+        <p:spPr>
+          <a:xfrm>
+            <a:off x="1234440" y="1444752"/>
+            <a:ext cx="2286000" cy="292608"/>
+          </a:xfrm>
+          <a:prstGeom prst="rect">
+            <a:avLst/>
+          </a:prstGeom>
+          <a:noFill/>
+          <a:ln/>
+        </p:spPr>
+        <p:txBody>
+          <a:bodyPr wrap="square" lIns="0" tIns="0" rIns="0" bIns="0" rtlCol="0" anchor="ctr"/>
+          <a:lstStyle/>
+          <a:p>
+            <a:pPr indent="0" marL="0">
+              <a:buNone/>
+            </a:pPr>
+            <a:r>
+              <a:rPr lang="en-US" sz="1350" b="1" dirty="0">
+                <a:solidFill>
+                  <a:srgbClr val="10212F"/>
+                </a:solidFill>
+                <a:latin typeface="Calibri" pitchFamily="34" charset="0"/>
+                <a:ea typeface="Calibri" pitchFamily="34" charset="-122"/>
+                <a:cs typeface="Calibri" pitchFamily="34" charset="-120"/>
+              </a:rPr>
+              <a:t>Real data</a:t>
+            </a:r>
+            <a:endParaRPr lang="en-US" sz="1350" dirty="0"/>
+          </a:p>
+        </p:txBody>
+      </p:sp>
+      <p:sp>
+        <p:nvSpPr>
+          <p:cNvPr id="7" name="Text 5"/>
+          <p:cNvSpPr txBox="1"/>
+          <p:nvPr/>
+        </p:nvSpPr>
+        <p:spPr>
+          <a:xfrm>
+            <a:off x="3566160" y="1417320"/>
+            <a:ext cx="7955280" cy="685800"/>
+          </a:xfrm>
+          <a:prstGeom prst="rect">
+            <a:avLst/>
+          </a:prstGeom>
+          <a:noFill/>
+          <a:ln/>
+        </p:spPr>
+        <p:txBody>
+          <a:bodyPr wrap="square" lIns="0" tIns="0" rIns="0" bIns="0" rtlCol="0" anchor="ctr"/>
+          <a:lstStyle/>
+          <a:p>
+            <a:pPr indent="0" marL="0">
+              <a:lnSpc>
+                <a:spcPts val="1800"/>
+              </a:lnSpc>
+              <a:buNone/>
+            </a:pPr>
+            <a:r>
+              <a:rPr lang="en-US" sz="1250" dirty="0">
+                <a:solidFill>
+                  <a:srgbClr val="5A6B7B"/>
+                </a:solidFill>
+                <a:latin typeface="Calibri" pitchFamily="34" charset="0"/>
+                <a:ea typeface="Calibri" pitchFamily="34" charset="-122"/>
+                <a:cs typeface="Calibri" pitchFamily="34" charset="-120"/>
+              </a:rPr>
+              <a:t>CISA's published ScubaGear assessment — a genuine redacted run, CC0 licensed. Any tenant's own ScubaResults file runs the same parser, transformers and validator — there is no separate demo path.</a:t>
+            </a:r>
+            <a:endParaRPr lang="en-US" sz="1250" dirty="0"/>
+          </a:p>
+        </p:txBody>
+      </p:sp>
+      <p:sp>
+        <p:nvSpPr>
+          <p:cNvPr id="8" name="Shape 6"/>
+          <p:cNvSpPr/>
+          <p:nvPr/>
+        </p:nvSpPr>
+        <p:spPr>
+          <a:xfrm>
+            <a:off x="685800" y="2377440"/>
+            <a:ext cx="384048" cy="384048"/>
+          </a:xfrm>
+          <a:prstGeom prst="ellipse">
+            <a:avLst/>
+          </a:prstGeom>
+          <a:solidFill>
+            <a:srgbClr val="E8F6EF"/>
+          </a:solidFill>
+          <a:ln w="12700">
+            <a:solidFill>
+              <a:srgbClr val="C3E9D7"/>
+            </a:solidFill>
+            <a:prstDash val="solid"/>
+          </a:ln>
+        </p:spPr>
+      </p:sp>
+      <p:sp>
+        <p:nvSpPr>
+          <p:cNvPr id="9" name="Text 7"/>
+          <p:cNvSpPr txBox="1"/>
+          <p:nvPr/>
+        </p:nvSpPr>
+        <p:spPr>
+          <a:xfrm>
+            <a:off x="685800" y="2432304"/>
+            <a:ext cx="384048" cy="274320"/>
+          </a:xfrm>
+          <a:prstGeom prst="rect">
+            <a:avLst/>
+          </a:prstGeom>
+          <a:noFill/>
+          <a:ln/>
+        </p:spPr>
+        <p:txBody>
+          <a:bodyPr wrap="square" lIns="0" tIns="0" rIns="0" bIns="0" rtlCol="0" anchor="ctr"/>
+          <a:lstStyle/>
+          <a:p>
+            <a:pPr algn="ctr" indent="0" marL="0">
+              <a:buNone/>
+            </a:pPr>
+            <a:r>
+              <a:rPr lang="en-US" sz="1300" b="1" dirty="0">
+                <a:solidFill>
+                  <a:srgbClr val="30A46C"/>
+                </a:solidFill>
+                <a:latin typeface="Calibri" pitchFamily="34" charset="0"/>
+                <a:ea typeface="Calibri" pitchFamily="34" charset="-122"/>
+                <a:cs typeface="Calibri" pitchFamily="34" charset="-120"/>
+              </a:rPr>
+              <a:t>✓</a:t>
+            </a:r>
+            <a:endParaRPr lang="en-US" sz="1300" dirty="0"/>
+          </a:p>
+        </p:txBody>
+      </p:sp>
+      <p:sp>
+        <p:nvSpPr>
+          <p:cNvPr id="10" name="Text 8"/>
+          <p:cNvSpPr txBox="1"/>
+          <p:nvPr/>
+        </p:nvSpPr>
+        <p:spPr>
+          <a:xfrm>
+            <a:off x="1234440" y="2340864"/>
+            <a:ext cx="2286000" cy="292608"/>
+          </a:xfrm>
+          <a:prstGeom prst="rect">
+            <a:avLst/>
+          </a:prstGeom>
+          <a:noFill/>
+          <a:ln/>
+        </p:spPr>
+        <p:txBody>
+          <a:bodyPr wrap="square" lIns="0" tIns="0" rIns="0" bIns="0" rtlCol="0" anchor="ctr"/>
+          <a:lstStyle/>
+          <a:p>
+            <a:pPr indent="0" marL="0">
+              <a:buNone/>
+            </a:pPr>
+            <a:r>
+              <a:rPr lang="en-US" sz="1350" b="1" dirty="0">
+                <a:solidFill>
+                  <a:srgbClr val="10212F"/>
+                </a:solidFill>
+                <a:latin typeface="Calibri" pitchFamily="34" charset="0"/>
+                <a:ea typeface="Calibri" pitchFamily="34" charset="-122"/>
+                <a:cs typeface="Calibri" pitchFamily="34" charset="-120"/>
+              </a:rPr>
+              <a:t>Real validation</a:t>
+            </a:r>
+            <a:endParaRPr lang="en-US" sz="1350" dirty="0"/>
+          </a:p>
+        </p:txBody>
+      </p:sp>
+      <p:sp>
+        <p:nvSpPr>
+          <p:cNvPr id="11" name="Text 9"/>
+          <p:cNvSpPr txBox="1"/>
+          <p:nvPr/>
+        </p:nvSpPr>
+        <p:spPr>
+          <a:xfrm>
+            <a:off x="3566160" y="2313432"/>
+            <a:ext cx="7955280" cy="685800"/>
+          </a:xfrm>
+          <a:prstGeom prst="rect">
+            <a:avLst/>
+          </a:prstGeom>
+          <a:noFill/>
+          <a:ln/>
+        </p:spPr>
+        <p:txBody>
+          <a:bodyPr wrap="square" lIns="0" tIns="0" rIns="0" bIns="0" rtlCol="0" anchor="ctr"/>
+          <a:lstStyle/>
+          <a:p>
+            <a:pPr indent="0" marL="0">
+              <a:lnSpc>
+                <a:spcPts val="1800"/>
+              </a:lnSpc>
+              <a:buNone/>
+            </a:pPr>
+            <a:r>
+              <a:rPr lang="en-US" sz="1250" dirty="0">
+                <a:solidFill>
+                  <a:srgbClr val="5A6B7B"/>
+                </a:solidFill>
+                <a:latin typeface="Calibri" pitchFamily="34" charset="0"/>
+                <a:ea typeface="Calibri" pitchFamily="34" charset="-122"/>
+                <a:cs typeface="Calibri" pitchFamily="34" charset="-120"/>
+              </a:rPr>
+              <a:t>NIST oscal-cli in CI. The build fails if any document stops validating.</a:t>
+            </a:r>
+            <a:endParaRPr lang="en-US" sz="1250" dirty="0"/>
+          </a:p>
+        </p:txBody>
+      </p:sp>
+      <p:sp>
+        <p:nvSpPr>
+          <p:cNvPr id="12" name="Shape 10"/>
+          <p:cNvSpPr/>
+          <p:nvPr/>
+        </p:nvSpPr>
+        <p:spPr>
+          <a:xfrm>
+            <a:off x="685800" y="3273552"/>
+            <a:ext cx="384048" cy="384048"/>
+          </a:xfrm>
+          <a:prstGeom prst="ellipse">
+            <a:avLst/>
+          </a:prstGeom>
+          <a:solidFill>
+            <a:srgbClr val="E8F6EF"/>
+          </a:solidFill>
+          <a:ln w="12700">
+            <a:solidFill>
+              <a:srgbClr val="C3E9D7"/>
+            </a:solidFill>
+            <a:prstDash val="solid"/>
+          </a:ln>
+        </p:spPr>
+      </p:sp>
+      <p:sp>
+        <p:nvSpPr>
+          <p:cNvPr id="13" name="Text 11"/>
+          <p:cNvSpPr txBox="1"/>
+          <p:nvPr/>
+        </p:nvSpPr>
+        <p:spPr>
+          <a:xfrm>
+            <a:off x="685800" y="3328416"/>
+            <a:ext cx="384048" cy="274320"/>
+          </a:xfrm>
+          <a:prstGeom prst="rect">
+            <a:avLst/>
+          </a:prstGeom>
+          <a:noFill/>
+          <a:ln/>
+        </p:spPr>
+        <p:txBody>
+          <a:bodyPr wrap="square" lIns="0" tIns="0" rIns="0" bIns="0" rtlCol="0" anchor="ctr"/>
+          <a:lstStyle/>
+          <a:p>
+            <a:pPr algn="ctr" indent="0" marL="0">
+              <a:buNone/>
+            </a:pPr>
+            <a:r>
+              <a:rPr lang="en-US" sz="1300" b="1" dirty="0">
+                <a:solidFill>
+                  <a:srgbClr val="30A46C"/>
+                </a:solidFill>
+                <a:latin typeface="Calibri" pitchFamily="34" charset="0"/>
+                <a:ea typeface="Calibri" pitchFamily="34" charset="-122"/>
+                <a:cs typeface="Calibri" pitchFamily="34" charset="-120"/>
+              </a:rPr>
+              <a:t>✓</a:t>
+            </a:r>
+            <a:endParaRPr lang="en-US" sz="1300" dirty="0"/>
+          </a:p>
+        </p:txBody>
+      </p:sp>
+      <p:sp>
+        <p:nvSpPr>
+          <p:cNvPr id="14" name="Text 12"/>
+          <p:cNvSpPr txBox="1"/>
+          <p:nvPr/>
+        </p:nvSpPr>
+        <p:spPr>
+          <a:xfrm>
+            <a:off x="1234440" y="3236976"/>
+            <a:ext cx="2286000" cy="292608"/>
+          </a:xfrm>
+          <a:prstGeom prst="rect">
+            <a:avLst/>
+          </a:prstGeom>
+          <a:noFill/>
+          <a:ln/>
+        </p:spPr>
+        <p:txBody>
+          <a:bodyPr wrap="square" lIns="0" tIns="0" rIns="0" bIns="0" rtlCol="0" anchor="ctr"/>
+          <a:lstStyle/>
+          <a:p>
+            <a:pPr indent="0" marL="0">
+              <a:buNone/>
+            </a:pPr>
+            <a:r>
+              <a:rPr lang="en-US" sz="1350" b="1" dirty="0">
+                <a:solidFill>
+                  <a:srgbClr val="10212F"/>
+                </a:solidFill>
+                <a:latin typeface="Calibri" pitchFamily="34" charset="0"/>
+                <a:ea typeface="Calibri" pitchFamily="34" charset="-122"/>
+                <a:cs typeface="Calibri" pitchFamily="34" charset="-120"/>
+              </a:rPr>
+              <a:t>Real deployment</a:t>
+            </a:r>
+            <a:endParaRPr lang="en-US" sz="1350" dirty="0"/>
+          </a:p>
+        </p:txBody>
+      </p:sp>
+      <p:sp>
+        <p:nvSpPr>
+          <p:cNvPr id="15" name="Text 13"/>
+          <p:cNvSpPr txBox="1"/>
+          <p:nvPr/>
+        </p:nvSpPr>
+        <p:spPr>
+          <a:xfrm>
+            <a:off x="3566160" y="3209544"/>
+            <a:ext cx="7955280" cy="685800"/>
+          </a:xfrm>
+          <a:prstGeom prst="rect">
+            <a:avLst/>
+          </a:prstGeom>
+          <a:noFill/>
+          <a:ln/>
+        </p:spPr>
+        <p:txBody>
+          <a:bodyPr wrap="square" lIns="0" tIns="0" rIns="0" bIns="0" rtlCol="0" anchor="ctr"/>
+          <a:lstStyle/>
+          <a:p>
+            <a:pPr indent="0" marL="0">
+              <a:lnSpc>
+                <a:spcPts val="1800"/>
+              </a:lnSpc>
+              <a:buNone/>
+            </a:pPr>
+            <a:r>
+              <a:rPr lang="en-US" sz="1250" dirty="0">
+                <a:solidFill>
+                  <a:srgbClr val="5A6B7B"/>
+                </a:solidFill>
+                <a:latin typeface="Calibri" pitchFamily="34" charset="0"/>
+                <a:ea typeface="Calibri" pitchFamily="34" charset="-122"/>
+                <a:cs typeface="Calibri" pitchFamily="34" charset="-120"/>
+              </a:rPr>
+              <a:t>Microsoft Foundry project in eastus2, gpt-5-mini, keyless auth. Provisioned and answering.</a:t>
+            </a:r>
+            <a:endParaRPr lang="en-US" sz="1250" dirty="0"/>
+          </a:p>
+        </p:txBody>
+      </p:sp>
+      <p:sp>
+        <p:nvSpPr>
+          <p:cNvPr id="16" name="Shape 14"/>
+          <p:cNvSpPr/>
+          <p:nvPr/>
+        </p:nvSpPr>
+        <p:spPr>
+          <a:xfrm>
+            <a:off x="685800" y="4169664"/>
+            <a:ext cx="384048" cy="384048"/>
+          </a:xfrm>
+          <a:prstGeom prst="ellipse">
+            <a:avLst/>
+          </a:prstGeom>
+          <a:solidFill>
+            <a:srgbClr val="E8F6EF"/>
+          </a:solidFill>
+          <a:ln w="12700">
+            <a:solidFill>
+              <a:srgbClr val="C3E9D7"/>
+            </a:solidFill>
+            <a:prstDash val="solid"/>
+          </a:ln>
+        </p:spPr>
+      </p:sp>
+      <p:sp>
+        <p:nvSpPr>
+          <p:cNvPr id="17" name="Text 15"/>
+          <p:cNvSpPr txBox="1"/>
+          <p:nvPr/>
+        </p:nvSpPr>
+        <p:spPr>
+          <a:xfrm>
+            <a:off x="685800" y="4224528"/>
+            <a:ext cx="384048" cy="274320"/>
+          </a:xfrm>
+          <a:prstGeom prst="rect">
+            <a:avLst/>
+          </a:prstGeom>
+          <a:noFill/>
+          <a:ln/>
+        </p:spPr>
+        <p:txBody>
+          <a:bodyPr wrap="square" lIns="0" tIns="0" rIns="0" bIns="0" rtlCol="0" anchor="ctr"/>
+          <a:lstStyle/>
+          <a:p>
+            <a:pPr algn="ctr" indent="0" marL="0">
+              <a:buNone/>
+            </a:pPr>
+            <a:r>
+              <a:rPr lang="en-US" sz="1300" b="1" dirty="0">
+                <a:solidFill>
+                  <a:srgbClr val="30A46C"/>
+                </a:solidFill>
+                <a:latin typeface="Calibri" pitchFamily="34" charset="0"/>
+                <a:ea typeface="Calibri" pitchFamily="34" charset="-122"/>
+                <a:cs typeface="Calibri" pitchFamily="34" charset="-120"/>
+              </a:rPr>
+              <a:t>✓</a:t>
+            </a:r>
+            <a:endParaRPr lang="en-US" sz="1300" dirty="0"/>
+          </a:p>
+        </p:txBody>
+      </p:sp>
+      <p:sp>
+        <p:nvSpPr>
+          <p:cNvPr id="18" name="Text 16"/>
+          <p:cNvSpPr txBox="1"/>
+          <p:nvPr/>
+        </p:nvSpPr>
+        <p:spPr>
+          <a:xfrm>
+            <a:off x="1234440" y="4133088"/>
+            <a:ext cx="2286000" cy="292608"/>
+          </a:xfrm>
+          <a:prstGeom prst="rect">
+            <a:avLst/>
+          </a:prstGeom>
+          <a:noFill/>
+          <a:ln/>
+        </p:spPr>
+        <p:txBody>
+          <a:bodyPr wrap="square" lIns="0" tIns="0" rIns="0" bIns="0" rtlCol="0" anchor="ctr"/>
+          <a:lstStyle/>
+          <a:p>
+            <a:pPr indent="0" marL="0">
+              <a:buNone/>
+            </a:pPr>
+            <a:r>
+              <a:rPr lang="en-US" sz="1350" b="1" dirty="0">
+                <a:solidFill>
+                  <a:srgbClr val="10212F"/>
+                </a:solidFill>
+                <a:latin typeface="Calibri" pitchFamily="34" charset="0"/>
+                <a:ea typeface="Calibri" pitchFamily="34" charset="-122"/>
+                <a:cs typeface="Calibri" pitchFamily="34" charset="-120"/>
+              </a:rPr>
+              <a:t>Reproducible</a:t>
+            </a:r>
+            <a:endParaRPr lang="en-US" sz="1350" dirty="0"/>
+          </a:p>
+        </p:txBody>
+      </p:sp>
+      <p:sp>
+        <p:nvSpPr>
+          <p:cNvPr id="19" name="Text 17"/>
+          <p:cNvSpPr txBox="1"/>
+          <p:nvPr/>
+        </p:nvSpPr>
+        <p:spPr>
+          <a:xfrm>
+            <a:off x="3566160" y="4105656"/>
+            <a:ext cx="7955280" cy="685800"/>
+          </a:xfrm>
+          <a:prstGeom prst="rect">
+            <a:avLst/>
+          </a:prstGeom>
+          <a:noFill/>
+          <a:ln/>
+        </p:spPr>
+        <p:txBody>
+          <a:bodyPr wrap="square" lIns="0" tIns="0" rIns="0" bIns="0" rtlCol="0" anchor="ctr"/>
+          <a:lstStyle/>
+          <a:p>
+            <a:pPr indent="0" marL="0">
+              <a:lnSpc>
+                <a:spcPts val="1800"/>
+              </a:lnSpc>
+              <a:buNone/>
+            </a:pPr>
+            <a:r>
+              <a:rPr lang="en-US" sz="1250" dirty="0">
+                <a:solidFill>
+                  <a:srgbClr val="5A6B7B"/>
+                </a:solidFill>
+                <a:latin typeface="Calibri" pitchFamily="34" charset="0"/>
+                <a:ea typeface="Calibri" pitchFamily="34" charset="-122"/>
+                <a:cs typeface="Calibri" pitchFamily="34" charset="-120"/>
+              </a:rPr>
+              <a:t>From a clean clone: install, then two commands — generate and validate — reproduce every artifact byte-for-byte, fully offline. Every document carries the SHA-256 of each input inside its own metadata, so an artifact can be tied back to the exact scan that produced it.</a:t>
+            </a:r>
+            <a:endParaRPr lang="en-US" sz="1250" dirty="0"/>
+          </a:p>
+        </p:txBody>
+      </p:sp>
+      <p:sp>
+        <p:nvSpPr>
+          <p:cNvPr id="20" name="Shape 18"/>
+          <p:cNvSpPr/>
+          <p:nvPr/>
+        </p:nvSpPr>
+        <p:spPr>
+          <a:xfrm>
+            <a:off x="685800" y="5065776"/>
+            <a:ext cx="384048" cy="384048"/>
+          </a:xfrm>
+          <a:prstGeom prst="ellipse">
+            <a:avLst/>
+          </a:prstGeom>
+          <a:solidFill>
+            <a:srgbClr val="FFF1CC"/>
+          </a:solidFill>
+          <a:ln w="12700">
+            <a:solidFill>
+              <a:srgbClr val="FFE2A8"/>
+            </a:solidFill>
+            <a:prstDash val="solid"/>
+          </a:ln>
+        </p:spPr>
+      </p:sp>
+      <p:sp>
+        <p:nvSpPr>
+          <p:cNvPr id="21" name="Text 19"/>
+          <p:cNvSpPr txBox="1"/>
+          <p:nvPr/>
+        </p:nvSpPr>
+        <p:spPr>
+          <a:xfrm>
+            <a:off x="685800" y="5120640"/>
+            <a:ext cx="384048" cy="274320"/>
+          </a:xfrm>
+          <a:prstGeom prst="rect">
+            <a:avLst/>
+          </a:prstGeom>
+          <a:noFill/>
+          <a:ln/>
+        </p:spPr>
+        <p:txBody>
+          <a:bodyPr wrap="square" lIns="0" tIns="0" rIns="0" bIns="0" rtlCol="0" anchor="ctr"/>
+          <a:lstStyle/>
+          <a:p>
+            <a:pPr algn="ctr" indent="0" marL="0">
+              <a:buNone/>
+            </a:pPr>
+            <a:r>
+              <a:rPr lang="en-US" sz="1300" b="1" dirty="0">
+                <a:solidFill>
+                  <a:srgbClr val="8A5A00"/>
+                </a:solidFill>
+                <a:latin typeface="Calibri" pitchFamily="34" charset="0"/>
+                <a:ea typeface="Calibri" pitchFamily="34" charset="-122"/>
+                <a:cs typeface="Calibri" pitchFamily="34" charset="-120"/>
+              </a:rPr>
+              <a:t>!</a:t>
+            </a:r>
+            <a:endParaRPr lang="en-US" sz="1300" dirty="0"/>
+          </a:p>
+        </p:txBody>
+      </p:sp>
+      <p:sp>
+        <p:nvSpPr>
+          <p:cNvPr id="22" name="Text 20"/>
+          <p:cNvSpPr txBox="1"/>
+          <p:nvPr/>
+        </p:nvSpPr>
+        <p:spPr>
+          <a:xfrm>
+            <a:off x="1234440" y="5029200"/>
+            <a:ext cx="2286000" cy="292608"/>
+          </a:xfrm>
+          <a:prstGeom prst="rect">
+            <a:avLst/>
+          </a:prstGeom>
+          <a:noFill/>
+          <a:ln/>
+        </p:spPr>
+        <p:txBody>
+          <a:bodyPr wrap="square" lIns="0" tIns="0" rIns="0" bIns="0" rtlCol="0" anchor="ctr"/>
+          <a:lstStyle/>
+          <a:p>
+            <a:pPr indent="0" marL="0">
+              <a:buNone/>
+            </a:pPr>
+            <a:r>
+              <a:rPr lang="en-US" sz="1350" b="1" dirty="0">
+                <a:solidFill>
+                  <a:srgbClr val="10212F"/>
+                </a:solidFill>
+                <a:latin typeface="Calibri" pitchFamily="34" charset="0"/>
+                <a:ea typeface="Calibri" pitchFamily="34" charset="-122"/>
+                <a:cs typeface="Calibri" pitchFamily="34" charset="-120"/>
+              </a:rPr>
+              <a:t>Honest about limits</a:t>
+            </a:r>
+            <a:endParaRPr lang="en-US" sz="1350" dirty="0"/>
+          </a:p>
+        </p:txBody>
+      </p:sp>
+      <p:sp>
+        <p:nvSpPr>
+          <p:cNvPr id="23" name="Text 21"/>
+          <p:cNvSpPr txBox="1"/>
+          <p:nvPr/>
+        </p:nvSpPr>
+        <p:spPr>
+          <a:xfrm>
+            <a:off x="3566160" y="5001768"/>
+            <a:ext cx="7955280" cy="685800"/>
+          </a:xfrm>
+          <a:prstGeom prst="rect">
+            <a:avLst/>
+          </a:prstGeom>
+          <a:noFill/>
+          <a:ln/>
+        </p:spPr>
+        <p:txBody>
+          <a:bodyPr wrap="square" lIns="0" tIns="0" rIns="0" bIns="0" rtlCol="0" anchor="ctr"/>
+          <a:lstStyle/>
+          <a:p>
+            <a:pPr indent="0" marL="0">
+              <a:lnSpc>
+                <a:spcPts val="1800"/>
+              </a:lnSpc>
+              <a:buNone/>
+            </a:pPr>
+            <a:r>
+              <a:rPr lang="en-US" sz="1250" dirty="0">
+                <a:solidFill>
+                  <a:srgbClr val="5A6B7B"/>
+                </a:solidFill>
+                <a:latin typeface="Calibri" pitchFamily="34" charset="0"/>
+                <a:ea typeface="Calibri" pitchFamily="34" charset="-122"/>
+                <a:cs typeface="Calibri" pitchFamily="34" charset="-120"/>
+              </a:rPr>
+              <a:t>oscal-cli has no mapping command yet, so that document is JSON-Schema validated only. We report cli:n/a rather than implying more.</a:t>
+            </a:r>
+            <a:endParaRPr lang="en-US" sz="1250" dirty="0"/>
+          </a:p>
+        </p:txBody>
+      </p:sp>
+      <p:sp>
+        <p:nvSpPr>
+          <p:cNvPr id="24" name="Text 22"/>
+          <p:cNvSpPr txBox="1"/>
+          <p:nvPr/>
+        </p:nvSpPr>
+        <p:spPr>
+          <a:xfrm>
+            <a:off x="640080" y="5943600"/>
+            <a:ext cx="10881360" cy="365760"/>
+          </a:xfrm>
+          <a:prstGeom prst="rect">
+            <a:avLst/>
+          </a:prstGeom>
+          <a:noFill/>
+          <a:ln/>
+        </p:spPr>
+        <p:txBody>
+          <a:bodyPr wrap="square" lIns="0" tIns="0" rIns="0" bIns="0" rtlCol="0" anchor="ctr"/>
+          <a:lstStyle/>
+          <a:p>
+            <a:pPr indent="0" marL="0">
+              <a:buNone/>
+            </a:pPr>
+            <a:r>
+              <a:rPr lang="en-US" sz="1250" i="1" dirty="0">
+                <a:solidFill>
+                  <a:srgbClr val="5A6B7B"/>
+                </a:solidFill>
+                <a:latin typeface="Calibri" pitchFamily="34" charset="0"/>
+                <a:ea typeface="Calibri" pitchFamily="34" charset="-122"/>
+                <a:cs typeface="Calibri" pitchFamily="34" charset="-120"/>
+              </a:rPr>
+              <a:t>Next: an Azure Container Apps deployment, Azure AI Search over baseline guidance, and the remaining M365 products.</a:t>
+            </a:r>
+            <a:endParaRPr lang="en-US" sz="1250" dirty="0"/>
+          </a:p>
+        </p:txBody>
+      </p:sp>
+    </p:spTree>
+  </p:cSld>
+  <p:clrMapOvr>
+    <a:masterClrMapping/>
+  </p:clrMapOvr>
+</p:sld>
+</file>
+
+<file path=ppt/slides/slide14.xml><?xml version="1.0" encoding="utf-8"?>
+<p:sld xmlns:a="http://schemas.openxmlformats.org/drawingml/2006/main" xmlns:r="http://schemas.openxmlformats.org/officeDocument/2006/relationships" xmlns:p="http://schemas.openxmlformats.org/presentationml/2006/main">
+  <p:cSld name="Slide 14">
     <p:bg>
       <p:bgPr>
         <a:solidFill>
@@ -5022,8 +6912,8 @@
         </p:nvSpPr>
         <p:spPr>
           <a:xfrm>
-            <a:off x="822960" y="2834640"/>
-            <a:ext cx="9509760" cy="822960"/>
+            <a:off x="822960" y="2788920"/>
+            <a:ext cx="9875520" cy="1051560"/>
           </a:xfrm>
           <a:prstGeom prst="rect">
             <a:avLst/>
@@ -5037,12 +6927,12 @@
           <a:p>
             <a:pPr indent="0" marL="0">
               <a:lnSpc>
-                <a:spcPts val="2300"/>
+                <a:spcPts val="2100"/>
               </a:lnSpc>
               <a:buNone/>
             </a:pPr>
             <a:r>
-              <a:rPr lang="en-US" sz="1500" dirty="0">
+              <a:rPr lang="en-US" sz="1400" dirty="0">
                 <a:solidFill>
                   <a:srgbClr val="C6D4E0"/>
                 </a:solidFill>
@@ -5050,9 +6940,9 @@
                 <a:ea typeface="Calibri" pitchFamily="34" charset="-122"/>
                 <a:cs typeface="Calibri" pitchFamily="34" charset="-120"/>
               </a:rPr>
-              <a:t>A complete, validated OSCAL chain for Microsoft 365 — with mappings provably faithful to CISA's own crosswalk, drift that survives baseline version changes, and an AI layer that cannot invent a compliance fact.</a:t>
-            </a:r>
-            <a:endParaRPr lang="en-US" sz="1500" dirty="0"/>
+              <a:t>A complete, validated OSCAL chain for Microsoft 365 — mappings provably faithful to CISA's own crosswalk, drift that survives a baseline version change, exemptions an auditor can query, and an AI layer that cannot invent a compliance fact. For a Commonwealth institution, every finding is also traced to SEC530.</a:t>
+            </a:r>
+            <a:endParaRPr lang="en-US" sz="1400" dirty="0"/>
           </a:p>
         </p:txBody>
       </p:sp>
@@ -7311,7 +9201,7 @@
                 <a:ea typeface="Calibri" pitchFamily="34" charset="-122"/>
                 <a:cs typeface="Calibri" pitchFamily="34" charset="-120"/>
               </a:rPr>
-              <a:t>59 tests</a:t>
+              <a:t>175 tests</a:t>
             </a:r>
             <a:endParaRPr lang="en-US" sz="1500" dirty="0"/>
           </a:p>
@@ -7801,7 +9691,7 @@
                 <a:ea typeface="Cambria" pitchFamily="34" charset="-122"/>
                 <a:cs typeface="Cambria" pitchFamily="34" charset="-120"/>
               </a:rPr>
-              <a:t>The complete OSCAL chain — all eight validate</a:t>
+              <a:t>The complete OSCAL chain — eight documents, all valid</a:t>
             </a:r>
             <a:endParaRPr lang="en-US" sz="3400" dirty="0"/>
           </a:p>
@@ -9193,7 +11083,7 @@
                 <a:ea typeface="Calibri" pitchFamily="34" charset="-122"/>
                 <a:cs typeface="Calibri" pitchFamily="34" charset="-120"/>
               </a:rPr>
-              <a:t>Validated with NIST's own oscal-cli 3.2.0 / liboscal-java 7.2.0 — full Metaschema constraints, not merely JSON Schema. Zero errors, zero warnings, enforced in CI.</a:t>
+              <a:t>8/8 pass NIST JSON Schema. 7/8 also pass NIST's own oscal-cli 3.2.0 with full Metaschema constraints — mapping-collection has no CLI command yet, and we report cli:n/a rather than implying more. Enforced in CI.</a:t>
             </a:r>
             <a:endParaRPr lang="en-US" sz="1300" dirty="0"/>
           </a:p>
@@ -10487,7 +12377,7 @@
     <p:bg>
       <p:bgPr>
         <a:solidFill>
-          <a:srgbClr val="0A1A2F"/>
+          <a:srgbClr val="FFFFFF"/>
         </a:solidFill>
       </p:bgPr>
     </p:bg>
@@ -10532,13 +12422,13 @@
             <a:r>
               <a:rPr lang="en-US" sz="1200" b="1" spc="200" kern="0" dirty="0">
                 <a:solidFill>
-                  <a:srgbClr val="3FC1C9"/>
-                </a:solidFill>
-                <a:latin typeface="Calibri" pitchFamily="34" charset="0"/>
-                <a:ea typeface="Calibri" pitchFamily="34" charset="-122"/>
-                <a:cs typeface="Calibri" pitchFamily="34" charset="-120"/>
-              </a:rPr>
-              <a:t>MICROSOFT FOUNDRY</a:t>
+                  <a:srgbClr val="00A896"/>
+                </a:solidFill>
+                <a:latin typeface="Calibri" pitchFamily="34" charset="0"/>
+                <a:ea typeface="Calibri" pitchFamily="34" charset="-122"/>
+                <a:cs typeface="Calibri" pitchFamily="34" charset="-120"/>
+              </a:rPr>
+              <a:t>RESULT #4  ·  INNOVATION</a:t>
             </a:r>
             <a:endParaRPr lang="en-US" sz="1200" dirty="0"/>
           </a:p>
@@ -10571,13 +12461,13 @@
             <a:r>
               <a:rPr lang="en-US" sz="3400" b="1" dirty="0">
                 <a:solidFill>
-                  <a:srgbClr val="FFFFFF"/>
+                  <a:srgbClr val="10212F"/>
                 </a:solidFill>
                 <a:latin typeface="Cambria" pitchFamily="34" charset="0"/>
                 <a:ea typeface="Cambria" pitchFamily="34" charset="-122"/>
                 <a:cs typeface="Cambria" pitchFamily="34" charset="-120"/>
               </a:rPr>
-              <a:t>An AI layer that cannot fabricate</a:t>
+              <a:t>Two questions the compliance number hides</a:t>
             </a:r>
             <a:endParaRPr lang="en-US" sz="3400" dirty="0"/>
           </a:p>
@@ -10585,104 +12475,26 @@
       </p:sp>
       <p:sp>
         <p:nvSpPr>
-          <p:cNvPr id="4" name="Text 2"/>
-          <p:cNvSpPr txBox="1"/>
-          <p:nvPr/>
-        </p:nvSpPr>
-        <p:spPr>
-          <a:xfrm>
-            <a:off x="640080" y="1371600"/>
-            <a:ext cx="10881360" cy="411480"/>
-          </a:xfrm>
-          <a:prstGeom prst="rect">
-            <a:avLst/>
-          </a:prstGeom>
-          <a:noFill/>
-          <a:ln/>
-        </p:spPr>
-        <p:txBody>
-          <a:bodyPr wrap="square" lIns="0" tIns="0" rIns="0" bIns="0" rtlCol="0" anchor="ctr"/>
-          <a:lstStyle/>
-          <a:p>
-            <a:pPr indent="0" marL="0">
-              <a:buNone/>
-            </a:pPr>
-            <a:r>
-              <a:rPr lang="en-US" sz="1500" b="1" dirty="0">
-                <a:solidFill>
-                  <a:srgbClr val="3FC1C9"/>
-                </a:solidFill>
-                <a:latin typeface="Courier New" pitchFamily="34" charset="0"/>
-                <a:ea typeface="Courier New" pitchFamily="34" charset="-122"/>
-                <a:cs typeface="Courier New" pitchFamily="34" charset="-120"/>
-              </a:rPr>
-              <a:t>question  →  agent  →  tool call  →  NIST-validated OSCAL  →  answer</a:t>
-            </a:r>
-            <a:endParaRPr lang="en-US" sz="1500" dirty="0"/>
-          </a:p>
-        </p:txBody>
-      </p:sp>
-      <p:sp>
-        <p:nvSpPr>
-          <p:cNvPr id="5" name="Text 3"/>
-          <p:cNvSpPr txBox="1"/>
-          <p:nvPr/>
-        </p:nvSpPr>
-        <p:spPr>
-          <a:xfrm>
-            <a:off x="640080" y="1783080"/>
-            <a:ext cx="10881360" cy="320040"/>
-          </a:xfrm>
-          <a:prstGeom prst="rect">
-            <a:avLst/>
-          </a:prstGeom>
-          <a:noFill/>
-          <a:ln/>
-        </p:spPr>
-        <p:txBody>
-          <a:bodyPr wrap="square" lIns="0" tIns="0" rIns="0" bIns="0" rtlCol="0" anchor="ctr"/>
-          <a:lstStyle/>
-          <a:p>
-            <a:pPr indent="0" marL="0">
-              <a:buNone/>
-            </a:pPr>
-            <a:r>
-              <a:rPr lang="en-US" sz="1300" i="1" dirty="0">
-                <a:solidFill>
-                  <a:srgbClr val="9FB3C8"/>
-                </a:solidFill>
-                <a:latin typeface="Calibri" pitchFamily="34" charset="0"/>
-                <a:ea typeface="Calibri" pitchFamily="34" charset="-122"/>
-                <a:cs typeface="Calibri" pitchFamily="34" charset="-120"/>
-              </a:rPr>
-              <a:t>There is no other path to a fact.</a:t>
-            </a:r>
-            <a:endParaRPr lang="en-US" sz="1300" dirty="0"/>
-          </a:p>
-        </p:txBody>
-      </p:sp>
-      <p:sp>
-        <p:nvSpPr>
-          <p:cNvPr id="6" name="Shape 4"/>
+          <p:cNvPr id="4" name="Shape 2"/>
           <p:cNvSpPr/>
           <p:nvPr/>
         </p:nvSpPr>
         <p:spPr>
           <a:xfrm>
-            <a:off x="640080" y="2286000"/>
-            <a:ext cx="2560320" cy="1371600"/>
+            <a:off x="640080" y="1325880"/>
+            <a:ext cx="5303520" cy="4206240"/>
           </a:xfrm>
           <a:prstGeom prst="roundRect">
             <a:avLst>
-              <a:gd name="adj" fmla="val 6667"/>
+              <a:gd name="adj" fmla="val 2174"/>
             </a:avLst>
           </a:prstGeom>
           <a:solidFill>
-            <a:srgbClr val="14304F"/>
+            <a:srgbClr val="FFFFFF"/>
           </a:solidFill>
           <a:ln w="12700">
             <a:solidFill>
-              <a:srgbClr val="1E4468"/>
+              <a:srgbClr val="E2E8EE"/>
             </a:solidFill>
             <a:prstDash val="solid"/>
           </a:ln>
@@ -10690,53 +12502,384 @@
       </p:sp>
       <p:sp>
         <p:nvSpPr>
+          <p:cNvPr id="5" name="Text 3"/>
+          <p:cNvSpPr txBox="1"/>
+          <p:nvPr/>
+        </p:nvSpPr>
+        <p:spPr>
+          <a:xfrm>
+            <a:off x="868680" y="1481328"/>
+            <a:ext cx="4846320" cy="347472"/>
+          </a:xfrm>
+          <a:prstGeom prst="rect">
+            <a:avLst/>
+          </a:prstGeom>
+          <a:noFill/>
+          <a:ln/>
+        </p:spPr>
+        <p:txBody>
+          <a:bodyPr wrap="square" lIns="0" tIns="0" rIns="0" bIns="0" rtlCol="0" anchor="ctr"/>
+          <a:lstStyle/>
+          <a:p>
+            <a:pPr indent="0" marL="0">
+              <a:buNone/>
+            </a:pPr>
+            <a:r>
+              <a:rPr lang="en-US" sz="1700" b="1" dirty="0">
+                <a:solidFill>
+                  <a:srgbClr val="10212F"/>
+                </a:solidFill>
+                <a:latin typeface="Cambria" pitchFamily="34" charset="0"/>
+                <a:ea typeface="Cambria" pitchFamily="34" charset="-122"/>
+                <a:cs typeface="Cambria" pitchFamily="34" charset="-120"/>
+              </a:rPr>
+              <a:t>“Is the number even real?”</a:t>
+            </a:r>
+            <a:endParaRPr lang="en-US" sz="1700" dirty="0"/>
+          </a:p>
+        </p:txBody>
+      </p:sp>
+      <p:sp>
+        <p:nvSpPr>
+          <p:cNvPr id="6" name="Text 4"/>
+          <p:cNvSpPr txBox="1"/>
+          <p:nvPr/>
+        </p:nvSpPr>
+        <p:spPr>
+          <a:xfrm>
+            <a:off x="868680" y="1874520"/>
+            <a:ext cx="4846320" cy="914400"/>
+          </a:xfrm>
+          <a:prstGeom prst="rect">
+            <a:avLst/>
+          </a:prstGeom>
+          <a:noFill/>
+          <a:ln/>
+        </p:spPr>
+        <p:txBody>
+          <a:bodyPr wrap="square" lIns="0" tIns="0" rIns="0" bIns="0" rtlCol="0" anchor="ctr"/>
+          <a:lstStyle/>
+          <a:p>
+            <a:pPr indent="0" marL="0">
+              <a:lnSpc>
+                <a:spcPts val="1700"/>
+              </a:lnSpc>
+              <a:buNone/>
+            </a:pPr>
+            <a:r>
+              <a:rPr lang="en-US" sz="1150" dirty="0">
+                <a:solidFill>
+                  <a:srgbClr val="5A6B7B"/>
+                </a:solidFill>
+                <a:latin typeface="Calibri" pitchFamily="34" charset="0"/>
+                <a:ea typeface="Calibri" pitchFamily="34" charset="-122"/>
+                <a:cs typeface="Calibri" pitchFamily="34" charset="-120"/>
+              </a:rPr>
+              <a:t>ScubaGear lets an organisation omit policies from its own report. Omitted policies leave the denominator — so the compliance rate can be raised by editing YAML. Nothing reviews it, approves it, or enforces the optional expiry date.</a:t>
+            </a:r>
+            <a:endParaRPr lang="en-US" sz="1150" dirty="0"/>
+          </a:p>
+        </p:txBody>
+      </p:sp>
+      <p:sp>
+        <p:nvSpPr>
           <p:cNvPr id="7" name="Text 5"/>
           <p:cNvSpPr txBox="1"/>
           <p:nvPr/>
         </p:nvSpPr>
         <p:spPr>
           <a:xfrm>
-            <a:off x="777240" y="2423160"/>
-            <a:ext cx="2286000" cy="320040"/>
-          </a:xfrm>
-          <a:prstGeom prst="rect">
-            <a:avLst/>
-          </a:prstGeom>
-          <a:noFill/>
-          <a:ln/>
-        </p:spPr>
-        <p:txBody>
-          <a:bodyPr wrap="square" lIns="0" tIns="0" rIns="0" bIns="0" rtlCol="0" anchor="ctr"/>
-          <a:lstStyle/>
-          <a:p>
-            <a:pPr indent="0" marL="0">
-              <a:buNone/>
-            </a:pPr>
-            <a:r>
-              <a:rPr lang="en-US" sz="1500" b="1" dirty="0">
-                <a:solidFill>
-                  <a:srgbClr val="3FC1C9"/>
-                </a:solidFill>
-                <a:latin typeface="Calibri" pitchFamily="34" charset="0"/>
-                <a:ea typeface="Calibri" pitchFamily="34" charset="-122"/>
-                <a:cs typeface="Calibri" pitchFamily="34" charset="-120"/>
-              </a:rPr>
-              <a:t>Posture</a:t>
-            </a:r>
-            <a:endParaRPr lang="en-US" sz="1500" dirty="0"/>
-          </a:p>
-        </p:txBody>
-      </p:sp>
-      <p:sp>
-        <p:nvSpPr>
-          <p:cNvPr id="8" name="Text 6"/>
-          <p:cNvSpPr txBox="1"/>
-          <p:nvPr/>
-        </p:nvSpPr>
-        <p:spPr>
-          <a:xfrm>
-            <a:off x="777240" y="2761488"/>
-            <a:ext cx="2286000" cy="777240"/>
+            <a:off x="868680" y="2880360"/>
+            <a:ext cx="4846320" cy="1051560"/>
+          </a:xfrm>
+          <a:prstGeom prst="rect">
+            <a:avLst/>
+          </a:prstGeom>
+          <a:noFill/>
+          <a:ln/>
+        </p:spPr>
+        <p:txBody>
+          <a:bodyPr wrap="square" lIns="0" tIns="0" rIns="0" bIns="0" rtlCol="0" anchor="ctr"/>
+          <a:lstStyle/>
+          <a:p>
+            <a:pPr indent="0" marL="0">
+              <a:lnSpc>
+                <a:spcPts val="2000"/>
+              </a:lnSpc>
+              <a:buNone/>
+            </a:pPr>
+            <a:r>
+              <a:rPr lang="en-US" sz="1200" b="1" dirty="0">
+                <a:solidFill>
+                  <a:srgbClr val="E5484D"/>
+                </a:solidFill>
+                <a:latin typeface="Calibri" pitchFamily="34" charset="0"/>
+                <a:ea typeface="Calibri" pitchFamily="34" charset="-122"/>
+                <a:cs typeface="Calibri" pitchFamily="34" charset="-120"/>
+              </a:rPr>
+              <a:t>4</a:t>
+            </a:r>
+            <a:pPr indent="0" marL="0">
+              <a:lnSpc>
+                <a:spcPts val="2000"/>
+              </a:lnSpc>
+              <a:buNone/>
+            </a:pPr>
+            <a:r>
+              <a:rPr lang="en-US" sz="1200" dirty="0">
+                <a:solidFill>
+                  <a:srgbClr val="10212F"/>
+                </a:solidFill>
+                <a:latin typeface="Calibri" pitchFamily="34" charset="0"/>
+                <a:ea typeface="Calibri" pitchFamily="34" charset="-122"/>
+                <a:cs typeface="Calibri" pitchFamily="34" charset="-120"/>
+              </a:rPr>
+              <a:t> policies suppressed — </a:t>
+            </a:r>
+            <a:pPr indent="0" marL="0">
+              <a:lnSpc>
+                <a:spcPts val="2000"/>
+              </a:lnSpc>
+              <a:buNone/>
+            </a:pPr>
+            <a:r>
+              <a:rPr lang="en-US" sz="1200" b="1" dirty="0">
+                <a:solidFill>
+                  <a:srgbClr val="E5484D"/>
+                </a:solidFill>
+                <a:latin typeface="Calibri" pitchFamily="34" charset="0"/>
+                <a:ea typeface="Calibri" pitchFamily="34" charset="-122"/>
+                <a:cs typeface="Calibri" pitchFamily="34" charset="-120"/>
+              </a:rPr>
+              <a:t>all 4 are SHALL</a:t>
+            </a:r>
+            <a:endParaRPr lang="en-US" sz="1200" dirty="0"/>
+          </a:p>
+          <a:p>
+            <a:pPr indent="0" marL="0">
+              <a:lnSpc>
+                <a:spcPts val="2000"/>
+              </a:lnSpc>
+              <a:buNone/>
+            </a:pPr>
+            <a:r>
+              <a:rPr lang="en-US" sz="1200" b="1" dirty="0">
+                <a:solidFill>
+                  <a:srgbClr val="FFB700"/>
+                </a:solidFill>
+                <a:latin typeface="Calibri" pitchFamily="34" charset="0"/>
+                <a:ea typeface="Calibri" pitchFamily="34" charset="-122"/>
+                <a:cs typeface="Calibri" pitchFamily="34" charset="-120"/>
+              </a:rPr>
+              <a:t>2</a:t>
+            </a:r>
+            <a:pPr indent="0" marL="0">
+              <a:lnSpc>
+                <a:spcPts val="2000"/>
+              </a:lnSpc>
+              <a:buNone/>
+            </a:pPr>
+            <a:r>
+              <a:rPr lang="en-US" sz="1200" dirty="0">
+                <a:solidFill>
+                  <a:srgbClr val="10212F"/>
+                </a:solidFill>
+                <a:latin typeface="Calibri" pitchFamily="34" charset="0"/>
+                <a:ea typeface="Calibri" pitchFamily="34" charset="-122"/>
+                <a:cs typeface="Calibri" pitchFamily="34" charset="-120"/>
+              </a:rPr>
+              <a:t> exemptions already expired, still suppressing</a:t>
+            </a:r>
+            <a:endParaRPr lang="en-US" sz="1200" dirty="0"/>
+          </a:p>
+          <a:p>
+            <a:pPr indent="0" marL="0">
+              <a:lnSpc>
+                <a:spcPts val="2000"/>
+              </a:lnSpc>
+              <a:buNone/>
+            </a:pPr>
+            <a:r>
+              <a:rPr lang="en-US" sz="1200" b="1" dirty="0">
+                <a:solidFill>
+                  <a:srgbClr val="FFB700"/>
+                </a:solidFill>
+                <a:latin typeface="Calibri" pitchFamily="34" charset="0"/>
+                <a:ea typeface="Calibri" pitchFamily="34" charset="-122"/>
+                <a:cs typeface="Calibri" pitchFamily="34" charset="-120"/>
+              </a:rPr>
+              <a:t>1</a:t>
+            </a:r>
+            <a:pPr indent="0" marL="0">
+              <a:lnSpc>
+                <a:spcPts val="2000"/>
+              </a:lnSpc>
+              <a:buNone/>
+            </a:pPr>
+            <a:r>
+              <a:rPr lang="en-US" sz="1200" dirty="0">
+                <a:solidFill>
+                  <a:srgbClr val="10212F"/>
+                </a:solidFill>
+                <a:latin typeface="Calibri" pitchFamily="34" charset="0"/>
+                <a:ea typeface="Calibri" pitchFamily="34" charset="-122"/>
+                <a:cs typeface="Calibri" pitchFamily="34" charset="-120"/>
+              </a:rPr>
+              <a:t> with no rationale · </a:t>
+            </a:r>
+            <a:pPr indent="0" marL="0">
+              <a:lnSpc>
+                <a:spcPts val="2000"/>
+              </a:lnSpc>
+              <a:buNone/>
+            </a:pPr>
+            <a:r>
+              <a:rPr lang="en-US" sz="1200" b="1" dirty="0">
+                <a:solidFill>
+                  <a:srgbClr val="FFB700"/>
+                </a:solidFill>
+                <a:latin typeface="Calibri" pitchFamily="34" charset="0"/>
+                <a:ea typeface="Calibri" pitchFamily="34" charset="-122"/>
+                <a:cs typeface="Calibri" pitchFamily="34" charset="-120"/>
+              </a:rPr>
+              <a:t>2</a:t>
+            </a:r>
+            <a:pPr indent="0" marL="0">
+              <a:lnSpc>
+                <a:spcPts val="2000"/>
+              </a:lnSpc>
+              <a:buNone/>
+            </a:pPr>
+            <a:r>
+              <a:rPr lang="en-US" sz="1200" dirty="0">
+                <a:solidFill>
+                  <a:srgbClr val="10212F"/>
+                </a:solidFill>
+                <a:latin typeface="Calibri" pitchFamily="34" charset="0"/>
+                <a:ea typeface="Calibri" pitchFamily="34" charset="-122"/>
+                <a:cs typeface="Calibri" pitchFamily="34" charset="-120"/>
+              </a:rPr>
+              <a:t> left over from an old baseline</a:t>
+            </a:r>
+            <a:endParaRPr lang="en-US" sz="1200" dirty="0"/>
+          </a:p>
+        </p:txBody>
+      </p:sp>
+      <p:sp>
+        <p:nvSpPr>
+          <p:cNvPr id="8" name="Shape 6"/>
+          <p:cNvSpPr/>
+          <p:nvPr/>
+        </p:nvSpPr>
+        <p:spPr>
+          <a:xfrm>
+            <a:off x="868680" y="3977640"/>
+            <a:ext cx="4846320" cy="658368"/>
+          </a:xfrm>
+          <a:prstGeom prst="roundRect">
+            <a:avLst>
+              <a:gd name="adj" fmla="val 11111"/>
+            </a:avLst>
+          </a:prstGeom>
+          <a:solidFill>
+            <a:srgbClr val="F4F7F9"/>
+          </a:solidFill>
+          <a:ln w="12700">
+            <a:solidFill>
+              <a:srgbClr val="E2E8EE"/>
+            </a:solidFill>
+            <a:prstDash val="solid"/>
+          </a:ln>
+        </p:spPr>
+      </p:sp>
+      <p:sp>
+        <p:nvSpPr>
+          <p:cNvPr id="9" name="Text 7"/>
+          <p:cNvSpPr txBox="1"/>
+          <p:nvPr/>
+        </p:nvSpPr>
+        <p:spPr>
+          <a:xfrm>
+            <a:off x="960120" y="4069080"/>
+            <a:ext cx="4663440" cy="274320"/>
+          </a:xfrm>
+          <a:prstGeom prst="rect">
+            <a:avLst/>
+          </a:prstGeom>
+          <a:noFill/>
+          <a:ln/>
+        </p:spPr>
+        <p:txBody>
+          <a:bodyPr wrap="square" lIns="0" tIns="0" rIns="0" bIns="0" rtlCol="0" anchor="ctr"/>
+          <a:lstStyle/>
+          <a:p>
+            <a:pPr algn="ctr" indent="0" marL="0">
+              <a:buNone/>
+            </a:pPr>
+            <a:r>
+              <a:rPr lang="en-US" sz="1250" b="1" dirty="0">
+                <a:solidFill>
+                  <a:srgbClr val="10212F"/>
+                </a:solidFill>
+                <a:latin typeface="Calibri" pitchFamily="34" charset="0"/>
+                <a:ea typeface="Calibri" pitchFamily="34" charset="-122"/>
+                <a:cs typeface="Calibri" pitchFamily="34" charset="-120"/>
+              </a:rPr>
+              <a:t>69.6%  reported        68.7%  over all assessed</a:t>
+            </a:r>
+            <a:endParaRPr lang="en-US" sz="1250" dirty="0"/>
+          </a:p>
+        </p:txBody>
+      </p:sp>
+      <p:sp>
+        <p:nvSpPr>
+          <p:cNvPr id="10" name="Text 8"/>
+          <p:cNvSpPr txBox="1"/>
+          <p:nvPr/>
+        </p:nvSpPr>
+        <p:spPr>
+          <a:xfrm>
+            <a:off x="960120" y="4334256"/>
+            <a:ext cx="4663440" cy="256032"/>
+          </a:xfrm>
+          <a:prstGeom prst="rect">
+            <a:avLst/>
+          </a:prstGeom>
+          <a:noFill/>
+          <a:ln/>
+        </p:spPr>
+        <p:txBody>
+          <a:bodyPr wrap="square" lIns="0" tIns="0" rIns="0" bIns="0" rtlCol="0" anchor="ctr"/>
+          <a:lstStyle/>
+          <a:p>
+            <a:pPr algn="ctr" indent="0" marL="0">
+              <a:buNone/>
+            </a:pPr>
+            <a:r>
+              <a:rPr lang="en-US" sz="1000" i="1" dirty="0">
+                <a:solidFill>
+                  <a:srgbClr val="5A6B7B"/>
+                </a:solidFill>
+                <a:latin typeface="Calibri" pitchFamily="34" charset="0"/>
+                <a:ea typeface="Calibri" pitchFamily="34" charset="-122"/>
+                <a:cs typeface="Calibri" pitchFamily="34" charset="-120"/>
+              </a:rPr>
+              <a:t>2 of the 4 suppressed policies were passing — so we report +0.9 pts, not a headline.</a:t>
+            </a:r>
+            <a:endParaRPr lang="en-US" sz="1000" dirty="0"/>
+          </a:p>
+        </p:txBody>
+      </p:sp>
+      <p:sp>
+        <p:nvSpPr>
+          <p:cNvPr id="11" name="Text 9"/>
+          <p:cNvSpPr txBox="1"/>
+          <p:nvPr/>
+        </p:nvSpPr>
+        <p:spPr>
+          <a:xfrm>
+            <a:off x="868680" y="4709160"/>
+            <a:ext cx="4846320" cy="731520"/>
           </a:xfrm>
           <a:prstGeom prst="rect">
             <a:avLst/>
@@ -10755,42 +12898,42 @@
               <a:buNone/>
             </a:pPr>
             <a:r>
-              <a:rPr lang="en-US" sz="1150" dirty="0">
-                <a:solidFill>
-                  <a:srgbClr val="C6D4E0"/>
-                </a:solidFill>
-                <a:latin typeface="Calibri" pitchFamily="34" charset="0"/>
-                <a:ea typeface="Calibri" pitchFamily="34" charset="-122"/>
-                <a:cs typeface="Calibri" pitchFamily="34" charset="-120"/>
-              </a:rPr>
-              <a:t>current state, and what a policy requires</a:t>
-            </a:r>
-            <a:endParaRPr lang="en-US" sz="1150" dirty="0"/>
-          </a:p>
-        </p:txBody>
-      </p:sp>
-      <p:sp>
-        <p:nvSpPr>
-          <p:cNvPr id="9" name="Shape 7"/>
+              <a:rPr lang="en-US" sz="1100" dirty="0">
+                <a:solidFill>
+                  <a:srgbClr val="14304F"/>
+                </a:solidFill>
+                <a:latin typeface="Calibri" pitchFamily="34" charset="0"/>
+                <a:ea typeface="Calibri" pitchFamily="34" charset="-122"/>
+                <a:cs typeface="Calibri" pitchFamily="34" charset="-120"/>
+              </a:rPr>
+              <a:t>Every exemption is written into the POA&amp;M as an OSCAL risk carrying deviation-approved, deviation-requested, or open once expired — queryable by an auditor instead of living in a YAML file.</a:t>
+            </a:r>
+            <a:endParaRPr lang="en-US" sz="1100" dirty="0"/>
+          </a:p>
+        </p:txBody>
+      </p:sp>
+      <p:sp>
+        <p:nvSpPr>
+          <p:cNvPr id="12" name="Shape 10"/>
           <p:cNvSpPr/>
           <p:nvPr/>
         </p:nvSpPr>
         <p:spPr>
           <a:xfrm>
-            <a:off x="3383280" y="2286000"/>
-            <a:ext cx="2560320" cy="1371600"/>
+            <a:off x="6217920" y="1325880"/>
+            <a:ext cx="5303520" cy="4206240"/>
           </a:xfrm>
           <a:prstGeom prst="roundRect">
             <a:avLst>
-              <a:gd name="adj" fmla="val 6667"/>
+              <a:gd name="adj" fmla="val 2174"/>
             </a:avLst>
           </a:prstGeom>
           <a:solidFill>
-            <a:srgbClr val="14304F"/>
+            <a:srgbClr val="FFFFFF"/>
           </a:solidFill>
           <a:ln w="12700">
             <a:solidFill>
-              <a:srgbClr val="1E4468"/>
+              <a:srgbClr val="E2E8EE"/>
             </a:solidFill>
             <a:prstDash val="solid"/>
           </a:ln>
@@ -10798,53 +12941,476 @@
       </p:sp>
       <p:sp>
         <p:nvSpPr>
-          <p:cNvPr id="10" name="Text 8"/>
-          <p:cNvSpPr txBox="1"/>
-          <p:nvPr/>
-        </p:nvSpPr>
-        <p:spPr>
-          <a:xfrm>
-            <a:off x="3520440" y="2423160"/>
-            <a:ext cx="2286000" cy="320040"/>
-          </a:xfrm>
-          <a:prstGeom prst="rect">
-            <a:avLst/>
-          </a:prstGeom>
-          <a:noFill/>
-          <a:ln/>
-        </p:spPr>
-        <p:txBody>
-          <a:bodyPr wrap="square" lIns="0" tIns="0" rIns="0" bIns="0" rtlCol="0" anchor="ctr"/>
-          <a:lstStyle/>
-          <a:p>
-            <a:pPr indent="0" marL="0">
-              <a:buNone/>
-            </a:pPr>
-            <a:r>
-              <a:rPr lang="en-US" sz="1500" b="1" dirty="0">
-                <a:solidFill>
-                  <a:srgbClr val="3FC1C9"/>
-                </a:solidFill>
-                <a:latin typeface="Calibri" pitchFamily="34" charset="0"/>
-                <a:ea typeface="Calibri" pitchFamily="34" charset="-122"/>
-                <a:cs typeface="Calibri" pitchFamily="34" charset="-120"/>
-              </a:rPr>
-              <a:t>Risk</a:t>
-            </a:r>
-            <a:endParaRPr lang="en-US" sz="1500" dirty="0"/>
-          </a:p>
-        </p:txBody>
-      </p:sp>
-      <p:sp>
-        <p:nvSpPr>
-          <p:cNvPr id="11" name="Text 9"/>
-          <p:cNvSpPr txBox="1"/>
-          <p:nvPr/>
-        </p:nvSpPr>
-        <p:spPr>
-          <a:xfrm>
-            <a:off x="3520440" y="2761488"/>
-            <a:ext cx="2286000" cy="777240"/>
+          <p:cNvPr id="13" name="Text 11"/>
+          <p:cNvSpPr txBox="1"/>
+          <p:nvPr/>
+        </p:nvSpPr>
+        <p:spPr>
+          <a:xfrm>
+            <a:off x="6446520" y="1481328"/>
+            <a:ext cx="4846320" cy="347472"/>
+          </a:xfrm>
+          <a:prstGeom prst="rect">
+            <a:avLst/>
+          </a:prstGeom>
+          <a:noFill/>
+          <a:ln/>
+        </p:spPr>
+        <p:txBody>
+          <a:bodyPr wrap="square" lIns="0" tIns="0" rIns="0" bIns="0" rtlCol="0" anchor="ctr"/>
+          <a:lstStyle/>
+          <a:p>
+            <a:pPr indent="0" marL="0">
+              <a:buNone/>
+            </a:pPr>
+            <a:r>
+              <a:rPr lang="en-US" sz="1700" b="1" dirty="0">
+                <a:solidFill>
+                  <a:srgbClr val="10212F"/>
+                </a:solidFill>
+                <a:latin typeface="Cambria" pitchFamily="34" charset="0"/>
+                <a:ea typeface="Cambria" pitchFamily="34" charset="-122"/>
+                <a:cs typeface="Cambria" pitchFamily="34" charset="-120"/>
+              </a:rPr>
+              <a:t>“What can still happen to us?”</a:t>
+            </a:r>
+            <a:endParaRPr lang="en-US" sz="1700" dirty="0"/>
+          </a:p>
+        </p:txBody>
+      </p:sp>
+      <p:sp>
+        <p:nvSpPr>
+          <p:cNvPr id="14" name="Text 12"/>
+          <p:cNvSpPr txBox="1"/>
+          <p:nvPr/>
+        </p:nvSpPr>
+        <p:spPr>
+          <a:xfrm>
+            <a:off x="6446520" y="1874520"/>
+            <a:ext cx="4846320" cy="914400"/>
+          </a:xfrm>
+          <a:prstGeom prst="rect">
+            <a:avLst/>
+          </a:prstGeom>
+          <a:noFill/>
+          <a:ln/>
+        </p:spPr>
+        <p:txBody>
+          <a:bodyPr wrap="square" lIns="0" tIns="0" rIns="0" bIns="0" rtlCol="0" anchor="ctr"/>
+          <a:lstStyle/>
+          <a:p>
+            <a:pPr indent="0" marL="0">
+              <a:lnSpc>
+                <a:spcPts val="1700"/>
+              </a:lnSpc>
+              <a:buNone/>
+            </a:pPr>
+            <a:r>
+              <a:rPr lang="en-US" sz="1150" dirty="0">
+                <a:solidFill>
+                  <a:srgbClr val="5A6B7B"/>
+                </a:solidFill>
+                <a:latin typeface="Calibri" pitchFamily="34" charset="0"/>
+                <a:ea typeface="Calibri" pitchFamily="34" charset="-122"/>
+                <a:cs typeface="Calibri" pitchFamily="34" charset="-120"/>
+              </a:rPr>
+              <a:t>CISA maps each SCuBA policy to the MITRE ATT&amp;CK techniques it mitigates. A technique is uncovered when every policy mapped to it is failing — coverage arithmetic over CISA's published mappings, not a claim of exploitability.</a:t>
+            </a:r>
+            <a:endParaRPr lang="en-US" sz="1150" dirty="0"/>
+          </a:p>
+        </p:txBody>
+      </p:sp>
+      <p:sp>
+        <p:nvSpPr>
+          <p:cNvPr id="15" name="Shape 13"/>
+          <p:cNvSpPr/>
+          <p:nvPr/>
+        </p:nvSpPr>
+        <p:spPr>
+          <a:xfrm>
+            <a:off x="6446520" y="2852928"/>
+            <a:ext cx="1463040" cy="914400"/>
+          </a:xfrm>
+          <a:prstGeom prst="roundRect">
+            <a:avLst>
+              <a:gd name="adj" fmla="val 8000"/>
+            </a:avLst>
+          </a:prstGeom>
+          <a:solidFill>
+            <a:srgbClr val="FDECEC"/>
+          </a:solidFill>
+          <a:ln w="12700">
+            <a:solidFill>
+              <a:srgbClr val="FDECEC"/>
+            </a:solidFill>
+            <a:prstDash val="solid"/>
+          </a:ln>
+        </p:spPr>
+      </p:sp>
+      <p:sp>
+        <p:nvSpPr>
+          <p:cNvPr id="16" name="Text 14"/>
+          <p:cNvSpPr txBox="1"/>
+          <p:nvPr/>
+        </p:nvSpPr>
+        <p:spPr>
+          <a:xfrm>
+            <a:off x="6446520" y="2944368"/>
+            <a:ext cx="1463040" cy="457200"/>
+          </a:xfrm>
+          <a:prstGeom prst="rect">
+            <a:avLst/>
+          </a:prstGeom>
+          <a:noFill/>
+          <a:ln/>
+        </p:spPr>
+        <p:txBody>
+          <a:bodyPr wrap="square" lIns="0" tIns="0" rIns="0" bIns="0" rtlCol="0" anchor="ctr"/>
+          <a:lstStyle/>
+          <a:p>
+            <a:pPr algn="ctr" indent="0" marL="0">
+              <a:buNone/>
+            </a:pPr>
+            <a:r>
+              <a:rPr lang="en-US" sz="2600" b="1" dirty="0">
+                <a:solidFill>
+                  <a:srgbClr val="E5484D"/>
+                </a:solidFill>
+                <a:latin typeface="Calibri" pitchFamily="34" charset="0"/>
+                <a:ea typeface="Calibri" pitchFamily="34" charset="-122"/>
+                <a:cs typeface="Calibri" pitchFamily="34" charset="-120"/>
+              </a:rPr>
+              <a:t>6</a:t>
+            </a:r>
+            <a:endParaRPr lang="en-US" sz="2600" dirty="0"/>
+          </a:p>
+        </p:txBody>
+      </p:sp>
+      <p:sp>
+        <p:nvSpPr>
+          <p:cNvPr id="17" name="Text 15"/>
+          <p:cNvSpPr txBox="1"/>
+          <p:nvPr/>
+        </p:nvSpPr>
+        <p:spPr>
+          <a:xfrm>
+            <a:off x="6446520" y="3401568"/>
+            <a:ext cx="1463040" cy="274320"/>
+          </a:xfrm>
+          <a:prstGeom prst="rect">
+            <a:avLst/>
+          </a:prstGeom>
+          <a:noFill/>
+          <a:ln/>
+        </p:spPr>
+        <p:txBody>
+          <a:bodyPr wrap="square" lIns="0" tIns="0" rIns="0" bIns="0" rtlCol="0" anchor="ctr"/>
+          <a:lstStyle/>
+          <a:p>
+            <a:pPr algn="ctr" indent="0" marL="0">
+              <a:buNone/>
+            </a:pPr>
+            <a:r>
+              <a:rPr lang="en-US" sz="1050" dirty="0">
+                <a:solidFill>
+                  <a:srgbClr val="5A6B7B"/>
+                </a:solidFill>
+                <a:latin typeface="Calibri" pitchFamily="34" charset="0"/>
+                <a:ea typeface="Calibri" pitchFamily="34" charset="-122"/>
+                <a:cs typeface="Calibri" pitchFamily="34" charset="-120"/>
+              </a:rPr>
+              <a:t>uncovered</a:t>
+            </a:r>
+            <a:endParaRPr lang="en-US" sz="1050" dirty="0"/>
+          </a:p>
+        </p:txBody>
+      </p:sp>
+      <p:sp>
+        <p:nvSpPr>
+          <p:cNvPr id="18" name="Shape 16"/>
+          <p:cNvSpPr/>
+          <p:nvPr/>
+        </p:nvSpPr>
+        <p:spPr>
+          <a:xfrm>
+            <a:off x="8074152" y="2852928"/>
+            <a:ext cx="1463040" cy="914400"/>
+          </a:xfrm>
+          <a:prstGeom prst="roundRect">
+            <a:avLst>
+              <a:gd name="adj" fmla="val 8000"/>
+            </a:avLst>
+          </a:prstGeom>
+          <a:solidFill>
+            <a:srgbClr val="FFF6E0"/>
+          </a:solidFill>
+          <a:ln w="12700">
+            <a:solidFill>
+              <a:srgbClr val="FFF6E0"/>
+            </a:solidFill>
+            <a:prstDash val="solid"/>
+          </a:ln>
+        </p:spPr>
+      </p:sp>
+      <p:sp>
+        <p:nvSpPr>
+          <p:cNvPr id="19" name="Text 17"/>
+          <p:cNvSpPr txBox="1"/>
+          <p:nvPr/>
+        </p:nvSpPr>
+        <p:spPr>
+          <a:xfrm>
+            <a:off x="8074152" y="2944368"/>
+            <a:ext cx="1463040" cy="457200"/>
+          </a:xfrm>
+          <a:prstGeom prst="rect">
+            <a:avLst/>
+          </a:prstGeom>
+          <a:noFill/>
+          <a:ln/>
+        </p:spPr>
+        <p:txBody>
+          <a:bodyPr wrap="square" lIns="0" tIns="0" rIns="0" bIns="0" rtlCol="0" anchor="ctr"/>
+          <a:lstStyle/>
+          <a:p>
+            <a:pPr algn="ctr" indent="0" marL="0">
+              <a:buNone/>
+            </a:pPr>
+            <a:r>
+              <a:rPr lang="en-US" sz="2600" b="1" dirty="0">
+                <a:solidFill>
+                  <a:srgbClr val="FFB700"/>
+                </a:solidFill>
+                <a:latin typeface="Calibri" pitchFamily="34" charset="0"/>
+                <a:ea typeface="Calibri" pitchFamily="34" charset="-122"/>
+                <a:cs typeface="Calibri" pitchFamily="34" charset="-120"/>
+              </a:rPr>
+              <a:t>15</a:t>
+            </a:r>
+            <a:endParaRPr lang="en-US" sz="2600" dirty="0"/>
+          </a:p>
+        </p:txBody>
+      </p:sp>
+      <p:sp>
+        <p:nvSpPr>
+          <p:cNvPr id="20" name="Text 18"/>
+          <p:cNvSpPr txBox="1"/>
+          <p:nvPr/>
+        </p:nvSpPr>
+        <p:spPr>
+          <a:xfrm>
+            <a:off x="8074152" y="3401568"/>
+            <a:ext cx="1463040" cy="274320"/>
+          </a:xfrm>
+          <a:prstGeom prst="rect">
+            <a:avLst/>
+          </a:prstGeom>
+          <a:noFill/>
+          <a:ln/>
+        </p:spPr>
+        <p:txBody>
+          <a:bodyPr wrap="square" lIns="0" tIns="0" rIns="0" bIns="0" rtlCol="0" anchor="ctr"/>
+          <a:lstStyle/>
+          <a:p>
+            <a:pPr algn="ctr" indent="0" marL="0">
+              <a:buNone/>
+            </a:pPr>
+            <a:r>
+              <a:rPr lang="en-US" sz="1050" dirty="0">
+                <a:solidFill>
+                  <a:srgbClr val="5A6B7B"/>
+                </a:solidFill>
+                <a:latin typeface="Calibri" pitchFamily="34" charset="0"/>
+                <a:ea typeface="Calibri" pitchFamily="34" charset="-122"/>
+                <a:cs typeface="Calibri" pitchFamily="34" charset="-120"/>
+              </a:rPr>
+              <a:t>degraded</a:t>
+            </a:r>
+            <a:endParaRPr lang="en-US" sz="1050" dirty="0"/>
+          </a:p>
+        </p:txBody>
+      </p:sp>
+      <p:sp>
+        <p:nvSpPr>
+          <p:cNvPr id="21" name="Shape 19"/>
+          <p:cNvSpPr/>
+          <p:nvPr/>
+        </p:nvSpPr>
+        <p:spPr>
+          <a:xfrm>
+            <a:off x="9701784" y="2852928"/>
+            <a:ext cx="1463040" cy="914400"/>
+          </a:xfrm>
+          <a:prstGeom prst="roundRect">
+            <a:avLst>
+              <a:gd name="adj" fmla="val 8000"/>
+            </a:avLst>
+          </a:prstGeom>
+          <a:solidFill>
+            <a:srgbClr val="E8F6EF"/>
+          </a:solidFill>
+          <a:ln w="12700">
+            <a:solidFill>
+              <a:srgbClr val="E8F6EF"/>
+            </a:solidFill>
+            <a:prstDash val="solid"/>
+          </a:ln>
+        </p:spPr>
+      </p:sp>
+      <p:sp>
+        <p:nvSpPr>
+          <p:cNvPr id="22" name="Text 20"/>
+          <p:cNvSpPr txBox="1"/>
+          <p:nvPr/>
+        </p:nvSpPr>
+        <p:spPr>
+          <a:xfrm>
+            <a:off x="9701784" y="2944368"/>
+            <a:ext cx="1463040" cy="457200"/>
+          </a:xfrm>
+          <a:prstGeom prst="rect">
+            <a:avLst/>
+          </a:prstGeom>
+          <a:noFill/>
+          <a:ln/>
+        </p:spPr>
+        <p:txBody>
+          <a:bodyPr wrap="square" lIns="0" tIns="0" rIns="0" bIns="0" rtlCol="0" anchor="ctr"/>
+          <a:lstStyle/>
+          <a:p>
+            <a:pPr algn="ctr" indent="0" marL="0">
+              <a:buNone/>
+            </a:pPr>
+            <a:r>
+              <a:rPr lang="en-US" sz="2600" b="1" dirty="0">
+                <a:solidFill>
+                  <a:srgbClr val="30A46C"/>
+                </a:solidFill>
+                <a:latin typeface="Calibri" pitchFamily="34" charset="0"/>
+                <a:ea typeface="Calibri" pitchFamily="34" charset="-122"/>
+                <a:cs typeface="Calibri" pitchFamily="34" charset="-120"/>
+              </a:rPr>
+              <a:t>32</a:t>
+            </a:r>
+            <a:endParaRPr lang="en-US" sz="2600" dirty="0"/>
+          </a:p>
+        </p:txBody>
+      </p:sp>
+      <p:sp>
+        <p:nvSpPr>
+          <p:cNvPr id="23" name="Text 21"/>
+          <p:cNvSpPr txBox="1"/>
+          <p:nvPr/>
+        </p:nvSpPr>
+        <p:spPr>
+          <a:xfrm>
+            <a:off x="9701784" y="3401568"/>
+            <a:ext cx="1463040" cy="274320"/>
+          </a:xfrm>
+          <a:prstGeom prst="rect">
+            <a:avLst/>
+          </a:prstGeom>
+          <a:noFill/>
+          <a:ln/>
+        </p:spPr>
+        <p:txBody>
+          <a:bodyPr wrap="square" lIns="0" tIns="0" rIns="0" bIns="0" rtlCol="0" anchor="ctr"/>
+          <a:lstStyle/>
+          <a:p>
+            <a:pPr algn="ctr" indent="0" marL="0">
+              <a:buNone/>
+            </a:pPr>
+            <a:r>
+              <a:rPr lang="en-US" sz="1050" dirty="0">
+                <a:solidFill>
+                  <a:srgbClr val="5A6B7B"/>
+                </a:solidFill>
+                <a:latin typeface="Calibri" pitchFamily="34" charset="0"/>
+                <a:ea typeface="Calibri" pitchFamily="34" charset="-122"/>
+                <a:cs typeface="Calibri" pitchFamily="34" charset="-120"/>
+              </a:rPr>
+              <a:t>covered</a:t>
+            </a:r>
+            <a:endParaRPr lang="en-US" sz="1050" dirty="0"/>
+          </a:p>
+        </p:txBody>
+      </p:sp>
+      <p:sp>
+        <p:nvSpPr>
+          <p:cNvPr id="24" name="Shape 22"/>
+          <p:cNvSpPr/>
+          <p:nvPr/>
+        </p:nvSpPr>
+        <p:spPr>
+          <a:xfrm>
+            <a:off x="6446520" y="3977640"/>
+            <a:ext cx="4846320" cy="1463040"/>
+          </a:xfrm>
+          <a:prstGeom prst="roundRect">
+            <a:avLst>
+              <a:gd name="adj" fmla="val 5000"/>
+            </a:avLst>
+          </a:prstGeom>
+          <a:solidFill>
+            <a:srgbClr val="FFF6E0"/>
+          </a:solidFill>
+          <a:ln w="12700">
+            <a:solidFill>
+              <a:srgbClr val="FFE2A8"/>
+            </a:solidFill>
+            <a:prstDash val="solid"/>
+          </a:ln>
+        </p:spPr>
+      </p:sp>
+      <p:sp>
+        <p:nvSpPr>
+          <p:cNvPr id="25" name="Text 23"/>
+          <p:cNvSpPr txBox="1"/>
+          <p:nvPr/>
+        </p:nvSpPr>
+        <p:spPr>
+          <a:xfrm>
+            <a:off x="6629400" y="4096512"/>
+            <a:ext cx="4480560" cy="274320"/>
+          </a:xfrm>
+          <a:prstGeom prst="rect">
+            <a:avLst/>
+          </a:prstGeom>
+          <a:noFill/>
+          <a:ln/>
+        </p:spPr>
+        <p:txBody>
+          <a:bodyPr wrap="square" lIns="0" tIns="0" rIns="0" bIns="0" rtlCol="0" anchor="ctr"/>
+          <a:lstStyle/>
+          <a:p>
+            <a:pPr indent="0" marL="0">
+              <a:buNone/>
+            </a:pPr>
+            <a:r>
+              <a:rPr lang="en-US" sz="1200" b="1" dirty="0">
+                <a:solidFill>
+                  <a:srgbClr val="8A5A00"/>
+                </a:solidFill>
+                <a:latin typeface="Calibri" pitchFamily="34" charset="0"/>
+                <a:ea typeface="Calibri" pitchFamily="34" charset="-122"/>
+                <a:cs typeface="Calibri" pitchFamily="34" charset="-120"/>
+              </a:rPr>
+              <a:t>The two rankings disagree — and that is the point.</a:t>
+            </a:r>
+            <a:endParaRPr lang="en-US" sz="1200" dirty="0"/>
+          </a:p>
+        </p:txBody>
+      </p:sp>
+      <p:sp>
+        <p:nvSpPr>
+          <p:cNvPr id="26" name="Text 24"/>
+          <p:cNvSpPr txBox="1"/>
+          <p:nvPr/>
+        </p:nvSpPr>
+        <p:spPr>
+          <a:xfrm>
+            <a:off x="6629400" y="4407408"/>
+            <a:ext cx="4480560" cy="914400"/>
           </a:xfrm>
           <a:prstGeom prst="rect">
             <a:avLst/>
@@ -10863,417 +13429,56 @@
               <a:buNone/>
             </a:pPr>
             <a:r>
-              <a:rPr lang="en-US" sz="1150" dirty="0">
-                <a:solidFill>
-                  <a:srgbClr val="C6D4E0"/>
-                </a:solidFill>
-                <a:latin typeface="Calibri" pitchFamily="34" charset="0"/>
-                <a:ea typeface="Calibri" pitchFamily="34" charset="-122"/>
-                <a:cs typeface="Calibri" pitchFamily="34" charset="-120"/>
-              </a:rPr>
-              <a:t>ranks by SHALL/SHOULD, ATT&amp;CK breadth, blast radius</a:t>
-            </a:r>
-            <a:endParaRPr lang="en-US" sz="1150" dirty="0"/>
-          </a:p>
-        </p:txBody>
-      </p:sp>
-      <p:sp>
-        <p:nvSpPr>
-          <p:cNvPr id="12" name="Shape 10"/>
-          <p:cNvSpPr/>
-          <p:nvPr/>
-        </p:nvSpPr>
-        <p:spPr>
-          <a:xfrm>
-            <a:off x="6126480" y="2286000"/>
-            <a:ext cx="2560320" cy="1371600"/>
-          </a:xfrm>
-          <a:prstGeom prst="roundRect">
-            <a:avLst>
-              <a:gd name="adj" fmla="val 6667"/>
-            </a:avLst>
-          </a:prstGeom>
-          <a:solidFill>
-            <a:srgbClr val="14304F"/>
-          </a:solidFill>
-          <a:ln w="12700">
-            <a:solidFill>
-              <a:srgbClr val="1E4468"/>
-            </a:solidFill>
-            <a:prstDash val="solid"/>
-          </a:ln>
-        </p:spPr>
-      </p:sp>
-      <p:sp>
-        <p:nvSpPr>
-          <p:cNvPr id="13" name="Text 11"/>
-          <p:cNvSpPr txBox="1"/>
-          <p:nvPr/>
-        </p:nvSpPr>
-        <p:spPr>
-          <a:xfrm>
-            <a:off x="6263640" y="2423160"/>
-            <a:ext cx="2286000" cy="320040"/>
-          </a:xfrm>
-          <a:prstGeom prst="rect">
-            <a:avLst/>
-          </a:prstGeom>
-          <a:noFill/>
-          <a:ln/>
-        </p:spPr>
-        <p:txBody>
-          <a:bodyPr wrap="square" lIns="0" tIns="0" rIns="0" bIns="0" rtlCol="0" anchor="ctr"/>
-          <a:lstStyle/>
-          <a:p>
-            <a:pPr indent="0" marL="0">
-              <a:buNone/>
-            </a:pPr>
-            <a:r>
-              <a:rPr lang="en-US" sz="1500" b="1" dirty="0">
-                <a:solidFill>
-                  <a:srgbClr val="3FC1C9"/>
-                </a:solidFill>
-                <a:latin typeface="Calibri" pitchFamily="34" charset="0"/>
-                <a:ea typeface="Calibri" pitchFamily="34" charset="-122"/>
-                <a:cs typeface="Calibri" pitchFamily="34" charset="-120"/>
-              </a:rPr>
-              <a:t>Remediation</a:t>
-            </a:r>
-            <a:endParaRPr lang="en-US" sz="1500" dirty="0"/>
-          </a:p>
-        </p:txBody>
-      </p:sp>
-      <p:sp>
-        <p:nvSpPr>
-          <p:cNvPr id="14" name="Text 12"/>
-          <p:cNvSpPr txBox="1"/>
-          <p:nvPr/>
-        </p:nvSpPr>
-        <p:spPr>
-          <a:xfrm>
-            <a:off x="6263640" y="2761488"/>
-            <a:ext cx="2286000" cy="777240"/>
-          </a:xfrm>
-          <a:prstGeom prst="rect">
-            <a:avLst/>
-          </a:prstGeom>
-          <a:noFill/>
-          <a:ln/>
-        </p:spPr>
-        <p:txBody>
-          <a:bodyPr wrap="square" lIns="0" tIns="0" rIns="0" bIns="0" rtlCol="0" anchor="ctr"/>
-          <a:lstStyle/>
-          <a:p>
-            <a:pPr indent="0" marL="0">
-              <a:lnSpc>
-                <a:spcPts val="1600"/>
-              </a:lnSpc>
-              <a:buNone/>
-            </a:pPr>
-            <a:r>
-              <a:rPr lang="en-US" sz="1150" dirty="0">
-                <a:solidFill>
-                  <a:srgbClr val="C6D4E0"/>
-                </a:solidFill>
-                <a:latin typeface="Calibri" pitchFamily="34" charset="0"/>
-                <a:ea typeface="Calibri" pitchFamily="34" charset="-122"/>
-                <a:cs typeface="Calibri" pitchFamily="34" charset="-120"/>
-              </a:rPr>
-              <a:t>fixes grounded in CISA's own guidance</a:t>
-            </a:r>
-            <a:endParaRPr lang="en-US" sz="1150" dirty="0"/>
-          </a:p>
-        </p:txBody>
-      </p:sp>
-      <p:sp>
-        <p:nvSpPr>
-          <p:cNvPr id="15" name="Shape 13"/>
-          <p:cNvSpPr/>
-          <p:nvPr/>
-        </p:nvSpPr>
-        <p:spPr>
-          <a:xfrm>
-            <a:off x="8869680" y="2286000"/>
-            <a:ext cx="2560320" cy="1371600"/>
-          </a:xfrm>
-          <a:prstGeom prst="roundRect">
-            <a:avLst>
-              <a:gd name="adj" fmla="val 6667"/>
-            </a:avLst>
-          </a:prstGeom>
-          <a:solidFill>
-            <a:srgbClr val="14304F"/>
-          </a:solidFill>
-          <a:ln w="12700">
-            <a:solidFill>
-              <a:srgbClr val="1E4468"/>
-            </a:solidFill>
-            <a:prstDash val="solid"/>
-          </a:ln>
-        </p:spPr>
-      </p:sp>
-      <p:sp>
-        <p:nvSpPr>
-          <p:cNvPr id="16" name="Text 14"/>
-          <p:cNvSpPr txBox="1"/>
-          <p:nvPr/>
-        </p:nvSpPr>
-        <p:spPr>
-          <a:xfrm>
-            <a:off x="9006840" y="2423160"/>
-            <a:ext cx="2286000" cy="320040"/>
-          </a:xfrm>
-          <a:prstGeom prst="rect">
-            <a:avLst/>
-          </a:prstGeom>
-          <a:noFill/>
-          <a:ln/>
-        </p:spPr>
-        <p:txBody>
-          <a:bodyPr wrap="square" lIns="0" tIns="0" rIns="0" bIns="0" rtlCol="0" anchor="ctr"/>
-          <a:lstStyle/>
-          <a:p>
-            <a:pPr indent="0" marL="0">
-              <a:buNone/>
-            </a:pPr>
-            <a:r>
-              <a:rPr lang="en-US" sz="1500" b="1" dirty="0">
-                <a:solidFill>
-                  <a:srgbClr val="3FC1C9"/>
-                </a:solidFill>
-                <a:latin typeface="Calibri" pitchFamily="34" charset="0"/>
-                <a:ea typeface="Calibri" pitchFamily="34" charset="-122"/>
-                <a:cs typeface="Calibri" pitchFamily="34" charset="-120"/>
-              </a:rPr>
-              <a:t>Report</a:t>
-            </a:r>
-            <a:endParaRPr lang="en-US" sz="1500" dirty="0"/>
-          </a:p>
-        </p:txBody>
-      </p:sp>
-      <p:sp>
-        <p:nvSpPr>
-          <p:cNvPr id="17" name="Text 15"/>
-          <p:cNvSpPr txBox="1"/>
-          <p:nvPr/>
-        </p:nvSpPr>
-        <p:spPr>
-          <a:xfrm>
-            <a:off x="9006840" y="2761488"/>
-            <a:ext cx="2286000" cy="777240"/>
-          </a:xfrm>
-          <a:prstGeom prst="rect">
-            <a:avLst/>
-          </a:prstGeom>
-          <a:noFill/>
-          <a:ln/>
-        </p:spPr>
-        <p:txBody>
-          <a:bodyPr wrap="square" lIns="0" tIns="0" rIns="0" bIns="0" rtlCol="0" anchor="ctr"/>
-          <a:lstStyle/>
-          <a:p>
-            <a:pPr indent="0" marL="0">
-              <a:lnSpc>
-                <a:spcPts val="1600"/>
-              </a:lnSpc>
-              <a:buNone/>
-            </a:pPr>
-            <a:r>
-              <a:rPr lang="en-US" sz="1150" dirty="0">
-                <a:solidFill>
-                  <a:srgbClr val="C6D4E0"/>
-                </a:solidFill>
-                <a:latin typeface="Calibri" pitchFamily="34" charset="0"/>
-                <a:ea typeface="Calibri" pitchFamily="34" charset="-122"/>
-                <a:cs typeface="Calibri" pitchFamily="34" charset="-120"/>
-              </a:rPr>
-              <a:t>executive · auditor · engineer phrasing</a:t>
-            </a:r>
-            <a:endParaRPr lang="en-US" sz="1150" dirty="0"/>
-          </a:p>
-        </p:txBody>
-      </p:sp>
-      <p:sp>
-        <p:nvSpPr>
-          <p:cNvPr id="18" name="Text 16"/>
-          <p:cNvSpPr txBox="1"/>
-          <p:nvPr/>
-        </p:nvSpPr>
-        <p:spPr>
-          <a:xfrm>
-            <a:off x="640080" y="3886200"/>
-            <a:ext cx="10881360" cy="320040"/>
-          </a:xfrm>
-          <a:prstGeom prst="rect">
-            <a:avLst/>
-          </a:prstGeom>
-          <a:noFill/>
-          <a:ln/>
-        </p:spPr>
-        <p:txBody>
-          <a:bodyPr wrap="square" lIns="0" tIns="0" rIns="0" bIns="0" rtlCol="0" anchor="ctr"/>
-          <a:lstStyle/>
-          <a:p>
-            <a:pPr indent="0" marL="0">
-              <a:buNone/>
-            </a:pPr>
-            <a:r>
-              <a:rPr lang="en-US" sz="1500" b="1" dirty="0">
-                <a:solidFill>
-                  <a:srgbClr val="FFFFFF"/>
-                </a:solidFill>
-                <a:latin typeface="Calibri" pitchFamily="34" charset="0"/>
-                <a:ea typeface="Calibri" pitchFamily="34" charset="-122"/>
-                <a:cs typeface="Calibri" pitchFamily="34" charset="-120"/>
-              </a:rPr>
-              <a:t>Guardrails that are mechanisms, not promises</a:t>
-            </a:r>
-            <a:endParaRPr lang="en-US" sz="1500" dirty="0"/>
-          </a:p>
-        </p:txBody>
-      </p:sp>
-      <p:sp>
-        <p:nvSpPr>
-          <p:cNvPr id="19" name="Text 17"/>
-          <p:cNvSpPr txBox="1"/>
-          <p:nvPr/>
-        </p:nvSpPr>
-        <p:spPr>
-          <a:xfrm>
-            <a:off x="822960" y="4279392"/>
-            <a:ext cx="10515600" cy="1463040"/>
-          </a:xfrm>
-          <a:prstGeom prst="rect">
-            <a:avLst/>
-          </a:prstGeom>
-          <a:noFill/>
-          <a:ln/>
-        </p:spPr>
-        <p:txBody>
-          <a:bodyPr wrap="square" lIns="0" tIns="0" rIns="0" bIns="0" rtlCol="0" anchor="ctr"/>
-          <a:lstStyle/>
-          <a:p>
-            <a:pPr marL="342900" indent="-342900">
-              <a:spcAft>
-                <a:spcPts val="700"/>
-              </a:spcAft>
-              <a:buSzPct val="100000"/>
-              <a:buChar char="•"/>
-            </a:pPr>
-            <a:r>
-              <a:rPr lang="en-US" sz="1300" dirty="0">
-                <a:solidFill>
-                  <a:srgbClr val="D2DEE8"/>
-                </a:solidFill>
-                <a:latin typeface="Calibri" pitchFamily="34" charset="0"/>
-                <a:ea typeface="Calibri" pitchFamily="34" charset="-122"/>
-                <a:cs typeface="Calibri" pitchFamily="34" charset="-120"/>
-              </a:rPr>
-              <a:t>Unknown policy IDs return an error — never a plausible-looking control</a:t>
+              <a:rPr lang="en-US" sz="1100" dirty="0">
+                <a:solidFill>
+                  <a:srgbClr val="10212F"/>
+                </a:solidFill>
+                <a:latin typeface="Calibri" pitchFamily="34" charset="0"/>
+                <a:ea typeface="Calibri" pitchFamily="34" charset="-122"/>
+                <a:cs typeface="Calibri" pitchFamily="34" charset="-120"/>
+              </a:rPr>
+              <a:t>MS.AAD.7.9v1, MS.TEAMS.5.2v2 and MS.TEAMS.5.3v2 are SHOULD, so compliance severity ranks them last. Each is the only remaining mitigation for two ATT&amp;CK techniques.</a:t>
+            </a:r>
+            <a:endParaRPr lang="en-US" sz="1100" dirty="0"/>
+          </a:p>
+        </p:txBody>
+      </p:sp>
+      <p:sp>
+        <p:nvSpPr>
+          <p:cNvPr id="27" name="Text 25"/>
+          <p:cNvSpPr txBox="1"/>
+          <p:nvPr/>
+        </p:nvSpPr>
+        <p:spPr>
+          <a:xfrm>
+            <a:off x="640080" y="5669280"/>
+            <a:ext cx="10881360" cy="365760"/>
+          </a:xfrm>
+          <a:prstGeom prst="rect">
+            <a:avLst/>
+          </a:prstGeom>
+          <a:noFill/>
+          <a:ln/>
+        </p:spPr>
+        <p:txBody>
+          <a:bodyPr wrap="square" lIns="0" tIns="0" rIns="0" bIns="0" rtlCol="0" anchor="ctr"/>
+          <a:lstStyle/>
+          <a:p>
+            <a:pPr indent="0" marL="0">
+              <a:buNone/>
+            </a:pPr>
+            <a:r>
+              <a:rPr lang="en-US" sz="1300" b="1" dirty="0">
+                <a:solidFill>
+                  <a:srgbClr val="14304F"/>
+                </a:solidFill>
+                <a:latin typeface="Calibri" pitchFamily="34" charset="0"/>
+                <a:ea typeface="Calibri" pitchFamily="34" charset="-122"/>
+                <a:cs typeface="Calibri" pitchFamily="34" charset="-120"/>
+              </a:rPr>
+              <a:t>A POA&amp;M says what is non-compliant. Neither of these questions can be answered from the scanner's own report.</a:t>
             </a:r>
             <a:endParaRPr lang="en-US" sz="1300" dirty="0"/>
-          </a:p>
-          <a:p>
-            <a:pPr marL="342900" indent="-342900">
-              <a:spcAft>
-                <a:spcPts val="700"/>
-              </a:spcAft>
-              <a:buSzPct val="100000"/>
-              <a:buChar char="•"/>
-            </a:pPr>
-            <a:r>
-              <a:rPr lang="en-US" sz="1300" dirty="0">
-                <a:solidFill>
-                  <a:srgbClr val="D2DEE8"/>
-                </a:solidFill>
-                <a:latin typeface="Calibri" pitchFamily="34" charset="0"/>
-                <a:ea typeface="Calibri" pitchFamily="34" charset="-122"/>
-                <a:cs typeface="Calibri" pitchFamily="34" charset="-120"/>
-              </a:rPr>
-              <a:t>Every mapping reports provenance; an AI proposal can never override CISA</a:t>
-            </a:r>
-            <a:endParaRPr lang="en-US" sz="1300" dirty="0"/>
-          </a:p>
-          <a:p>
-            <a:pPr marL="342900" indent="-342900">
-              <a:spcAft>
-                <a:spcPts val="700"/>
-              </a:spcAft>
-              <a:buSzPct val="100000"/>
-              <a:buChar char="•"/>
-            </a:pPr>
-            <a:r>
-              <a:rPr lang="en-US" sz="1300" dirty="0">
-                <a:solidFill>
-                  <a:srgbClr val="D2DEE8"/>
-                </a:solidFill>
-                <a:latin typeface="Calibri" pitchFamily="34" charset="0"/>
-                <a:ea typeface="Calibri" pitchFamily="34" charset="-122"/>
-                <a:cs typeface="Calibri" pitchFamily="34" charset="-120"/>
-              </a:rPr>
-              <a:t>Untestable policies recorded as EXAMINE, not TEST — evidence is never overstated</a:t>
-            </a:r>
-            <a:endParaRPr lang="en-US" sz="1300" dirty="0"/>
-          </a:p>
-          <a:p>
-            <a:pPr marL="342900" indent="-342900">
-              <a:spcAft>
-                <a:spcPts val="700"/>
-              </a:spcAft>
-              <a:buSzPct val="100000"/>
-              <a:buChar char="•"/>
-            </a:pPr>
-            <a:r>
-              <a:rPr lang="en-US" sz="1300" dirty="0">
-                <a:solidFill>
-                  <a:srgbClr val="D2DEE8"/>
-                </a:solidFill>
-                <a:latin typeface="Calibri" pitchFamily="34" charset="0"/>
-                <a:ea typeface="Calibri" pitchFamily="34" charset="-122"/>
-                <a:cs typeface="Calibri" pitchFamily="34" charset="-120"/>
-              </a:rPr>
-              <a:t>AI-authored remediation prose tagged generated-by=ai-assistant inside the POA&amp;M</a:t>
-            </a:r>
-            <a:endParaRPr lang="en-US" sz="1300" dirty="0"/>
-          </a:p>
-        </p:txBody>
-      </p:sp>
-      <p:sp>
-        <p:nvSpPr>
-          <p:cNvPr id="20" name="Text 18"/>
-          <p:cNvSpPr txBox="1"/>
-          <p:nvPr/>
-        </p:nvSpPr>
-        <p:spPr>
-          <a:xfrm>
-            <a:off x="640080" y="5989320"/>
-            <a:ext cx="10881360" cy="320040"/>
-          </a:xfrm>
-          <a:prstGeom prst="rect">
-            <a:avLst/>
-          </a:prstGeom>
-          <a:noFill/>
-          <a:ln/>
-        </p:spPr>
-        <p:txBody>
-          <a:bodyPr wrap="square" lIns="0" tIns="0" rIns="0" bIns="0" rtlCol="0" anchor="ctr"/>
-          <a:lstStyle/>
-          <a:p>
-            <a:pPr indent="0" marL="0">
-              <a:buNone/>
-            </a:pPr>
-            <a:r>
-              <a:rPr lang="en-US" sz="1200" dirty="0">
-                <a:solidFill>
-                  <a:srgbClr val="7E93A6"/>
-                </a:solidFill>
-                <a:latin typeface="Calibri" pitchFamily="34" charset="0"/>
-                <a:ea typeface="Calibri" pitchFamily="34" charset="-122"/>
-                <a:cs typeface="Calibri" pitchFamily="34" charset="-120"/>
-              </a:rPr>
-              <a:t>gpt-5-mini on Microsoft Foundry  ·  keyless auth  ·  Microsoft Agent Framework</a:t>
-            </a:r>
-            <a:endParaRPr lang="en-US" sz="1200" dirty="0"/>
           </a:p>
         </p:txBody>
       </p:sp>
@@ -11342,7 +13547,7 @@
                 <a:ea typeface="Calibri" pitchFamily="34" charset="-122"/>
                 <a:cs typeface="Calibri" pitchFamily="34" charset="-120"/>
               </a:rPr>
-              <a:t>MEASURED, NOT ASSERTED</a:t>
+              <a:t>BUILT FOR THE COMMONWEALTH</a:t>
             </a:r>
             <a:endParaRPr lang="en-US" sz="1200" dirty="0"/>
           </a:p>
@@ -11381,7 +13586,7 @@
                 <a:ea typeface="Cambria" pitchFamily="34" charset="-122"/>
                 <a:cs typeface="Cambria" pitchFamily="34" charset="-120"/>
               </a:rPr>
-              <a:t>We tested our architecture against the obvious one</a:t>
+              <a:t>What a SCuBA failure means in Virginia</a:t>
             </a:r>
             <a:endParaRPr lang="en-US" sz="3400" dirty="0"/>
           </a:p>
@@ -11396,7 +13601,7 @@
         <p:spPr>
           <a:xfrm>
             <a:off x="640080" y="1298448"/>
-            <a:ext cx="10881360" cy="548640"/>
+            <a:ext cx="10881360" cy="594360"/>
           </a:xfrm>
           <a:prstGeom prst="rect">
             <a:avLst/>
@@ -11423,7 +13628,7 @@
                 <a:ea typeface="Calibri" pitchFamily="34" charset="-122"/>
                 <a:cs typeface="Calibri" pitchFamily="34" charset="-120"/>
               </a:rPr>
-              <a:t>Same 15 questions. Same model. Same grader. The only variable: one arm gets tools over validated OSCAL, the other gets the raw scanner output dumped into context.</a:t>
+              <a:t>SCuBA is federal guidance. Virginia public bodies — every public college, university and school division — are governed by SEC530, VITA's Information Security Standard, which adopts NIST 800-53 and uses its control identifiers directly.</a:t>
             </a:r>
             <a:endParaRPr lang="en-US" sz="1400" dirty="0"/>
           </a:p>
@@ -11431,96 +13636,18 @@
       </p:sp>
       <p:sp>
         <p:nvSpPr>
-          <p:cNvPr id="5" name="Text 3"/>
-          <p:cNvSpPr txBox="1"/>
-          <p:nvPr/>
-        </p:nvSpPr>
-        <p:spPr>
-          <a:xfrm>
-            <a:off x="6675120" y="1965960"/>
-            <a:ext cx="2194560" cy="365760"/>
-          </a:xfrm>
-          <a:prstGeom prst="rect">
-            <a:avLst/>
-          </a:prstGeom>
-          <a:noFill/>
-          <a:ln/>
-        </p:spPr>
-        <p:txBody>
-          <a:bodyPr wrap="square" lIns="0" tIns="0" rIns="0" bIns="0" rtlCol="0" anchor="ctr"/>
-          <a:lstStyle/>
-          <a:p>
-            <a:pPr algn="ctr" indent="0" marL="0">
-              <a:buNone/>
-            </a:pPr>
-            <a:r>
-              <a:rPr lang="en-US" sz="1150" b="1" spc="100" kern="0" dirty="0">
-                <a:solidFill>
-                  <a:srgbClr val="30A46C"/>
-                </a:solidFill>
-                <a:latin typeface="Calibri" pitchFamily="34" charset="0"/>
-                <a:ea typeface="Calibri" pitchFamily="34" charset="-122"/>
-                <a:cs typeface="Calibri" pitchFamily="34" charset="-120"/>
-              </a:rPr>
-              <a:t>GROUNDED</a:t>
-            </a:r>
-            <a:endParaRPr lang="en-US" sz="1150" dirty="0"/>
-          </a:p>
-        </p:txBody>
-      </p:sp>
-      <p:sp>
-        <p:nvSpPr>
-          <p:cNvPr id="6" name="Text 4"/>
-          <p:cNvSpPr txBox="1"/>
-          <p:nvPr/>
-        </p:nvSpPr>
-        <p:spPr>
-          <a:xfrm>
-            <a:off x="9052560" y="1965960"/>
-            <a:ext cx="2468880" cy="365760"/>
-          </a:xfrm>
-          <a:prstGeom prst="rect">
-            <a:avLst/>
-          </a:prstGeom>
-          <a:noFill/>
-          <a:ln/>
-        </p:spPr>
-        <p:txBody>
-          <a:bodyPr wrap="square" lIns="0" tIns="0" rIns="0" bIns="0" rtlCol="0" anchor="ctr"/>
-          <a:lstStyle/>
-          <a:p>
-            <a:pPr algn="ctr" indent="0" marL="0">
-              <a:buNone/>
-            </a:pPr>
-            <a:r>
-              <a:rPr lang="en-US" sz="1150" b="1" spc="100" kern="0" dirty="0">
-                <a:solidFill>
-                  <a:srgbClr val="E5484D"/>
-                </a:solidFill>
-                <a:latin typeface="Calibri" pitchFamily="34" charset="0"/>
-                <a:ea typeface="Calibri" pitchFamily="34" charset="-122"/>
-                <a:cs typeface="Calibri" pitchFamily="34" charset="-120"/>
-              </a:rPr>
-              <a:t>UNGROUNDED</a:t>
-            </a:r>
-            <a:endParaRPr lang="en-US" sz="1150" dirty="0"/>
-          </a:p>
-        </p:txBody>
-      </p:sp>
-      <p:sp>
-        <p:nvSpPr>
-          <p:cNvPr id="7" name="Shape 5"/>
+          <p:cNvPr id="5" name="Shape 3"/>
           <p:cNvSpPr/>
           <p:nvPr/>
         </p:nvSpPr>
         <p:spPr>
           <a:xfrm>
-            <a:off x="640080" y="2441448"/>
-            <a:ext cx="10881360" cy="512064"/>
+            <a:off x="640080" y="2011680"/>
+            <a:ext cx="2377440" cy="548640"/>
           </a:xfrm>
           <a:prstGeom prst="roundRect">
             <a:avLst>
-              <a:gd name="adj" fmla="val 8929"/>
+              <a:gd name="adj" fmla="val 13333"/>
             </a:avLst>
           </a:prstGeom>
           <a:solidFill>
@@ -11536,30 +13663,30 @@
       </p:sp>
       <p:sp>
         <p:nvSpPr>
-          <p:cNvPr id="8" name="Text 6"/>
-          <p:cNvSpPr txBox="1"/>
-          <p:nvPr/>
-        </p:nvSpPr>
-        <p:spPr>
-          <a:xfrm>
-            <a:off x="914400" y="2551176"/>
-            <a:ext cx="5577840" cy="329184"/>
-          </a:xfrm>
-          <a:prstGeom prst="rect">
-            <a:avLst/>
-          </a:prstGeom>
-          <a:noFill/>
-          <a:ln/>
-        </p:spPr>
-        <p:txBody>
-          <a:bodyPr wrap="square" lIns="0" tIns="0" rIns="0" bIns="0" rtlCol="0" anchor="ctr"/>
-          <a:lstStyle/>
-          <a:p>
-            <a:pPr indent="0" marL="0">
-              <a:buNone/>
-            </a:pPr>
-            <a:r>
-              <a:rPr lang="en-US" sz="1300" dirty="0">
+          <p:cNvPr id="6" name="Text 4"/>
+          <p:cNvSpPr txBox="1"/>
+          <p:nvPr/>
+        </p:nvSpPr>
+        <p:spPr>
+          <a:xfrm>
+            <a:off x="640080" y="2148840"/>
+            <a:ext cx="2377440" cy="292608"/>
+          </a:xfrm>
+          <a:prstGeom prst="rect">
+            <a:avLst/>
+          </a:prstGeom>
+          <a:noFill/>
+          <a:ln/>
+        </p:spPr>
+        <p:txBody>
+          <a:bodyPr wrap="square" lIns="0" tIns="0" rIns="0" bIns="0" rtlCol="0" anchor="ctr"/>
+          <a:lstStyle/>
+          <a:p>
+            <a:pPr algn="ctr" indent="0" marL="0">
+              <a:buNone/>
+            </a:pPr>
+            <a:r>
+              <a:rPr lang="en-US" sz="1250" b="1" dirty="0">
                 <a:solidFill>
                   <a:srgbClr val="10212F"/>
                 </a:solidFill>
@@ -11567,22 +13694,22 @@
                 <a:ea typeface="Calibri" pitchFamily="34" charset="-122"/>
                 <a:cs typeface="Calibri" pitchFamily="34" charset="-120"/>
               </a:rPr>
-              <a:t>Pass rate</a:t>
-            </a:r>
-            <a:endParaRPr lang="en-US" sz="1300" dirty="0"/>
-          </a:p>
-        </p:txBody>
-      </p:sp>
-      <p:sp>
-        <p:nvSpPr>
-          <p:cNvPr id="9" name="Text 7"/>
-          <p:cNvSpPr txBox="1"/>
-          <p:nvPr/>
-        </p:nvSpPr>
-        <p:spPr>
-          <a:xfrm>
-            <a:off x="6675120" y="2514600"/>
-            <a:ext cx="2194560" cy="384048"/>
+              <a:t>SCuBA policy</a:t>
+            </a:r>
+            <a:endParaRPr lang="en-US" sz="1250" dirty="0"/>
+          </a:p>
+        </p:txBody>
+      </p:sp>
+      <p:sp>
+        <p:nvSpPr>
+          <p:cNvPr id="7" name="Text 5"/>
+          <p:cNvSpPr txBox="1"/>
+          <p:nvPr/>
+        </p:nvSpPr>
+        <p:spPr>
+          <a:xfrm>
+            <a:off x="3017520" y="2130552"/>
+            <a:ext cx="411480" cy="310896"/>
           </a:xfrm>
           <a:prstGeom prst="rect">
             <a:avLst/>
@@ -11598,217 +13725,34 @@
               <a:buNone/>
             </a:pPr>
             <a:r>
-              <a:rPr lang="en-US" sz="1700" b="1" dirty="0">
-                <a:solidFill>
-                  <a:srgbClr val="30A46C"/>
-                </a:solidFill>
-                <a:latin typeface="Calibri" pitchFamily="34" charset="0"/>
-                <a:ea typeface="Calibri" pitchFamily="34" charset="-122"/>
-                <a:cs typeface="Calibri" pitchFamily="34" charset="-120"/>
-              </a:rPr>
-              <a:t>100%</a:t>
-            </a:r>
-            <a:endParaRPr lang="en-US" sz="1700" dirty="0"/>
-          </a:p>
-        </p:txBody>
-      </p:sp>
-      <p:sp>
-        <p:nvSpPr>
-          <p:cNvPr id="10" name="Text 8"/>
-          <p:cNvSpPr txBox="1"/>
-          <p:nvPr/>
-        </p:nvSpPr>
-        <p:spPr>
-          <a:xfrm>
-            <a:off x="9052560" y="2514600"/>
-            <a:ext cx="2468880" cy="384048"/>
-          </a:xfrm>
-          <a:prstGeom prst="rect">
-            <a:avLst/>
-          </a:prstGeom>
-          <a:noFill/>
-          <a:ln/>
-        </p:spPr>
-        <p:txBody>
-          <a:bodyPr wrap="square" lIns="0" tIns="0" rIns="0" bIns="0" rtlCol="0" anchor="ctr"/>
-          <a:lstStyle/>
-          <a:p>
-            <a:pPr algn="ctr" indent="0" marL="0">
-              <a:buNone/>
-            </a:pPr>
-            <a:r>
-              <a:rPr lang="en-US" sz="1700" b="1" dirty="0">
-                <a:solidFill>
-                  <a:srgbClr val="E5484D"/>
-                </a:solidFill>
-                <a:latin typeface="Calibri" pitchFamily="34" charset="0"/>
-                <a:ea typeface="Calibri" pitchFamily="34" charset="-122"/>
-                <a:cs typeface="Calibri" pitchFamily="34" charset="-120"/>
-              </a:rPr>
-              <a:t>80%</a:t>
-            </a:r>
-            <a:endParaRPr lang="en-US" sz="1700" dirty="0"/>
-          </a:p>
-        </p:txBody>
-      </p:sp>
-      <p:sp>
-        <p:nvSpPr>
-          <p:cNvPr id="11" name="Shape 9"/>
+              <a:rPr lang="en-US" sz="1500" b="1" dirty="0">
+                <a:solidFill>
+                  <a:srgbClr val="00A896"/>
+                </a:solidFill>
+                <a:latin typeface="Calibri" pitchFamily="34" charset="0"/>
+                <a:ea typeface="Calibri" pitchFamily="34" charset="-122"/>
+                <a:cs typeface="Calibri" pitchFamily="34" charset="-120"/>
+              </a:rPr>
+              <a:t>→</a:t>
+            </a:r>
+            <a:endParaRPr lang="en-US" sz="1500" dirty="0"/>
+          </a:p>
+        </p:txBody>
+      </p:sp>
+      <p:sp>
+        <p:nvSpPr>
+          <p:cNvPr id="8" name="Shape 6"/>
           <p:cNvSpPr/>
           <p:nvPr/>
         </p:nvSpPr>
         <p:spPr>
           <a:xfrm>
-            <a:off x="640080" y="3008376"/>
-            <a:ext cx="10881360" cy="512064"/>
+            <a:off x="3429000" y="2011680"/>
+            <a:ext cx="2377440" cy="548640"/>
           </a:xfrm>
           <a:prstGeom prst="roundRect">
             <a:avLst>
-              <a:gd name="adj" fmla="val 8929"/>
-            </a:avLst>
-          </a:prstGeom>
-          <a:solidFill>
-            <a:srgbClr val="FFFFFF"/>
-          </a:solidFill>
-          <a:ln w="12700">
-            <a:solidFill>
-              <a:srgbClr val="EDF1F4"/>
-            </a:solidFill>
-            <a:prstDash val="solid"/>
-          </a:ln>
-        </p:spPr>
-      </p:sp>
-      <p:sp>
-        <p:nvSpPr>
-          <p:cNvPr id="12" name="Text 10"/>
-          <p:cNvSpPr txBox="1"/>
-          <p:nvPr/>
-        </p:nvSpPr>
-        <p:spPr>
-          <a:xfrm>
-            <a:off x="914400" y="3118104"/>
-            <a:ext cx="5577840" cy="329184"/>
-          </a:xfrm>
-          <a:prstGeom prst="rect">
-            <a:avLst/>
-          </a:prstGeom>
-          <a:noFill/>
-          <a:ln/>
-        </p:spPr>
-        <p:txBody>
-          <a:bodyPr wrap="square" lIns="0" tIns="0" rIns="0" bIns="0" rtlCol="0" anchor="ctr"/>
-          <a:lstStyle/>
-          <a:p>
-            <a:pPr indent="0" marL="0">
-              <a:buNone/>
-            </a:pPr>
-            <a:r>
-              <a:rPr lang="en-US" sz="1300" dirty="0">
-                <a:solidFill>
-                  <a:srgbClr val="10212F"/>
-                </a:solidFill>
-                <a:latin typeface="Calibri" pitchFamily="34" charset="0"/>
-                <a:ea typeface="Calibri" pitchFamily="34" charset="-122"/>
-                <a:cs typeface="Calibri" pitchFamily="34" charset="-120"/>
-              </a:rPr>
-              <a:t>Answers asserting facts never given to it</a:t>
-            </a:r>
-            <a:endParaRPr lang="en-US" sz="1300" dirty="0"/>
-          </a:p>
-        </p:txBody>
-      </p:sp>
-      <p:sp>
-        <p:nvSpPr>
-          <p:cNvPr id="13" name="Text 11"/>
-          <p:cNvSpPr txBox="1"/>
-          <p:nvPr/>
-        </p:nvSpPr>
-        <p:spPr>
-          <a:xfrm>
-            <a:off x="6675120" y="3081528"/>
-            <a:ext cx="2194560" cy="384048"/>
-          </a:xfrm>
-          <a:prstGeom prst="rect">
-            <a:avLst/>
-          </a:prstGeom>
-          <a:noFill/>
-          <a:ln/>
-        </p:spPr>
-        <p:txBody>
-          <a:bodyPr wrap="square" lIns="0" tIns="0" rIns="0" bIns="0" rtlCol="0" anchor="ctr"/>
-          <a:lstStyle/>
-          <a:p>
-            <a:pPr algn="ctr" indent="0" marL="0">
-              <a:buNone/>
-            </a:pPr>
-            <a:r>
-              <a:rPr lang="en-US" sz="1700" b="1" dirty="0">
-                <a:solidFill>
-                  <a:srgbClr val="30A46C"/>
-                </a:solidFill>
-                <a:latin typeface="Calibri" pitchFamily="34" charset="0"/>
-                <a:ea typeface="Calibri" pitchFamily="34" charset="-122"/>
-                <a:cs typeface="Calibri" pitchFamily="34" charset="-120"/>
-              </a:rPr>
-              <a:t>0</a:t>
-            </a:r>
-            <a:endParaRPr lang="en-US" sz="1700" dirty="0"/>
-          </a:p>
-        </p:txBody>
-      </p:sp>
-      <p:sp>
-        <p:nvSpPr>
-          <p:cNvPr id="14" name="Text 12"/>
-          <p:cNvSpPr txBox="1"/>
-          <p:nvPr/>
-        </p:nvSpPr>
-        <p:spPr>
-          <a:xfrm>
-            <a:off x="9052560" y="3081528"/>
-            <a:ext cx="2468880" cy="384048"/>
-          </a:xfrm>
-          <a:prstGeom prst="rect">
-            <a:avLst/>
-          </a:prstGeom>
-          <a:noFill/>
-          <a:ln/>
-        </p:spPr>
-        <p:txBody>
-          <a:bodyPr wrap="square" lIns="0" tIns="0" rIns="0" bIns="0" rtlCol="0" anchor="ctr"/>
-          <a:lstStyle/>
-          <a:p>
-            <a:pPr algn="ctr" indent="0" marL="0">
-              <a:buNone/>
-            </a:pPr>
-            <a:r>
-              <a:rPr lang="en-US" sz="1700" b="1" dirty="0">
-                <a:solidFill>
-                  <a:srgbClr val="E5484D"/>
-                </a:solidFill>
-                <a:latin typeface="Calibri" pitchFamily="34" charset="0"/>
-                <a:ea typeface="Calibri" pitchFamily="34" charset="-122"/>
-                <a:cs typeface="Calibri" pitchFamily="34" charset="-120"/>
-              </a:rPr>
-              <a:t>2</a:t>
-            </a:r>
-            <a:endParaRPr lang="en-US" sz="1700" dirty="0"/>
-          </a:p>
-        </p:txBody>
-      </p:sp>
-      <p:sp>
-        <p:nvSpPr>
-          <p:cNvPr id="15" name="Shape 13"/>
-          <p:cNvSpPr/>
-          <p:nvPr/>
-        </p:nvSpPr>
-        <p:spPr>
-          <a:xfrm>
-            <a:off x="640080" y="3575304"/>
-            <a:ext cx="10881360" cy="512064"/>
-          </a:xfrm>
-          <a:prstGeom prst="roundRect">
-            <a:avLst>
-              <a:gd name="adj" fmla="val 8929"/>
+              <a:gd name="adj" fmla="val 13333"/>
             </a:avLst>
           </a:prstGeom>
           <a:solidFill>
@@ -11824,30 +13768,30 @@
       </p:sp>
       <p:sp>
         <p:nvSpPr>
-          <p:cNvPr id="16" name="Text 14"/>
-          <p:cNvSpPr txBox="1"/>
-          <p:nvPr/>
-        </p:nvSpPr>
-        <p:spPr>
-          <a:xfrm>
-            <a:off x="914400" y="3685032"/>
-            <a:ext cx="5577840" cy="329184"/>
-          </a:xfrm>
-          <a:prstGeom prst="rect">
-            <a:avLst/>
-          </a:prstGeom>
-          <a:noFill/>
-          <a:ln/>
-        </p:spPr>
-        <p:txBody>
-          <a:bodyPr wrap="square" lIns="0" tIns="0" rIns="0" bIns="0" rtlCol="0" anchor="ctr"/>
-          <a:lstStyle/>
-          <a:p>
-            <a:pPr indent="0" marL="0">
-              <a:buNone/>
-            </a:pPr>
-            <a:r>
-              <a:rPr lang="en-US" sz="1300" dirty="0">
+          <p:cNvPr id="9" name="Text 7"/>
+          <p:cNvSpPr txBox="1"/>
+          <p:nvPr/>
+        </p:nvSpPr>
+        <p:spPr>
+          <a:xfrm>
+            <a:off x="3429000" y="2148840"/>
+            <a:ext cx="2377440" cy="292608"/>
+          </a:xfrm>
+          <a:prstGeom prst="rect">
+            <a:avLst/>
+          </a:prstGeom>
+          <a:noFill/>
+          <a:ln/>
+        </p:spPr>
+        <p:txBody>
+          <a:bodyPr wrap="square" lIns="0" tIns="0" rIns="0" bIns="0" rtlCol="0" anchor="ctr"/>
+          <a:lstStyle/>
+          <a:p>
+            <a:pPr algn="ctr" indent="0" marL="0">
+              <a:buNone/>
+            </a:pPr>
+            <a:r>
+              <a:rPr lang="en-US" sz="1250" b="1" dirty="0">
                 <a:solidFill>
                   <a:srgbClr val="10212F"/>
                 </a:solidFill>
@@ -11855,22 +13799,22 @@
                 <a:ea typeface="Calibri" pitchFamily="34" charset="-122"/>
                 <a:cs typeface="Calibri" pitchFamily="34" charset="-120"/>
               </a:rPr>
-              <a:t>Security identifiers invented from memory</a:t>
-            </a:r>
-            <a:endParaRPr lang="en-US" sz="1300" dirty="0"/>
-          </a:p>
-        </p:txBody>
-      </p:sp>
-      <p:sp>
-        <p:nvSpPr>
-          <p:cNvPr id="17" name="Text 15"/>
-          <p:cNvSpPr txBox="1"/>
-          <p:nvPr/>
-        </p:nvSpPr>
-        <p:spPr>
-          <a:xfrm>
-            <a:off x="6675120" y="3648456"/>
-            <a:ext cx="2194560" cy="384048"/>
+              <a:t>CISA crosswalk</a:t>
+            </a:r>
+            <a:endParaRPr lang="en-US" sz="1250" dirty="0"/>
+          </a:p>
+        </p:txBody>
+      </p:sp>
+      <p:sp>
+        <p:nvSpPr>
+          <p:cNvPr id="10" name="Text 8"/>
+          <p:cNvSpPr txBox="1"/>
+          <p:nvPr/>
+        </p:nvSpPr>
+        <p:spPr>
+          <a:xfrm>
+            <a:off x="5806440" y="2130552"/>
+            <a:ext cx="411480" cy="310896"/>
           </a:xfrm>
           <a:prstGeom prst="rect">
             <a:avLst/>
@@ -11886,81 +13830,42 @@
               <a:buNone/>
             </a:pPr>
             <a:r>
-              <a:rPr lang="en-US" sz="1700" b="1" dirty="0">
-                <a:solidFill>
-                  <a:srgbClr val="30A46C"/>
-                </a:solidFill>
-                <a:latin typeface="Calibri" pitchFamily="34" charset="0"/>
-                <a:ea typeface="Calibri" pitchFamily="34" charset="-122"/>
-                <a:cs typeface="Calibri" pitchFamily="34" charset="-120"/>
-              </a:rPr>
-              <a:t>0</a:t>
-            </a:r>
-            <a:endParaRPr lang="en-US" sz="1700" dirty="0"/>
-          </a:p>
-        </p:txBody>
-      </p:sp>
-      <p:sp>
-        <p:nvSpPr>
-          <p:cNvPr id="18" name="Text 16"/>
-          <p:cNvSpPr txBox="1"/>
-          <p:nvPr/>
-        </p:nvSpPr>
-        <p:spPr>
-          <a:xfrm>
-            <a:off x="9052560" y="3648456"/>
-            <a:ext cx="2468880" cy="384048"/>
-          </a:xfrm>
-          <a:prstGeom prst="rect">
-            <a:avLst/>
-          </a:prstGeom>
-          <a:noFill/>
-          <a:ln/>
-        </p:spPr>
-        <p:txBody>
-          <a:bodyPr wrap="square" lIns="0" tIns="0" rIns="0" bIns="0" rtlCol="0" anchor="ctr"/>
-          <a:lstStyle/>
-          <a:p>
-            <a:pPr algn="ctr" indent="0" marL="0">
-              <a:buNone/>
-            </a:pPr>
-            <a:r>
-              <a:rPr lang="en-US" sz="1700" b="1" dirty="0">
-                <a:solidFill>
-                  <a:srgbClr val="E5484D"/>
-                </a:solidFill>
-                <a:latin typeface="Calibri" pitchFamily="34" charset="0"/>
-                <a:ea typeface="Calibri" pitchFamily="34" charset="-122"/>
-                <a:cs typeface="Calibri" pitchFamily="34" charset="-120"/>
-              </a:rPr>
-              <a:t>6</a:t>
-            </a:r>
-            <a:endParaRPr lang="en-US" sz="1700" dirty="0"/>
-          </a:p>
-        </p:txBody>
-      </p:sp>
-      <p:sp>
-        <p:nvSpPr>
-          <p:cNvPr id="19" name="Shape 17"/>
+              <a:rPr lang="en-US" sz="1500" b="1" dirty="0">
+                <a:solidFill>
+                  <a:srgbClr val="00A896"/>
+                </a:solidFill>
+                <a:latin typeface="Calibri" pitchFamily="34" charset="0"/>
+                <a:ea typeface="Calibri" pitchFamily="34" charset="-122"/>
+                <a:cs typeface="Calibri" pitchFamily="34" charset="-120"/>
+              </a:rPr>
+              <a:t>→</a:t>
+            </a:r>
+            <a:endParaRPr lang="en-US" sz="1500" dirty="0"/>
+          </a:p>
+        </p:txBody>
+      </p:sp>
+      <p:sp>
+        <p:nvSpPr>
+          <p:cNvPr id="11" name="Shape 9"/>
           <p:cNvSpPr/>
           <p:nvPr/>
         </p:nvSpPr>
         <p:spPr>
           <a:xfrm>
-            <a:off x="640080" y="4315968"/>
-            <a:ext cx="10881360" cy="1600200"/>
+            <a:off x="6217920" y="2011680"/>
+            <a:ext cx="2377440" cy="548640"/>
           </a:xfrm>
           <a:prstGeom prst="roundRect">
             <a:avLst>
-              <a:gd name="adj" fmla="val 5714"/>
+              <a:gd name="adj" fmla="val 13333"/>
             </a:avLst>
           </a:prstGeom>
           <a:solidFill>
-            <a:srgbClr val="FDECEC"/>
+            <a:srgbClr val="F4F7F9"/>
           </a:solidFill>
           <a:ln w="12700">
             <a:solidFill>
-              <a:srgbClr val="F7C9C9"/>
+              <a:srgbClr val="E2E8EE"/>
             </a:solidFill>
             <a:prstDash val="solid"/>
           </a:ln>
@@ -11968,42 +13873,335 @@
       </p:sp>
       <p:sp>
         <p:nvSpPr>
-          <p:cNvPr id="20" name="Text 18"/>
-          <p:cNvSpPr txBox="1"/>
-          <p:nvPr/>
-        </p:nvSpPr>
-        <p:spPr>
-          <a:xfrm>
-            <a:off x="914400" y="4480560"/>
-            <a:ext cx="10332720" cy="320040"/>
-          </a:xfrm>
-          <a:prstGeom prst="rect">
-            <a:avLst/>
-          </a:prstGeom>
-          <a:noFill/>
-          <a:ln/>
-        </p:spPr>
-        <p:txBody>
-          <a:bodyPr wrap="square" lIns="0" tIns="0" rIns="0" bIns="0" rtlCol="0" anchor="ctr"/>
-          <a:lstStyle/>
-          <a:p>
-            <a:pPr indent="0" marL="0">
-              <a:buNone/>
-            </a:pPr>
-            <a:r>
-              <a:rPr lang="en-US" sz="1400" b="1" dirty="0">
-                <a:solidFill>
-                  <a:srgbClr val="8A2A2A"/>
-                </a:solidFill>
-                <a:latin typeface="Calibri" pitchFamily="34" charset="0"/>
-                <a:ea typeface="Calibri" pitchFamily="34" charset="-122"/>
-                <a:cs typeface="Calibri" pitchFamily="34" charset="-120"/>
-              </a:rPr>
-              <a:t>The pass rate is not the story. Fabrication is.</a:t>
-            </a:r>
-            <a:endParaRPr lang="en-US" sz="1400" dirty="0"/>
-          </a:p>
-        </p:txBody>
+          <p:cNvPr id="12" name="Text 10"/>
+          <p:cNvSpPr txBox="1"/>
+          <p:nvPr/>
+        </p:nvSpPr>
+        <p:spPr>
+          <a:xfrm>
+            <a:off x="6217920" y="2148840"/>
+            <a:ext cx="2377440" cy="292608"/>
+          </a:xfrm>
+          <a:prstGeom prst="rect">
+            <a:avLst/>
+          </a:prstGeom>
+          <a:noFill/>
+          <a:ln/>
+        </p:spPr>
+        <p:txBody>
+          <a:bodyPr wrap="square" lIns="0" tIns="0" rIns="0" bIns="0" rtlCol="0" anchor="ctr"/>
+          <a:lstStyle/>
+          <a:p>
+            <a:pPr algn="ctr" indent="0" marL="0">
+              <a:buNone/>
+            </a:pPr>
+            <a:r>
+              <a:rPr lang="en-US" sz="1250" b="1" dirty="0">
+                <a:solidFill>
+                  <a:srgbClr val="10212F"/>
+                </a:solidFill>
+                <a:latin typeface="Calibri" pitchFamily="34" charset="0"/>
+                <a:ea typeface="Calibri" pitchFamily="34" charset="-122"/>
+                <a:cs typeface="Calibri" pitchFamily="34" charset="-120"/>
+              </a:rPr>
+              <a:t>NIST 800-53</a:t>
+            </a:r>
+            <a:endParaRPr lang="en-US" sz="1250" dirty="0"/>
+          </a:p>
+        </p:txBody>
+      </p:sp>
+      <p:sp>
+        <p:nvSpPr>
+          <p:cNvPr id="13" name="Text 11"/>
+          <p:cNvSpPr txBox="1"/>
+          <p:nvPr/>
+        </p:nvSpPr>
+        <p:spPr>
+          <a:xfrm>
+            <a:off x="8595360" y="2130552"/>
+            <a:ext cx="411480" cy="310896"/>
+          </a:xfrm>
+          <a:prstGeom prst="rect">
+            <a:avLst/>
+          </a:prstGeom>
+          <a:noFill/>
+          <a:ln/>
+        </p:spPr>
+        <p:txBody>
+          <a:bodyPr wrap="square" lIns="0" tIns="0" rIns="0" bIns="0" rtlCol="0" anchor="ctr"/>
+          <a:lstStyle/>
+          <a:p>
+            <a:pPr algn="ctr" indent="0" marL="0">
+              <a:buNone/>
+            </a:pPr>
+            <a:r>
+              <a:rPr lang="en-US" sz="1500" b="1" dirty="0">
+                <a:solidFill>
+                  <a:srgbClr val="00A896"/>
+                </a:solidFill>
+                <a:latin typeface="Calibri" pitchFamily="34" charset="0"/>
+                <a:ea typeface="Calibri" pitchFamily="34" charset="-122"/>
+                <a:cs typeface="Calibri" pitchFamily="34" charset="-120"/>
+              </a:rPr>
+              <a:t>→</a:t>
+            </a:r>
+            <a:endParaRPr lang="en-US" sz="1500" dirty="0"/>
+          </a:p>
+        </p:txBody>
+      </p:sp>
+      <p:sp>
+        <p:nvSpPr>
+          <p:cNvPr id="14" name="Shape 12"/>
+          <p:cNvSpPr/>
+          <p:nvPr/>
+        </p:nvSpPr>
+        <p:spPr>
+          <a:xfrm>
+            <a:off x="9006840" y="2011680"/>
+            <a:ext cx="2377440" cy="548640"/>
+          </a:xfrm>
+          <a:prstGeom prst="roundRect">
+            <a:avLst>
+              <a:gd name="adj" fmla="val 13333"/>
+            </a:avLst>
+          </a:prstGeom>
+          <a:solidFill>
+            <a:srgbClr val="14304F"/>
+          </a:solidFill>
+          <a:ln w="12700">
+            <a:solidFill>
+              <a:srgbClr val="14304F"/>
+            </a:solidFill>
+            <a:prstDash val="solid"/>
+          </a:ln>
+        </p:spPr>
+      </p:sp>
+      <p:sp>
+        <p:nvSpPr>
+          <p:cNvPr id="15" name="Text 13"/>
+          <p:cNvSpPr txBox="1"/>
+          <p:nvPr/>
+        </p:nvSpPr>
+        <p:spPr>
+          <a:xfrm>
+            <a:off x="9006840" y="2148840"/>
+            <a:ext cx="2377440" cy="292608"/>
+          </a:xfrm>
+          <a:prstGeom prst="rect">
+            <a:avLst/>
+          </a:prstGeom>
+          <a:noFill/>
+          <a:ln/>
+        </p:spPr>
+        <p:txBody>
+          <a:bodyPr wrap="square" lIns="0" tIns="0" rIns="0" bIns="0" rtlCol="0" anchor="ctr"/>
+          <a:lstStyle/>
+          <a:p>
+            <a:pPr algn="ctr" indent="0" marL="0">
+              <a:buNone/>
+            </a:pPr>
+            <a:r>
+              <a:rPr lang="en-US" sz="1250" b="1" dirty="0">
+                <a:solidFill>
+                  <a:srgbClr val="FFFFFF"/>
+                </a:solidFill>
+                <a:latin typeface="Calibri" pitchFamily="34" charset="0"/>
+                <a:ea typeface="Calibri" pitchFamily="34" charset="-122"/>
+                <a:cs typeface="Calibri" pitchFamily="34" charset="-120"/>
+              </a:rPr>
+              <a:t>VITA SEC530</a:t>
+            </a:r>
+            <a:endParaRPr lang="en-US" sz="1250" dirty="0"/>
+          </a:p>
+        </p:txBody>
+      </p:sp>
+      <p:sp>
+        <p:nvSpPr>
+          <p:cNvPr id="16" name="Text 14"/>
+          <p:cNvSpPr txBox="1"/>
+          <p:nvPr/>
+        </p:nvSpPr>
+        <p:spPr>
+          <a:xfrm>
+            <a:off x="640080" y="2633472"/>
+            <a:ext cx="10881360" cy="274320"/>
+          </a:xfrm>
+          <a:prstGeom prst="rect">
+            <a:avLst/>
+          </a:prstGeom>
+          <a:noFill/>
+          <a:ln/>
+        </p:spPr>
+        <p:txBody>
+          <a:bodyPr wrap="square" lIns="0" tIns="0" rIns="0" bIns="0" rtlCol="0" anchor="ctr"/>
+          <a:lstStyle/>
+          <a:p>
+            <a:pPr indent="0" marL="0">
+              <a:buNone/>
+            </a:pPr>
+            <a:r>
+              <a:rPr lang="en-US" sz="1150" i="1" dirty="0">
+                <a:solidFill>
+                  <a:srgbClr val="5A6B7B"/>
+                </a:solidFill>
+                <a:latin typeface="Calibri" pitchFamily="34" charset="0"/>
+                <a:ea typeface="Calibri" pitchFamily="34" charset="-122"/>
+                <a:cs typeface="Calibri" pitchFamily="34" charset="-120"/>
+              </a:rPr>
+              <a:t>An exact join on identifiers published by CISA and VITA. No model is involved anywhere in this chain.</a:t>
+            </a:r>
+            <a:endParaRPr lang="en-US" sz="1150" dirty="0"/>
+          </a:p>
+        </p:txBody>
+      </p:sp>
+      <p:sp>
+        <p:nvSpPr>
+          <p:cNvPr id="17" name="Shape 15"/>
+          <p:cNvSpPr/>
+          <p:nvPr/>
+        </p:nvSpPr>
+        <p:spPr>
+          <a:xfrm>
+            <a:off x="640080" y="3063240"/>
+            <a:ext cx="3474720" cy="1508760"/>
+          </a:xfrm>
+          <a:prstGeom prst="roundRect">
+            <a:avLst>
+              <a:gd name="adj" fmla="val 6061"/>
+            </a:avLst>
+          </a:prstGeom>
+          <a:solidFill>
+            <a:srgbClr val="E8F6EF"/>
+          </a:solidFill>
+          <a:ln w="12700">
+            <a:solidFill>
+              <a:srgbClr val="E8F6EF"/>
+            </a:solidFill>
+            <a:prstDash val="solid"/>
+          </a:ln>
+        </p:spPr>
+      </p:sp>
+      <p:sp>
+        <p:nvSpPr>
+          <p:cNvPr id="18" name="Text 16"/>
+          <p:cNvSpPr txBox="1"/>
+          <p:nvPr/>
+        </p:nvSpPr>
+        <p:spPr>
+          <a:xfrm>
+            <a:off x="640080" y="3227832"/>
+            <a:ext cx="3474720" cy="749808"/>
+          </a:xfrm>
+          <a:prstGeom prst="rect">
+            <a:avLst/>
+          </a:prstGeom>
+          <a:noFill/>
+          <a:ln/>
+        </p:spPr>
+        <p:txBody>
+          <a:bodyPr wrap="square" lIns="0" tIns="0" rIns="0" bIns="0" rtlCol="0" anchor="ctr"/>
+          <a:lstStyle/>
+          <a:p>
+            <a:pPr algn="ctr" indent="0" marL="0">
+              <a:buNone/>
+            </a:pPr>
+            <a:r>
+              <a:rPr lang="en-US" sz="4000" b="1" dirty="0">
+                <a:solidFill>
+                  <a:srgbClr val="10212F"/>
+                </a:solidFill>
+                <a:latin typeface="Calibri" pitchFamily="34" charset="0"/>
+                <a:ea typeface="Calibri" pitchFamily="34" charset="-122"/>
+                <a:cs typeface="Calibri" pitchFamily="34" charset="-120"/>
+              </a:rPr>
+              <a:t>23 of 26</a:t>
+            </a:r>
+            <a:endParaRPr lang="en-US" sz="4000" dirty="0"/>
+          </a:p>
+        </p:txBody>
+      </p:sp>
+      <p:sp>
+        <p:nvSpPr>
+          <p:cNvPr id="19" name="Text 17"/>
+          <p:cNvSpPr txBox="1"/>
+          <p:nvPr/>
+        </p:nvSpPr>
+        <p:spPr>
+          <a:xfrm>
+            <a:off x="749808" y="3977640"/>
+            <a:ext cx="3255264" cy="502920"/>
+          </a:xfrm>
+          <a:prstGeom prst="rect">
+            <a:avLst/>
+          </a:prstGeom>
+          <a:noFill/>
+          <a:ln/>
+        </p:spPr>
+        <p:txBody>
+          <a:bodyPr wrap="square" lIns="0" tIns="0" rIns="0" bIns="0" rtlCol="0" anchor="ctr"/>
+          <a:lstStyle/>
+          <a:p>
+            <a:pPr algn="ctr" indent="0" marL="0">
+              <a:buNone/>
+            </a:pPr>
+            <a:r>
+              <a:rPr lang="en-US" sz="1150" dirty="0">
+                <a:solidFill>
+                  <a:srgbClr val="5A6B7B"/>
+                </a:solidFill>
+                <a:latin typeface="Calibri" pitchFamily="34" charset="0"/>
+                <a:ea typeface="Calibri" pitchFamily="34" charset="-122"/>
+                <a:cs typeface="Calibri" pitchFamily="34" charset="-120"/>
+              </a:rPr>
+              <a:t>failures are also</a:t>
+            </a:r>
+            <a:endParaRPr lang="en-US" sz="1150" dirty="0"/>
+          </a:p>
+          <a:p>
+            <a:pPr algn="ctr" indent="0" marL="0">
+              <a:buNone/>
+            </a:pPr>
+            <a:r>
+              <a:rPr lang="en-US" sz="1150" dirty="0">
+                <a:solidFill>
+                  <a:srgbClr val="5A6B7B"/>
+                </a:solidFill>
+                <a:latin typeface="Calibri" pitchFamily="34" charset="0"/>
+                <a:ea typeface="Calibri" pitchFamily="34" charset="-122"/>
+                <a:cs typeface="Calibri" pitchFamily="34" charset="-120"/>
+              </a:rPr>
+              <a:t>Commonwealth obligations</a:t>
+            </a:r>
+            <a:endParaRPr lang="en-US" sz="1150" dirty="0"/>
+          </a:p>
+        </p:txBody>
+      </p:sp>
+      <p:sp>
+        <p:nvSpPr>
+          <p:cNvPr id="20" name="Shape 18"/>
+          <p:cNvSpPr/>
+          <p:nvPr/>
+        </p:nvSpPr>
+        <p:spPr>
+          <a:xfrm>
+            <a:off x="4343400" y="3063240"/>
+            <a:ext cx="3474720" cy="1508760"/>
+          </a:xfrm>
+          <a:prstGeom prst="roundRect">
+            <a:avLst>
+              <a:gd name="adj" fmla="val 6061"/>
+            </a:avLst>
+          </a:prstGeom>
+          <a:solidFill>
+            <a:srgbClr val="F4F7F9"/>
+          </a:solidFill>
+          <a:ln w="12700">
+            <a:solidFill>
+              <a:srgbClr val="F4F7F9"/>
+            </a:solidFill>
+            <a:prstDash val="solid"/>
+          </a:ln>
+        </p:spPr>
       </p:sp>
       <p:sp>
         <p:nvSpPr>
@@ -12013,8 +14211,291 @@
         </p:nvSpPr>
         <p:spPr>
           <a:xfrm>
-            <a:off x="914400" y="4818888"/>
-            <a:ext cx="10332720" cy="777240"/>
+            <a:off x="4343400" y="3227832"/>
+            <a:ext cx="3474720" cy="749808"/>
+          </a:xfrm>
+          <a:prstGeom prst="rect">
+            <a:avLst/>
+          </a:prstGeom>
+          <a:noFill/>
+          <a:ln/>
+        </p:spPr>
+        <p:txBody>
+          <a:bodyPr wrap="square" lIns="0" tIns="0" rIns="0" bIns="0" rtlCol="0" anchor="ctr"/>
+          <a:lstStyle/>
+          <a:p>
+            <a:pPr algn="ctr" indent="0" marL="0">
+              <a:buNone/>
+            </a:pPr>
+            <a:r>
+              <a:rPr lang="en-US" sz="4000" b="1" dirty="0">
+                <a:solidFill>
+                  <a:srgbClr val="10212F"/>
+                </a:solidFill>
+                <a:latin typeface="Calibri" pitchFamily="34" charset="0"/>
+                <a:ea typeface="Calibri" pitchFamily="34" charset="-122"/>
+                <a:cs typeface="Calibri" pitchFamily="34" charset="-120"/>
+              </a:rPr>
+              <a:t>1,189</a:t>
+            </a:r>
+            <a:endParaRPr lang="en-US" sz="4000" dirty="0"/>
+          </a:p>
+        </p:txBody>
+      </p:sp>
+      <p:sp>
+        <p:nvSpPr>
+          <p:cNvPr id="22" name="Text 20"/>
+          <p:cNvSpPr txBox="1"/>
+          <p:nvPr/>
+        </p:nvSpPr>
+        <p:spPr>
+          <a:xfrm>
+            <a:off x="4453128" y="3977640"/>
+            <a:ext cx="3255264" cy="502920"/>
+          </a:xfrm>
+          <a:prstGeom prst="rect">
+            <a:avLst/>
+          </a:prstGeom>
+          <a:noFill/>
+          <a:ln/>
+        </p:spPr>
+        <p:txBody>
+          <a:bodyPr wrap="square" lIns="0" tIns="0" rIns="0" bIns="0" rtlCol="0" anchor="ctr"/>
+          <a:lstStyle/>
+          <a:p>
+            <a:pPr algn="ctr" indent="0" marL="0">
+              <a:buNone/>
+            </a:pPr>
+            <a:r>
+              <a:rPr lang="en-US" sz="1150" dirty="0">
+                <a:solidFill>
+                  <a:srgbClr val="5A6B7B"/>
+                </a:solidFill>
+                <a:latin typeface="Calibri" pitchFamily="34" charset="0"/>
+                <a:ea typeface="Calibri" pitchFamily="34" charset="-122"/>
+                <a:cs typeface="Calibri" pitchFamily="34" charset="-120"/>
+              </a:rPr>
+              <a:t>SEC530 controls parsed</a:t>
+            </a:r>
+            <a:endParaRPr lang="en-US" sz="1150" dirty="0"/>
+          </a:p>
+          <a:p>
+            <a:pPr algn="ctr" indent="0" marL="0">
+              <a:buNone/>
+            </a:pPr>
+            <a:r>
+              <a:rPr lang="en-US" sz="1150" dirty="0">
+                <a:solidFill>
+                  <a:srgbClr val="5A6B7B"/>
+                </a:solidFill>
+                <a:latin typeface="Calibri" pitchFamily="34" charset="0"/>
+                <a:ea typeface="Calibri" pitchFamily="34" charset="-122"/>
+                <a:cs typeface="Calibri" pitchFamily="34" charset="-120"/>
+              </a:rPr>
+              <a:t>from VITA's own spreadsheet</a:t>
+            </a:r>
+            <a:endParaRPr lang="en-US" sz="1150" dirty="0"/>
+          </a:p>
+        </p:txBody>
+      </p:sp>
+      <p:sp>
+        <p:nvSpPr>
+          <p:cNvPr id="23" name="Shape 21"/>
+          <p:cNvSpPr/>
+          <p:nvPr/>
+        </p:nvSpPr>
+        <p:spPr>
+          <a:xfrm>
+            <a:off x="8046720" y="3063240"/>
+            <a:ext cx="3474720" cy="1508760"/>
+          </a:xfrm>
+          <a:prstGeom prst="roundRect">
+            <a:avLst>
+              <a:gd name="adj" fmla="val 6061"/>
+            </a:avLst>
+          </a:prstGeom>
+          <a:solidFill>
+            <a:srgbClr val="FFF6E0"/>
+          </a:solidFill>
+          <a:ln w="12700">
+            <a:solidFill>
+              <a:srgbClr val="FFF6E0"/>
+            </a:solidFill>
+            <a:prstDash val="solid"/>
+          </a:ln>
+        </p:spPr>
+      </p:sp>
+      <p:sp>
+        <p:nvSpPr>
+          <p:cNvPr id="24" name="Text 22"/>
+          <p:cNvSpPr txBox="1"/>
+          <p:nvPr/>
+        </p:nvSpPr>
+        <p:spPr>
+          <a:xfrm>
+            <a:off x="8046720" y="3227832"/>
+            <a:ext cx="3474720" cy="749808"/>
+          </a:xfrm>
+          <a:prstGeom prst="rect">
+            <a:avLst/>
+          </a:prstGeom>
+          <a:noFill/>
+          <a:ln/>
+        </p:spPr>
+        <p:txBody>
+          <a:bodyPr wrap="square" lIns="0" tIns="0" rIns="0" bIns="0" rtlCol="0" anchor="ctr"/>
+          <a:lstStyle/>
+          <a:p>
+            <a:pPr algn="ctr" indent="0" marL="0">
+              <a:buNone/>
+            </a:pPr>
+            <a:r>
+              <a:rPr lang="en-US" sz="4000" b="1" dirty="0">
+                <a:solidFill>
+                  <a:srgbClr val="8A5A00"/>
+                </a:solidFill>
+                <a:latin typeface="Calibri" pitchFamily="34" charset="0"/>
+                <a:ea typeface="Calibri" pitchFamily="34" charset="-122"/>
+                <a:cs typeface="Calibri" pitchFamily="34" charset="-120"/>
+              </a:rPr>
+              <a:t>3</a:t>
+            </a:r>
+            <a:endParaRPr lang="en-US" sz="4000" dirty="0"/>
+          </a:p>
+        </p:txBody>
+      </p:sp>
+      <p:sp>
+        <p:nvSpPr>
+          <p:cNvPr id="25" name="Text 23"/>
+          <p:cNvSpPr txBox="1"/>
+          <p:nvPr/>
+        </p:nvSpPr>
+        <p:spPr>
+          <a:xfrm>
+            <a:off x="8156448" y="3977640"/>
+            <a:ext cx="3255264" cy="502920"/>
+          </a:xfrm>
+          <a:prstGeom prst="rect">
+            <a:avLst/>
+          </a:prstGeom>
+          <a:noFill/>
+          <a:ln/>
+        </p:spPr>
+        <p:txBody>
+          <a:bodyPr wrap="square" lIns="0" tIns="0" rIns="0" bIns="0" rtlCol="0" anchor="ctr"/>
+          <a:lstStyle/>
+          <a:p>
+            <a:pPr algn="ctr" indent="0" marL="0">
+              <a:buNone/>
+            </a:pPr>
+            <a:r>
+              <a:rPr lang="en-US" sz="1150" dirty="0">
+                <a:solidFill>
+                  <a:srgbClr val="5A6B7B"/>
+                </a:solidFill>
+                <a:latin typeface="Calibri" pitchFamily="34" charset="0"/>
+                <a:ea typeface="Calibri" pitchFamily="34" charset="-122"/>
+                <a:cs typeface="Calibri" pitchFamily="34" charset="-120"/>
+              </a:rPr>
+              <a:t>federal only — Virginia</a:t>
+            </a:r>
+            <a:endParaRPr lang="en-US" sz="1150" dirty="0"/>
+          </a:p>
+          <a:p>
+            <a:pPr algn="ctr" indent="0" marL="0">
+              <a:buNone/>
+            </a:pPr>
+            <a:r>
+              <a:rPr lang="en-US" sz="1150" dirty="0">
+                <a:solidFill>
+                  <a:srgbClr val="5A6B7B"/>
+                </a:solidFill>
+                <a:latin typeface="Calibri" pitchFamily="34" charset="0"/>
+                <a:ea typeface="Calibri" pitchFamily="34" charset="-122"/>
+                <a:cs typeface="Calibri" pitchFamily="34" charset="-120"/>
+              </a:rPr>
+              <a:t>withdrew the control</a:t>
+            </a:r>
+            <a:endParaRPr lang="en-US" sz="1150" dirty="0"/>
+          </a:p>
+        </p:txBody>
+      </p:sp>
+      <p:sp>
+        <p:nvSpPr>
+          <p:cNvPr id="26" name="Shape 24"/>
+          <p:cNvSpPr/>
+          <p:nvPr/>
+        </p:nvSpPr>
+        <p:spPr>
+          <a:xfrm>
+            <a:off x="640080" y="4800600"/>
+            <a:ext cx="10881360" cy="1234440"/>
+          </a:xfrm>
+          <a:prstGeom prst="roundRect">
+            <a:avLst>
+              <a:gd name="adj" fmla="val 7407"/>
+            </a:avLst>
+          </a:prstGeom>
+          <a:solidFill>
+            <a:srgbClr val="0A1A2F"/>
+          </a:solidFill>
+          <a:ln w="12700">
+            <a:solidFill>
+              <a:srgbClr val="0A1A2F"/>
+            </a:solidFill>
+            <a:prstDash val="solid"/>
+          </a:ln>
+        </p:spPr>
+      </p:sp>
+      <p:sp>
+        <p:nvSpPr>
+          <p:cNvPr id="27" name="Text 25"/>
+          <p:cNvSpPr txBox="1"/>
+          <p:nvPr/>
+        </p:nvSpPr>
+        <p:spPr>
+          <a:xfrm>
+            <a:off x="914400" y="4956048"/>
+            <a:ext cx="10332720" cy="292608"/>
+          </a:xfrm>
+          <a:prstGeom prst="rect">
+            <a:avLst/>
+          </a:prstGeom>
+          <a:noFill/>
+          <a:ln/>
+        </p:spPr>
+        <p:txBody>
+          <a:bodyPr wrap="square" lIns="0" tIns="0" rIns="0" bIns="0" rtlCol="0" anchor="ctr"/>
+          <a:lstStyle/>
+          <a:p>
+            <a:pPr indent="0" marL="0">
+              <a:buNone/>
+            </a:pPr>
+            <a:r>
+              <a:rPr lang="en-US" sz="1350" b="1" dirty="0">
+                <a:solidFill>
+                  <a:srgbClr val="FFB700"/>
+                </a:solidFill>
+                <a:latin typeface="Calibri" pitchFamily="34" charset="0"/>
+                <a:ea typeface="Calibri" pitchFamily="34" charset="-122"/>
+                <a:cs typeface="Calibri" pitchFamily="34" charset="-120"/>
+              </a:rPr>
+              <a:t>Where the two governments differ</a:t>
+            </a:r>
+            <a:endParaRPr lang="en-US" sz="1350" dirty="0"/>
+          </a:p>
+        </p:txBody>
+      </p:sp>
+      <p:sp>
+        <p:nvSpPr>
+          <p:cNvPr id="28" name="Text 26"/>
+          <p:cNvSpPr txBox="1"/>
+          <p:nvPr/>
+        </p:nvSpPr>
+        <p:spPr>
+          <a:xfrm>
+            <a:off x="914400" y="5285232"/>
+            <a:ext cx="10332720" cy="640080"/>
           </a:xfrm>
           <a:prstGeom prst="rect">
             <a:avLst/>
@@ -12028,100 +14509,22 @@
           <a:p>
             <a:pPr indent="0" marL="0">
               <a:lnSpc>
-                <a:spcPts val="1800"/>
+                <a:spcPts val="1700"/>
               </a:lnSpc>
               <a:buNone/>
             </a:pPr>
             <a:r>
-              <a:rPr lang="en-US" sz="1250" dirty="0">
-                <a:solidFill>
-                  <a:srgbClr val="10212F"/>
-                </a:solidFill>
-                <a:latin typeface="Calibri" pitchFamily="34" charset="0"/>
-                <a:ea typeface="Calibri" pitchFamily="34" charset="-122"/>
-                <a:cs typeface="Calibri" pitchFamily="34" charset="-120"/>
-              </a:rPr>
-              <a:t>The scanner file contains no NIST control IDs and no MITRE technique IDs — those come from CISA's baselines, which we integrate. Asked anyway, the ungrounded model did not decline. It asserted six identifiers from memory, and named T1110.003 “Credential Stuffing” when MITRE and CISA both say “Password Spraying”.</a:t>
-            </a:r>
-            <a:endParaRPr lang="en-US" sz="1250" dirty="0"/>
-          </a:p>
-        </p:txBody>
-      </p:sp>
-      <p:sp>
-        <p:nvSpPr>
-          <p:cNvPr id="22" name="Text 20"/>
-          <p:cNvSpPr txBox="1"/>
-          <p:nvPr/>
-        </p:nvSpPr>
-        <p:spPr>
-          <a:xfrm>
-            <a:off x="914400" y="5577840"/>
-            <a:ext cx="10332720" cy="274320"/>
-          </a:xfrm>
-          <a:prstGeom prst="rect">
-            <a:avLst/>
-          </a:prstGeom>
-          <a:noFill/>
-          <a:ln/>
-        </p:spPr>
-        <p:txBody>
-          <a:bodyPr wrap="square" lIns="0" tIns="0" rIns="0" bIns="0" rtlCol="0" anchor="ctr"/>
-          <a:lstStyle/>
-          <a:p>
-            <a:pPr indent="0" marL="0">
-              <a:buNone/>
-            </a:pPr>
-            <a:r>
-              <a:rPr lang="en-US" sz="1250" b="1" i="1" dirty="0">
-                <a:solidFill>
-                  <a:srgbClr val="8A2A2A"/>
-                </a:solidFill>
-                <a:latin typeface="Calibri" pitchFamily="34" charset="0"/>
-                <a:ea typeface="Calibri" pitchFamily="34" charset="-122"/>
-                <a:cs typeface="Calibri" pitchFamily="34" charset="-120"/>
-              </a:rPr>
-              <a:t>Fluent, confident, and wrong in a way an analyst would have acted on.</a:t>
-            </a:r>
-            <a:endParaRPr lang="en-US" sz="1250" dirty="0"/>
-          </a:p>
-        </p:txBody>
-      </p:sp>
-      <p:sp>
-        <p:nvSpPr>
-          <p:cNvPr id="23" name="Text 21"/>
-          <p:cNvSpPr txBox="1"/>
-          <p:nvPr/>
-        </p:nvSpPr>
-        <p:spPr>
-          <a:xfrm>
-            <a:off x="640080" y="6099048"/>
-            <a:ext cx="10881360" cy="365760"/>
-          </a:xfrm>
-          <a:prstGeom prst="rect">
-            <a:avLst/>
-          </a:prstGeom>
-          <a:noFill/>
-          <a:ln/>
-        </p:spPr>
-        <p:txBody>
-          <a:bodyPr wrap="square" lIns="0" tIns="0" rIns="0" bIns="0" rtlCol="0" anchor="ctr"/>
-          <a:lstStyle/>
-          <a:p>
-            <a:pPr indent="0" marL="0">
-              <a:buNone/>
-            </a:pPr>
-            <a:r>
-              <a:rPr lang="en-US" sz="1350" b="1" dirty="0">
-                <a:solidFill>
-                  <a:srgbClr val="14304F"/>
-                </a:solidFill>
-                <a:latin typeface="Calibri" pitchFamily="34" charset="0"/>
-                <a:ea typeface="Calibri" pitchFamily="34" charset="-122"/>
-                <a:cs typeface="Calibri" pitchFamily="34" charset="-120"/>
-              </a:rPr>
-              <a:t>Our agents asserted zero facts they were not given — enforced by a test that fails the build if it ever changes.</a:t>
-            </a:r>
-            <a:endParaRPr lang="en-US" sz="1350" dirty="0"/>
+              <a:rPr lang="en-US" sz="1200" dirty="0">
+                <a:solidFill>
+                  <a:srgbClr val="D2DEE8"/>
+                </a:solidFill>
+                <a:latin typeface="Calibri" pitchFamily="34" charset="0"/>
+                <a:ea typeface="Calibri" pitchFamily="34" charset="-122"/>
+                <a:cs typeface="Calibri" pitchFamily="34" charset="-120"/>
+              </a:rPr>
+              <a:t>Three failures map only to SC-7(10), which the Commonwealth has withdrawn — “not applicable to COV”. They remain federal obligations and carry no SEC530 duty. We also surface who Virginia says owns each control, from SEC530's own IMPLEMENTED BY column.</a:t>
+            </a:r>
+            <a:endParaRPr lang="en-US" sz="1200" dirty="0"/>
           </a:p>
         </p:txBody>
       </p:sp>
